--- a/docs/pptx/carbo/jx-carbo-linsubhr-ratio-hosp8.pptx
+++ b/docs/pptx/carbo/jx-carbo-linsubhr-ratio-hosp8.pptx
@@ -2271,7 +2271,7 @@
           </p:nvSpPr>
           <p:spPr>
             <a:xfrm>
-              <a:off x="817517" y="5114368"/>
+              <a:off x="817517" y="5142518"/>
               <a:ext cx="7799693" cy="0"/>
             </a:xfrm>
             <a:custGeom>
@@ -2314,7 +2314,7 @@
           </p:nvSpPr>
           <p:spPr>
             <a:xfrm>
-              <a:off x="817517" y="4244691"/>
+              <a:off x="817517" y="4313054"/>
               <a:ext cx="7799693" cy="0"/>
             </a:xfrm>
             <a:custGeom>
@@ -2357,7 +2357,7 @@
           </p:nvSpPr>
           <p:spPr>
             <a:xfrm>
-              <a:off x="817517" y="3375014"/>
+              <a:off x="817517" y="3483591"/>
               <a:ext cx="7799693" cy="0"/>
             </a:xfrm>
             <a:custGeom>
@@ -2400,7 +2400,7 @@
           </p:nvSpPr>
           <p:spPr>
             <a:xfrm>
-              <a:off x="817517" y="2505337"/>
+              <a:off x="817517" y="2654127"/>
               <a:ext cx="7799693" cy="0"/>
             </a:xfrm>
             <a:custGeom>
@@ -2443,15 +2443,15 @@
           </p:nvSpPr>
           <p:spPr>
             <a:xfrm>
-              <a:off x="1615213" y="1896563"/>
-              <a:ext cx="0" cy="3826579"/>
+              <a:off x="1615213" y="2073503"/>
+              <a:ext cx="0" cy="3649639"/>
             </a:xfrm>
             <a:custGeom>
               <a:avLst/>
               <a:pathLst>
-                <a:path w="0" h="3826579">
+                <a:path w="0" h="3649639">
                   <a:moveTo>
-                    <a:pt x="0" y="3826579"/>
+                    <a:pt x="0" y="3649639"/>
                   </a:moveTo>
                   <a:lnTo>
                     <a:pt x="0" y="0"/>
@@ -2486,15 +2486,15 @@
           </p:nvSpPr>
           <p:spPr>
             <a:xfrm>
-              <a:off x="3387871" y="1896563"/>
-              <a:ext cx="0" cy="3826579"/>
+              <a:off x="3387871" y="2073503"/>
+              <a:ext cx="0" cy="3649639"/>
             </a:xfrm>
             <a:custGeom>
               <a:avLst/>
               <a:pathLst>
-                <a:path w="0" h="3826579">
+                <a:path w="0" h="3649639">
                   <a:moveTo>
-                    <a:pt x="0" y="3826579"/>
+                    <a:pt x="0" y="3649639"/>
                   </a:moveTo>
                   <a:lnTo>
                     <a:pt x="0" y="0"/>
@@ -2529,15 +2529,15 @@
           </p:nvSpPr>
           <p:spPr>
             <a:xfrm>
-              <a:off x="5160528" y="1896563"/>
-              <a:ext cx="0" cy="3826579"/>
+              <a:off x="5160528" y="2073503"/>
+              <a:ext cx="0" cy="3649639"/>
             </a:xfrm>
             <a:custGeom>
               <a:avLst/>
               <a:pathLst>
-                <a:path w="0" h="3826579">
+                <a:path w="0" h="3649639">
                   <a:moveTo>
-                    <a:pt x="0" y="3826579"/>
+                    <a:pt x="0" y="3649639"/>
                   </a:moveTo>
                   <a:lnTo>
                     <a:pt x="0" y="0"/>
@@ -2572,15 +2572,15 @@
           </p:nvSpPr>
           <p:spPr>
             <a:xfrm>
-              <a:off x="6933186" y="1896563"/>
-              <a:ext cx="0" cy="3826579"/>
+              <a:off x="6933186" y="2073503"/>
+              <a:ext cx="0" cy="3649639"/>
             </a:xfrm>
             <a:custGeom>
               <a:avLst/>
               <a:pathLst>
-                <a:path w="0" h="3826579">
+                <a:path w="0" h="3649639">
                   <a:moveTo>
-                    <a:pt x="0" y="3826579"/>
+                    <a:pt x="0" y="3649639"/>
                   </a:moveTo>
                   <a:lnTo>
                     <a:pt x="0" y="0"/>
@@ -2615,7 +2615,7 @@
           </p:nvSpPr>
           <p:spPr>
             <a:xfrm>
-              <a:off x="817517" y="5549207"/>
+              <a:off x="817517" y="5557249"/>
               <a:ext cx="7799693" cy="0"/>
             </a:xfrm>
             <a:custGeom>
@@ -2658,7 +2658,7 @@
           </p:nvSpPr>
           <p:spPr>
             <a:xfrm>
-              <a:off x="817517" y="4679530"/>
+              <a:off x="817517" y="4727786"/>
               <a:ext cx="7799693" cy="0"/>
             </a:xfrm>
             <a:custGeom>
@@ -2701,7 +2701,7 @@
           </p:nvSpPr>
           <p:spPr>
             <a:xfrm>
-              <a:off x="817517" y="3809853"/>
+              <a:off x="817517" y="3898322"/>
               <a:ext cx="7799693" cy="0"/>
             </a:xfrm>
             <a:custGeom>
@@ -2744,7 +2744,7 @@
           </p:nvSpPr>
           <p:spPr>
             <a:xfrm>
-              <a:off x="817517" y="2940175"/>
+              <a:off x="817517" y="3068859"/>
               <a:ext cx="7799693" cy="0"/>
             </a:xfrm>
             <a:custGeom>
@@ -2787,7 +2787,7 @@
           </p:nvSpPr>
           <p:spPr>
             <a:xfrm>
-              <a:off x="817517" y="2070498"/>
+              <a:off x="817517" y="2239395"/>
               <a:ext cx="7799693" cy="0"/>
             </a:xfrm>
             <a:custGeom>
@@ -2830,15 +2830,15 @@
           </p:nvSpPr>
           <p:spPr>
             <a:xfrm>
-              <a:off x="2501542" y="1896563"/>
-              <a:ext cx="0" cy="3826579"/>
+              <a:off x="2501542" y="2073503"/>
+              <a:ext cx="0" cy="3649639"/>
             </a:xfrm>
             <a:custGeom>
               <a:avLst/>
               <a:pathLst>
-                <a:path w="0" h="3826579">
+                <a:path w="0" h="3649639">
                   <a:moveTo>
-                    <a:pt x="0" y="3826579"/>
+                    <a:pt x="0" y="3649639"/>
                   </a:moveTo>
                   <a:lnTo>
                     <a:pt x="0" y="0"/>
@@ -2873,15 +2873,15 @@
           </p:nvSpPr>
           <p:spPr>
             <a:xfrm>
-              <a:off x="4274200" y="1896563"/>
-              <a:ext cx="0" cy="3826579"/>
+              <a:off x="4274200" y="2073503"/>
+              <a:ext cx="0" cy="3649639"/>
             </a:xfrm>
             <a:custGeom>
               <a:avLst/>
               <a:pathLst>
-                <a:path w="0" h="3826579">
+                <a:path w="0" h="3649639">
                   <a:moveTo>
-                    <a:pt x="0" y="3826579"/>
+                    <a:pt x="0" y="3649639"/>
                   </a:moveTo>
                   <a:lnTo>
                     <a:pt x="0" y="0"/>
@@ -2916,15 +2916,15 @@
           </p:nvSpPr>
           <p:spPr>
             <a:xfrm>
-              <a:off x="6046857" y="1896563"/>
-              <a:ext cx="0" cy="3826579"/>
+              <a:off x="6046857" y="2073503"/>
+              <a:ext cx="0" cy="3649639"/>
             </a:xfrm>
             <a:custGeom>
               <a:avLst/>
               <a:pathLst>
-                <a:path w="0" h="3826579">
+                <a:path w="0" h="3649639">
                   <a:moveTo>
-                    <a:pt x="0" y="3826579"/>
+                    <a:pt x="0" y="3649639"/>
                   </a:moveTo>
                   <a:lnTo>
                     <a:pt x="0" y="0"/>
@@ -2959,15 +2959,15 @@
           </p:nvSpPr>
           <p:spPr>
             <a:xfrm>
-              <a:off x="7819515" y="1896563"/>
-              <a:ext cx="0" cy="3826579"/>
+              <a:off x="7819515" y="2073503"/>
+              <a:ext cx="0" cy="3649639"/>
             </a:xfrm>
             <a:custGeom>
               <a:avLst/>
               <a:pathLst>
-                <a:path w="0" h="3826579">
+                <a:path w="0" h="3649639">
                   <a:moveTo>
-                    <a:pt x="0" y="3826579"/>
+                    <a:pt x="0" y="3649639"/>
                   </a:moveTo>
                   <a:lnTo>
                     <a:pt x="0" y="0"/>
@@ -3002,594 +3002,594 @@
           </p:nvSpPr>
           <p:spPr>
             <a:xfrm>
-              <a:off x="817517" y="1896563"/>
-              <a:ext cx="7403783" cy="3507113"/>
+              <a:off x="817517" y="2073503"/>
+              <a:ext cx="7403783" cy="3344946"/>
             </a:xfrm>
             <a:custGeom>
               <a:avLst/>
               <a:pathLst>
-                <a:path w="7403783" h="3507113">
+                <a:path w="7403783" h="3344946">
                   <a:moveTo>
                     <a:pt x="198209" y="0"/>
                   </a:moveTo>
                   <a:lnTo>
-                    <a:pt x="200323" y="3509"/>
-                  </a:lnTo>
-                  <a:lnTo>
-                    <a:pt x="276956" y="126465"/>
-                  </a:lnTo>
-                  <a:lnTo>
-                    <a:pt x="353588" y="245277"/>
-                  </a:lnTo>
-                  <a:lnTo>
-                    <a:pt x="430221" y="360086"/>
-                  </a:lnTo>
-                  <a:lnTo>
-                    <a:pt x="506853" y="471027"/>
-                  </a:lnTo>
-                  <a:lnTo>
-                    <a:pt x="583486" y="578230"/>
-                  </a:lnTo>
-                  <a:lnTo>
-                    <a:pt x="660118" y="681820"/>
-                  </a:lnTo>
-                  <a:lnTo>
-                    <a:pt x="736751" y="781920"/>
-                  </a:lnTo>
-                  <a:lnTo>
-                    <a:pt x="813384" y="878648"/>
-                  </a:lnTo>
-                  <a:lnTo>
-                    <a:pt x="890016" y="972116"/>
-                  </a:lnTo>
-                  <a:lnTo>
-                    <a:pt x="966649" y="1062435"/>
-                  </a:lnTo>
-                  <a:lnTo>
-                    <a:pt x="1043281" y="1149710"/>
-                  </a:lnTo>
-                  <a:lnTo>
-                    <a:pt x="1119914" y="1234045"/>
-                  </a:lnTo>
-                  <a:lnTo>
-                    <a:pt x="1196546" y="1315538"/>
-                  </a:lnTo>
-                  <a:lnTo>
-                    <a:pt x="1273179" y="1394286"/>
-                  </a:lnTo>
-                  <a:lnTo>
-                    <a:pt x="1349811" y="1470380"/>
-                  </a:lnTo>
-                  <a:lnTo>
-                    <a:pt x="1426444" y="1543910"/>
-                  </a:lnTo>
-                  <a:lnTo>
-                    <a:pt x="1503076" y="1614962"/>
-                  </a:lnTo>
-                  <a:lnTo>
-                    <a:pt x="1579709" y="1683621"/>
-                  </a:lnTo>
-                  <a:lnTo>
-                    <a:pt x="1656342" y="1749966"/>
-                  </a:lnTo>
-                  <a:lnTo>
-                    <a:pt x="1732974" y="1814075"/>
-                  </a:lnTo>
-                  <a:lnTo>
-                    <a:pt x="1809607" y="1876025"/>
-                  </a:lnTo>
-                  <a:lnTo>
-                    <a:pt x="1886239" y="1935887"/>
-                  </a:lnTo>
-                  <a:lnTo>
-                    <a:pt x="1962872" y="1993732"/>
-                  </a:lnTo>
-                  <a:lnTo>
-                    <a:pt x="2039504" y="2049628"/>
-                  </a:lnTo>
-                  <a:lnTo>
-                    <a:pt x="2116137" y="2103641"/>
-                  </a:lnTo>
-                  <a:lnTo>
-                    <a:pt x="2192769" y="2155833"/>
-                  </a:lnTo>
-                  <a:lnTo>
-                    <a:pt x="2269402" y="2206267"/>
-                  </a:lnTo>
-                  <a:lnTo>
-                    <a:pt x="2346034" y="2255002"/>
-                  </a:lnTo>
-                  <a:lnTo>
-                    <a:pt x="2422667" y="2302095"/>
-                  </a:lnTo>
-                  <a:lnTo>
-                    <a:pt x="2499300" y="2347601"/>
-                  </a:lnTo>
-                  <a:lnTo>
-                    <a:pt x="2575932" y="2391573"/>
-                  </a:lnTo>
-                  <a:lnTo>
-                    <a:pt x="2652565" y="2434064"/>
-                  </a:lnTo>
-                  <a:lnTo>
-                    <a:pt x="2729197" y="2475124"/>
-                  </a:lnTo>
-                  <a:lnTo>
-                    <a:pt x="2805830" y="2514800"/>
-                  </a:lnTo>
-                  <a:lnTo>
-                    <a:pt x="2882462" y="2553138"/>
-                  </a:lnTo>
-                  <a:lnTo>
-                    <a:pt x="2959095" y="2590186"/>
-                  </a:lnTo>
-                  <a:lnTo>
-                    <a:pt x="3035727" y="2625985"/>
-                  </a:lnTo>
-                  <a:lnTo>
-                    <a:pt x="3112360" y="2660577"/>
-                  </a:lnTo>
-                  <a:lnTo>
-                    <a:pt x="3188993" y="2694004"/>
-                  </a:lnTo>
-                  <a:lnTo>
-                    <a:pt x="3265625" y="2726305"/>
-                  </a:lnTo>
-                  <a:lnTo>
-                    <a:pt x="3342258" y="2757517"/>
-                  </a:lnTo>
-                  <a:lnTo>
-                    <a:pt x="3418890" y="2782907"/>
-                  </a:lnTo>
-                  <a:lnTo>
-                    <a:pt x="3495523" y="2782530"/>
-                  </a:lnTo>
-                  <a:lnTo>
-                    <a:pt x="3572155" y="2782153"/>
-                  </a:lnTo>
-                  <a:lnTo>
-                    <a:pt x="3648788" y="2781777"/>
-                  </a:lnTo>
-                  <a:lnTo>
-                    <a:pt x="3725420" y="2781400"/>
-                  </a:lnTo>
-                  <a:lnTo>
-                    <a:pt x="3802053" y="2781022"/>
-                  </a:lnTo>
-                  <a:lnTo>
-                    <a:pt x="3878685" y="2780645"/>
-                  </a:lnTo>
-                  <a:lnTo>
-                    <a:pt x="3955318" y="2780268"/>
-                  </a:lnTo>
-                  <a:lnTo>
-                    <a:pt x="4031951" y="2779890"/>
-                  </a:lnTo>
-                  <a:lnTo>
-                    <a:pt x="4108583" y="2779512"/>
-                  </a:lnTo>
-                  <a:lnTo>
-                    <a:pt x="4185216" y="2779134"/>
-                  </a:lnTo>
-                  <a:lnTo>
-                    <a:pt x="4261848" y="2778756"/>
-                  </a:lnTo>
-                  <a:lnTo>
-                    <a:pt x="4338481" y="2778378"/>
-                  </a:lnTo>
-                  <a:lnTo>
-                    <a:pt x="4415113" y="2777999"/>
-                  </a:lnTo>
-                  <a:lnTo>
-                    <a:pt x="4491746" y="2777621"/>
-                  </a:lnTo>
-                  <a:lnTo>
-                    <a:pt x="4568378" y="2777242"/>
-                  </a:lnTo>
-                  <a:lnTo>
-                    <a:pt x="4645011" y="2776863"/>
-                  </a:lnTo>
-                  <a:lnTo>
-                    <a:pt x="4721644" y="2776484"/>
-                  </a:lnTo>
-                  <a:lnTo>
-                    <a:pt x="4798276" y="2776105"/>
-                  </a:lnTo>
-                  <a:lnTo>
-                    <a:pt x="4874909" y="2775725"/>
-                  </a:lnTo>
-                  <a:lnTo>
-                    <a:pt x="4951541" y="2775346"/>
-                  </a:lnTo>
-                  <a:lnTo>
-                    <a:pt x="5028174" y="2774966"/>
-                  </a:lnTo>
-                  <a:lnTo>
-                    <a:pt x="5104806" y="2774586"/>
-                  </a:lnTo>
-                  <a:lnTo>
-                    <a:pt x="5181439" y="2774206"/>
-                  </a:lnTo>
-                  <a:lnTo>
-                    <a:pt x="5258071" y="2773826"/>
-                  </a:lnTo>
-                  <a:lnTo>
-                    <a:pt x="5334704" y="2773445"/>
-                  </a:lnTo>
-                  <a:lnTo>
-                    <a:pt x="5411336" y="2773065"/>
-                  </a:lnTo>
-                  <a:lnTo>
-                    <a:pt x="5487969" y="2772684"/>
-                  </a:lnTo>
-                  <a:lnTo>
-                    <a:pt x="5564602" y="2772303"/>
-                  </a:lnTo>
-                  <a:lnTo>
-                    <a:pt x="5641234" y="2771922"/>
-                  </a:lnTo>
-                  <a:lnTo>
-                    <a:pt x="5717867" y="2771541"/>
-                  </a:lnTo>
-                  <a:lnTo>
-                    <a:pt x="5794499" y="2771159"/>
-                  </a:lnTo>
-                  <a:lnTo>
-                    <a:pt x="5871132" y="2770778"/>
-                  </a:lnTo>
-                  <a:lnTo>
-                    <a:pt x="5947764" y="2770396"/>
-                  </a:lnTo>
-                  <a:lnTo>
-                    <a:pt x="6024397" y="2770014"/>
-                  </a:lnTo>
-                  <a:lnTo>
-                    <a:pt x="6101029" y="2769632"/>
-                  </a:lnTo>
-                  <a:lnTo>
-                    <a:pt x="6177662" y="2769250"/>
-                  </a:lnTo>
-                  <a:lnTo>
-                    <a:pt x="6254294" y="2768867"/>
-                  </a:lnTo>
-                  <a:lnTo>
-                    <a:pt x="6330927" y="2768485"/>
-                  </a:lnTo>
-                  <a:lnTo>
-                    <a:pt x="6407560" y="2768102"/>
-                  </a:lnTo>
-                  <a:lnTo>
-                    <a:pt x="6484192" y="2767719"/>
-                  </a:lnTo>
-                  <a:lnTo>
-                    <a:pt x="6560825" y="2767336"/>
-                  </a:lnTo>
-                  <a:lnTo>
-                    <a:pt x="6637457" y="2766953"/>
-                  </a:lnTo>
-                  <a:lnTo>
-                    <a:pt x="6714090" y="2766569"/>
-                  </a:lnTo>
-                  <a:lnTo>
-                    <a:pt x="6790722" y="2766186"/>
-                  </a:lnTo>
-                  <a:lnTo>
-                    <a:pt x="6867355" y="2765802"/>
-                  </a:lnTo>
-                  <a:lnTo>
-                    <a:pt x="6943987" y="2765418"/>
-                  </a:lnTo>
-                  <a:lnTo>
-                    <a:pt x="7020620" y="2765034"/>
-                  </a:lnTo>
-                  <a:lnTo>
-                    <a:pt x="7097253" y="2764650"/>
-                  </a:lnTo>
-                  <a:lnTo>
-                    <a:pt x="7173885" y="2764265"/>
-                  </a:lnTo>
-                  <a:lnTo>
-                    <a:pt x="7250518" y="2763881"/>
-                  </a:lnTo>
-                  <a:lnTo>
-                    <a:pt x="7327150" y="2763496"/>
-                  </a:lnTo>
-                  <a:lnTo>
-                    <a:pt x="7403783" y="2763111"/>
-                  </a:lnTo>
-                  <a:lnTo>
-                    <a:pt x="7403783" y="3507113"/>
-                  </a:lnTo>
-                  <a:lnTo>
-                    <a:pt x="7327150" y="3502039"/>
-                  </a:lnTo>
-                  <a:lnTo>
-                    <a:pt x="7250518" y="3496787"/>
-                  </a:lnTo>
-                  <a:lnTo>
-                    <a:pt x="7173885" y="3491353"/>
-                  </a:lnTo>
-                  <a:lnTo>
-                    <a:pt x="7097253" y="3485729"/>
-                  </a:lnTo>
-                  <a:lnTo>
-                    <a:pt x="7020620" y="3479908"/>
-                  </a:lnTo>
-                  <a:lnTo>
-                    <a:pt x="6943987" y="3473885"/>
-                  </a:lnTo>
-                  <a:lnTo>
-                    <a:pt x="6867355" y="3467652"/>
-                  </a:lnTo>
-                  <a:lnTo>
-                    <a:pt x="6790722" y="3461202"/>
-                  </a:lnTo>
-                  <a:lnTo>
-                    <a:pt x="6714090" y="3454526"/>
-                  </a:lnTo>
-                  <a:lnTo>
-                    <a:pt x="6637457" y="3447618"/>
-                  </a:lnTo>
-                  <a:lnTo>
-                    <a:pt x="6560825" y="3440469"/>
-                  </a:lnTo>
-                  <a:lnTo>
-                    <a:pt x="6484192" y="3433071"/>
-                  </a:lnTo>
-                  <a:lnTo>
-                    <a:pt x="6407560" y="3425414"/>
-                  </a:lnTo>
-                  <a:lnTo>
-                    <a:pt x="6330927" y="3417491"/>
-                  </a:lnTo>
-                  <a:lnTo>
-                    <a:pt x="6254294" y="3409291"/>
-                  </a:lnTo>
-                  <a:lnTo>
-                    <a:pt x="6177662" y="3400806"/>
-                  </a:lnTo>
-                  <a:lnTo>
-                    <a:pt x="6101029" y="3392024"/>
-                  </a:lnTo>
-                  <a:lnTo>
-                    <a:pt x="6024397" y="3382937"/>
-                  </a:lnTo>
-                  <a:lnTo>
-                    <a:pt x="5947764" y="3373532"/>
-                  </a:lnTo>
-                  <a:lnTo>
-                    <a:pt x="5871132" y="3363800"/>
-                  </a:lnTo>
-                  <a:lnTo>
-                    <a:pt x="5794499" y="3353728"/>
-                  </a:lnTo>
-                  <a:lnTo>
-                    <a:pt x="5717867" y="3343305"/>
-                  </a:lnTo>
-                  <a:lnTo>
-                    <a:pt x="5641234" y="3332519"/>
-                  </a:lnTo>
-                  <a:lnTo>
-                    <a:pt x="5564602" y="3321356"/>
-                  </a:lnTo>
-                  <a:lnTo>
-                    <a:pt x="5487969" y="3309805"/>
-                  </a:lnTo>
-                  <a:lnTo>
-                    <a:pt x="5411336" y="3297850"/>
-                  </a:lnTo>
-                  <a:lnTo>
-                    <a:pt x="5334704" y="3285479"/>
-                  </a:lnTo>
-                  <a:lnTo>
-                    <a:pt x="5258071" y="3272676"/>
-                  </a:lnTo>
-                  <a:lnTo>
-                    <a:pt x="5181439" y="3259427"/>
-                  </a:lnTo>
-                  <a:lnTo>
-                    <a:pt x="5104806" y="3245715"/>
-                  </a:lnTo>
-                  <a:lnTo>
-                    <a:pt x="5028174" y="3231526"/>
-                  </a:lnTo>
-                  <a:lnTo>
-                    <a:pt x="4951541" y="3216842"/>
-                  </a:lnTo>
-                  <a:lnTo>
-                    <a:pt x="4874909" y="3201646"/>
-                  </a:lnTo>
-                  <a:lnTo>
-                    <a:pt x="4798276" y="3185920"/>
-                  </a:lnTo>
-                  <a:lnTo>
-                    <a:pt x="4721644" y="3169646"/>
-                  </a:lnTo>
-                  <a:lnTo>
-                    <a:pt x="4645011" y="3152804"/>
-                  </a:lnTo>
-                  <a:lnTo>
-                    <a:pt x="4568378" y="3135375"/>
-                  </a:lnTo>
-                  <a:lnTo>
-                    <a:pt x="4491746" y="3117338"/>
-                  </a:lnTo>
-                  <a:lnTo>
-                    <a:pt x="4415113" y="3098672"/>
-                  </a:lnTo>
-                  <a:lnTo>
-                    <a:pt x="4338481" y="3079356"/>
-                  </a:lnTo>
-                  <a:lnTo>
-                    <a:pt x="4261848" y="3059366"/>
-                  </a:lnTo>
-                  <a:lnTo>
-                    <a:pt x="4185216" y="3038678"/>
-                  </a:lnTo>
-                  <a:lnTo>
-                    <a:pt x="4108583" y="3017270"/>
-                  </a:lnTo>
-                  <a:lnTo>
-                    <a:pt x="4031951" y="2995115"/>
-                  </a:lnTo>
-                  <a:lnTo>
-                    <a:pt x="3955318" y="2972187"/>
-                  </a:lnTo>
-                  <a:lnTo>
-                    <a:pt x="3878685" y="2948460"/>
-                  </a:lnTo>
-                  <a:lnTo>
-                    <a:pt x="3802053" y="2923906"/>
-                  </a:lnTo>
-                  <a:lnTo>
-                    <a:pt x="3725420" y="2898495"/>
-                  </a:lnTo>
-                  <a:lnTo>
-                    <a:pt x="3648788" y="2872199"/>
-                  </a:lnTo>
-                  <a:lnTo>
-                    <a:pt x="3572155" y="2844985"/>
-                  </a:lnTo>
-                  <a:lnTo>
-                    <a:pt x="3495523" y="2816823"/>
-                  </a:lnTo>
-                  <a:lnTo>
-                    <a:pt x="3418890" y="2787678"/>
-                  </a:lnTo>
-                  <a:lnTo>
-                    <a:pt x="3342258" y="2783283"/>
-                  </a:lnTo>
-                  <a:lnTo>
-                    <a:pt x="3265625" y="2783659"/>
-                  </a:lnTo>
-                  <a:lnTo>
-                    <a:pt x="3188993" y="2784035"/>
-                  </a:lnTo>
-                  <a:lnTo>
-                    <a:pt x="3112360" y="2784411"/>
-                  </a:lnTo>
-                  <a:lnTo>
-                    <a:pt x="3035727" y="2784787"/>
-                  </a:lnTo>
-                  <a:lnTo>
-                    <a:pt x="2959095" y="2785162"/>
-                  </a:lnTo>
-                  <a:lnTo>
-                    <a:pt x="2882462" y="2785537"/>
-                  </a:lnTo>
-                  <a:lnTo>
-                    <a:pt x="2805830" y="2785913"/>
-                  </a:lnTo>
-                  <a:lnTo>
-                    <a:pt x="2729197" y="2786288"/>
-                  </a:lnTo>
-                  <a:lnTo>
-                    <a:pt x="2652565" y="2786663"/>
-                  </a:lnTo>
-                  <a:lnTo>
-                    <a:pt x="2575932" y="2787037"/>
-                  </a:lnTo>
-                  <a:lnTo>
-                    <a:pt x="2499300" y="2787412"/>
-                  </a:lnTo>
-                  <a:lnTo>
-                    <a:pt x="2422667" y="2787786"/>
-                  </a:lnTo>
-                  <a:lnTo>
-                    <a:pt x="2346034" y="2788160"/>
-                  </a:lnTo>
-                  <a:lnTo>
-                    <a:pt x="2269402" y="2788534"/>
-                  </a:lnTo>
-                  <a:lnTo>
-                    <a:pt x="2192769" y="2788908"/>
-                  </a:lnTo>
-                  <a:lnTo>
-                    <a:pt x="2116137" y="2789282"/>
-                  </a:lnTo>
-                  <a:lnTo>
-                    <a:pt x="2039504" y="2789656"/>
-                  </a:lnTo>
-                  <a:lnTo>
-                    <a:pt x="1962872" y="2790029"/>
-                  </a:lnTo>
-                  <a:lnTo>
-                    <a:pt x="1886239" y="2790402"/>
-                  </a:lnTo>
-                  <a:lnTo>
-                    <a:pt x="1809607" y="2790775"/>
-                  </a:lnTo>
-                  <a:lnTo>
-                    <a:pt x="1732974" y="2791148"/>
-                  </a:lnTo>
-                  <a:lnTo>
-                    <a:pt x="1656342" y="2791521"/>
-                  </a:lnTo>
-                  <a:lnTo>
-                    <a:pt x="1579709" y="2791894"/>
-                  </a:lnTo>
-                  <a:lnTo>
-                    <a:pt x="1503076" y="2792266"/>
-                  </a:lnTo>
-                  <a:lnTo>
-                    <a:pt x="1426444" y="2792638"/>
-                  </a:lnTo>
-                  <a:lnTo>
-                    <a:pt x="1349811" y="2793011"/>
-                  </a:lnTo>
-                  <a:lnTo>
-                    <a:pt x="1273179" y="2793382"/>
-                  </a:lnTo>
-                  <a:lnTo>
-                    <a:pt x="1196546" y="2793754"/>
-                  </a:lnTo>
-                  <a:lnTo>
-                    <a:pt x="1119914" y="2794126"/>
-                  </a:lnTo>
-                  <a:lnTo>
-                    <a:pt x="1043281" y="2794497"/>
-                  </a:lnTo>
-                  <a:lnTo>
-                    <a:pt x="966649" y="2794869"/>
-                  </a:lnTo>
-                  <a:lnTo>
-                    <a:pt x="890016" y="2795240"/>
-                  </a:lnTo>
-                  <a:lnTo>
-                    <a:pt x="813384" y="2795611"/>
-                  </a:lnTo>
-                  <a:lnTo>
-                    <a:pt x="736751" y="2795982"/>
-                  </a:lnTo>
-                  <a:lnTo>
-                    <a:pt x="660118" y="2796352"/>
-                  </a:lnTo>
-                  <a:lnTo>
-                    <a:pt x="583486" y="2796723"/>
-                  </a:lnTo>
-                  <a:lnTo>
-                    <a:pt x="506853" y="2797093"/>
-                  </a:lnTo>
-                  <a:lnTo>
-                    <a:pt x="430221" y="2797463"/>
-                  </a:lnTo>
-                  <a:lnTo>
-                    <a:pt x="353588" y="2797833"/>
-                  </a:lnTo>
-                  <a:lnTo>
-                    <a:pt x="276956" y="2798203"/>
-                  </a:lnTo>
-                  <a:lnTo>
-                    <a:pt x="200323" y="2798573"/>
-                  </a:lnTo>
-                  <a:lnTo>
-                    <a:pt x="123691" y="2798943"/>
-                  </a:lnTo>
-                  <a:lnTo>
-                    <a:pt x="47058" y="2799312"/>
-                  </a:lnTo>
-                  <a:lnTo>
-                    <a:pt x="0" y="2799539"/>
+                    <a:pt x="200323" y="3347"/>
+                  </a:lnTo>
+                  <a:lnTo>
+                    <a:pt x="276956" y="120617"/>
+                  </a:lnTo>
+                  <a:lnTo>
+                    <a:pt x="353588" y="233936"/>
+                  </a:lnTo>
+                  <a:lnTo>
+                    <a:pt x="430221" y="343436"/>
+                  </a:lnTo>
+                  <a:lnTo>
+                    <a:pt x="506853" y="449247"/>
+                  </a:lnTo>
+                  <a:lnTo>
+                    <a:pt x="583486" y="551493"/>
+                  </a:lnTo>
+                  <a:lnTo>
+                    <a:pt x="660118" y="650293"/>
+                  </a:lnTo>
+                  <a:lnTo>
+                    <a:pt x="736751" y="745765"/>
+                  </a:lnTo>
+                  <a:lnTo>
+                    <a:pt x="813384" y="838019"/>
+                  </a:lnTo>
+                  <a:lnTo>
+                    <a:pt x="890016" y="927166"/>
+                  </a:lnTo>
+                  <a:lnTo>
+                    <a:pt x="966649" y="1013308"/>
+                  </a:lnTo>
+                  <a:lnTo>
+                    <a:pt x="1043281" y="1096548"/>
+                  </a:lnTo>
+                  <a:lnTo>
+                    <a:pt x="1119914" y="1176983"/>
+                  </a:lnTo>
+                  <a:lnTo>
+                    <a:pt x="1196546" y="1254708"/>
+                  </a:lnTo>
+                  <a:lnTo>
+                    <a:pt x="1273179" y="1329814"/>
+                  </a:lnTo>
+                  <a:lnTo>
+                    <a:pt x="1349811" y="1402390"/>
+                  </a:lnTo>
+                  <a:lnTo>
+                    <a:pt x="1426444" y="1472520"/>
+                  </a:lnTo>
+                  <a:lnTo>
+                    <a:pt x="1503076" y="1540287"/>
+                  </a:lnTo>
+                  <a:lnTo>
+                    <a:pt x="1579709" y="1605771"/>
+                  </a:lnTo>
+                  <a:lnTo>
+                    <a:pt x="1656342" y="1669048"/>
+                  </a:lnTo>
+                  <a:lnTo>
+                    <a:pt x="1732974" y="1730193"/>
+                  </a:lnTo>
+                  <a:lnTo>
+                    <a:pt x="1809607" y="1789278"/>
+                  </a:lnTo>
+                  <a:lnTo>
+                    <a:pt x="1886239" y="1846372"/>
+                  </a:lnTo>
+                  <a:lnTo>
+                    <a:pt x="1962872" y="1901542"/>
+                  </a:lnTo>
+                  <a:lnTo>
+                    <a:pt x="2039504" y="1954854"/>
+                  </a:lnTo>
+                  <a:lnTo>
+                    <a:pt x="2116137" y="2006369"/>
+                  </a:lnTo>
+                  <a:lnTo>
+                    <a:pt x="2192769" y="2056148"/>
+                  </a:lnTo>
+                  <a:lnTo>
+                    <a:pt x="2269402" y="2104250"/>
+                  </a:lnTo>
+                  <a:lnTo>
+                    <a:pt x="2346034" y="2150732"/>
+                  </a:lnTo>
+                  <a:lnTo>
+                    <a:pt x="2422667" y="2195647"/>
+                  </a:lnTo>
+                  <a:lnTo>
+                    <a:pt x="2499300" y="2239049"/>
+                  </a:lnTo>
+                  <a:lnTo>
+                    <a:pt x="2575932" y="2280988"/>
+                  </a:lnTo>
+                  <a:lnTo>
+                    <a:pt x="2652565" y="2321514"/>
+                  </a:lnTo>
+                  <a:lnTo>
+                    <a:pt x="2729197" y="2360675"/>
+                  </a:lnTo>
+                  <a:lnTo>
+                    <a:pt x="2805830" y="2398516"/>
+                  </a:lnTo>
+                  <a:lnTo>
+                    <a:pt x="2882462" y="2435082"/>
+                  </a:lnTo>
+                  <a:lnTo>
+                    <a:pt x="2959095" y="2470416"/>
+                  </a:lnTo>
+                  <a:lnTo>
+                    <a:pt x="3035727" y="2504560"/>
+                  </a:lnTo>
+                  <a:lnTo>
+                    <a:pt x="3112360" y="2537553"/>
+                  </a:lnTo>
+                  <a:lnTo>
+                    <a:pt x="3188993" y="2569434"/>
+                  </a:lnTo>
+                  <a:lnTo>
+                    <a:pt x="3265625" y="2600242"/>
+                  </a:lnTo>
+                  <a:lnTo>
+                    <a:pt x="3342258" y="2630011"/>
+                  </a:lnTo>
+                  <a:lnTo>
+                    <a:pt x="3418890" y="2654226"/>
+                  </a:lnTo>
+                  <a:lnTo>
+                    <a:pt x="3495523" y="2653867"/>
+                  </a:lnTo>
+                  <a:lnTo>
+                    <a:pt x="3572155" y="2653508"/>
+                  </a:lnTo>
+                  <a:lnTo>
+                    <a:pt x="3648788" y="2653148"/>
+                  </a:lnTo>
+                  <a:lnTo>
+                    <a:pt x="3725420" y="2652789"/>
+                  </a:lnTo>
+                  <a:lnTo>
+                    <a:pt x="3802053" y="2652429"/>
+                  </a:lnTo>
+                  <a:lnTo>
+                    <a:pt x="3878685" y="2652069"/>
+                  </a:lnTo>
+                  <a:lnTo>
+                    <a:pt x="3955318" y="2651709"/>
+                  </a:lnTo>
+                  <a:lnTo>
+                    <a:pt x="4031951" y="2651349"/>
+                  </a:lnTo>
+                  <a:lnTo>
+                    <a:pt x="4108583" y="2650989"/>
+                  </a:lnTo>
+                  <a:lnTo>
+                    <a:pt x="4185216" y="2650628"/>
+                  </a:lnTo>
+                  <a:lnTo>
+                    <a:pt x="4261848" y="2650267"/>
+                  </a:lnTo>
+                  <a:lnTo>
+                    <a:pt x="4338481" y="2649907"/>
+                  </a:lnTo>
+                  <a:lnTo>
+                    <a:pt x="4415113" y="2649546"/>
+                  </a:lnTo>
+                  <a:lnTo>
+                    <a:pt x="4491746" y="2649185"/>
+                  </a:lnTo>
+                  <a:lnTo>
+                    <a:pt x="4568378" y="2648823"/>
+                  </a:lnTo>
+                  <a:lnTo>
+                    <a:pt x="4645011" y="2648462"/>
+                  </a:lnTo>
+                  <a:lnTo>
+                    <a:pt x="4721644" y="2648100"/>
+                  </a:lnTo>
+                  <a:lnTo>
+                    <a:pt x="4798276" y="2647739"/>
+                  </a:lnTo>
+                  <a:lnTo>
+                    <a:pt x="4874909" y="2647377"/>
+                  </a:lnTo>
+                  <a:lnTo>
+                    <a:pt x="4951541" y="2647015"/>
+                  </a:lnTo>
+                  <a:lnTo>
+                    <a:pt x="5028174" y="2646652"/>
+                  </a:lnTo>
+                  <a:lnTo>
+                    <a:pt x="5104806" y="2646290"/>
+                  </a:lnTo>
+                  <a:lnTo>
+                    <a:pt x="5181439" y="2645928"/>
+                  </a:lnTo>
+                  <a:lnTo>
+                    <a:pt x="5258071" y="2645565"/>
+                  </a:lnTo>
+                  <a:lnTo>
+                    <a:pt x="5334704" y="2645202"/>
+                  </a:lnTo>
+                  <a:lnTo>
+                    <a:pt x="5411336" y="2644839"/>
+                  </a:lnTo>
+                  <a:lnTo>
+                    <a:pt x="5487969" y="2644476"/>
+                  </a:lnTo>
+                  <a:lnTo>
+                    <a:pt x="5564602" y="2644113"/>
+                  </a:lnTo>
+                  <a:lnTo>
+                    <a:pt x="5641234" y="2643749"/>
+                  </a:lnTo>
+                  <a:lnTo>
+                    <a:pt x="5717867" y="2643386"/>
+                  </a:lnTo>
+                  <a:lnTo>
+                    <a:pt x="5794499" y="2643022"/>
+                  </a:lnTo>
+                  <a:lnTo>
+                    <a:pt x="5871132" y="2642658"/>
+                  </a:lnTo>
+                  <a:lnTo>
+                    <a:pt x="5947764" y="2642294"/>
+                  </a:lnTo>
+                  <a:lnTo>
+                    <a:pt x="6024397" y="2641929"/>
+                  </a:lnTo>
+                  <a:lnTo>
+                    <a:pt x="6101029" y="2641565"/>
+                  </a:lnTo>
+                  <a:lnTo>
+                    <a:pt x="6177662" y="2641200"/>
+                  </a:lnTo>
+                  <a:lnTo>
+                    <a:pt x="6254294" y="2640836"/>
+                  </a:lnTo>
+                  <a:lnTo>
+                    <a:pt x="6330927" y="2640471"/>
+                  </a:lnTo>
+                  <a:lnTo>
+                    <a:pt x="6407560" y="2640106"/>
+                  </a:lnTo>
+                  <a:lnTo>
+                    <a:pt x="6484192" y="2639741"/>
+                  </a:lnTo>
+                  <a:lnTo>
+                    <a:pt x="6560825" y="2639375"/>
+                  </a:lnTo>
+                  <a:lnTo>
+                    <a:pt x="6637457" y="2639010"/>
+                  </a:lnTo>
+                  <a:lnTo>
+                    <a:pt x="6714090" y="2638644"/>
+                  </a:lnTo>
+                  <a:lnTo>
+                    <a:pt x="6790722" y="2638278"/>
+                  </a:lnTo>
+                  <a:lnTo>
+                    <a:pt x="6867355" y="2637912"/>
+                  </a:lnTo>
+                  <a:lnTo>
+                    <a:pt x="6943987" y="2637546"/>
+                  </a:lnTo>
+                  <a:lnTo>
+                    <a:pt x="7020620" y="2637180"/>
+                  </a:lnTo>
+                  <a:lnTo>
+                    <a:pt x="7097253" y="2636813"/>
+                  </a:lnTo>
+                  <a:lnTo>
+                    <a:pt x="7173885" y="2636447"/>
+                  </a:lnTo>
+                  <a:lnTo>
+                    <a:pt x="7250518" y="2636080"/>
+                  </a:lnTo>
+                  <a:lnTo>
+                    <a:pt x="7327150" y="2635713"/>
+                  </a:lnTo>
+                  <a:lnTo>
+                    <a:pt x="7403783" y="2635346"/>
+                  </a:lnTo>
+                  <a:lnTo>
+                    <a:pt x="7403783" y="3344946"/>
+                  </a:lnTo>
+                  <a:lnTo>
+                    <a:pt x="7327150" y="3340106"/>
+                  </a:lnTo>
+                  <a:lnTo>
+                    <a:pt x="7250518" y="3335097"/>
+                  </a:lnTo>
+                  <a:lnTo>
+                    <a:pt x="7173885" y="3329914"/>
+                  </a:lnTo>
+                  <a:lnTo>
+                    <a:pt x="7097253" y="3324550"/>
+                  </a:lnTo>
+                  <a:lnTo>
+                    <a:pt x="7020620" y="3318999"/>
+                  </a:lnTo>
+                  <a:lnTo>
+                    <a:pt x="6943987" y="3313254"/>
+                  </a:lnTo>
+                  <a:lnTo>
+                    <a:pt x="6867355" y="3307309"/>
+                  </a:lnTo>
+                  <a:lnTo>
+                    <a:pt x="6790722" y="3301157"/>
+                  </a:lnTo>
+                  <a:lnTo>
+                    <a:pt x="6714090" y="3294790"/>
+                  </a:lnTo>
+                  <a:lnTo>
+                    <a:pt x="6637457" y="3288201"/>
+                  </a:lnTo>
+                  <a:lnTo>
+                    <a:pt x="6560825" y="3281383"/>
+                  </a:lnTo>
+                  <a:lnTo>
+                    <a:pt x="6484192" y="3274327"/>
+                  </a:lnTo>
+                  <a:lnTo>
+                    <a:pt x="6407560" y="3267024"/>
+                  </a:lnTo>
+                  <a:lnTo>
+                    <a:pt x="6330927" y="3259467"/>
+                  </a:lnTo>
+                  <a:lnTo>
+                    <a:pt x="6254294" y="3251647"/>
+                  </a:lnTo>
+                  <a:lnTo>
+                    <a:pt x="6177662" y="3243554"/>
+                  </a:lnTo>
+                  <a:lnTo>
+                    <a:pt x="6101029" y="3235178"/>
+                  </a:lnTo>
+                  <a:lnTo>
+                    <a:pt x="6024397" y="3226511"/>
+                  </a:lnTo>
+                  <a:lnTo>
+                    <a:pt x="5947764" y="3217541"/>
+                  </a:lnTo>
+                  <a:lnTo>
+                    <a:pt x="5871132" y="3208259"/>
+                  </a:lnTo>
+                  <a:lnTo>
+                    <a:pt x="5794499" y="3198653"/>
+                  </a:lnTo>
+                  <a:lnTo>
+                    <a:pt x="5717867" y="3188712"/>
+                  </a:lnTo>
+                  <a:lnTo>
+                    <a:pt x="5641234" y="3178424"/>
+                  </a:lnTo>
+                  <a:lnTo>
+                    <a:pt x="5564602" y="3167778"/>
+                  </a:lnTo>
+                  <a:lnTo>
+                    <a:pt x="5487969" y="3156760"/>
+                  </a:lnTo>
+                  <a:lnTo>
+                    <a:pt x="5411336" y="3145359"/>
+                  </a:lnTo>
+                  <a:lnTo>
+                    <a:pt x="5334704" y="3133559"/>
+                  </a:lnTo>
+                  <a:lnTo>
+                    <a:pt x="5258071" y="3121348"/>
+                  </a:lnTo>
+                  <a:lnTo>
+                    <a:pt x="5181439" y="3108712"/>
+                  </a:lnTo>
+                  <a:lnTo>
+                    <a:pt x="5104806" y="3095635"/>
+                  </a:lnTo>
+                  <a:lnTo>
+                    <a:pt x="5028174" y="3082102"/>
+                  </a:lnTo>
+                  <a:lnTo>
+                    <a:pt x="4951541" y="3068096"/>
+                  </a:lnTo>
+                  <a:lnTo>
+                    <a:pt x="4874909" y="3053603"/>
+                  </a:lnTo>
+                  <a:lnTo>
+                    <a:pt x="4798276" y="3038604"/>
+                  </a:lnTo>
+                  <a:lnTo>
+                    <a:pt x="4721644" y="3023082"/>
+                  </a:lnTo>
+                  <a:lnTo>
+                    <a:pt x="4645011" y="3007019"/>
+                  </a:lnTo>
+                  <a:lnTo>
+                    <a:pt x="4568378" y="2990396"/>
+                  </a:lnTo>
+                  <a:lnTo>
+                    <a:pt x="4491746" y="2973193"/>
+                  </a:lnTo>
+                  <a:lnTo>
+                    <a:pt x="4415113" y="2955391"/>
+                  </a:lnTo>
+                  <a:lnTo>
+                    <a:pt x="4338481" y="2936967"/>
+                  </a:lnTo>
+                  <a:lnTo>
+                    <a:pt x="4261848" y="2917902"/>
+                  </a:lnTo>
+                  <a:lnTo>
+                    <a:pt x="4185216" y="2898171"/>
+                  </a:lnTo>
+                  <a:lnTo>
+                    <a:pt x="4108583" y="2877752"/>
+                  </a:lnTo>
+                  <a:lnTo>
+                    <a:pt x="4031951" y="2856622"/>
+                  </a:lnTo>
+                  <a:lnTo>
+                    <a:pt x="3955318" y="2834754"/>
+                  </a:lnTo>
+                  <a:lnTo>
+                    <a:pt x="3878685" y="2812125"/>
+                  </a:lnTo>
+                  <a:lnTo>
+                    <a:pt x="3802053" y="2788706"/>
+                  </a:lnTo>
+                  <a:lnTo>
+                    <a:pt x="3725420" y="2764470"/>
+                  </a:lnTo>
+                  <a:lnTo>
+                    <a:pt x="3648788" y="2739389"/>
+                  </a:lnTo>
+                  <a:lnTo>
+                    <a:pt x="3572155" y="2713434"/>
+                  </a:lnTo>
+                  <a:lnTo>
+                    <a:pt x="3495523" y="2686574"/>
+                  </a:lnTo>
+                  <a:lnTo>
+                    <a:pt x="3418890" y="2658777"/>
+                  </a:lnTo>
+                  <a:lnTo>
+                    <a:pt x="3342258" y="2654585"/>
+                  </a:lnTo>
+                  <a:lnTo>
+                    <a:pt x="3265625" y="2654944"/>
+                  </a:lnTo>
+                  <a:lnTo>
+                    <a:pt x="3188993" y="2655302"/>
+                  </a:lnTo>
+                  <a:lnTo>
+                    <a:pt x="3112360" y="2655661"/>
+                  </a:lnTo>
+                  <a:lnTo>
+                    <a:pt x="3035727" y="2656019"/>
+                  </a:lnTo>
+                  <a:lnTo>
+                    <a:pt x="2959095" y="2656377"/>
+                  </a:lnTo>
+                  <a:lnTo>
+                    <a:pt x="2882462" y="2656735"/>
+                  </a:lnTo>
+                  <a:lnTo>
+                    <a:pt x="2805830" y="2657093"/>
+                  </a:lnTo>
+                  <a:lnTo>
+                    <a:pt x="2729197" y="2657451"/>
+                  </a:lnTo>
+                  <a:lnTo>
+                    <a:pt x="2652565" y="2657808"/>
+                  </a:lnTo>
+                  <a:lnTo>
+                    <a:pt x="2575932" y="2658166"/>
+                  </a:lnTo>
+                  <a:lnTo>
+                    <a:pt x="2499300" y="2658523"/>
+                  </a:lnTo>
+                  <a:lnTo>
+                    <a:pt x="2422667" y="2658880"/>
+                  </a:lnTo>
+                  <a:lnTo>
+                    <a:pt x="2346034" y="2659237"/>
+                  </a:lnTo>
+                  <a:lnTo>
+                    <a:pt x="2269402" y="2659594"/>
+                  </a:lnTo>
+                  <a:lnTo>
+                    <a:pt x="2192769" y="2659950"/>
+                  </a:lnTo>
+                  <a:lnTo>
+                    <a:pt x="2116137" y="2660307"/>
+                  </a:lnTo>
+                  <a:lnTo>
+                    <a:pt x="2039504" y="2660663"/>
+                  </a:lnTo>
+                  <a:lnTo>
+                    <a:pt x="1962872" y="2661019"/>
+                  </a:lnTo>
+                  <a:lnTo>
+                    <a:pt x="1886239" y="2661375"/>
+                  </a:lnTo>
+                  <a:lnTo>
+                    <a:pt x="1809607" y="2661731"/>
+                  </a:lnTo>
+                  <a:lnTo>
+                    <a:pt x="1732974" y="2662087"/>
+                  </a:lnTo>
+                  <a:lnTo>
+                    <a:pt x="1656342" y="2662442"/>
+                  </a:lnTo>
+                  <a:lnTo>
+                    <a:pt x="1579709" y="2662798"/>
+                  </a:lnTo>
+                  <a:lnTo>
+                    <a:pt x="1503076" y="2663153"/>
+                  </a:lnTo>
+                  <a:lnTo>
+                    <a:pt x="1426444" y="2663508"/>
+                  </a:lnTo>
+                  <a:lnTo>
+                    <a:pt x="1349811" y="2663863"/>
+                  </a:lnTo>
+                  <a:lnTo>
+                    <a:pt x="1273179" y="2664217"/>
+                  </a:lnTo>
+                  <a:lnTo>
+                    <a:pt x="1196546" y="2664572"/>
+                  </a:lnTo>
+                  <a:lnTo>
+                    <a:pt x="1119914" y="2664927"/>
+                  </a:lnTo>
+                  <a:lnTo>
+                    <a:pt x="1043281" y="2665281"/>
+                  </a:lnTo>
+                  <a:lnTo>
+                    <a:pt x="966649" y="2665635"/>
+                  </a:lnTo>
+                  <a:lnTo>
+                    <a:pt x="890016" y="2665989"/>
+                  </a:lnTo>
+                  <a:lnTo>
+                    <a:pt x="813384" y="2666343"/>
+                  </a:lnTo>
+                  <a:lnTo>
+                    <a:pt x="736751" y="2666697"/>
+                  </a:lnTo>
+                  <a:lnTo>
+                    <a:pt x="660118" y="2667050"/>
+                  </a:lnTo>
+                  <a:lnTo>
+                    <a:pt x="583486" y="2667403"/>
+                  </a:lnTo>
+                  <a:lnTo>
+                    <a:pt x="506853" y="2667757"/>
+                  </a:lnTo>
+                  <a:lnTo>
+                    <a:pt x="430221" y="2668110"/>
+                  </a:lnTo>
+                  <a:lnTo>
+                    <a:pt x="353588" y="2668463"/>
+                  </a:lnTo>
+                  <a:lnTo>
+                    <a:pt x="276956" y="2668815"/>
+                  </a:lnTo>
+                  <a:lnTo>
+                    <a:pt x="200323" y="2669168"/>
+                  </a:lnTo>
+                  <a:lnTo>
+                    <a:pt x="123691" y="2669521"/>
+                  </a:lnTo>
+                  <a:lnTo>
+                    <a:pt x="47058" y="2669873"/>
+                  </a:lnTo>
+                  <a:lnTo>
+                    <a:pt x="0" y="2670089"/>
                   </a:lnTo>
                   <a:close/>
                 </a:path>
@@ -3615,300 +3615,300 @@
           </p:nvSpPr>
           <p:spPr>
             <a:xfrm>
-              <a:off x="1015727" y="1896563"/>
-              <a:ext cx="7205573" cy="2782907"/>
+              <a:off x="1015727" y="2073503"/>
+              <a:ext cx="7205573" cy="2654226"/>
             </a:xfrm>
             <a:custGeom>
               <a:avLst/>
               <a:pathLst>
-                <a:path w="7205573" h="2782907">
+                <a:path w="7205573" h="2654226">
                   <a:moveTo>
                     <a:pt x="0" y="0"/>
                   </a:moveTo>
                   <a:lnTo>
-                    <a:pt x="2113" y="3509"/>
-                  </a:lnTo>
-                  <a:lnTo>
-                    <a:pt x="78746" y="126465"/>
-                  </a:lnTo>
-                  <a:lnTo>
-                    <a:pt x="155378" y="245277"/>
-                  </a:lnTo>
-                  <a:lnTo>
-                    <a:pt x="232011" y="360086"/>
-                  </a:lnTo>
-                  <a:lnTo>
-                    <a:pt x="308643" y="471027"/>
-                  </a:lnTo>
-                  <a:lnTo>
-                    <a:pt x="385276" y="578230"/>
-                  </a:lnTo>
-                  <a:lnTo>
-                    <a:pt x="461909" y="681820"/>
-                  </a:lnTo>
-                  <a:lnTo>
-                    <a:pt x="538541" y="781920"/>
-                  </a:lnTo>
-                  <a:lnTo>
-                    <a:pt x="615174" y="878648"/>
-                  </a:lnTo>
-                  <a:lnTo>
-                    <a:pt x="691806" y="972116"/>
-                  </a:lnTo>
-                  <a:lnTo>
-                    <a:pt x="768439" y="1062435"/>
-                  </a:lnTo>
-                  <a:lnTo>
-                    <a:pt x="845071" y="1149710"/>
-                  </a:lnTo>
-                  <a:lnTo>
-                    <a:pt x="921704" y="1234045"/>
-                  </a:lnTo>
-                  <a:lnTo>
-                    <a:pt x="998336" y="1315538"/>
-                  </a:lnTo>
-                  <a:lnTo>
-                    <a:pt x="1074969" y="1394286"/>
-                  </a:lnTo>
-                  <a:lnTo>
-                    <a:pt x="1151602" y="1470380"/>
-                  </a:lnTo>
-                  <a:lnTo>
-                    <a:pt x="1228234" y="1543910"/>
-                  </a:lnTo>
-                  <a:lnTo>
-                    <a:pt x="1304867" y="1614962"/>
-                  </a:lnTo>
-                  <a:lnTo>
-                    <a:pt x="1381499" y="1683621"/>
-                  </a:lnTo>
-                  <a:lnTo>
-                    <a:pt x="1458132" y="1749966"/>
-                  </a:lnTo>
-                  <a:lnTo>
-                    <a:pt x="1534764" y="1814075"/>
-                  </a:lnTo>
-                  <a:lnTo>
-                    <a:pt x="1611397" y="1876025"/>
-                  </a:lnTo>
-                  <a:lnTo>
-                    <a:pt x="1688029" y="1935887"/>
-                  </a:lnTo>
-                  <a:lnTo>
-                    <a:pt x="1764662" y="1993732"/>
-                  </a:lnTo>
-                  <a:lnTo>
-                    <a:pt x="1841294" y="2049628"/>
-                  </a:lnTo>
-                  <a:lnTo>
-                    <a:pt x="1917927" y="2103641"/>
-                  </a:lnTo>
-                  <a:lnTo>
-                    <a:pt x="1994560" y="2155833"/>
-                  </a:lnTo>
-                  <a:lnTo>
-                    <a:pt x="2071192" y="2206267"/>
-                  </a:lnTo>
-                  <a:lnTo>
-                    <a:pt x="2147825" y="2255002"/>
-                  </a:lnTo>
-                  <a:lnTo>
-                    <a:pt x="2224457" y="2302095"/>
-                  </a:lnTo>
-                  <a:lnTo>
-                    <a:pt x="2301090" y="2347601"/>
-                  </a:lnTo>
-                  <a:lnTo>
-                    <a:pt x="2377722" y="2391573"/>
-                  </a:lnTo>
-                  <a:lnTo>
-                    <a:pt x="2454355" y="2434064"/>
-                  </a:lnTo>
-                  <a:lnTo>
-                    <a:pt x="2530987" y="2475124"/>
-                  </a:lnTo>
-                  <a:lnTo>
-                    <a:pt x="2607620" y="2514800"/>
-                  </a:lnTo>
-                  <a:lnTo>
-                    <a:pt x="2684253" y="2553138"/>
-                  </a:lnTo>
-                  <a:lnTo>
-                    <a:pt x="2760885" y="2590186"/>
-                  </a:lnTo>
-                  <a:lnTo>
-                    <a:pt x="2837518" y="2625985"/>
-                  </a:lnTo>
-                  <a:lnTo>
-                    <a:pt x="2914150" y="2660577"/>
-                  </a:lnTo>
-                  <a:lnTo>
-                    <a:pt x="2990783" y="2694004"/>
-                  </a:lnTo>
-                  <a:lnTo>
-                    <a:pt x="3067415" y="2726305"/>
-                  </a:lnTo>
-                  <a:lnTo>
-                    <a:pt x="3144048" y="2757517"/>
-                  </a:lnTo>
-                  <a:lnTo>
-                    <a:pt x="3220680" y="2782907"/>
-                  </a:lnTo>
-                  <a:lnTo>
-                    <a:pt x="3297313" y="2782530"/>
-                  </a:lnTo>
-                  <a:lnTo>
-                    <a:pt x="3373945" y="2782153"/>
-                  </a:lnTo>
-                  <a:lnTo>
-                    <a:pt x="3450578" y="2781777"/>
-                  </a:lnTo>
-                  <a:lnTo>
-                    <a:pt x="3527211" y="2781400"/>
-                  </a:lnTo>
-                  <a:lnTo>
-                    <a:pt x="3603843" y="2781022"/>
-                  </a:lnTo>
-                  <a:lnTo>
-                    <a:pt x="3680476" y="2780645"/>
-                  </a:lnTo>
-                  <a:lnTo>
-                    <a:pt x="3757108" y="2780268"/>
-                  </a:lnTo>
-                  <a:lnTo>
-                    <a:pt x="3833741" y="2779890"/>
-                  </a:lnTo>
-                  <a:lnTo>
-                    <a:pt x="3910373" y="2779512"/>
-                  </a:lnTo>
-                  <a:lnTo>
-                    <a:pt x="3987006" y="2779134"/>
-                  </a:lnTo>
-                  <a:lnTo>
-                    <a:pt x="4063638" y="2778756"/>
-                  </a:lnTo>
-                  <a:lnTo>
-                    <a:pt x="4140271" y="2778378"/>
-                  </a:lnTo>
-                  <a:lnTo>
-                    <a:pt x="4216903" y="2777999"/>
-                  </a:lnTo>
-                  <a:lnTo>
-                    <a:pt x="4293536" y="2777621"/>
-                  </a:lnTo>
-                  <a:lnTo>
-                    <a:pt x="4370169" y="2777242"/>
-                  </a:lnTo>
-                  <a:lnTo>
-                    <a:pt x="4446801" y="2776863"/>
-                  </a:lnTo>
-                  <a:lnTo>
-                    <a:pt x="4523434" y="2776484"/>
-                  </a:lnTo>
-                  <a:lnTo>
-                    <a:pt x="4600066" y="2776105"/>
-                  </a:lnTo>
-                  <a:lnTo>
-                    <a:pt x="4676699" y="2775725"/>
-                  </a:lnTo>
-                  <a:lnTo>
-                    <a:pt x="4753331" y="2775346"/>
-                  </a:lnTo>
-                  <a:lnTo>
-                    <a:pt x="4829964" y="2774966"/>
-                  </a:lnTo>
-                  <a:lnTo>
-                    <a:pt x="4906596" y="2774586"/>
-                  </a:lnTo>
-                  <a:lnTo>
-                    <a:pt x="4983229" y="2774206"/>
-                  </a:lnTo>
-                  <a:lnTo>
-                    <a:pt x="5059862" y="2773826"/>
-                  </a:lnTo>
-                  <a:lnTo>
-                    <a:pt x="5136494" y="2773445"/>
-                  </a:lnTo>
-                  <a:lnTo>
-                    <a:pt x="5213127" y="2773065"/>
-                  </a:lnTo>
-                  <a:lnTo>
-                    <a:pt x="5289759" y="2772684"/>
-                  </a:lnTo>
-                  <a:lnTo>
-                    <a:pt x="5366392" y="2772303"/>
-                  </a:lnTo>
-                  <a:lnTo>
-                    <a:pt x="5443024" y="2771922"/>
-                  </a:lnTo>
-                  <a:lnTo>
-                    <a:pt x="5519657" y="2771541"/>
-                  </a:lnTo>
-                  <a:lnTo>
-                    <a:pt x="5596289" y="2771159"/>
-                  </a:lnTo>
-                  <a:lnTo>
-                    <a:pt x="5672922" y="2770778"/>
-                  </a:lnTo>
-                  <a:lnTo>
-                    <a:pt x="5749554" y="2770396"/>
-                  </a:lnTo>
-                  <a:lnTo>
-                    <a:pt x="5826187" y="2770014"/>
-                  </a:lnTo>
-                  <a:lnTo>
-                    <a:pt x="5902820" y="2769632"/>
-                  </a:lnTo>
-                  <a:lnTo>
-                    <a:pt x="5979452" y="2769250"/>
-                  </a:lnTo>
-                  <a:lnTo>
-                    <a:pt x="6056085" y="2768867"/>
-                  </a:lnTo>
-                  <a:lnTo>
-                    <a:pt x="6132717" y="2768485"/>
-                  </a:lnTo>
-                  <a:lnTo>
-                    <a:pt x="6209350" y="2768102"/>
-                  </a:lnTo>
-                  <a:lnTo>
-                    <a:pt x="6285982" y="2767719"/>
-                  </a:lnTo>
-                  <a:lnTo>
-                    <a:pt x="6362615" y="2767336"/>
-                  </a:lnTo>
-                  <a:lnTo>
-                    <a:pt x="6439247" y="2766953"/>
-                  </a:lnTo>
-                  <a:lnTo>
-                    <a:pt x="6515880" y="2766569"/>
-                  </a:lnTo>
-                  <a:lnTo>
-                    <a:pt x="6592513" y="2766186"/>
-                  </a:lnTo>
-                  <a:lnTo>
-                    <a:pt x="6669145" y="2765802"/>
-                  </a:lnTo>
-                  <a:lnTo>
-                    <a:pt x="6745778" y="2765418"/>
-                  </a:lnTo>
-                  <a:lnTo>
-                    <a:pt x="6822410" y="2765034"/>
-                  </a:lnTo>
-                  <a:lnTo>
-                    <a:pt x="6899043" y="2764650"/>
-                  </a:lnTo>
-                  <a:lnTo>
-                    <a:pt x="6975675" y="2764265"/>
-                  </a:lnTo>
-                  <a:lnTo>
-                    <a:pt x="7052308" y="2763881"/>
-                  </a:lnTo>
-                  <a:lnTo>
-                    <a:pt x="7128940" y="2763496"/>
-                  </a:lnTo>
-                  <a:lnTo>
-                    <a:pt x="7205573" y="2763111"/>
+                    <a:pt x="2113" y="3347"/>
+                  </a:lnTo>
+                  <a:lnTo>
+                    <a:pt x="78746" y="120617"/>
+                  </a:lnTo>
+                  <a:lnTo>
+                    <a:pt x="155378" y="233936"/>
+                  </a:lnTo>
+                  <a:lnTo>
+                    <a:pt x="232011" y="343436"/>
+                  </a:lnTo>
+                  <a:lnTo>
+                    <a:pt x="308643" y="449247"/>
+                  </a:lnTo>
+                  <a:lnTo>
+                    <a:pt x="385276" y="551493"/>
+                  </a:lnTo>
+                  <a:lnTo>
+                    <a:pt x="461909" y="650293"/>
+                  </a:lnTo>
+                  <a:lnTo>
+                    <a:pt x="538541" y="745765"/>
+                  </a:lnTo>
+                  <a:lnTo>
+                    <a:pt x="615174" y="838019"/>
+                  </a:lnTo>
+                  <a:lnTo>
+                    <a:pt x="691806" y="927166"/>
+                  </a:lnTo>
+                  <a:lnTo>
+                    <a:pt x="768439" y="1013308"/>
+                  </a:lnTo>
+                  <a:lnTo>
+                    <a:pt x="845071" y="1096548"/>
+                  </a:lnTo>
+                  <a:lnTo>
+                    <a:pt x="921704" y="1176983"/>
+                  </a:lnTo>
+                  <a:lnTo>
+                    <a:pt x="998336" y="1254708"/>
+                  </a:lnTo>
+                  <a:lnTo>
+                    <a:pt x="1074969" y="1329814"/>
+                  </a:lnTo>
+                  <a:lnTo>
+                    <a:pt x="1151602" y="1402390"/>
+                  </a:lnTo>
+                  <a:lnTo>
+                    <a:pt x="1228234" y="1472520"/>
+                  </a:lnTo>
+                  <a:lnTo>
+                    <a:pt x="1304867" y="1540287"/>
+                  </a:lnTo>
+                  <a:lnTo>
+                    <a:pt x="1381499" y="1605771"/>
+                  </a:lnTo>
+                  <a:lnTo>
+                    <a:pt x="1458132" y="1669048"/>
+                  </a:lnTo>
+                  <a:lnTo>
+                    <a:pt x="1534764" y="1730193"/>
+                  </a:lnTo>
+                  <a:lnTo>
+                    <a:pt x="1611397" y="1789278"/>
+                  </a:lnTo>
+                  <a:lnTo>
+                    <a:pt x="1688029" y="1846372"/>
+                  </a:lnTo>
+                  <a:lnTo>
+                    <a:pt x="1764662" y="1901542"/>
+                  </a:lnTo>
+                  <a:lnTo>
+                    <a:pt x="1841294" y="1954854"/>
+                  </a:lnTo>
+                  <a:lnTo>
+                    <a:pt x="1917927" y="2006369"/>
+                  </a:lnTo>
+                  <a:lnTo>
+                    <a:pt x="1994560" y="2056148"/>
+                  </a:lnTo>
+                  <a:lnTo>
+                    <a:pt x="2071192" y="2104250"/>
+                  </a:lnTo>
+                  <a:lnTo>
+                    <a:pt x="2147825" y="2150732"/>
+                  </a:lnTo>
+                  <a:lnTo>
+                    <a:pt x="2224457" y="2195647"/>
+                  </a:lnTo>
+                  <a:lnTo>
+                    <a:pt x="2301090" y="2239049"/>
+                  </a:lnTo>
+                  <a:lnTo>
+                    <a:pt x="2377722" y="2280988"/>
+                  </a:lnTo>
+                  <a:lnTo>
+                    <a:pt x="2454355" y="2321514"/>
+                  </a:lnTo>
+                  <a:lnTo>
+                    <a:pt x="2530987" y="2360675"/>
+                  </a:lnTo>
+                  <a:lnTo>
+                    <a:pt x="2607620" y="2398516"/>
+                  </a:lnTo>
+                  <a:lnTo>
+                    <a:pt x="2684253" y="2435082"/>
+                  </a:lnTo>
+                  <a:lnTo>
+                    <a:pt x="2760885" y="2470416"/>
+                  </a:lnTo>
+                  <a:lnTo>
+                    <a:pt x="2837518" y="2504560"/>
+                  </a:lnTo>
+                  <a:lnTo>
+                    <a:pt x="2914150" y="2537553"/>
+                  </a:lnTo>
+                  <a:lnTo>
+                    <a:pt x="2990783" y="2569434"/>
+                  </a:lnTo>
+                  <a:lnTo>
+                    <a:pt x="3067415" y="2600242"/>
+                  </a:lnTo>
+                  <a:lnTo>
+                    <a:pt x="3144048" y="2630011"/>
+                  </a:lnTo>
+                  <a:lnTo>
+                    <a:pt x="3220680" y="2654226"/>
+                  </a:lnTo>
+                  <a:lnTo>
+                    <a:pt x="3297313" y="2653867"/>
+                  </a:lnTo>
+                  <a:lnTo>
+                    <a:pt x="3373945" y="2653508"/>
+                  </a:lnTo>
+                  <a:lnTo>
+                    <a:pt x="3450578" y="2653148"/>
+                  </a:lnTo>
+                  <a:lnTo>
+                    <a:pt x="3527211" y="2652789"/>
+                  </a:lnTo>
+                  <a:lnTo>
+                    <a:pt x="3603843" y="2652429"/>
+                  </a:lnTo>
+                  <a:lnTo>
+                    <a:pt x="3680476" y="2652069"/>
+                  </a:lnTo>
+                  <a:lnTo>
+                    <a:pt x="3757108" y="2651709"/>
+                  </a:lnTo>
+                  <a:lnTo>
+                    <a:pt x="3833741" y="2651349"/>
+                  </a:lnTo>
+                  <a:lnTo>
+                    <a:pt x="3910373" y="2650989"/>
+                  </a:lnTo>
+                  <a:lnTo>
+                    <a:pt x="3987006" y="2650628"/>
+                  </a:lnTo>
+                  <a:lnTo>
+                    <a:pt x="4063638" y="2650267"/>
+                  </a:lnTo>
+                  <a:lnTo>
+                    <a:pt x="4140271" y="2649907"/>
+                  </a:lnTo>
+                  <a:lnTo>
+                    <a:pt x="4216903" y="2649546"/>
+                  </a:lnTo>
+                  <a:lnTo>
+                    <a:pt x="4293536" y="2649185"/>
+                  </a:lnTo>
+                  <a:lnTo>
+                    <a:pt x="4370169" y="2648823"/>
+                  </a:lnTo>
+                  <a:lnTo>
+                    <a:pt x="4446801" y="2648462"/>
+                  </a:lnTo>
+                  <a:lnTo>
+                    <a:pt x="4523434" y="2648100"/>
+                  </a:lnTo>
+                  <a:lnTo>
+                    <a:pt x="4600066" y="2647739"/>
+                  </a:lnTo>
+                  <a:lnTo>
+                    <a:pt x="4676699" y="2647377"/>
+                  </a:lnTo>
+                  <a:lnTo>
+                    <a:pt x="4753331" y="2647015"/>
+                  </a:lnTo>
+                  <a:lnTo>
+                    <a:pt x="4829964" y="2646652"/>
+                  </a:lnTo>
+                  <a:lnTo>
+                    <a:pt x="4906596" y="2646290"/>
+                  </a:lnTo>
+                  <a:lnTo>
+                    <a:pt x="4983229" y="2645928"/>
+                  </a:lnTo>
+                  <a:lnTo>
+                    <a:pt x="5059862" y="2645565"/>
+                  </a:lnTo>
+                  <a:lnTo>
+                    <a:pt x="5136494" y="2645202"/>
+                  </a:lnTo>
+                  <a:lnTo>
+                    <a:pt x="5213127" y="2644839"/>
+                  </a:lnTo>
+                  <a:lnTo>
+                    <a:pt x="5289759" y="2644476"/>
+                  </a:lnTo>
+                  <a:lnTo>
+                    <a:pt x="5366392" y="2644113"/>
+                  </a:lnTo>
+                  <a:lnTo>
+                    <a:pt x="5443024" y="2643749"/>
+                  </a:lnTo>
+                  <a:lnTo>
+                    <a:pt x="5519657" y="2643386"/>
+                  </a:lnTo>
+                  <a:lnTo>
+                    <a:pt x="5596289" y="2643022"/>
+                  </a:lnTo>
+                  <a:lnTo>
+                    <a:pt x="5672922" y="2642658"/>
+                  </a:lnTo>
+                  <a:lnTo>
+                    <a:pt x="5749554" y="2642294"/>
+                  </a:lnTo>
+                  <a:lnTo>
+                    <a:pt x="5826187" y="2641929"/>
+                  </a:lnTo>
+                  <a:lnTo>
+                    <a:pt x="5902820" y="2641565"/>
+                  </a:lnTo>
+                  <a:lnTo>
+                    <a:pt x="5979452" y="2641200"/>
+                  </a:lnTo>
+                  <a:lnTo>
+                    <a:pt x="6056085" y="2640836"/>
+                  </a:lnTo>
+                  <a:lnTo>
+                    <a:pt x="6132717" y="2640471"/>
+                  </a:lnTo>
+                  <a:lnTo>
+                    <a:pt x="6209350" y="2640106"/>
+                  </a:lnTo>
+                  <a:lnTo>
+                    <a:pt x="6285982" y="2639741"/>
+                  </a:lnTo>
+                  <a:lnTo>
+                    <a:pt x="6362615" y="2639375"/>
+                  </a:lnTo>
+                  <a:lnTo>
+                    <a:pt x="6439247" y="2639010"/>
+                  </a:lnTo>
+                  <a:lnTo>
+                    <a:pt x="6515880" y="2638644"/>
+                  </a:lnTo>
+                  <a:lnTo>
+                    <a:pt x="6592513" y="2638278"/>
+                  </a:lnTo>
+                  <a:lnTo>
+                    <a:pt x="6669145" y="2637912"/>
+                  </a:lnTo>
+                  <a:lnTo>
+                    <a:pt x="6745778" y="2637546"/>
+                  </a:lnTo>
+                  <a:lnTo>
+                    <a:pt x="6822410" y="2637180"/>
+                  </a:lnTo>
+                  <a:lnTo>
+                    <a:pt x="6899043" y="2636813"/>
+                  </a:lnTo>
+                  <a:lnTo>
+                    <a:pt x="6975675" y="2636447"/>
+                  </a:lnTo>
+                  <a:lnTo>
+                    <a:pt x="7052308" y="2636080"/>
+                  </a:lnTo>
+                  <a:lnTo>
+                    <a:pt x="7128940" y="2635713"/>
+                  </a:lnTo>
+                  <a:lnTo>
+                    <a:pt x="7205573" y="2635346"/>
                   </a:lnTo>
                 </a:path>
               </a:pathLst>
@@ -3928,306 +3928,306 @@
           </p:nvSpPr>
           <p:spPr>
             <a:xfrm>
-              <a:off x="817517" y="4679846"/>
-              <a:ext cx="7403783" cy="723830"/>
+              <a:off x="817517" y="4728088"/>
+              <a:ext cx="7403783" cy="690360"/>
             </a:xfrm>
             <a:custGeom>
               <a:avLst/>
               <a:pathLst>
-                <a:path w="7403783" h="723830">
+                <a:path w="7403783" h="690360">
                   <a:moveTo>
-                    <a:pt x="7403783" y="723830"/>
+                    <a:pt x="7403783" y="690360"/>
                   </a:moveTo>
                   <a:lnTo>
-                    <a:pt x="7327150" y="718755"/>
-                  </a:lnTo>
-                  <a:lnTo>
-                    <a:pt x="7250518" y="713504"/>
-                  </a:lnTo>
-                  <a:lnTo>
-                    <a:pt x="7173885" y="708069"/>
-                  </a:lnTo>
-                  <a:lnTo>
-                    <a:pt x="7097253" y="702445"/>
-                  </a:lnTo>
-                  <a:lnTo>
-                    <a:pt x="7020620" y="696625"/>
-                  </a:lnTo>
-                  <a:lnTo>
-                    <a:pt x="6943987" y="690602"/>
-                  </a:lnTo>
-                  <a:lnTo>
-                    <a:pt x="6867355" y="684369"/>
-                  </a:lnTo>
-                  <a:lnTo>
-                    <a:pt x="6790722" y="677918"/>
-                  </a:lnTo>
-                  <a:lnTo>
-                    <a:pt x="6714090" y="671243"/>
-                  </a:lnTo>
-                  <a:lnTo>
-                    <a:pt x="6637457" y="664335"/>
-                  </a:lnTo>
-                  <a:lnTo>
-                    <a:pt x="6560825" y="657186"/>
-                  </a:lnTo>
-                  <a:lnTo>
-                    <a:pt x="6484192" y="649787"/>
-                  </a:lnTo>
-                  <a:lnTo>
-                    <a:pt x="6407560" y="642131"/>
-                  </a:lnTo>
-                  <a:lnTo>
-                    <a:pt x="6330927" y="634208"/>
-                  </a:lnTo>
-                  <a:lnTo>
-                    <a:pt x="6254294" y="626008"/>
-                  </a:lnTo>
-                  <a:lnTo>
-                    <a:pt x="6177662" y="617522"/>
-                  </a:lnTo>
-                  <a:lnTo>
-                    <a:pt x="6101029" y="608741"/>
-                  </a:lnTo>
-                  <a:lnTo>
-                    <a:pt x="6024397" y="599653"/>
-                  </a:lnTo>
-                  <a:lnTo>
-                    <a:pt x="5947764" y="590249"/>
-                  </a:lnTo>
-                  <a:lnTo>
-                    <a:pt x="5871132" y="580517"/>
-                  </a:lnTo>
-                  <a:lnTo>
-                    <a:pt x="5794499" y="570445"/>
-                  </a:lnTo>
-                  <a:lnTo>
-                    <a:pt x="5717867" y="560022"/>
-                  </a:lnTo>
-                  <a:lnTo>
-                    <a:pt x="5641234" y="549235"/>
-                  </a:lnTo>
-                  <a:lnTo>
-                    <a:pt x="5564602" y="538073"/>
-                  </a:lnTo>
-                  <a:lnTo>
-                    <a:pt x="5487969" y="526521"/>
-                  </a:lnTo>
-                  <a:lnTo>
-                    <a:pt x="5411336" y="514567"/>
-                  </a:lnTo>
-                  <a:lnTo>
-                    <a:pt x="5334704" y="502195"/>
-                  </a:lnTo>
-                  <a:lnTo>
-                    <a:pt x="5258071" y="489392"/>
-                  </a:lnTo>
-                  <a:lnTo>
-                    <a:pt x="5181439" y="476143"/>
-                  </a:lnTo>
-                  <a:lnTo>
-                    <a:pt x="5104806" y="462432"/>
-                  </a:lnTo>
-                  <a:lnTo>
-                    <a:pt x="5028174" y="448243"/>
-                  </a:lnTo>
-                  <a:lnTo>
-                    <a:pt x="4951541" y="433559"/>
-                  </a:lnTo>
-                  <a:lnTo>
-                    <a:pt x="4874909" y="418363"/>
-                  </a:lnTo>
-                  <a:lnTo>
-                    <a:pt x="4798276" y="402637"/>
-                  </a:lnTo>
-                  <a:lnTo>
-                    <a:pt x="4721644" y="386362"/>
-                  </a:lnTo>
-                  <a:lnTo>
-                    <a:pt x="4645011" y="369520"/>
-                  </a:lnTo>
-                  <a:lnTo>
-                    <a:pt x="4568378" y="352091"/>
-                  </a:lnTo>
-                  <a:lnTo>
-                    <a:pt x="4491746" y="334055"/>
-                  </a:lnTo>
-                  <a:lnTo>
-                    <a:pt x="4415113" y="315389"/>
-                  </a:lnTo>
-                  <a:lnTo>
-                    <a:pt x="4338481" y="296072"/>
-                  </a:lnTo>
-                  <a:lnTo>
-                    <a:pt x="4261848" y="276082"/>
-                  </a:lnTo>
-                  <a:lnTo>
-                    <a:pt x="4185216" y="255395"/>
-                  </a:lnTo>
-                  <a:lnTo>
-                    <a:pt x="4108583" y="233986"/>
-                  </a:lnTo>
-                  <a:lnTo>
-                    <a:pt x="4031951" y="211831"/>
-                  </a:lnTo>
-                  <a:lnTo>
-                    <a:pt x="3955318" y="188904"/>
-                  </a:lnTo>
-                  <a:lnTo>
-                    <a:pt x="3878685" y="165177"/>
-                  </a:lnTo>
-                  <a:lnTo>
-                    <a:pt x="3802053" y="140623"/>
-                  </a:lnTo>
-                  <a:lnTo>
-                    <a:pt x="3725420" y="115212"/>
-                  </a:lnTo>
-                  <a:lnTo>
-                    <a:pt x="3648788" y="88915"/>
-                  </a:lnTo>
-                  <a:lnTo>
-                    <a:pt x="3572155" y="61702"/>
-                  </a:lnTo>
-                  <a:lnTo>
-                    <a:pt x="3495523" y="33539"/>
-                  </a:lnTo>
-                  <a:lnTo>
-                    <a:pt x="3418890" y="4395"/>
+                    <a:pt x="7327150" y="685520"/>
+                  </a:lnTo>
+                  <a:lnTo>
+                    <a:pt x="7250518" y="680512"/>
+                  </a:lnTo>
+                  <a:lnTo>
+                    <a:pt x="7173885" y="675329"/>
+                  </a:lnTo>
+                  <a:lnTo>
+                    <a:pt x="7097253" y="669964"/>
+                  </a:lnTo>
+                  <a:lnTo>
+                    <a:pt x="7020620" y="664413"/>
+                  </a:lnTo>
+                  <a:lnTo>
+                    <a:pt x="6943987" y="658669"/>
+                  </a:lnTo>
+                  <a:lnTo>
+                    <a:pt x="6867355" y="652724"/>
+                  </a:lnTo>
+                  <a:lnTo>
+                    <a:pt x="6790722" y="646572"/>
+                  </a:lnTo>
+                  <a:lnTo>
+                    <a:pt x="6714090" y="640205"/>
+                  </a:lnTo>
+                  <a:lnTo>
+                    <a:pt x="6637457" y="633616"/>
+                  </a:lnTo>
+                  <a:lnTo>
+                    <a:pt x="6560825" y="626798"/>
+                  </a:lnTo>
+                  <a:lnTo>
+                    <a:pt x="6484192" y="619741"/>
+                  </a:lnTo>
+                  <a:lnTo>
+                    <a:pt x="6407560" y="612439"/>
+                  </a:lnTo>
+                  <a:lnTo>
+                    <a:pt x="6330927" y="604882"/>
+                  </a:lnTo>
+                  <a:lnTo>
+                    <a:pt x="6254294" y="597062"/>
+                  </a:lnTo>
+                  <a:lnTo>
+                    <a:pt x="6177662" y="588968"/>
+                  </a:lnTo>
+                  <a:lnTo>
+                    <a:pt x="6101029" y="580593"/>
+                  </a:lnTo>
+                  <a:lnTo>
+                    <a:pt x="6024397" y="571926"/>
+                  </a:lnTo>
+                  <a:lnTo>
+                    <a:pt x="5947764" y="562956"/>
+                  </a:lnTo>
+                  <a:lnTo>
+                    <a:pt x="5871132" y="553674"/>
+                  </a:lnTo>
+                  <a:lnTo>
+                    <a:pt x="5794499" y="544068"/>
+                  </a:lnTo>
+                  <a:lnTo>
+                    <a:pt x="5717867" y="534127"/>
+                  </a:lnTo>
+                  <a:lnTo>
+                    <a:pt x="5641234" y="523839"/>
+                  </a:lnTo>
+                  <a:lnTo>
+                    <a:pt x="5564602" y="513193"/>
+                  </a:lnTo>
+                  <a:lnTo>
+                    <a:pt x="5487969" y="502175"/>
+                  </a:lnTo>
+                  <a:lnTo>
+                    <a:pt x="5411336" y="490773"/>
+                  </a:lnTo>
+                  <a:lnTo>
+                    <a:pt x="5334704" y="478974"/>
+                  </a:lnTo>
+                  <a:lnTo>
+                    <a:pt x="5258071" y="466763"/>
+                  </a:lnTo>
+                  <a:lnTo>
+                    <a:pt x="5181439" y="454126"/>
+                  </a:lnTo>
+                  <a:lnTo>
+                    <a:pt x="5104806" y="441049"/>
+                  </a:lnTo>
+                  <a:lnTo>
+                    <a:pt x="5028174" y="427516"/>
+                  </a:lnTo>
+                  <a:lnTo>
+                    <a:pt x="4951541" y="413511"/>
+                  </a:lnTo>
+                  <a:lnTo>
+                    <a:pt x="4874909" y="399018"/>
+                  </a:lnTo>
+                  <a:lnTo>
+                    <a:pt x="4798276" y="384019"/>
+                  </a:lnTo>
+                  <a:lnTo>
+                    <a:pt x="4721644" y="368497"/>
+                  </a:lnTo>
+                  <a:lnTo>
+                    <a:pt x="4645011" y="352434"/>
+                  </a:lnTo>
+                  <a:lnTo>
+                    <a:pt x="4568378" y="335811"/>
+                  </a:lnTo>
+                  <a:lnTo>
+                    <a:pt x="4491746" y="318608"/>
+                  </a:lnTo>
+                  <a:lnTo>
+                    <a:pt x="4415113" y="300805"/>
+                  </a:lnTo>
+                  <a:lnTo>
+                    <a:pt x="4338481" y="282382"/>
+                  </a:lnTo>
+                  <a:lnTo>
+                    <a:pt x="4261848" y="263316"/>
+                  </a:lnTo>
+                  <a:lnTo>
+                    <a:pt x="4185216" y="243586"/>
+                  </a:lnTo>
+                  <a:lnTo>
+                    <a:pt x="4108583" y="223167"/>
+                  </a:lnTo>
+                  <a:lnTo>
+                    <a:pt x="4031951" y="202036"/>
+                  </a:lnTo>
+                  <a:lnTo>
+                    <a:pt x="3955318" y="180169"/>
+                  </a:lnTo>
+                  <a:lnTo>
+                    <a:pt x="3878685" y="157539"/>
+                  </a:lnTo>
+                  <a:lnTo>
+                    <a:pt x="3802053" y="134120"/>
+                  </a:lnTo>
+                  <a:lnTo>
+                    <a:pt x="3725420" y="109885"/>
+                  </a:lnTo>
+                  <a:lnTo>
+                    <a:pt x="3648788" y="84804"/>
+                  </a:lnTo>
+                  <a:lnTo>
+                    <a:pt x="3572155" y="58849"/>
+                  </a:lnTo>
+                  <a:lnTo>
+                    <a:pt x="3495523" y="31988"/>
+                  </a:lnTo>
+                  <a:lnTo>
+                    <a:pt x="3418890" y="4192"/>
                   </a:lnTo>
                   <a:lnTo>
                     <a:pt x="3342258" y="0"/>
                   </a:lnTo>
                   <a:lnTo>
-                    <a:pt x="3265625" y="376"/>
-                  </a:lnTo>
-                  <a:lnTo>
-                    <a:pt x="3188993" y="752"/>
-                  </a:lnTo>
-                  <a:lnTo>
-                    <a:pt x="3112360" y="1128"/>
-                  </a:lnTo>
-                  <a:lnTo>
-                    <a:pt x="3035727" y="1503"/>
-                  </a:lnTo>
-                  <a:lnTo>
-                    <a:pt x="2959095" y="1879"/>
-                  </a:lnTo>
-                  <a:lnTo>
-                    <a:pt x="2882462" y="2254"/>
-                  </a:lnTo>
-                  <a:lnTo>
-                    <a:pt x="2805830" y="2629"/>
-                  </a:lnTo>
-                  <a:lnTo>
-                    <a:pt x="2729197" y="3004"/>
-                  </a:lnTo>
-                  <a:lnTo>
-                    <a:pt x="2652565" y="3379"/>
-                  </a:lnTo>
-                  <a:lnTo>
-                    <a:pt x="2575932" y="3754"/>
-                  </a:lnTo>
-                  <a:lnTo>
-                    <a:pt x="2499300" y="4128"/>
-                  </a:lnTo>
-                  <a:lnTo>
-                    <a:pt x="2422667" y="4503"/>
-                  </a:lnTo>
-                  <a:lnTo>
-                    <a:pt x="2346034" y="4877"/>
-                  </a:lnTo>
-                  <a:lnTo>
-                    <a:pt x="2269402" y="5251"/>
-                  </a:lnTo>
-                  <a:lnTo>
-                    <a:pt x="2192769" y="5625"/>
-                  </a:lnTo>
-                  <a:lnTo>
-                    <a:pt x="2116137" y="5999"/>
-                  </a:lnTo>
-                  <a:lnTo>
-                    <a:pt x="2039504" y="6372"/>
-                  </a:lnTo>
-                  <a:lnTo>
-                    <a:pt x="1962872" y="6746"/>
-                  </a:lnTo>
-                  <a:lnTo>
-                    <a:pt x="1886239" y="7119"/>
-                  </a:lnTo>
-                  <a:lnTo>
-                    <a:pt x="1809607" y="7492"/>
-                  </a:lnTo>
-                  <a:lnTo>
-                    <a:pt x="1732974" y="7865"/>
-                  </a:lnTo>
-                  <a:lnTo>
-                    <a:pt x="1656342" y="8238"/>
-                  </a:lnTo>
-                  <a:lnTo>
-                    <a:pt x="1579709" y="8610"/>
-                  </a:lnTo>
-                  <a:lnTo>
-                    <a:pt x="1503076" y="8983"/>
-                  </a:lnTo>
-                  <a:lnTo>
-                    <a:pt x="1426444" y="9355"/>
-                  </a:lnTo>
-                  <a:lnTo>
-                    <a:pt x="1349811" y="9727"/>
-                  </a:lnTo>
-                  <a:lnTo>
-                    <a:pt x="1273179" y="10099"/>
-                  </a:lnTo>
-                  <a:lnTo>
-                    <a:pt x="1196546" y="10471"/>
-                  </a:lnTo>
-                  <a:lnTo>
-                    <a:pt x="1119914" y="10843"/>
-                  </a:lnTo>
-                  <a:lnTo>
-                    <a:pt x="1043281" y="11214"/>
-                  </a:lnTo>
-                  <a:lnTo>
-                    <a:pt x="966649" y="11585"/>
-                  </a:lnTo>
-                  <a:lnTo>
-                    <a:pt x="890016" y="11956"/>
-                  </a:lnTo>
-                  <a:lnTo>
-                    <a:pt x="813384" y="12327"/>
-                  </a:lnTo>
-                  <a:lnTo>
-                    <a:pt x="736751" y="12698"/>
-                  </a:lnTo>
-                  <a:lnTo>
-                    <a:pt x="660118" y="13069"/>
-                  </a:lnTo>
-                  <a:lnTo>
-                    <a:pt x="583486" y="13440"/>
-                  </a:lnTo>
-                  <a:lnTo>
-                    <a:pt x="506853" y="13810"/>
-                  </a:lnTo>
-                  <a:lnTo>
-                    <a:pt x="430221" y="14180"/>
-                  </a:lnTo>
-                  <a:lnTo>
-                    <a:pt x="353588" y="14550"/>
-                  </a:lnTo>
-                  <a:lnTo>
-                    <a:pt x="276956" y="14920"/>
-                  </a:lnTo>
-                  <a:lnTo>
-                    <a:pt x="200323" y="15290"/>
-                  </a:lnTo>
-                  <a:lnTo>
-                    <a:pt x="123691" y="15659"/>
-                  </a:lnTo>
-                  <a:lnTo>
-                    <a:pt x="47058" y="16029"/>
-                  </a:lnTo>
-                  <a:lnTo>
-                    <a:pt x="0" y="16255"/>
+                    <a:pt x="3265625" y="358"/>
+                  </a:lnTo>
+                  <a:lnTo>
+                    <a:pt x="3188993" y="717"/>
+                  </a:lnTo>
+                  <a:lnTo>
+                    <a:pt x="3112360" y="1075"/>
+                  </a:lnTo>
+                  <a:lnTo>
+                    <a:pt x="3035727" y="1434"/>
+                  </a:lnTo>
+                  <a:lnTo>
+                    <a:pt x="2959095" y="1792"/>
+                  </a:lnTo>
+                  <a:lnTo>
+                    <a:pt x="2882462" y="2150"/>
+                  </a:lnTo>
+                  <a:lnTo>
+                    <a:pt x="2805830" y="2508"/>
+                  </a:lnTo>
+                  <a:lnTo>
+                    <a:pt x="2729197" y="2865"/>
+                  </a:lnTo>
+                  <a:lnTo>
+                    <a:pt x="2652565" y="3223"/>
+                  </a:lnTo>
+                  <a:lnTo>
+                    <a:pt x="2575932" y="3580"/>
+                  </a:lnTo>
+                  <a:lnTo>
+                    <a:pt x="2499300" y="3937"/>
+                  </a:lnTo>
+                  <a:lnTo>
+                    <a:pt x="2422667" y="4295"/>
+                  </a:lnTo>
+                  <a:lnTo>
+                    <a:pt x="2346034" y="4651"/>
+                  </a:lnTo>
+                  <a:lnTo>
+                    <a:pt x="2269402" y="5008"/>
+                  </a:lnTo>
+                  <a:lnTo>
+                    <a:pt x="2192769" y="5365"/>
+                  </a:lnTo>
+                  <a:lnTo>
+                    <a:pt x="2116137" y="5721"/>
+                  </a:lnTo>
+                  <a:lnTo>
+                    <a:pt x="2039504" y="6078"/>
+                  </a:lnTo>
+                  <a:lnTo>
+                    <a:pt x="1962872" y="6434"/>
+                  </a:lnTo>
+                  <a:lnTo>
+                    <a:pt x="1886239" y="6790"/>
+                  </a:lnTo>
+                  <a:lnTo>
+                    <a:pt x="1809607" y="7146"/>
+                  </a:lnTo>
+                  <a:lnTo>
+                    <a:pt x="1732974" y="7501"/>
+                  </a:lnTo>
+                  <a:lnTo>
+                    <a:pt x="1656342" y="7857"/>
+                  </a:lnTo>
+                  <a:lnTo>
+                    <a:pt x="1579709" y="8212"/>
+                  </a:lnTo>
+                  <a:lnTo>
+                    <a:pt x="1503076" y="8567"/>
+                  </a:lnTo>
+                  <a:lnTo>
+                    <a:pt x="1426444" y="8922"/>
+                  </a:lnTo>
+                  <a:lnTo>
+                    <a:pt x="1349811" y="9277"/>
+                  </a:lnTo>
+                  <a:lnTo>
+                    <a:pt x="1273179" y="9632"/>
+                  </a:lnTo>
+                  <a:lnTo>
+                    <a:pt x="1196546" y="9987"/>
+                  </a:lnTo>
+                  <a:lnTo>
+                    <a:pt x="1119914" y="10341"/>
+                  </a:lnTo>
+                  <a:lnTo>
+                    <a:pt x="1043281" y="10695"/>
+                  </a:lnTo>
+                  <a:lnTo>
+                    <a:pt x="966649" y="11050"/>
+                  </a:lnTo>
+                  <a:lnTo>
+                    <a:pt x="890016" y="11404"/>
+                  </a:lnTo>
+                  <a:lnTo>
+                    <a:pt x="813384" y="11757"/>
+                  </a:lnTo>
+                  <a:lnTo>
+                    <a:pt x="736751" y="12111"/>
+                  </a:lnTo>
+                  <a:lnTo>
+                    <a:pt x="660118" y="12465"/>
+                  </a:lnTo>
+                  <a:lnTo>
+                    <a:pt x="583486" y="12818"/>
+                  </a:lnTo>
+                  <a:lnTo>
+                    <a:pt x="506853" y="13171"/>
+                  </a:lnTo>
+                  <a:lnTo>
+                    <a:pt x="430221" y="13524"/>
+                  </a:lnTo>
+                  <a:lnTo>
+                    <a:pt x="353588" y="13877"/>
+                  </a:lnTo>
+                  <a:lnTo>
+                    <a:pt x="276956" y="14230"/>
+                  </a:lnTo>
+                  <a:lnTo>
+                    <a:pt x="200323" y="14583"/>
+                  </a:lnTo>
+                  <a:lnTo>
+                    <a:pt x="123691" y="14935"/>
+                  </a:lnTo>
+                  <a:lnTo>
+                    <a:pt x="47058" y="15287"/>
+                  </a:lnTo>
+                  <a:lnTo>
+                    <a:pt x="0" y="15504"/>
                   </a:lnTo>
                 </a:path>
               </a:pathLst>
@@ -4247,306 +4247,306 @@
           </p:nvSpPr>
           <p:spPr>
             <a:xfrm>
-              <a:off x="817517" y="3703908"/>
-              <a:ext cx="7403783" cy="1485502"/>
+              <a:off x="817517" y="3797277"/>
+              <a:ext cx="7403783" cy="1416813"/>
             </a:xfrm>
             <a:custGeom>
               <a:avLst/>
               <a:pathLst>
-                <a:path w="7403783" h="1485502">
+                <a:path w="7403783" h="1416813">
                   <a:moveTo>
                     <a:pt x="0" y="0"/>
                   </a:moveTo>
                   <a:lnTo>
-                    <a:pt x="47058" y="19137"/>
-                  </a:lnTo>
-                  <a:lnTo>
-                    <a:pt x="123691" y="49777"/>
-                  </a:lnTo>
-                  <a:lnTo>
-                    <a:pt x="200323" y="79904"/>
-                  </a:lnTo>
-                  <a:lnTo>
-                    <a:pt x="276956" y="109525"/>
-                  </a:lnTo>
-                  <a:lnTo>
-                    <a:pt x="353588" y="138650"/>
-                  </a:lnTo>
-                  <a:lnTo>
-                    <a:pt x="430221" y="167285"/>
-                  </a:lnTo>
-                  <a:lnTo>
-                    <a:pt x="506853" y="195440"/>
-                  </a:lnTo>
-                  <a:lnTo>
-                    <a:pt x="583486" y="223123"/>
-                  </a:lnTo>
-                  <a:lnTo>
-                    <a:pt x="660118" y="250341"/>
-                  </a:lnTo>
-                  <a:lnTo>
-                    <a:pt x="736751" y="277103"/>
-                  </a:lnTo>
-                  <a:lnTo>
-                    <a:pt x="813384" y="303415"/>
-                  </a:lnTo>
-                  <a:lnTo>
-                    <a:pt x="890016" y="329286"/>
-                  </a:lnTo>
-                  <a:lnTo>
-                    <a:pt x="966649" y="354723"/>
-                  </a:lnTo>
-                  <a:lnTo>
-                    <a:pt x="1043281" y="379733"/>
-                  </a:lnTo>
-                  <a:lnTo>
-                    <a:pt x="1119914" y="404323"/>
-                  </a:lnTo>
-                  <a:lnTo>
-                    <a:pt x="1196546" y="428501"/>
-                  </a:lnTo>
-                  <a:lnTo>
-                    <a:pt x="1273179" y="452273"/>
-                  </a:lnTo>
-                  <a:lnTo>
-                    <a:pt x="1349811" y="475647"/>
-                  </a:lnTo>
-                  <a:lnTo>
-                    <a:pt x="1426444" y="498628"/>
-                  </a:lnTo>
-                  <a:lnTo>
-                    <a:pt x="1503076" y="521223"/>
-                  </a:lnTo>
-                  <a:lnTo>
-                    <a:pt x="1579709" y="543440"/>
-                  </a:lnTo>
-                  <a:lnTo>
-                    <a:pt x="1656342" y="565283"/>
-                  </a:lnTo>
-                  <a:lnTo>
-                    <a:pt x="1732974" y="586761"/>
-                  </a:lnTo>
-                  <a:lnTo>
-                    <a:pt x="1809607" y="607877"/>
-                  </a:lnTo>
-                  <a:lnTo>
-                    <a:pt x="1886239" y="628640"/>
-                  </a:lnTo>
-                  <a:lnTo>
-                    <a:pt x="1962872" y="649054"/>
-                  </a:lnTo>
-                  <a:lnTo>
-                    <a:pt x="2039504" y="669126"/>
-                  </a:lnTo>
-                  <a:lnTo>
-                    <a:pt x="2116137" y="688860"/>
-                  </a:lnTo>
-                  <a:lnTo>
-                    <a:pt x="2192769" y="708264"/>
-                  </a:lnTo>
-                  <a:lnTo>
-                    <a:pt x="2269402" y="727342"/>
-                  </a:lnTo>
-                  <a:lnTo>
-                    <a:pt x="2346034" y="746100"/>
-                  </a:lnTo>
-                  <a:lnTo>
-                    <a:pt x="2422667" y="764543"/>
-                  </a:lnTo>
-                  <a:lnTo>
-                    <a:pt x="2499300" y="782677"/>
-                  </a:lnTo>
-                  <a:lnTo>
-                    <a:pt x="2575932" y="800507"/>
-                  </a:lnTo>
-                  <a:lnTo>
-                    <a:pt x="2652565" y="818037"/>
-                  </a:lnTo>
-                  <a:lnTo>
-                    <a:pt x="2729197" y="835273"/>
-                  </a:lnTo>
-                  <a:lnTo>
-                    <a:pt x="2805830" y="852220"/>
-                  </a:lnTo>
-                  <a:lnTo>
-                    <a:pt x="2882462" y="868883"/>
-                  </a:lnTo>
-                  <a:lnTo>
-                    <a:pt x="2959095" y="885266"/>
-                  </a:lnTo>
-                  <a:lnTo>
-                    <a:pt x="3035727" y="901374"/>
-                  </a:lnTo>
-                  <a:lnTo>
-                    <a:pt x="3112360" y="917212"/>
-                  </a:lnTo>
-                  <a:lnTo>
-                    <a:pt x="3188993" y="932784"/>
-                  </a:lnTo>
-                  <a:lnTo>
-                    <a:pt x="3265625" y="948095"/>
-                  </a:lnTo>
-                  <a:lnTo>
-                    <a:pt x="3342258" y="963149"/>
-                  </a:lnTo>
-                  <a:lnTo>
-                    <a:pt x="3418890" y="977951"/>
-                  </a:lnTo>
-                  <a:lnTo>
-                    <a:pt x="3495523" y="992504"/>
-                  </a:lnTo>
-                  <a:lnTo>
-                    <a:pt x="3572155" y="1006813"/>
-                  </a:lnTo>
-                  <a:lnTo>
-                    <a:pt x="3648788" y="1020881"/>
-                  </a:lnTo>
-                  <a:lnTo>
-                    <a:pt x="3725420" y="1034714"/>
-                  </a:lnTo>
-                  <a:lnTo>
-                    <a:pt x="3802053" y="1048315"/>
-                  </a:lnTo>
-                  <a:lnTo>
-                    <a:pt x="3878685" y="1061687"/>
-                  </a:lnTo>
-                  <a:lnTo>
-                    <a:pt x="3955318" y="1074835"/>
-                  </a:lnTo>
-                  <a:lnTo>
-                    <a:pt x="4031951" y="1087763"/>
-                  </a:lnTo>
-                  <a:lnTo>
-                    <a:pt x="4108583" y="1100473"/>
-                  </a:lnTo>
-                  <a:lnTo>
-                    <a:pt x="4185216" y="1112971"/>
-                  </a:lnTo>
-                  <a:lnTo>
-                    <a:pt x="4261848" y="1125258"/>
-                  </a:lnTo>
-                  <a:lnTo>
-                    <a:pt x="4338481" y="1137340"/>
-                  </a:lnTo>
-                  <a:lnTo>
-                    <a:pt x="4415113" y="1149218"/>
-                  </a:lnTo>
-                  <a:lnTo>
-                    <a:pt x="4491746" y="1160898"/>
-                  </a:lnTo>
-                  <a:lnTo>
-                    <a:pt x="4568378" y="1172381"/>
-                  </a:lnTo>
-                  <a:lnTo>
-                    <a:pt x="4645011" y="1183672"/>
-                  </a:lnTo>
-                  <a:lnTo>
-                    <a:pt x="4721644" y="1194773"/>
-                  </a:lnTo>
-                  <a:lnTo>
-                    <a:pt x="4798276" y="1205688"/>
-                  </a:lnTo>
-                  <a:lnTo>
-                    <a:pt x="4874909" y="1216420"/>
-                  </a:lnTo>
-                  <a:lnTo>
-                    <a:pt x="4951541" y="1226972"/>
-                  </a:lnTo>
-                  <a:lnTo>
-                    <a:pt x="5028174" y="1237347"/>
-                  </a:lnTo>
-                  <a:lnTo>
-                    <a:pt x="5104806" y="1247547"/>
-                  </a:lnTo>
-                  <a:lnTo>
-                    <a:pt x="5181439" y="1257577"/>
-                  </a:lnTo>
-                  <a:lnTo>
-                    <a:pt x="5258071" y="1267438"/>
-                  </a:lnTo>
-                  <a:lnTo>
-                    <a:pt x="5334704" y="1277134"/>
-                  </a:lnTo>
-                  <a:lnTo>
-                    <a:pt x="5411336" y="1286667"/>
-                  </a:lnTo>
-                  <a:lnTo>
-                    <a:pt x="5487969" y="1296040"/>
-                  </a:lnTo>
-                  <a:lnTo>
-                    <a:pt x="5564602" y="1305256"/>
-                  </a:lnTo>
-                  <a:lnTo>
-                    <a:pt x="5641234" y="1314318"/>
-                  </a:lnTo>
-                  <a:lnTo>
-                    <a:pt x="5717867" y="1323227"/>
-                  </a:lnTo>
-                  <a:lnTo>
-                    <a:pt x="5794499" y="1331987"/>
-                  </a:lnTo>
-                  <a:lnTo>
-                    <a:pt x="5871132" y="1340599"/>
-                  </a:lnTo>
-                  <a:lnTo>
-                    <a:pt x="5947764" y="1349068"/>
-                  </a:lnTo>
-                  <a:lnTo>
-                    <a:pt x="6024397" y="1357394"/>
-                  </a:lnTo>
-                  <a:lnTo>
-                    <a:pt x="6101029" y="1365580"/>
-                  </a:lnTo>
-                  <a:lnTo>
-                    <a:pt x="6177662" y="1373629"/>
-                  </a:lnTo>
-                  <a:lnTo>
-                    <a:pt x="6254294" y="1381543"/>
-                  </a:lnTo>
-                  <a:lnTo>
-                    <a:pt x="6330927" y="1389325"/>
-                  </a:lnTo>
-                  <a:lnTo>
-                    <a:pt x="6407560" y="1396975"/>
-                  </a:lnTo>
-                  <a:lnTo>
-                    <a:pt x="6484192" y="1404498"/>
-                  </a:lnTo>
-                  <a:lnTo>
-                    <a:pt x="6560825" y="1411894"/>
-                  </a:lnTo>
-                  <a:lnTo>
-                    <a:pt x="6637457" y="1419166"/>
-                  </a:lnTo>
-                  <a:lnTo>
-                    <a:pt x="6714090" y="1426316"/>
-                  </a:lnTo>
-                  <a:lnTo>
-                    <a:pt x="6790722" y="1433346"/>
-                  </a:lnTo>
-                  <a:lnTo>
-                    <a:pt x="6867355" y="1440258"/>
-                  </a:lnTo>
-                  <a:lnTo>
-                    <a:pt x="6943987" y="1447054"/>
-                  </a:lnTo>
-                  <a:lnTo>
-                    <a:pt x="7020620" y="1453736"/>
-                  </a:lnTo>
-                  <a:lnTo>
-                    <a:pt x="7097253" y="1460306"/>
-                  </a:lnTo>
-                  <a:lnTo>
-                    <a:pt x="7173885" y="1466766"/>
-                  </a:lnTo>
-                  <a:lnTo>
-                    <a:pt x="7250518" y="1473117"/>
-                  </a:lnTo>
-                  <a:lnTo>
-                    <a:pt x="7327150" y="1479362"/>
-                  </a:lnTo>
-                  <a:lnTo>
-                    <a:pt x="7403783" y="1485502"/>
+                    <a:pt x="47058" y="18252"/>
+                  </a:lnTo>
+                  <a:lnTo>
+                    <a:pt x="123691" y="47476"/>
+                  </a:lnTo>
+                  <a:lnTo>
+                    <a:pt x="200323" y="76209"/>
+                  </a:lnTo>
+                  <a:lnTo>
+                    <a:pt x="276956" y="104461"/>
+                  </a:lnTo>
+                  <a:lnTo>
+                    <a:pt x="353588" y="132238"/>
+                  </a:lnTo>
+                  <a:lnTo>
+                    <a:pt x="430221" y="159550"/>
+                  </a:lnTo>
+                  <a:lnTo>
+                    <a:pt x="506853" y="186403"/>
+                  </a:lnTo>
+                  <a:lnTo>
+                    <a:pt x="583486" y="212806"/>
+                  </a:lnTo>
+                  <a:lnTo>
+                    <a:pt x="660118" y="238765"/>
+                  </a:lnTo>
+                  <a:lnTo>
+                    <a:pt x="736751" y="264289"/>
+                  </a:lnTo>
+                  <a:lnTo>
+                    <a:pt x="813384" y="289385"/>
+                  </a:lnTo>
+                  <a:lnTo>
+                    <a:pt x="890016" y="314060"/>
+                  </a:lnTo>
+                  <a:lnTo>
+                    <a:pt x="966649" y="338321"/>
+                  </a:lnTo>
+                  <a:lnTo>
+                    <a:pt x="1043281" y="362174"/>
+                  </a:lnTo>
+                  <a:lnTo>
+                    <a:pt x="1119914" y="385628"/>
+                  </a:lnTo>
+                  <a:lnTo>
+                    <a:pt x="1196546" y="408687"/>
+                  </a:lnTo>
+                  <a:lnTo>
+                    <a:pt x="1273179" y="431360"/>
+                  </a:lnTo>
+                  <a:lnTo>
+                    <a:pt x="1349811" y="453653"/>
+                  </a:lnTo>
+                  <a:lnTo>
+                    <a:pt x="1426444" y="475571"/>
+                  </a:lnTo>
+                  <a:lnTo>
+                    <a:pt x="1503076" y="497122"/>
+                  </a:lnTo>
+                  <a:lnTo>
+                    <a:pt x="1579709" y="518311"/>
+                  </a:lnTo>
+                  <a:lnTo>
+                    <a:pt x="1656342" y="539145"/>
+                  </a:lnTo>
+                  <a:lnTo>
+                    <a:pt x="1732974" y="559629"/>
+                  </a:lnTo>
+                  <a:lnTo>
+                    <a:pt x="1809607" y="579769"/>
+                  </a:lnTo>
+                  <a:lnTo>
+                    <a:pt x="1886239" y="599572"/>
+                  </a:lnTo>
+                  <a:lnTo>
+                    <a:pt x="1962872" y="619042"/>
+                  </a:lnTo>
+                  <a:lnTo>
+                    <a:pt x="2039504" y="638185"/>
+                  </a:lnTo>
+                  <a:lnTo>
+                    <a:pt x="2116137" y="657008"/>
+                  </a:lnTo>
+                  <a:lnTo>
+                    <a:pt x="2192769" y="675514"/>
+                  </a:lnTo>
+                  <a:lnTo>
+                    <a:pt x="2269402" y="693710"/>
+                  </a:lnTo>
+                  <a:lnTo>
+                    <a:pt x="2346034" y="711601"/>
+                  </a:lnTo>
+                  <a:lnTo>
+                    <a:pt x="2422667" y="729191"/>
+                  </a:lnTo>
+                  <a:lnTo>
+                    <a:pt x="2499300" y="746486"/>
+                  </a:lnTo>
+                  <a:lnTo>
+                    <a:pt x="2575932" y="763491"/>
+                  </a:lnTo>
+                  <a:lnTo>
+                    <a:pt x="2652565" y="780211"/>
+                  </a:lnTo>
+                  <a:lnTo>
+                    <a:pt x="2729197" y="796650"/>
+                  </a:lnTo>
+                  <a:lnTo>
+                    <a:pt x="2805830" y="812814"/>
+                  </a:lnTo>
+                  <a:lnTo>
+                    <a:pt x="2882462" y="828706"/>
+                  </a:lnTo>
+                  <a:lnTo>
+                    <a:pt x="2959095" y="844332"/>
+                  </a:lnTo>
+                  <a:lnTo>
+                    <a:pt x="3035727" y="859695"/>
+                  </a:lnTo>
+                  <a:lnTo>
+                    <a:pt x="3112360" y="874801"/>
+                  </a:lnTo>
+                  <a:lnTo>
+                    <a:pt x="3188993" y="889653"/>
+                  </a:lnTo>
+                  <a:lnTo>
+                    <a:pt x="3265625" y="904256"/>
+                  </a:lnTo>
+                  <a:lnTo>
+                    <a:pt x="3342258" y="918614"/>
+                  </a:lnTo>
+                  <a:lnTo>
+                    <a:pt x="3418890" y="932731"/>
+                  </a:lnTo>
+                  <a:lnTo>
+                    <a:pt x="3495523" y="946611"/>
+                  </a:lnTo>
+                  <a:lnTo>
+                    <a:pt x="3572155" y="960258"/>
+                  </a:lnTo>
+                  <a:lnTo>
+                    <a:pt x="3648788" y="973676"/>
+                  </a:lnTo>
+                  <a:lnTo>
+                    <a:pt x="3725420" y="986869"/>
+                  </a:lnTo>
+                  <a:lnTo>
+                    <a:pt x="3802053" y="999841"/>
+                  </a:lnTo>
+                  <a:lnTo>
+                    <a:pt x="3878685" y="1012595"/>
+                  </a:lnTo>
+                  <a:lnTo>
+                    <a:pt x="3955318" y="1025135"/>
+                  </a:lnTo>
+                  <a:lnTo>
+                    <a:pt x="4031951" y="1037465"/>
+                  </a:lnTo>
+                  <a:lnTo>
+                    <a:pt x="4108583" y="1049588"/>
+                  </a:lnTo>
+                  <a:lnTo>
+                    <a:pt x="4185216" y="1061507"/>
+                  </a:lnTo>
+                  <a:lnTo>
+                    <a:pt x="4261848" y="1073227"/>
+                  </a:lnTo>
+                  <a:lnTo>
+                    <a:pt x="4338481" y="1084749"/>
+                  </a:lnTo>
+                  <a:lnTo>
+                    <a:pt x="4415113" y="1096079"/>
+                  </a:lnTo>
+                  <a:lnTo>
+                    <a:pt x="4491746" y="1107218"/>
+                  </a:lnTo>
+                  <a:lnTo>
+                    <a:pt x="4568378" y="1118171"/>
+                  </a:lnTo>
+                  <a:lnTo>
+                    <a:pt x="4645011" y="1128939"/>
+                  </a:lnTo>
+                  <a:lnTo>
+                    <a:pt x="4721644" y="1139527"/>
+                  </a:lnTo>
+                  <a:lnTo>
+                    <a:pt x="4798276" y="1149938"/>
+                  </a:lnTo>
+                  <a:lnTo>
+                    <a:pt x="4874909" y="1160173"/>
+                  </a:lnTo>
+                  <a:lnTo>
+                    <a:pt x="4951541" y="1170237"/>
+                  </a:lnTo>
+                  <a:lnTo>
+                    <a:pt x="5028174" y="1180132"/>
+                  </a:lnTo>
+                  <a:lnTo>
+                    <a:pt x="5104806" y="1189861"/>
+                  </a:lnTo>
+                  <a:lnTo>
+                    <a:pt x="5181439" y="1199427"/>
+                  </a:lnTo>
+                  <a:lnTo>
+                    <a:pt x="5258071" y="1208832"/>
+                  </a:lnTo>
+                  <a:lnTo>
+                    <a:pt x="5334704" y="1218080"/>
+                  </a:lnTo>
+                  <a:lnTo>
+                    <a:pt x="5411336" y="1227172"/>
+                  </a:lnTo>
+                  <a:lnTo>
+                    <a:pt x="5487969" y="1236112"/>
+                  </a:lnTo>
+                  <a:lnTo>
+                    <a:pt x="5564602" y="1244902"/>
+                  </a:lnTo>
+                  <a:lnTo>
+                    <a:pt x="5641234" y="1253544"/>
+                  </a:lnTo>
+                  <a:lnTo>
+                    <a:pt x="5717867" y="1262041"/>
+                  </a:lnTo>
+                  <a:lnTo>
+                    <a:pt x="5794499" y="1270396"/>
+                  </a:lnTo>
+                  <a:lnTo>
+                    <a:pt x="5871132" y="1278610"/>
+                  </a:lnTo>
+                  <a:lnTo>
+                    <a:pt x="5947764" y="1286687"/>
+                  </a:lnTo>
+                  <a:lnTo>
+                    <a:pt x="6024397" y="1294628"/>
+                  </a:lnTo>
+                  <a:lnTo>
+                    <a:pt x="6101029" y="1302436"/>
+                  </a:lnTo>
+                  <a:lnTo>
+                    <a:pt x="6177662" y="1310113"/>
+                  </a:lnTo>
+                  <a:lnTo>
+                    <a:pt x="6254294" y="1317661"/>
+                  </a:lnTo>
+                  <a:lnTo>
+                    <a:pt x="6330927" y="1325083"/>
+                  </a:lnTo>
+                  <a:lnTo>
+                    <a:pt x="6407560" y="1332380"/>
+                  </a:lnTo>
+                  <a:lnTo>
+                    <a:pt x="6484192" y="1339554"/>
+                  </a:lnTo>
+                  <a:lnTo>
+                    <a:pt x="6560825" y="1346608"/>
+                  </a:lnTo>
+                  <a:lnTo>
+                    <a:pt x="6637457" y="1353544"/>
+                  </a:lnTo>
+                  <a:lnTo>
+                    <a:pt x="6714090" y="1360363"/>
+                  </a:lnTo>
+                  <a:lnTo>
+                    <a:pt x="6790722" y="1367068"/>
+                  </a:lnTo>
+                  <a:lnTo>
+                    <a:pt x="6867355" y="1373661"/>
+                  </a:lnTo>
+                  <a:lnTo>
+                    <a:pt x="6943987" y="1380143"/>
+                  </a:lnTo>
+                  <a:lnTo>
+                    <a:pt x="7020620" y="1386516"/>
+                  </a:lnTo>
+                  <a:lnTo>
+                    <a:pt x="7097253" y="1392782"/>
+                  </a:lnTo>
+                  <a:lnTo>
+                    <a:pt x="7173885" y="1398943"/>
+                  </a:lnTo>
+                  <a:lnTo>
+                    <a:pt x="7250518" y="1405001"/>
+                  </a:lnTo>
+                  <a:lnTo>
+                    <a:pt x="7327150" y="1410957"/>
+                  </a:lnTo>
+                  <a:lnTo>
+                    <a:pt x="7403783" y="1416813"/>
                   </a:lnTo>
                 </a:path>
               </a:pathLst>
@@ -4575,7 +4575,7 @@
           </p:nvSpPr>
           <p:spPr>
             <a:xfrm>
-              <a:off x="817517" y="4679530"/>
+              <a:off x="817517" y="4727786"/>
               <a:ext cx="7799693" cy="0"/>
             </a:xfrm>
             <a:custGeom>
@@ -4618,15 +4618,15 @@
           </p:nvSpPr>
           <p:spPr>
             <a:xfrm>
-              <a:off x="4224261" y="1896563"/>
-              <a:ext cx="0" cy="3826579"/>
+              <a:off x="4224261" y="2073503"/>
+              <a:ext cx="0" cy="3649639"/>
             </a:xfrm>
             <a:custGeom>
               <a:avLst/>
               <a:pathLst>
-                <a:path w="0" h="3826579">
+                <a:path w="0" h="3649639">
                   <a:moveTo>
-                    <a:pt x="0" y="3826579"/>
+                    <a:pt x="0" y="3649639"/>
                   </a:moveTo>
                   <a:lnTo>
                     <a:pt x="0" y="0"/>
@@ -4661,7 +4661,7 @@
           </p:nvSpPr>
           <p:spPr>
             <a:xfrm>
-              <a:off x="692708" y="5509156"/>
+              <a:off x="692708" y="5517199"/>
               <a:ext cx="62179" cy="80101"/>
             </a:xfrm>
             <a:prstGeom prst="rect">
@@ -4707,7 +4707,7 @@
           </p:nvSpPr>
           <p:spPr>
             <a:xfrm>
-              <a:off x="692708" y="4639479"/>
+              <a:off x="692708" y="4687735"/>
               <a:ext cx="62179" cy="80101"/>
             </a:xfrm>
             <a:prstGeom prst="rect">
@@ -4753,7 +4753,7 @@
           </p:nvSpPr>
           <p:spPr>
             <a:xfrm>
-              <a:off x="692708" y="3769802"/>
+              <a:off x="692708" y="3858272"/>
               <a:ext cx="62179" cy="80101"/>
             </a:xfrm>
             <a:prstGeom prst="rect">
@@ -4799,7 +4799,7 @@
           </p:nvSpPr>
           <p:spPr>
             <a:xfrm>
-              <a:off x="692708" y="2900125"/>
+              <a:off x="692708" y="3028808"/>
               <a:ext cx="62179" cy="80101"/>
             </a:xfrm>
             <a:prstGeom prst="rect">
@@ -4845,7 +4845,7 @@
           </p:nvSpPr>
           <p:spPr>
             <a:xfrm>
-              <a:off x="692708" y="2030448"/>
+              <a:off x="692708" y="2199345"/>
               <a:ext cx="62179" cy="80101"/>
             </a:xfrm>
             <a:prstGeom prst="rect">
@@ -5121,7 +5121,7 @@
           </p:nvSpPr>
           <p:spPr>
             <a:xfrm rot="-5400000">
-              <a:off x="68446" y="3759743"/>
+              <a:off x="68446" y="3848213"/>
               <a:ext cx="1016904" cy="100218"/>
             </a:xfrm>
             <a:prstGeom prst="rect">
@@ -5162,6 +5162,52 @@
         <p:sp>
           <p:nvSpPr>
             <p:cNvPr id="38" name="tx38"/>
+            <p:cNvSpPr/>
+            <p:nvPr/>
+          </p:nvSpPr>
+          <p:spPr>
+            <a:xfrm>
+              <a:off x="817517" y="1896563"/>
+              <a:ext cx="5626211" cy="82021"/>
+            </a:xfrm>
+            <a:prstGeom prst="rect">
+              <a:avLst/>
+            </a:prstGeom>
+            <a:noFill/>
+          </p:spPr>
+          <p:txBody>
+            <a:bodyPr lIns="0" rIns="0" tIns="0" bIns="0" anchorCtr="1" anchor="ctr" wrap="none"/>
+            <a:lstStyle/>
+            <a:p>
+              <a:pPr algn="l" marL="0" marR="0" indent="0">
+                <a:lnSpc>
+                  <a:spcPts val="900"/>
+                </a:lnSpc>
+                <a:spcBef>
+                  <a:spcPts val="0"/>
+                </a:spcBef>
+                <a:spcAft>
+                  <a:spcPts val="0"/>
+                </a:spcAft>
+              </a:pPr>
+              <a:r>
+                <a:rPr sz="900">
+                  <a:solidFill>
+                    <a:srgbClr val="404040">
+                      <a:alpha val="100000"/>
+                    </a:srgbClr>
+                  </a:solidFill>
+                  <a:latin typeface="Helvetica"/>
+                  <a:cs typeface="Helvetica"/>
+                </a:rPr>
+                <a:t>subHR per 0.1 ratio decline: 1.22 (1.00-1.49)  |  per IQR decline (Δ = 0.30): 1.80 (0.99-3.27)  |  IQR: [0.85, 1.15]</a:t>
+              </a:r>
+            </a:p>
+          </p:txBody>
+        </p:sp>
+        <p:sp>
+          <p:nvSpPr>
+            <p:cNvPr id="39" name="tx39"/>
             <p:cNvSpPr/>
             <p:nvPr/>
           </p:nvSpPr>

--- a/docs/pptx/carbo/jx-carbo-linsubhr-ratio-hosp8.pptx
+++ b/docs/pptx/carbo/jx-carbo-linsubhr-ratio-hosp8.pptx
@@ -5168,7 +5168,7 @@
           <p:spPr>
             <a:xfrm>
               <a:off x="817517" y="1896563"/>
-              <a:ext cx="5626211" cy="82021"/>
+              <a:ext cx="6169365" cy="82021"/>
             </a:xfrm>
             <a:prstGeom prst="rect">
               <a:avLst/>
@@ -5200,7 +5200,7 @@
                   <a:latin typeface="Helvetica"/>
                   <a:cs typeface="Helvetica"/>
                 </a:rPr>
-                <a:t>subHR per 0.1 ratio decline: 1.22 (1.00-1.49)  |  per IQR decline (Δ = 0.30): 1.80 (0.99-3.27)  |  IQR: [0.85, 1.15]</a:t>
+                <a:t>subHR per 0.1 ratio decline: 1.22 (1.00-1.49), p = 0.056  |  per IQR decline (Δ = 0.30): 1.80 (0.99-3.27)  |  IQR: [0.85, 1.15]</a:t>
               </a:r>
             </a:p>
           </p:txBody>

--- a/docs/pptx/carbo/jx-carbo-linsubhr-ratio-hosp8.pptx
+++ b/docs/pptx/carbo/jx-carbo-linsubhr-ratio-hosp8.pptx
@@ -2443,7 +2443,7 @@
           </p:nvSpPr>
           <p:spPr>
             <a:xfrm>
-              <a:off x="1615213" y="2073503"/>
+              <a:off x="1467192" y="2073503"/>
               <a:ext cx="0" cy="3649639"/>
             </a:xfrm>
             <a:custGeom>
@@ -2486,7 +2486,7 @@
           </p:nvSpPr>
           <p:spPr>
             <a:xfrm>
-              <a:off x="3387871" y="2073503"/>
+              <a:off x="3538150" y="2073503"/>
               <a:ext cx="0" cy="3649639"/>
             </a:xfrm>
             <a:custGeom>
@@ -2529,7 +2529,7 @@
           </p:nvSpPr>
           <p:spPr>
             <a:xfrm>
-              <a:off x="5160528" y="2073503"/>
+              <a:off x="5609107" y="2073503"/>
               <a:ext cx="0" cy="3649639"/>
             </a:xfrm>
             <a:custGeom>
@@ -2572,7 +2572,7 @@
           </p:nvSpPr>
           <p:spPr>
             <a:xfrm>
-              <a:off x="6933186" y="2073503"/>
+              <a:off x="7680065" y="2073503"/>
               <a:ext cx="0" cy="3649639"/>
             </a:xfrm>
             <a:custGeom>
@@ -2830,7 +2830,7 @@
           </p:nvSpPr>
           <p:spPr>
             <a:xfrm>
-              <a:off x="2501542" y="2073503"/>
+              <a:off x="2502671" y="2073503"/>
               <a:ext cx="0" cy="3649639"/>
             </a:xfrm>
             <a:custGeom>
@@ -2873,7 +2873,7 @@
           </p:nvSpPr>
           <p:spPr>
             <a:xfrm>
-              <a:off x="4274200" y="2073503"/>
+              <a:off x="4573628" y="2073503"/>
               <a:ext cx="0" cy="3649639"/>
             </a:xfrm>
             <a:custGeom>
@@ -2916,7 +2916,7 @@
           </p:nvSpPr>
           <p:spPr>
             <a:xfrm>
-              <a:off x="6046857" y="2073503"/>
+              <a:off x="6644586" y="2073503"/>
               <a:ext cx="0" cy="3649639"/>
             </a:xfrm>
             <a:custGeom>
@@ -2953,643 +2953,606 @@
         </p:sp>
         <p:sp>
           <p:nvSpPr>
-            <p:cNvPr id="20" name="pl20"/>
+            <p:cNvPr id="20" name="pg20"/>
             <p:cNvSpPr/>
             <p:nvPr/>
           </p:nvSpPr>
           <p:spPr>
             <a:xfrm>
-              <a:off x="7819515" y="2073503"/>
-              <a:ext cx="0" cy="3649639"/>
+              <a:off x="1172049" y="2073503"/>
+              <a:ext cx="7090630" cy="3344946"/>
             </a:xfrm>
             <a:custGeom>
               <a:avLst/>
               <a:pathLst>
-                <a:path w="0" h="3649639">
+                <a:path w="7090630" h="3344946">
                   <a:moveTo>
-                    <a:pt x="0" y="3649639"/>
+                    <a:pt x="356137" y="0"/>
                   </a:moveTo>
                   <a:lnTo>
-                    <a:pt x="0" y="0"/>
-                  </a:lnTo>
-                  <a:lnTo>
-                    <a:pt x="0" y="0"/>
-                  </a:lnTo>
-                </a:path>
-              </a:pathLst>
-            </a:custGeom>
-            <a:ln w="13550" cap="flat">
-              <a:solidFill>
-                <a:srgbClr val="EBEBEB">
-                  <a:alpha val="100000"/>
-                </a:srgbClr>
-              </a:solidFill>
-              <a:prstDash val="solid"/>
-              <a:round/>
-            </a:ln>
-          </p:spPr>
-          <p:txBody>
-            <a:bodyPr/>
-            <a:lstStyle/>
-            <a:p/>
-          </p:txBody>
-        </p:sp>
-        <p:sp>
-          <p:nvSpPr>
-            <p:cNvPr id="21" name="pg21"/>
-            <p:cNvSpPr/>
-            <p:nvPr/>
-          </p:nvSpPr>
-          <p:spPr>
-            <a:xfrm>
-              <a:off x="817517" y="2073503"/>
-              <a:ext cx="7403783" cy="3344946"/>
-            </a:xfrm>
-            <a:custGeom>
-              <a:avLst/>
-              <a:pathLst>
-                <a:path w="7403783" h="3344946">
-                  <a:moveTo>
-                    <a:pt x="198209" y="0"/>
-                  </a:moveTo>
-                  <a:lnTo>
-                    <a:pt x="200323" y="3347"/>
-                  </a:lnTo>
-                  <a:lnTo>
-                    <a:pt x="276956" y="120617"/>
-                  </a:lnTo>
-                  <a:lnTo>
-                    <a:pt x="353588" y="233936"/>
-                  </a:lnTo>
-                  <a:lnTo>
-                    <a:pt x="430221" y="343436"/>
-                  </a:lnTo>
-                  <a:lnTo>
-                    <a:pt x="506853" y="449247"/>
-                  </a:lnTo>
-                  <a:lnTo>
-                    <a:pt x="583486" y="551493"/>
-                  </a:lnTo>
-                  <a:lnTo>
-                    <a:pt x="660118" y="650293"/>
-                  </a:lnTo>
-                  <a:lnTo>
-                    <a:pt x="736751" y="745765"/>
-                  </a:lnTo>
-                  <a:lnTo>
-                    <a:pt x="813384" y="838019"/>
-                  </a:lnTo>
-                  <a:lnTo>
-                    <a:pt x="890016" y="927166"/>
-                  </a:lnTo>
-                  <a:lnTo>
-                    <a:pt x="966649" y="1013308"/>
-                  </a:lnTo>
-                  <a:lnTo>
-                    <a:pt x="1043281" y="1096548"/>
-                  </a:lnTo>
-                  <a:lnTo>
-                    <a:pt x="1119914" y="1176983"/>
-                  </a:lnTo>
-                  <a:lnTo>
-                    <a:pt x="1196546" y="1254708"/>
-                  </a:lnTo>
-                  <a:lnTo>
-                    <a:pt x="1273179" y="1329814"/>
-                  </a:lnTo>
-                  <a:lnTo>
-                    <a:pt x="1349811" y="1402390"/>
-                  </a:lnTo>
-                  <a:lnTo>
-                    <a:pt x="1426444" y="1472520"/>
-                  </a:lnTo>
-                  <a:lnTo>
-                    <a:pt x="1503076" y="1540287"/>
-                  </a:lnTo>
-                  <a:lnTo>
-                    <a:pt x="1579709" y="1605771"/>
-                  </a:lnTo>
-                  <a:lnTo>
-                    <a:pt x="1656342" y="1669048"/>
-                  </a:lnTo>
-                  <a:lnTo>
-                    <a:pt x="1732974" y="1730193"/>
-                  </a:lnTo>
-                  <a:lnTo>
-                    <a:pt x="1809607" y="1789278"/>
-                  </a:lnTo>
-                  <a:lnTo>
-                    <a:pt x="1886239" y="1846372"/>
-                  </a:lnTo>
-                  <a:lnTo>
-                    <a:pt x="1962872" y="1901542"/>
-                  </a:lnTo>
-                  <a:lnTo>
-                    <a:pt x="2039504" y="1954854"/>
-                  </a:lnTo>
-                  <a:lnTo>
-                    <a:pt x="2116137" y="2006369"/>
-                  </a:lnTo>
-                  <a:lnTo>
-                    <a:pt x="2192769" y="2056148"/>
-                  </a:lnTo>
-                  <a:lnTo>
-                    <a:pt x="2269402" y="2104250"/>
-                  </a:lnTo>
-                  <a:lnTo>
-                    <a:pt x="2346034" y="2150732"/>
-                  </a:lnTo>
-                  <a:lnTo>
-                    <a:pt x="2422667" y="2195647"/>
-                  </a:lnTo>
-                  <a:lnTo>
-                    <a:pt x="2499300" y="2239049"/>
-                  </a:lnTo>
-                  <a:lnTo>
-                    <a:pt x="2575932" y="2280988"/>
-                  </a:lnTo>
-                  <a:lnTo>
-                    <a:pt x="2652565" y="2321514"/>
-                  </a:lnTo>
-                  <a:lnTo>
-                    <a:pt x="2729197" y="2360675"/>
-                  </a:lnTo>
-                  <a:lnTo>
-                    <a:pt x="2805830" y="2398516"/>
-                  </a:lnTo>
-                  <a:lnTo>
-                    <a:pt x="2882462" y="2435082"/>
-                  </a:lnTo>
-                  <a:lnTo>
-                    <a:pt x="2959095" y="2470416"/>
-                  </a:lnTo>
-                  <a:lnTo>
-                    <a:pt x="3035727" y="2504560"/>
-                  </a:lnTo>
-                  <a:lnTo>
-                    <a:pt x="3112360" y="2537553"/>
-                  </a:lnTo>
-                  <a:lnTo>
-                    <a:pt x="3188993" y="2569434"/>
-                  </a:lnTo>
-                  <a:lnTo>
-                    <a:pt x="3265625" y="2600242"/>
-                  </a:lnTo>
-                  <a:lnTo>
-                    <a:pt x="3342258" y="2630011"/>
-                  </a:lnTo>
-                  <a:lnTo>
-                    <a:pt x="3418890" y="2654226"/>
-                  </a:lnTo>
-                  <a:lnTo>
-                    <a:pt x="3495523" y="2653867"/>
-                  </a:lnTo>
-                  <a:lnTo>
-                    <a:pt x="3572155" y="2653508"/>
-                  </a:lnTo>
-                  <a:lnTo>
-                    <a:pt x="3648788" y="2653148"/>
-                  </a:lnTo>
-                  <a:lnTo>
-                    <a:pt x="3725420" y="2652789"/>
-                  </a:lnTo>
-                  <a:lnTo>
-                    <a:pt x="3802053" y="2652429"/>
-                  </a:lnTo>
-                  <a:lnTo>
-                    <a:pt x="3878685" y="2652069"/>
-                  </a:lnTo>
-                  <a:lnTo>
-                    <a:pt x="3955318" y="2651709"/>
-                  </a:lnTo>
-                  <a:lnTo>
-                    <a:pt x="4031951" y="2651349"/>
-                  </a:lnTo>
-                  <a:lnTo>
-                    <a:pt x="4108583" y="2650989"/>
-                  </a:lnTo>
-                  <a:lnTo>
-                    <a:pt x="4185216" y="2650628"/>
-                  </a:lnTo>
-                  <a:lnTo>
-                    <a:pt x="4261848" y="2650267"/>
-                  </a:lnTo>
-                  <a:lnTo>
-                    <a:pt x="4338481" y="2649907"/>
-                  </a:lnTo>
-                  <a:lnTo>
-                    <a:pt x="4415113" y="2649546"/>
-                  </a:lnTo>
-                  <a:lnTo>
-                    <a:pt x="4491746" y="2649185"/>
-                  </a:lnTo>
-                  <a:lnTo>
-                    <a:pt x="4568378" y="2648823"/>
-                  </a:lnTo>
-                  <a:lnTo>
-                    <a:pt x="4645011" y="2648462"/>
-                  </a:lnTo>
-                  <a:lnTo>
-                    <a:pt x="4721644" y="2648100"/>
-                  </a:lnTo>
-                  <a:lnTo>
-                    <a:pt x="4798276" y="2647739"/>
-                  </a:lnTo>
-                  <a:lnTo>
-                    <a:pt x="4874909" y="2647377"/>
-                  </a:lnTo>
-                  <a:lnTo>
-                    <a:pt x="4951541" y="2647015"/>
-                  </a:lnTo>
-                  <a:lnTo>
-                    <a:pt x="5028174" y="2646652"/>
-                  </a:lnTo>
-                  <a:lnTo>
-                    <a:pt x="5104806" y="2646290"/>
-                  </a:lnTo>
-                  <a:lnTo>
-                    <a:pt x="5181439" y="2645928"/>
-                  </a:lnTo>
-                  <a:lnTo>
-                    <a:pt x="5258071" y="2645565"/>
-                  </a:lnTo>
-                  <a:lnTo>
-                    <a:pt x="5334704" y="2645202"/>
-                  </a:lnTo>
-                  <a:lnTo>
-                    <a:pt x="5411336" y="2644839"/>
-                  </a:lnTo>
-                  <a:lnTo>
-                    <a:pt x="5487969" y="2644476"/>
-                  </a:lnTo>
-                  <a:lnTo>
-                    <a:pt x="5564602" y="2644113"/>
-                  </a:lnTo>
-                  <a:lnTo>
-                    <a:pt x="5641234" y="2643749"/>
-                  </a:lnTo>
-                  <a:lnTo>
-                    <a:pt x="5717867" y="2643386"/>
-                  </a:lnTo>
-                  <a:lnTo>
-                    <a:pt x="5794499" y="2643022"/>
-                  </a:lnTo>
-                  <a:lnTo>
-                    <a:pt x="5871132" y="2642658"/>
-                  </a:lnTo>
-                  <a:lnTo>
-                    <a:pt x="5947764" y="2642294"/>
-                  </a:lnTo>
-                  <a:lnTo>
-                    <a:pt x="6024397" y="2641929"/>
-                  </a:lnTo>
-                  <a:lnTo>
-                    <a:pt x="6101029" y="2641565"/>
-                  </a:lnTo>
-                  <a:lnTo>
-                    <a:pt x="6177662" y="2641200"/>
-                  </a:lnTo>
-                  <a:lnTo>
-                    <a:pt x="6254294" y="2640836"/>
-                  </a:lnTo>
-                  <a:lnTo>
-                    <a:pt x="6330927" y="2640471"/>
-                  </a:lnTo>
-                  <a:lnTo>
-                    <a:pt x="6407560" y="2640106"/>
-                  </a:lnTo>
-                  <a:lnTo>
-                    <a:pt x="6484192" y="2639741"/>
-                  </a:lnTo>
-                  <a:lnTo>
-                    <a:pt x="6560825" y="2639375"/>
-                  </a:lnTo>
-                  <a:lnTo>
-                    <a:pt x="6637457" y="2639010"/>
-                  </a:lnTo>
-                  <a:lnTo>
-                    <a:pt x="6714090" y="2638644"/>
-                  </a:lnTo>
-                  <a:lnTo>
-                    <a:pt x="6790722" y="2638278"/>
-                  </a:lnTo>
-                  <a:lnTo>
-                    <a:pt x="6867355" y="2637912"/>
-                  </a:lnTo>
-                  <a:lnTo>
-                    <a:pt x="6943987" y="2637546"/>
-                  </a:lnTo>
-                  <a:lnTo>
-                    <a:pt x="7020620" y="2637180"/>
-                  </a:lnTo>
-                  <a:lnTo>
-                    <a:pt x="7097253" y="2636813"/>
-                  </a:lnTo>
-                  <a:lnTo>
-                    <a:pt x="7173885" y="2636447"/>
-                  </a:lnTo>
-                  <a:lnTo>
-                    <a:pt x="7250518" y="2636080"/>
-                  </a:lnTo>
-                  <a:lnTo>
-                    <a:pt x="7327150" y="2635713"/>
-                  </a:lnTo>
-                  <a:lnTo>
-                    <a:pt x="7403783" y="2635346"/>
-                  </a:lnTo>
-                  <a:lnTo>
-                    <a:pt x="7403783" y="3344946"/>
-                  </a:lnTo>
-                  <a:lnTo>
-                    <a:pt x="7327150" y="3340106"/>
-                  </a:lnTo>
-                  <a:lnTo>
-                    <a:pt x="7250518" y="3335097"/>
-                  </a:lnTo>
-                  <a:lnTo>
-                    <a:pt x="7173885" y="3329914"/>
-                  </a:lnTo>
-                  <a:lnTo>
-                    <a:pt x="7097253" y="3324550"/>
-                  </a:lnTo>
-                  <a:lnTo>
-                    <a:pt x="7020620" y="3318999"/>
-                  </a:lnTo>
-                  <a:lnTo>
-                    <a:pt x="6943987" y="3313254"/>
-                  </a:lnTo>
-                  <a:lnTo>
-                    <a:pt x="6867355" y="3307309"/>
-                  </a:lnTo>
-                  <a:lnTo>
-                    <a:pt x="6790722" y="3301157"/>
-                  </a:lnTo>
-                  <a:lnTo>
-                    <a:pt x="6714090" y="3294790"/>
-                  </a:lnTo>
-                  <a:lnTo>
-                    <a:pt x="6637457" y="3288201"/>
-                  </a:lnTo>
-                  <a:lnTo>
-                    <a:pt x="6560825" y="3281383"/>
-                  </a:lnTo>
-                  <a:lnTo>
-                    <a:pt x="6484192" y="3274327"/>
-                  </a:lnTo>
-                  <a:lnTo>
-                    <a:pt x="6407560" y="3267024"/>
-                  </a:lnTo>
-                  <a:lnTo>
-                    <a:pt x="6330927" y="3259467"/>
-                  </a:lnTo>
-                  <a:lnTo>
-                    <a:pt x="6254294" y="3251647"/>
-                  </a:lnTo>
-                  <a:lnTo>
-                    <a:pt x="6177662" y="3243554"/>
-                  </a:lnTo>
-                  <a:lnTo>
-                    <a:pt x="6101029" y="3235178"/>
-                  </a:lnTo>
-                  <a:lnTo>
-                    <a:pt x="6024397" y="3226511"/>
-                  </a:lnTo>
-                  <a:lnTo>
-                    <a:pt x="5947764" y="3217541"/>
-                  </a:lnTo>
-                  <a:lnTo>
-                    <a:pt x="5871132" y="3208259"/>
-                  </a:lnTo>
-                  <a:lnTo>
-                    <a:pt x="5794499" y="3198653"/>
-                  </a:lnTo>
-                  <a:lnTo>
-                    <a:pt x="5717867" y="3188712"/>
-                  </a:lnTo>
-                  <a:lnTo>
-                    <a:pt x="5641234" y="3178424"/>
-                  </a:lnTo>
-                  <a:lnTo>
-                    <a:pt x="5564602" y="3167778"/>
-                  </a:lnTo>
-                  <a:lnTo>
-                    <a:pt x="5487969" y="3156760"/>
-                  </a:lnTo>
-                  <a:lnTo>
-                    <a:pt x="5411336" y="3145359"/>
-                  </a:lnTo>
-                  <a:lnTo>
-                    <a:pt x="5334704" y="3133559"/>
-                  </a:lnTo>
-                  <a:lnTo>
-                    <a:pt x="5258071" y="3121348"/>
-                  </a:lnTo>
-                  <a:lnTo>
-                    <a:pt x="5181439" y="3108712"/>
-                  </a:lnTo>
-                  <a:lnTo>
-                    <a:pt x="5104806" y="3095635"/>
-                  </a:lnTo>
-                  <a:lnTo>
-                    <a:pt x="5028174" y="3082102"/>
-                  </a:lnTo>
-                  <a:lnTo>
-                    <a:pt x="4951541" y="3068096"/>
-                  </a:lnTo>
-                  <a:lnTo>
-                    <a:pt x="4874909" y="3053603"/>
-                  </a:lnTo>
-                  <a:lnTo>
-                    <a:pt x="4798276" y="3038604"/>
-                  </a:lnTo>
-                  <a:lnTo>
-                    <a:pt x="4721644" y="3023082"/>
-                  </a:lnTo>
-                  <a:lnTo>
-                    <a:pt x="4645011" y="3007019"/>
-                  </a:lnTo>
-                  <a:lnTo>
-                    <a:pt x="4568378" y="2990396"/>
-                  </a:lnTo>
-                  <a:lnTo>
-                    <a:pt x="4491746" y="2973193"/>
-                  </a:lnTo>
-                  <a:lnTo>
-                    <a:pt x="4415113" y="2955391"/>
-                  </a:lnTo>
-                  <a:lnTo>
-                    <a:pt x="4338481" y="2936967"/>
-                  </a:lnTo>
-                  <a:lnTo>
-                    <a:pt x="4261848" y="2917902"/>
-                  </a:lnTo>
-                  <a:lnTo>
-                    <a:pt x="4185216" y="2898171"/>
-                  </a:lnTo>
-                  <a:lnTo>
-                    <a:pt x="4108583" y="2877752"/>
-                  </a:lnTo>
-                  <a:lnTo>
-                    <a:pt x="4031951" y="2856622"/>
-                  </a:lnTo>
-                  <a:lnTo>
-                    <a:pt x="3955318" y="2834754"/>
-                  </a:lnTo>
-                  <a:lnTo>
-                    <a:pt x="3878685" y="2812125"/>
-                  </a:lnTo>
-                  <a:lnTo>
-                    <a:pt x="3802053" y="2788706"/>
-                  </a:lnTo>
-                  <a:lnTo>
-                    <a:pt x="3725420" y="2764470"/>
-                  </a:lnTo>
-                  <a:lnTo>
-                    <a:pt x="3648788" y="2739389"/>
-                  </a:lnTo>
-                  <a:lnTo>
-                    <a:pt x="3572155" y="2713434"/>
-                  </a:lnTo>
-                  <a:lnTo>
-                    <a:pt x="3495523" y="2686574"/>
-                  </a:lnTo>
-                  <a:lnTo>
-                    <a:pt x="3418890" y="2658777"/>
-                  </a:lnTo>
-                  <a:lnTo>
-                    <a:pt x="3342258" y="2654585"/>
-                  </a:lnTo>
-                  <a:lnTo>
-                    <a:pt x="3265625" y="2654944"/>
-                  </a:lnTo>
-                  <a:lnTo>
-                    <a:pt x="3188993" y="2655302"/>
-                  </a:lnTo>
-                  <a:lnTo>
-                    <a:pt x="3112360" y="2655661"/>
-                  </a:lnTo>
-                  <a:lnTo>
-                    <a:pt x="3035727" y="2656019"/>
-                  </a:lnTo>
-                  <a:lnTo>
-                    <a:pt x="2959095" y="2656377"/>
-                  </a:lnTo>
-                  <a:lnTo>
-                    <a:pt x="2882462" y="2656735"/>
-                  </a:lnTo>
-                  <a:lnTo>
-                    <a:pt x="2805830" y="2657093"/>
-                  </a:lnTo>
-                  <a:lnTo>
-                    <a:pt x="2729197" y="2657451"/>
-                  </a:lnTo>
-                  <a:lnTo>
-                    <a:pt x="2652565" y="2657808"/>
-                  </a:lnTo>
-                  <a:lnTo>
-                    <a:pt x="2575932" y="2658166"/>
-                  </a:lnTo>
-                  <a:lnTo>
-                    <a:pt x="2499300" y="2658523"/>
-                  </a:lnTo>
-                  <a:lnTo>
-                    <a:pt x="2422667" y="2658880"/>
-                  </a:lnTo>
-                  <a:lnTo>
-                    <a:pt x="2346034" y="2659237"/>
-                  </a:lnTo>
-                  <a:lnTo>
-                    <a:pt x="2269402" y="2659594"/>
-                  </a:lnTo>
-                  <a:lnTo>
-                    <a:pt x="2192769" y="2659950"/>
-                  </a:lnTo>
-                  <a:lnTo>
-                    <a:pt x="2116137" y="2660307"/>
-                  </a:lnTo>
-                  <a:lnTo>
-                    <a:pt x="2039504" y="2660663"/>
-                  </a:lnTo>
-                  <a:lnTo>
-                    <a:pt x="1962872" y="2661019"/>
-                  </a:lnTo>
-                  <a:lnTo>
-                    <a:pt x="1886239" y="2661375"/>
-                  </a:lnTo>
-                  <a:lnTo>
-                    <a:pt x="1809607" y="2661731"/>
-                  </a:lnTo>
-                  <a:lnTo>
-                    <a:pt x="1732974" y="2662087"/>
-                  </a:lnTo>
-                  <a:lnTo>
-                    <a:pt x="1656342" y="2662442"/>
-                  </a:lnTo>
-                  <a:lnTo>
-                    <a:pt x="1579709" y="2662798"/>
-                  </a:lnTo>
-                  <a:lnTo>
-                    <a:pt x="1503076" y="2663153"/>
-                  </a:lnTo>
-                  <a:lnTo>
-                    <a:pt x="1426444" y="2663508"/>
-                  </a:lnTo>
-                  <a:lnTo>
-                    <a:pt x="1349811" y="2663863"/>
-                  </a:lnTo>
-                  <a:lnTo>
-                    <a:pt x="1273179" y="2664217"/>
-                  </a:lnTo>
-                  <a:lnTo>
-                    <a:pt x="1196546" y="2664572"/>
-                  </a:lnTo>
-                  <a:lnTo>
-                    <a:pt x="1119914" y="2664927"/>
-                  </a:lnTo>
-                  <a:lnTo>
-                    <a:pt x="1043281" y="2665281"/>
-                  </a:lnTo>
-                  <a:lnTo>
-                    <a:pt x="966649" y="2665635"/>
-                  </a:lnTo>
-                  <a:lnTo>
-                    <a:pt x="890016" y="2665989"/>
-                  </a:lnTo>
-                  <a:lnTo>
-                    <a:pt x="813384" y="2666343"/>
-                  </a:lnTo>
-                  <a:lnTo>
-                    <a:pt x="736751" y="2666697"/>
-                  </a:lnTo>
-                  <a:lnTo>
-                    <a:pt x="660118" y="2667050"/>
-                  </a:lnTo>
-                  <a:lnTo>
-                    <a:pt x="583486" y="2667403"/>
-                  </a:lnTo>
-                  <a:lnTo>
-                    <a:pt x="506853" y="2667757"/>
-                  </a:lnTo>
-                  <a:lnTo>
-                    <a:pt x="430221" y="2668110"/>
-                  </a:lnTo>
-                  <a:lnTo>
-                    <a:pt x="353588" y="2668463"/>
-                  </a:lnTo>
-                  <a:lnTo>
-                    <a:pt x="276956" y="2668815"/>
-                  </a:lnTo>
-                  <a:lnTo>
-                    <a:pt x="200323" y="2669168"/>
-                  </a:lnTo>
-                  <a:lnTo>
-                    <a:pt x="123691" y="2669521"/>
-                  </a:lnTo>
-                  <a:lnTo>
-                    <a:pt x="47058" y="2669873"/>
-                  </a:lnTo>
-                  <a:lnTo>
-                    <a:pt x="0" y="2670089"/>
+                    <a:pt x="358112" y="3347"/>
+                  </a:lnTo>
+                  <a:lnTo>
+                    <a:pt x="429735" y="120617"/>
+                  </a:lnTo>
+                  <a:lnTo>
+                    <a:pt x="501357" y="233936"/>
+                  </a:lnTo>
+                  <a:lnTo>
+                    <a:pt x="572980" y="343436"/>
+                  </a:lnTo>
+                  <a:lnTo>
+                    <a:pt x="644602" y="449247"/>
+                  </a:lnTo>
+                  <a:lnTo>
+                    <a:pt x="716225" y="551493"/>
+                  </a:lnTo>
+                  <a:lnTo>
+                    <a:pt x="787847" y="650293"/>
+                  </a:lnTo>
+                  <a:lnTo>
+                    <a:pt x="859470" y="745765"/>
+                  </a:lnTo>
+                  <a:lnTo>
+                    <a:pt x="931092" y="838019"/>
+                  </a:lnTo>
+                  <a:lnTo>
+                    <a:pt x="1002715" y="927166"/>
+                  </a:lnTo>
+                  <a:lnTo>
+                    <a:pt x="1074337" y="1013308"/>
+                  </a:lnTo>
+                  <a:lnTo>
+                    <a:pt x="1145960" y="1096548"/>
+                  </a:lnTo>
+                  <a:lnTo>
+                    <a:pt x="1217582" y="1176983"/>
+                  </a:lnTo>
+                  <a:lnTo>
+                    <a:pt x="1289205" y="1254708"/>
+                  </a:lnTo>
+                  <a:lnTo>
+                    <a:pt x="1360827" y="1329814"/>
+                  </a:lnTo>
+                  <a:lnTo>
+                    <a:pt x="1432450" y="1402390"/>
+                  </a:lnTo>
+                  <a:lnTo>
+                    <a:pt x="1504073" y="1472520"/>
+                  </a:lnTo>
+                  <a:lnTo>
+                    <a:pt x="1575695" y="1540287"/>
+                  </a:lnTo>
+                  <a:lnTo>
+                    <a:pt x="1647318" y="1605771"/>
+                  </a:lnTo>
+                  <a:lnTo>
+                    <a:pt x="1718940" y="1669048"/>
+                  </a:lnTo>
+                  <a:lnTo>
+                    <a:pt x="1790563" y="1730193"/>
+                  </a:lnTo>
+                  <a:lnTo>
+                    <a:pt x="1862185" y="1789278"/>
+                  </a:lnTo>
+                  <a:lnTo>
+                    <a:pt x="1933808" y="1846372"/>
+                  </a:lnTo>
+                  <a:lnTo>
+                    <a:pt x="2005430" y="1901542"/>
+                  </a:lnTo>
+                  <a:lnTo>
+                    <a:pt x="2077053" y="1954854"/>
+                  </a:lnTo>
+                  <a:lnTo>
+                    <a:pt x="2148675" y="2006369"/>
+                  </a:lnTo>
+                  <a:lnTo>
+                    <a:pt x="2220298" y="2056148"/>
+                  </a:lnTo>
+                  <a:lnTo>
+                    <a:pt x="2291920" y="2104250"/>
+                  </a:lnTo>
+                  <a:lnTo>
+                    <a:pt x="2363543" y="2150732"/>
+                  </a:lnTo>
+                  <a:lnTo>
+                    <a:pt x="2435165" y="2195647"/>
+                  </a:lnTo>
+                  <a:lnTo>
+                    <a:pt x="2506788" y="2239049"/>
+                  </a:lnTo>
+                  <a:lnTo>
+                    <a:pt x="2578410" y="2280988"/>
+                  </a:lnTo>
+                  <a:lnTo>
+                    <a:pt x="2650033" y="2321514"/>
+                  </a:lnTo>
+                  <a:lnTo>
+                    <a:pt x="2721655" y="2360675"/>
+                  </a:lnTo>
+                  <a:lnTo>
+                    <a:pt x="2793278" y="2398516"/>
+                  </a:lnTo>
+                  <a:lnTo>
+                    <a:pt x="2864901" y="2435082"/>
+                  </a:lnTo>
+                  <a:lnTo>
+                    <a:pt x="2936523" y="2470416"/>
+                  </a:lnTo>
+                  <a:lnTo>
+                    <a:pt x="3008146" y="2504560"/>
+                  </a:lnTo>
+                  <a:lnTo>
+                    <a:pt x="3079768" y="2537553"/>
+                  </a:lnTo>
+                  <a:lnTo>
+                    <a:pt x="3151391" y="2569434"/>
+                  </a:lnTo>
+                  <a:lnTo>
+                    <a:pt x="3223013" y="2600242"/>
+                  </a:lnTo>
+                  <a:lnTo>
+                    <a:pt x="3294636" y="2630011"/>
+                  </a:lnTo>
+                  <a:lnTo>
+                    <a:pt x="3366258" y="2654226"/>
+                  </a:lnTo>
+                  <a:lnTo>
+                    <a:pt x="3437881" y="2653867"/>
+                  </a:lnTo>
+                  <a:lnTo>
+                    <a:pt x="3509503" y="2653508"/>
+                  </a:lnTo>
+                  <a:lnTo>
+                    <a:pt x="3581126" y="2653148"/>
+                  </a:lnTo>
+                  <a:lnTo>
+                    <a:pt x="3652748" y="2652789"/>
+                  </a:lnTo>
+                  <a:lnTo>
+                    <a:pt x="3724371" y="2652429"/>
+                  </a:lnTo>
+                  <a:lnTo>
+                    <a:pt x="3795993" y="2652069"/>
+                  </a:lnTo>
+                  <a:lnTo>
+                    <a:pt x="3867616" y="2651709"/>
+                  </a:lnTo>
+                  <a:lnTo>
+                    <a:pt x="3939238" y="2651349"/>
+                  </a:lnTo>
+                  <a:lnTo>
+                    <a:pt x="4010861" y="2650989"/>
+                  </a:lnTo>
+                  <a:lnTo>
+                    <a:pt x="4082483" y="2650628"/>
+                  </a:lnTo>
+                  <a:lnTo>
+                    <a:pt x="4154106" y="2650267"/>
+                  </a:lnTo>
+                  <a:lnTo>
+                    <a:pt x="4225729" y="2649907"/>
+                  </a:lnTo>
+                  <a:lnTo>
+                    <a:pt x="4297351" y="2649546"/>
+                  </a:lnTo>
+                  <a:lnTo>
+                    <a:pt x="4368974" y="2649185"/>
+                  </a:lnTo>
+                  <a:lnTo>
+                    <a:pt x="4440596" y="2648823"/>
+                  </a:lnTo>
+                  <a:lnTo>
+                    <a:pt x="4512219" y="2648462"/>
+                  </a:lnTo>
+                  <a:lnTo>
+                    <a:pt x="4583841" y="2648100"/>
+                  </a:lnTo>
+                  <a:lnTo>
+                    <a:pt x="4655464" y="2647739"/>
+                  </a:lnTo>
+                  <a:lnTo>
+                    <a:pt x="4727086" y="2647377"/>
+                  </a:lnTo>
+                  <a:lnTo>
+                    <a:pt x="4798709" y="2647015"/>
+                  </a:lnTo>
+                  <a:lnTo>
+                    <a:pt x="4870331" y="2646652"/>
+                  </a:lnTo>
+                  <a:lnTo>
+                    <a:pt x="4941954" y="2646290"/>
+                  </a:lnTo>
+                  <a:lnTo>
+                    <a:pt x="5013576" y="2645928"/>
+                  </a:lnTo>
+                  <a:lnTo>
+                    <a:pt x="5085199" y="2645565"/>
+                  </a:lnTo>
+                  <a:lnTo>
+                    <a:pt x="5156821" y="2645202"/>
+                  </a:lnTo>
+                  <a:lnTo>
+                    <a:pt x="5228444" y="2644839"/>
+                  </a:lnTo>
+                  <a:lnTo>
+                    <a:pt x="5300066" y="2644476"/>
+                  </a:lnTo>
+                  <a:lnTo>
+                    <a:pt x="5371689" y="2644113"/>
+                  </a:lnTo>
+                  <a:lnTo>
+                    <a:pt x="5443311" y="2643749"/>
+                  </a:lnTo>
+                  <a:lnTo>
+                    <a:pt x="5514934" y="2643386"/>
+                  </a:lnTo>
+                  <a:lnTo>
+                    <a:pt x="5586557" y="2643022"/>
+                  </a:lnTo>
+                  <a:lnTo>
+                    <a:pt x="5658179" y="2642658"/>
+                  </a:lnTo>
+                  <a:lnTo>
+                    <a:pt x="5729802" y="2642294"/>
+                  </a:lnTo>
+                  <a:lnTo>
+                    <a:pt x="5801424" y="2641929"/>
+                  </a:lnTo>
+                  <a:lnTo>
+                    <a:pt x="5873047" y="2641565"/>
+                  </a:lnTo>
+                  <a:lnTo>
+                    <a:pt x="5944669" y="2641200"/>
+                  </a:lnTo>
+                  <a:lnTo>
+                    <a:pt x="6016292" y="2640836"/>
+                  </a:lnTo>
+                  <a:lnTo>
+                    <a:pt x="6087914" y="2640471"/>
+                  </a:lnTo>
+                  <a:lnTo>
+                    <a:pt x="6159537" y="2640106"/>
+                  </a:lnTo>
+                  <a:lnTo>
+                    <a:pt x="6231159" y="2639741"/>
+                  </a:lnTo>
+                  <a:lnTo>
+                    <a:pt x="6302782" y="2639375"/>
+                  </a:lnTo>
+                  <a:lnTo>
+                    <a:pt x="6374404" y="2639010"/>
+                  </a:lnTo>
+                  <a:lnTo>
+                    <a:pt x="6446027" y="2638644"/>
+                  </a:lnTo>
+                  <a:lnTo>
+                    <a:pt x="6517649" y="2638278"/>
+                  </a:lnTo>
+                  <a:lnTo>
+                    <a:pt x="6589272" y="2637912"/>
+                  </a:lnTo>
+                  <a:lnTo>
+                    <a:pt x="6660894" y="2637546"/>
+                  </a:lnTo>
+                  <a:lnTo>
+                    <a:pt x="6732517" y="2637180"/>
+                  </a:lnTo>
+                  <a:lnTo>
+                    <a:pt x="6804139" y="2636813"/>
+                  </a:lnTo>
+                  <a:lnTo>
+                    <a:pt x="6875762" y="2636447"/>
+                  </a:lnTo>
+                  <a:lnTo>
+                    <a:pt x="6947385" y="2636080"/>
+                  </a:lnTo>
+                  <a:lnTo>
+                    <a:pt x="7019007" y="2635713"/>
+                  </a:lnTo>
+                  <a:lnTo>
+                    <a:pt x="7090630" y="2635346"/>
+                  </a:lnTo>
+                  <a:lnTo>
+                    <a:pt x="7090630" y="3344946"/>
+                  </a:lnTo>
+                  <a:lnTo>
+                    <a:pt x="7019007" y="3340106"/>
+                  </a:lnTo>
+                  <a:lnTo>
+                    <a:pt x="6947385" y="3335097"/>
+                  </a:lnTo>
+                  <a:lnTo>
+                    <a:pt x="6875762" y="3329914"/>
+                  </a:lnTo>
+                  <a:lnTo>
+                    <a:pt x="6804139" y="3324550"/>
+                  </a:lnTo>
+                  <a:lnTo>
+                    <a:pt x="6732517" y="3318999"/>
+                  </a:lnTo>
+                  <a:lnTo>
+                    <a:pt x="6660894" y="3313254"/>
+                  </a:lnTo>
+                  <a:lnTo>
+                    <a:pt x="6589272" y="3307309"/>
+                  </a:lnTo>
+                  <a:lnTo>
+                    <a:pt x="6517649" y="3301157"/>
+                  </a:lnTo>
+                  <a:lnTo>
+                    <a:pt x="6446027" y="3294790"/>
+                  </a:lnTo>
+                  <a:lnTo>
+                    <a:pt x="6374404" y="3288201"/>
+                  </a:lnTo>
+                  <a:lnTo>
+                    <a:pt x="6302782" y="3281383"/>
+                  </a:lnTo>
+                  <a:lnTo>
+                    <a:pt x="6231159" y="3274327"/>
+                  </a:lnTo>
+                  <a:lnTo>
+                    <a:pt x="6159537" y="3267024"/>
+                  </a:lnTo>
+                  <a:lnTo>
+                    <a:pt x="6087914" y="3259467"/>
+                  </a:lnTo>
+                  <a:lnTo>
+                    <a:pt x="6016292" y="3251647"/>
+                  </a:lnTo>
+                  <a:lnTo>
+                    <a:pt x="5944669" y="3243554"/>
+                  </a:lnTo>
+                  <a:lnTo>
+                    <a:pt x="5873047" y="3235178"/>
+                  </a:lnTo>
+                  <a:lnTo>
+                    <a:pt x="5801424" y="3226511"/>
+                  </a:lnTo>
+                  <a:lnTo>
+                    <a:pt x="5729802" y="3217541"/>
+                  </a:lnTo>
+                  <a:lnTo>
+                    <a:pt x="5658179" y="3208259"/>
+                  </a:lnTo>
+                  <a:lnTo>
+                    <a:pt x="5586557" y="3198653"/>
+                  </a:lnTo>
+                  <a:lnTo>
+                    <a:pt x="5514934" y="3188712"/>
+                  </a:lnTo>
+                  <a:lnTo>
+                    <a:pt x="5443311" y="3178424"/>
+                  </a:lnTo>
+                  <a:lnTo>
+                    <a:pt x="5371689" y="3167778"/>
+                  </a:lnTo>
+                  <a:lnTo>
+                    <a:pt x="5300066" y="3156760"/>
+                  </a:lnTo>
+                  <a:lnTo>
+                    <a:pt x="5228444" y="3145359"/>
+                  </a:lnTo>
+                  <a:lnTo>
+                    <a:pt x="5156821" y="3133559"/>
+                  </a:lnTo>
+                  <a:lnTo>
+                    <a:pt x="5085199" y="3121348"/>
+                  </a:lnTo>
+                  <a:lnTo>
+                    <a:pt x="5013576" y="3108712"/>
+                  </a:lnTo>
+                  <a:lnTo>
+                    <a:pt x="4941954" y="3095635"/>
+                  </a:lnTo>
+                  <a:lnTo>
+                    <a:pt x="4870331" y="3082102"/>
+                  </a:lnTo>
+                  <a:lnTo>
+                    <a:pt x="4798709" y="3068096"/>
+                  </a:lnTo>
+                  <a:lnTo>
+                    <a:pt x="4727086" y="3053603"/>
+                  </a:lnTo>
+                  <a:lnTo>
+                    <a:pt x="4655464" y="3038604"/>
+                  </a:lnTo>
+                  <a:lnTo>
+                    <a:pt x="4583841" y="3023082"/>
+                  </a:lnTo>
+                  <a:lnTo>
+                    <a:pt x="4512219" y="3007019"/>
+                  </a:lnTo>
+                  <a:lnTo>
+                    <a:pt x="4440596" y="2990396"/>
+                  </a:lnTo>
+                  <a:lnTo>
+                    <a:pt x="4368974" y="2973193"/>
+                  </a:lnTo>
+                  <a:lnTo>
+                    <a:pt x="4297351" y="2955391"/>
+                  </a:lnTo>
+                  <a:lnTo>
+                    <a:pt x="4225729" y="2936967"/>
+                  </a:lnTo>
+                  <a:lnTo>
+                    <a:pt x="4154106" y="2917902"/>
+                  </a:lnTo>
+                  <a:lnTo>
+                    <a:pt x="4082483" y="2898171"/>
+                  </a:lnTo>
+                  <a:lnTo>
+                    <a:pt x="4010861" y="2877752"/>
+                  </a:lnTo>
+                  <a:lnTo>
+                    <a:pt x="3939238" y="2856622"/>
+                  </a:lnTo>
+                  <a:lnTo>
+                    <a:pt x="3867616" y="2834754"/>
+                  </a:lnTo>
+                  <a:lnTo>
+                    <a:pt x="3795993" y="2812125"/>
+                  </a:lnTo>
+                  <a:lnTo>
+                    <a:pt x="3724371" y="2788706"/>
+                  </a:lnTo>
+                  <a:lnTo>
+                    <a:pt x="3652748" y="2764470"/>
+                  </a:lnTo>
+                  <a:lnTo>
+                    <a:pt x="3581126" y="2739389"/>
+                  </a:lnTo>
+                  <a:lnTo>
+                    <a:pt x="3509503" y="2713434"/>
+                  </a:lnTo>
+                  <a:lnTo>
+                    <a:pt x="3437881" y="2686574"/>
+                  </a:lnTo>
+                  <a:lnTo>
+                    <a:pt x="3366258" y="2658777"/>
+                  </a:lnTo>
+                  <a:lnTo>
+                    <a:pt x="3294636" y="2654585"/>
+                  </a:lnTo>
+                  <a:lnTo>
+                    <a:pt x="3223013" y="2654944"/>
+                  </a:lnTo>
+                  <a:lnTo>
+                    <a:pt x="3151391" y="2655302"/>
+                  </a:lnTo>
+                  <a:lnTo>
+                    <a:pt x="3079768" y="2655661"/>
+                  </a:lnTo>
+                  <a:lnTo>
+                    <a:pt x="3008146" y="2656019"/>
+                  </a:lnTo>
+                  <a:lnTo>
+                    <a:pt x="2936523" y="2656377"/>
+                  </a:lnTo>
+                  <a:lnTo>
+                    <a:pt x="2864901" y="2656735"/>
+                  </a:lnTo>
+                  <a:lnTo>
+                    <a:pt x="2793278" y="2657093"/>
+                  </a:lnTo>
+                  <a:lnTo>
+                    <a:pt x="2721655" y="2657451"/>
+                  </a:lnTo>
+                  <a:lnTo>
+                    <a:pt x="2650033" y="2657808"/>
+                  </a:lnTo>
+                  <a:lnTo>
+                    <a:pt x="2578410" y="2658166"/>
+                  </a:lnTo>
+                  <a:lnTo>
+                    <a:pt x="2506788" y="2658523"/>
+                  </a:lnTo>
+                  <a:lnTo>
+                    <a:pt x="2435165" y="2658880"/>
+                  </a:lnTo>
+                  <a:lnTo>
+                    <a:pt x="2363543" y="2659237"/>
+                  </a:lnTo>
+                  <a:lnTo>
+                    <a:pt x="2291920" y="2659594"/>
+                  </a:lnTo>
+                  <a:lnTo>
+                    <a:pt x="2220298" y="2659950"/>
+                  </a:lnTo>
+                  <a:lnTo>
+                    <a:pt x="2148675" y="2660307"/>
+                  </a:lnTo>
+                  <a:lnTo>
+                    <a:pt x="2077053" y="2660663"/>
+                  </a:lnTo>
+                  <a:lnTo>
+                    <a:pt x="2005430" y="2661019"/>
+                  </a:lnTo>
+                  <a:lnTo>
+                    <a:pt x="1933808" y="2661375"/>
+                  </a:lnTo>
+                  <a:lnTo>
+                    <a:pt x="1862185" y="2661731"/>
+                  </a:lnTo>
+                  <a:lnTo>
+                    <a:pt x="1790563" y="2662087"/>
+                  </a:lnTo>
+                  <a:lnTo>
+                    <a:pt x="1718940" y="2662442"/>
+                  </a:lnTo>
+                  <a:lnTo>
+                    <a:pt x="1647318" y="2662798"/>
+                  </a:lnTo>
+                  <a:lnTo>
+                    <a:pt x="1575695" y="2663153"/>
+                  </a:lnTo>
+                  <a:lnTo>
+                    <a:pt x="1504073" y="2663508"/>
+                  </a:lnTo>
+                  <a:lnTo>
+                    <a:pt x="1432450" y="2663863"/>
+                  </a:lnTo>
+                  <a:lnTo>
+                    <a:pt x="1360827" y="2664217"/>
+                  </a:lnTo>
+                  <a:lnTo>
+                    <a:pt x="1289205" y="2664572"/>
+                  </a:lnTo>
+                  <a:lnTo>
+                    <a:pt x="1217582" y="2664927"/>
+                  </a:lnTo>
+                  <a:lnTo>
+                    <a:pt x="1145960" y="2665281"/>
+                  </a:lnTo>
+                  <a:lnTo>
+                    <a:pt x="1074337" y="2665635"/>
+                  </a:lnTo>
+                  <a:lnTo>
+                    <a:pt x="1002715" y="2665989"/>
+                  </a:lnTo>
+                  <a:lnTo>
+                    <a:pt x="931092" y="2666343"/>
+                  </a:lnTo>
+                  <a:lnTo>
+                    <a:pt x="859470" y="2666697"/>
+                  </a:lnTo>
+                  <a:lnTo>
+                    <a:pt x="787847" y="2667050"/>
+                  </a:lnTo>
+                  <a:lnTo>
+                    <a:pt x="716225" y="2667403"/>
+                  </a:lnTo>
+                  <a:lnTo>
+                    <a:pt x="644602" y="2667757"/>
+                  </a:lnTo>
+                  <a:lnTo>
+                    <a:pt x="572980" y="2668110"/>
+                  </a:lnTo>
+                  <a:lnTo>
+                    <a:pt x="501357" y="2668463"/>
+                  </a:lnTo>
+                  <a:lnTo>
+                    <a:pt x="429735" y="2668815"/>
+                  </a:lnTo>
+                  <a:lnTo>
+                    <a:pt x="358112" y="2669168"/>
+                  </a:lnTo>
+                  <a:lnTo>
+                    <a:pt x="286490" y="2669521"/>
+                  </a:lnTo>
+                  <a:lnTo>
+                    <a:pt x="214867" y="2669873"/>
+                  </a:lnTo>
+                  <a:lnTo>
+                    <a:pt x="143245" y="2670225"/>
+                  </a:lnTo>
+                  <a:lnTo>
+                    <a:pt x="71622" y="2670577"/>
+                  </a:lnTo>
+                  <a:lnTo>
+                    <a:pt x="0" y="2670929"/>
                   </a:lnTo>
                   <a:close/>
                 </a:path>
@@ -3609,306 +3572,631 @@
         </p:sp>
         <p:sp>
           <p:nvSpPr>
+            <p:cNvPr id="21" name="pl21"/>
+            <p:cNvSpPr/>
+            <p:nvPr/>
+          </p:nvSpPr>
+          <p:spPr>
+            <a:xfrm>
+              <a:off x="1528186" y="2073503"/>
+              <a:ext cx="6734493" cy="2654226"/>
+            </a:xfrm>
+            <a:custGeom>
+              <a:avLst/>
+              <a:pathLst>
+                <a:path w="6734493" h="2654226">
+                  <a:moveTo>
+                    <a:pt x="0" y="0"/>
+                  </a:moveTo>
+                  <a:lnTo>
+                    <a:pt x="1975" y="3347"/>
+                  </a:lnTo>
+                  <a:lnTo>
+                    <a:pt x="73598" y="120617"/>
+                  </a:lnTo>
+                  <a:lnTo>
+                    <a:pt x="145220" y="233936"/>
+                  </a:lnTo>
+                  <a:lnTo>
+                    <a:pt x="216843" y="343436"/>
+                  </a:lnTo>
+                  <a:lnTo>
+                    <a:pt x="288465" y="449247"/>
+                  </a:lnTo>
+                  <a:lnTo>
+                    <a:pt x="360088" y="551493"/>
+                  </a:lnTo>
+                  <a:lnTo>
+                    <a:pt x="431710" y="650293"/>
+                  </a:lnTo>
+                  <a:lnTo>
+                    <a:pt x="503333" y="745765"/>
+                  </a:lnTo>
+                  <a:lnTo>
+                    <a:pt x="574955" y="838019"/>
+                  </a:lnTo>
+                  <a:lnTo>
+                    <a:pt x="646578" y="927166"/>
+                  </a:lnTo>
+                  <a:lnTo>
+                    <a:pt x="718200" y="1013308"/>
+                  </a:lnTo>
+                  <a:lnTo>
+                    <a:pt x="789823" y="1096548"/>
+                  </a:lnTo>
+                  <a:lnTo>
+                    <a:pt x="861445" y="1176983"/>
+                  </a:lnTo>
+                  <a:lnTo>
+                    <a:pt x="933068" y="1254708"/>
+                  </a:lnTo>
+                  <a:lnTo>
+                    <a:pt x="1004690" y="1329814"/>
+                  </a:lnTo>
+                  <a:lnTo>
+                    <a:pt x="1076313" y="1402390"/>
+                  </a:lnTo>
+                  <a:lnTo>
+                    <a:pt x="1147936" y="1472520"/>
+                  </a:lnTo>
+                  <a:lnTo>
+                    <a:pt x="1219558" y="1540287"/>
+                  </a:lnTo>
+                  <a:lnTo>
+                    <a:pt x="1291181" y="1605771"/>
+                  </a:lnTo>
+                  <a:lnTo>
+                    <a:pt x="1362803" y="1669048"/>
+                  </a:lnTo>
+                  <a:lnTo>
+                    <a:pt x="1434426" y="1730193"/>
+                  </a:lnTo>
+                  <a:lnTo>
+                    <a:pt x="1506048" y="1789278"/>
+                  </a:lnTo>
+                  <a:lnTo>
+                    <a:pt x="1577671" y="1846372"/>
+                  </a:lnTo>
+                  <a:lnTo>
+                    <a:pt x="1649293" y="1901542"/>
+                  </a:lnTo>
+                  <a:lnTo>
+                    <a:pt x="1720916" y="1954854"/>
+                  </a:lnTo>
+                  <a:lnTo>
+                    <a:pt x="1792538" y="2006369"/>
+                  </a:lnTo>
+                  <a:lnTo>
+                    <a:pt x="1864161" y="2056148"/>
+                  </a:lnTo>
+                  <a:lnTo>
+                    <a:pt x="1935783" y="2104250"/>
+                  </a:lnTo>
+                  <a:lnTo>
+                    <a:pt x="2007406" y="2150732"/>
+                  </a:lnTo>
+                  <a:lnTo>
+                    <a:pt x="2079028" y="2195647"/>
+                  </a:lnTo>
+                  <a:lnTo>
+                    <a:pt x="2150651" y="2239049"/>
+                  </a:lnTo>
+                  <a:lnTo>
+                    <a:pt x="2222273" y="2280988"/>
+                  </a:lnTo>
+                  <a:lnTo>
+                    <a:pt x="2293896" y="2321514"/>
+                  </a:lnTo>
+                  <a:lnTo>
+                    <a:pt x="2365518" y="2360675"/>
+                  </a:lnTo>
+                  <a:lnTo>
+                    <a:pt x="2437141" y="2398516"/>
+                  </a:lnTo>
+                  <a:lnTo>
+                    <a:pt x="2508764" y="2435082"/>
+                  </a:lnTo>
+                  <a:lnTo>
+                    <a:pt x="2580386" y="2470416"/>
+                  </a:lnTo>
+                  <a:lnTo>
+                    <a:pt x="2652009" y="2504560"/>
+                  </a:lnTo>
+                  <a:lnTo>
+                    <a:pt x="2723631" y="2537553"/>
+                  </a:lnTo>
+                  <a:lnTo>
+                    <a:pt x="2795254" y="2569434"/>
+                  </a:lnTo>
+                  <a:lnTo>
+                    <a:pt x="2866876" y="2600242"/>
+                  </a:lnTo>
+                  <a:lnTo>
+                    <a:pt x="2938499" y="2630011"/>
+                  </a:lnTo>
+                  <a:lnTo>
+                    <a:pt x="3010121" y="2654226"/>
+                  </a:lnTo>
+                  <a:lnTo>
+                    <a:pt x="3081744" y="2653867"/>
+                  </a:lnTo>
+                  <a:lnTo>
+                    <a:pt x="3153366" y="2653508"/>
+                  </a:lnTo>
+                  <a:lnTo>
+                    <a:pt x="3224989" y="2653148"/>
+                  </a:lnTo>
+                  <a:lnTo>
+                    <a:pt x="3296611" y="2652789"/>
+                  </a:lnTo>
+                  <a:lnTo>
+                    <a:pt x="3368234" y="2652429"/>
+                  </a:lnTo>
+                  <a:lnTo>
+                    <a:pt x="3439856" y="2652069"/>
+                  </a:lnTo>
+                  <a:lnTo>
+                    <a:pt x="3511479" y="2651709"/>
+                  </a:lnTo>
+                  <a:lnTo>
+                    <a:pt x="3583101" y="2651349"/>
+                  </a:lnTo>
+                  <a:lnTo>
+                    <a:pt x="3654724" y="2650989"/>
+                  </a:lnTo>
+                  <a:lnTo>
+                    <a:pt x="3726346" y="2650628"/>
+                  </a:lnTo>
+                  <a:lnTo>
+                    <a:pt x="3797969" y="2650267"/>
+                  </a:lnTo>
+                  <a:lnTo>
+                    <a:pt x="3869592" y="2649907"/>
+                  </a:lnTo>
+                  <a:lnTo>
+                    <a:pt x="3941214" y="2649546"/>
+                  </a:lnTo>
+                  <a:lnTo>
+                    <a:pt x="4012837" y="2649185"/>
+                  </a:lnTo>
+                  <a:lnTo>
+                    <a:pt x="4084459" y="2648823"/>
+                  </a:lnTo>
+                  <a:lnTo>
+                    <a:pt x="4156082" y="2648462"/>
+                  </a:lnTo>
+                  <a:lnTo>
+                    <a:pt x="4227704" y="2648100"/>
+                  </a:lnTo>
+                  <a:lnTo>
+                    <a:pt x="4299327" y="2647739"/>
+                  </a:lnTo>
+                  <a:lnTo>
+                    <a:pt x="4370949" y="2647377"/>
+                  </a:lnTo>
+                  <a:lnTo>
+                    <a:pt x="4442572" y="2647015"/>
+                  </a:lnTo>
+                  <a:lnTo>
+                    <a:pt x="4514194" y="2646652"/>
+                  </a:lnTo>
+                  <a:lnTo>
+                    <a:pt x="4585817" y="2646290"/>
+                  </a:lnTo>
+                  <a:lnTo>
+                    <a:pt x="4657439" y="2645928"/>
+                  </a:lnTo>
+                  <a:lnTo>
+                    <a:pt x="4729062" y="2645565"/>
+                  </a:lnTo>
+                  <a:lnTo>
+                    <a:pt x="4800684" y="2645202"/>
+                  </a:lnTo>
+                  <a:lnTo>
+                    <a:pt x="4872307" y="2644839"/>
+                  </a:lnTo>
+                  <a:lnTo>
+                    <a:pt x="4943929" y="2644476"/>
+                  </a:lnTo>
+                  <a:lnTo>
+                    <a:pt x="5015552" y="2644113"/>
+                  </a:lnTo>
+                  <a:lnTo>
+                    <a:pt x="5087174" y="2643749"/>
+                  </a:lnTo>
+                  <a:lnTo>
+                    <a:pt x="5158797" y="2643386"/>
+                  </a:lnTo>
+                  <a:lnTo>
+                    <a:pt x="5230420" y="2643022"/>
+                  </a:lnTo>
+                  <a:lnTo>
+                    <a:pt x="5302042" y="2642658"/>
+                  </a:lnTo>
+                  <a:lnTo>
+                    <a:pt x="5373665" y="2642294"/>
+                  </a:lnTo>
+                  <a:lnTo>
+                    <a:pt x="5445287" y="2641929"/>
+                  </a:lnTo>
+                  <a:lnTo>
+                    <a:pt x="5516910" y="2641565"/>
+                  </a:lnTo>
+                  <a:lnTo>
+                    <a:pt x="5588532" y="2641200"/>
+                  </a:lnTo>
+                  <a:lnTo>
+                    <a:pt x="5660155" y="2640836"/>
+                  </a:lnTo>
+                  <a:lnTo>
+                    <a:pt x="5731777" y="2640471"/>
+                  </a:lnTo>
+                  <a:lnTo>
+                    <a:pt x="5803400" y="2640106"/>
+                  </a:lnTo>
+                  <a:lnTo>
+                    <a:pt x="5875022" y="2639741"/>
+                  </a:lnTo>
+                  <a:lnTo>
+                    <a:pt x="5946645" y="2639375"/>
+                  </a:lnTo>
+                  <a:lnTo>
+                    <a:pt x="6018267" y="2639010"/>
+                  </a:lnTo>
+                  <a:lnTo>
+                    <a:pt x="6089890" y="2638644"/>
+                  </a:lnTo>
+                  <a:lnTo>
+                    <a:pt x="6161512" y="2638278"/>
+                  </a:lnTo>
+                  <a:lnTo>
+                    <a:pt x="6233135" y="2637912"/>
+                  </a:lnTo>
+                  <a:lnTo>
+                    <a:pt x="6304757" y="2637546"/>
+                  </a:lnTo>
+                  <a:lnTo>
+                    <a:pt x="6376380" y="2637180"/>
+                  </a:lnTo>
+                  <a:lnTo>
+                    <a:pt x="6448002" y="2636813"/>
+                  </a:lnTo>
+                  <a:lnTo>
+                    <a:pt x="6519625" y="2636447"/>
+                  </a:lnTo>
+                  <a:lnTo>
+                    <a:pt x="6591248" y="2636080"/>
+                  </a:lnTo>
+                  <a:lnTo>
+                    <a:pt x="6662870" y="2635713"/>
+                  </a:lnTo>
+                  <a:lnTo>
+                    <a:pt x="6734493" y="2635346"/>
+                  </a:lnTo>
+                </a:path>
+              </a:pathLst>
+            </a:custGeom>
+          </p:spPr>
+          <p:txBody>
+            <a:bodyPr/>
+            <a:lstStyle/>
+            <a:p/>
+          </p:txBody>
+        </p:sp>
+        <p:sp>
+          <p:nvSpPr>
             <p:cNvPr id="22" name="pl22"/>
             <p:cNvSpPr/>
             <p:nvPr/>
           </p:nvSpPr>
           <p:spPr>
             <a:xfrm>
-              <a:off x="1015727" y="2073503"/>
-              <a:ext cx="7205573" cy="2654226"/>
+              <a:off x="1172049" y="4728088"/>
+              <a:ext cx="7090630" cy="690360"/>
             </a:xfrm>
             <a:custGeom>
               <a:avLst/>
               <a:pathLst>
-                <a:path w="7205573" h="2654226">
+                <a:path w="7090630" h="690360">
                   <a:moveTo>
-                    <a:pt x="0" y="0"/>
+                    <a:pt x="7090630" y="690360"/>
                   </a:moveTo>
                   <a:lnTo>
-                    <a:pt x="2113" y="3347"/>
-                  </a:lnTo>
-                  <a:lnTo>
-                    <a:pt x="78746" y="120617"/>
-                  </a:lnTo>
-                  <a:lnTo>
-                    <a:pt x="155378" y="233936"/>
-                  </a:lnTo>
-                  <a:lnTo>
-                    <a:pt x="232011" y="343436"/>
-                  </a:lnTo>
-                  <a:lnTo>
-                    <a:pt x="308643" y="449247"/>
-                  </a:lnTo>
-                  <a:lnTo>
-                    <a:pt x="385276" y="551493"/>
-                  </a:lnTo>
-                  <a:lnTo>
-                    <a:pt x="461909" y="650293"/>
-                  </a:lnTo>
-                  <a:lnTo>
-                    <a:pt x="538541" y="745765"/>
-                  </a:lnTo>
-                  <a:lnTo>
-                    <a:pt x="615174" y="838019"/>
-                  </a:lnTo>
-                  <a:lnTo>
-                    <a:pt x="691806" y="927166"/>
-                  </a:lnTo>
-                  <a:lnTo>
-                    <a:pt x="768439" y="1013308"/>
-                  </a:lnTo>
-                  <a:lnTo>
-                    <a:pt x="845071" y="1096548"/>
-                  </a:lnTo>
-                  <a:lnTo>
-                    <a:pt x="921704" y="1176983"/>
-                  </a:lnTo>
-                  <a:lnTo>
-                    <a:pt x="998336" y="1254708"/>
-                  </a:lnTo>
-                  <a:lnTo>
-                    <a:pt x="1074969" y="1329814"/>
-                  </a:lnTo>
-                  <a:lnTo>
-                    <a:pt x="1151602" y="1402390"/>
-                  </a:lnTo>
-                  <a:lnTo>
-                    <a:pt x="1228234" y="1472520"/>
-                  </a:lnTo>
-                  <a:lnTo>
-                    <a:pt x="1304867" y="1540287"/>
-                  </a:lnTo>
-                  <a:lnTo>
-                    <a:pt x="1381499" y="1605771"/>
-                  </a:lnTo>
-                  <a:lnTo>
-                    <a:pt x="1458132" y="1669048"/>
-                  </a:lnTo>
-                  <a:lnTo>
-                    <a:pt x="1534764" y="1730193"/>
-                  </a:lnTo>
-                  <a:lnTo>
-                    <a:pt x="1611397" y="1789278"/>
-                  </a:lnTo>
-                  <a:lnTo>
-                    <a:pt x="1688029" y="1846372"/>
-                  </a:lnTo>
-                  <a:lnTo>
-                    <a:pt x="1764662" y="1901542"/>
-                  </a:lnTo>
-                  <a:lnTo>
-                    <a:pt x="1841294" y="1954854"/>
-                  </a:lnTo>
-                  <a:lnTo>
-                    <a:pt x="1917927" y="2006369"/>
-                  </a:lnTo>
-                  <a:lnTo>
-                    <a:pt x="1994560" y="2056148"/>
-                  </a:lnTo>
-                  <a:lnTo>
-                    <a:pt x="2071192" y="2104250"/>
-                  </a:lnTo>
-                  <a:lnTo>
-                    <a:pt x="2147825" y="2150732"/>
-                  </a:lnTo>
-                  <a:lnTo>
-                    <a:pt x="2224457" y="2195647"/>
-                  </a:lnTo>
-                  <a:lnTo>
-                    <a:pt x="2301090" y="2239049"/>
-                  </a:lnTo>
-                  <a:lnTo>
-                    <a:pt x="2377722" y="2280988"/>
-                  </a:lnTo>
-                  <a:lnTo>
-                    <a:pt x="2454355" y="2321514"/>
-                  </a:lnTo>
-                  <a:lnTo>
-                    <a:pt x="2530987" y="2360675"/>
-                  </a:lnTo>
-                  <a:lnTo>
-                    <a:pt x="2607620" y="2398516"/>
-                  </a:lnTo>
-                  <a:lnTo>
-                    <a:pt x="2684253" y="2435082"/>
-                  </a:lnTo>
-                  <a:lnTo>
-                    <a:pt x="2760885" y="2470416"/>
-                  </a:lnTo>
-                  <a:lnTo>
-                    <a:pt x="2837518" y="2504560"/>
-                  </a:lnTo>
-                  <a:lnTo>
-                    <a:pt x="2914150" y="2537553"/>
-                  </a:lnTo>
-                  <a:lnTo>
-                    <a:pt x="2990783" y="2569434"/>
-                  </a:lnTo>
-                  <a:lnTo>
-                    <a:pt x="3067415" y="2600242"/>
-                  </a:lnTo>
-                  <a:lnTo>
-                    <a:pt x="3144048" y="2630011"/>
-                  </a:lnTo>
-                  <a:lnTo>
-                    <a:pt x="3220680" y="2654226"/>
-                  </a:lnTo>
-                  <a:lnTo>
-                    <a:pt x="3297313" y="2653867"/>
-                  </a:lnTo>
-                  <a:lnTo>
-                    <a:pt x="3373945" y="2653508"/>
-                  </a:lnTo>
-                  <a:lnTo>
-                    <a:pt x="3450578" y="2653148"/>
-                  </a:lnTo>
-                  <a:lnTo>
-                    <a:pt x="3527211" y="2652789"/>
-                  </a:lnTo>
-                  <a:lnTo>
-                    <a:pt x="3603843" y="2652429"/>
-                  </a:lnTo>
-                  <a:lnTo>
-                    <a:pt x="3680476" y="2652069"/>
-                  </a:lnTo>
-                  <a:lnTo>
-                    <a:pt x="3757108" y="2651709"/>
-                  </a:lnTo>
-                  <a:lnTo>
-                    <a:pt x="3833741" y="2651349"/>
-                  </a:lnTo>
-                  <a:lnTo>
-                    <a:pt x="3910373" y="2650989"/>
-                  </a:lnTo>
-                  <a:lnTo>
-                    <a:pt x="3987006" y="2650628"/>
-                  </a:lnTo>
-                  <a:lnTo>
-                    <a:pt x="4063638" y="2650267"/>
-                  </a:lnTo>
-                  <a:lnTo>
-                    <a:pt x="4140271" y="2649907"/>
-                  </a:lnTo>
-                  <a:lnTo>
-                    <a:pt x="4216903" y="2649546"/>
-                  </a:lnTo>
-                  <a:lnTo>
-                    <a:pt x="4293536" y="2649185"/>
-                  </a:lnTo>
-                  <a:lnTo>
-                    <a:pt x="4370169" y="2648823"/>
-                  </a:lnTo>
-                  <a:lnTo>
-                    <a:pt x="4446801" y="2648462"/>
-                  </a:lnTo>
-                  <a:lnTo>
-                    <a:pt x="4523434" y="2648100"/>
-                  </a:lnTo>
-                  <a:lnTo>
-                    <a:pt x="4600066" y="2647739"/>
-                  </a:lnTo>
-                  <a:lnTo>
-                    <a:pt x="4676699" y="2647377"/>
-                  </a:lnTo>
-                  <a:lnTo>
-                    <a:pt x="4753331" y="2647015"/>
-                  </a:lnTo>
-                  <a:lnTo>
-                    <a:pt x="4829964" y="2646652"/>
-                  </a:lnTo>
-                  <a:lnTo>
-                    <a:pt x="4906596" y="2646290"/>
-                  </a:lnTo>
-                  <a:lnTo>
-                    <a:pt x="4983229" y="2645928"/>
-                  </a:lnTo>
-                  <a:lnTo>
-                    <a:pt x="5059862" y="2645565"/>
-                  </a:lnTo>
-                  <a:lnTo>
-                    <a:pt x="5136494" y="2645202"/>
-                  </a:lnTo>
-                  <a:lnTo>
-                    <a:pt x="5213127" y="2644839"/>
-                  </a:lnTo>
-                  <a:lnTo>
-                    <a:pt x="5289759" y="2644476"/>
-                  </a:lnTo>
-                  <a:lnTo>
-                    <a:pt x="5366392" y="2644113"/>
-                  </a:lnTo>
-                  <a:lnTo>
-                    <a:pt x="5443024" y="2643749"/>
-                  </a:lnTo>
-                  <a:lnTo>
-                    <a:pt x="5519657" y="2643386"/>
-                  </a:lnTo>
-                  <a:lnTo>
-                    <a:pt x="5596289" y="2643022"/>
-                  </a:lnTo>
-                  <a:lnTo>
-                    <a:pt x="5672922" y="2642658"/>
-                  </a:lnTo>
-                  <a:lnTo>
-                    <a:pt x="5749554" y="2642294"/>
-                  </a:lnTo>
-                  <a:lnTo>
-                    <a:pt x="5826187" y="2641929"/>
-                  </a:lnTo>
-                  <a:lnTo>
-                    <a:pt x="5902820" y="2641565"/>
-                  </a:lnTo>
-                  <a:lnTo>
-                    <a:pt x="5979452" y="2641200"/>
-                  </a:lnTo>
-                  <a:lnTo>
-                    <a:pt x="6056085" y="2640836"/>
-                  </a:lnTo>
-                  <a:lnTo>
-                    <a:pt x="6132717" y="2640471"/>
-                  </a:lnTo>
-                  <a:lnTo>
-                    <a:pt x="6209350" y="2640106"/>
-                  </a:lnTo>
-                  <a:lnTo>
-                    <a:pt x="6285982" y="2639741"/>
-                  </a:lnTo>
-                  <a:lnTo>
-                    <a:pt x="6362615" y="2639375"/>
-                  </a:lnTo>
-                  <a:lnTo>
-                    <a:pt x="6439247" y="2639010"/>
-                  </a:lnTo>
-                  <a:lnTo>
-                    <a:pt x="6515880" y="2638644"/>
-                  </a:lnTo>
-                  <a:lnTo>
-                    <a:pt x="6592513" y="2638278"/>
-                  </a:lnTo>
-                  <a:lnTo>
-                    <a:pt x="6669145" y="2637912"/>
-                  </a:lnTo>
-                  <a:lnTo>
-                    <a:pt x="6745778" y="2637546"/>
-                  </a:lnTo>
-                  <a:lnTo>
-                    <a:pt x="6822410" y="2637180"/>
-                  </a:lnTo>
-                  <a:lnTo>
-                    <a:pt x="6899043" y="2636813"/>
-                  </a:lnTo>
-                  <a:lnTo>
-                    <a:pt x="6975675" y="2636447"/>
-                  </a:lnTo>
-                  <a:lnTo>
-                    <a:pt x="7052308" y="2636080"/>
-                  </a:lnTo>
-                  <a:lnTo>
-                    <a:pt x="7128940" y="2635713"/>
-                  </a:lnTo>
-                  <a:lnTo>
-                    <a:pt x="7205573" y="2635346"/>
+                    <a:pt x="7019007" y="685520"/>
+                  </a:lnTo>
+                  <a:lnTo>
+                    <a:pt x="6947385" y="680512"/>
+                  </a:lnTo>
+                  <a:lnTo>
+                    <a:pt x="6875762" y="675329"/>
+                  </a:lnTo>
+                  <a:lnTo>
+                    <a:pt x="6804139" y="669964"/>
+                  </a:lnTo>
+                  <a:lnTo>
+                    <a:pt x="6732517" y="664413"/>
+                  </a:lnTo>
+                  <a:lnTo>
+                    <a:pt x="6660894" y="658669"/>
+                  </a:lnTo>
+                  <a:lnTo>
+                    <a:pt x="6589272" y="652724"/>
+                  </a:lnTo>
+                  <a:lnTo>
+                    <a:pt x="6517649" y="646572"/>
+                  </a:lnTo>
+                  <a:lnTo>
+                    <a:pt x="6446027" y="640205"/>
+                  </a:lnTo>
+                  <a:lnTo>
+                    <a:pt x="6374404" y="633616"/>
+                  </a:lnTo>
+                  <a:lnTo>
+                    <a:pt x="6302782" y="626798"/>
+                  </a:lnTo>
+                  <a:lnTo>
+                    <a:pt x="6231159" y="619741"/>
+                  </a:lnTo>
+                  <a:lnTo>
+                    <a:pt x="6159537" y="612439"/>
+                  </a:lnTo>
+                  <a:lnTo>
+                    <a:pt x="6087914" y="604882"/>
+                  </a:lnTo>
+                  <a:lnTo>
+                    <a:pt x="6016292" y="597062"/>
+                  </a:lnTo>
+                  <a:lnTo>
+                    <a:pt x="5944669" y="588968"/>
+                  </a:lnTo>
+                  <a:lnTo>
+                    <a:pt x="5873047" y="580593"/>
+                  </a:lnTo>
+                  <a:lnTo>
+                    <a:pt x="5801424" y="571926"/>
+                  </a:lnTo>
+                  <a:lnTo>
+                    <a:pt x="5729802" y="562956"/>
+                  </a:lnTo>
+                  <a:lnTo>
+                    <a:pt x="5658179" y="553674"/>
+                  </a:lnTo>
+                  <a:lnTo>
+                    <a:pt x="5586557" y="544068"/>
+                  </a:lnTo>
+                  <a:lnTo>
+                    <a:pt x="5514934" y="534127"/>
+                  </a:lnTo>
+                  <a:lnTo>
+                    <a:pt x="5443311" y="523839"/>
+                  </a:lnTo>
+                  <a:lnTo>
+                    <a:pt x="5371689" y="513193"/>
+                  </a:lnTo>
+                  <a:lnTo>
+                    <a:pt x="5300066" y="502175"/>
+                  </a:lnTo>
+                  <a:lnTo>
+                    <a:pt x="5228444" y="490773"/>
+                  </a:lnTo>
+                  <a:lnTo>
+                    <a:pt x="5156821" y="478974"/>
+                  </a:lnTo>
+                  <a:lnTo>
+                    <a:pt x="5085199" y="466763"/>
+                  </a:lnTo>
+                  <a:lnTo>
+                    <a:pt x="5013576" y="454126"/>
+                  </a:lnTo>
+                  <a:lnTo>
+                    <a:pt x="4941954" y="441049"/>
+                  </a:lnTo>
+                  <a:lnTo>
+                    <a:pt x="4870331" y="427516"/>
+                  </a:lnTo>
+                  <a:lnTo>
+                    <a:pt x="4798709" y="413511"/>
+                  </a:lnTo>
+                  <a:lnTo>
+                    <a:pt x="4727086" y="399018"/>
+                  </a:lnTo>
+                  <a:lnTo>
+                    <a:pt x="4655464" y="384019"/>
+                  </a:lnTo>
+                  <a:lnTo>
+                    <a:pt x="4583841" y="368497"/>
+                  </a:lnTo>
+                  <a:lnTo>
+                    <a:pt x="4512219" y="352434"/>
+                  </a:lnTo>
+                  <a:lnTo>
+                    <a:pt x="4440596" y="335811"/>
+                  </a:lnTo>
+                  <a:lnTo>
+                    <a:pt x="4368974" y="318608"/>
+                  </a:lnTo>
+                  <a:lnTo>
+                    <a:pt x="4297351" y="300805"/>
+                  </a:lnTo>
+                  <a:lnTo>
+                    <a:pt x="4225729" y="282382"/>
+                  </a:lnTo>
+                  <a:lnTo>
+                    <a:pt x="4154106" y="263316"/>
+                  </a:lnTo>
+                  <a:lnTo>
+                    <a:pt x="4082483" y="243586"/>
+                  </a:lnTo>
+                  <a:lnTo>
+                    <a:pt x="4010861" y="223167"/>
+                  </a:lnTo>
+                  <a:lnTo>
+                    <a:pt x="3939238" y="202036"/>
+                  </a:lnTo>
+                  <a:lnTo>
+                    <a:pt x="3867616" y="180169"/>
+                  </a:lnTo>
+                  <a:lnTo>
+                    <a:pt x="3795993" y="157539"/>
+                  </a:lnTo>
+                  <a:lnTo>
+                    <a:pt x="3724371" y="134120"/>
+                  </a:lnTo>
+                  <a:lnTo>
+                    <a:pt x="3652748" y="109885"/>
+                  </a:lnTo>
+                  <a:lnTo>
+                    <a:pt x="3581126" y="84804"/>
+                  </a:lnTo>
+                  <a:lnTo>
+                    <a:pt x="3509503" y="58849"/>
+                  </a:lnTo>
+                  <a:lnTo>
+                    <a:pt x="3437881" y="31988"/>
+                  </a:lnTo>
+                  <a:lnTo>
+                    <a:pt x="3366258" y="4192"/>
+                  </a:lnTo>
+                  <a:lnTo>
+                    <a:pt x="3294636" y="0"/>
+                  </a:lnTo>
+                  <a:lnTo>
+                    <a:pt x="3223013" y="358"/>
+                  </a:lnTo>
+                  <a:lnTo>
+                    <a:pt x="3151391" y="717"/>
+                  </a:lnTo>
+                  <a:lnTo>
+                    <a:pt x="3079768" y="1075"/>
+                  </a:lnTo>
+                  <a:lnTo>
+                    <a:pt x="3008146" y="1434"/>
+                  </a:lnTo>
+                  <a:lnTo>
+                    <a:pt x="2936523" y="1792"/>
+                  </a:lnTo>
+                  <a:lnTo>
+                    <a:pt x="2864901" y="2150"/>
+                  </a:lnTo>
+                  <a:lnTo>
+                    <a:pt x="2793278" y="2508"/>
+                  </a:lnTo>
+                  <a:lnTo>
+                    <a:pt x="2721655" y="2865"/>
+                  </a:lnTo>
+                  <a:lnTo>
+                    <a:pt x="2650033" y="3223"/>
+                  </a:lnTo>
+                  <a:lnTo>
+                    <a:pt x="2578410" y="3580"/>
+                  </a:lnTo>
+                  <a:lnTo>
+                    <a:pt x="2506788" y="3937"/>
+                  </a:lnTo>
+                  <a:lnTo>
+                    <a:pt x="2435165" y="4295"/>
+                  </a:lnTo>
+                  <a:lnTo>
+                    <a:pt x="2363543" y="4651"/>
+                  </a:lnTo>
+                  <a:lnTo>
+                    <a:pt x="2291920" y="5008"/>
+                  </a:lnTo>
+                  <a:lnTo>
+                    <a:pt x="2220298" y="5365"/>
+                  </a:lnTo>
+                  <a:lnTo>
+                    <a:pt x="2148675" y="5721"/>
+                  </a:lnTo>
+                  <a:lnTo>
+                    <a:pt x="2077053" y="6078"/>
+                  </a:lnTo>
+                  <a:lnTo>
+                    <a:pt x="2005430" y="6434"/>
+                  </a:lnTo>
+                  <a:lnTo>
+                    <a:pt x="1933808" y="6790"/>
+                  </a:lnTo>
+                  <a:lnTo>
+                    <a:pt x="1862185" y="7146"/>
+                  </a:lnTo>
+                  <a:lnTo>
+                    <a:pt x="1790563" y="7501"/>
+                  </a:lnTo>
+                  <a:lnTo>
+                    <a:pt x="1718940" y="7857"/>
+                  </a:lnTo>
+                  <a:lnTo>
+                    <a:pt x="1647318" y="8212"/>
+                  </a:lnTo>
+                  <a:lnTo>
+                    <a:pt x="1575695" y="8567"/>
+                  </a:lnTo>
+                  <a:lnTo>
+                    <a:pt x="1504073" y="8922"/>
+                  </a:lnTo>
+                  <a:lnTo>
+                    <a:pt x="1432450" y="9277"/>
+                  </a:lnTo>
+                  <a:lnTo>
+                    <a:pt x="1360827" y="9632"/>
+                  </a:lnTo>
+                  <a:lnTo>
+                    <a:pt x="1289205" y="9987"/>
+                  </a:lnTo>
+                  <a:lnTo>
+                    <a:pt x="1217582" y="10341"/>
+                  </a:lnTo>
+                  <a:lnTo>
+                    <a:pt x="1145960" y="10695"/>
+                  </a:lnTo>
+                  <a:lnTo>
+                    <a:pt x="1074337" y="11050"/>
+                  </a:lnTo>
+                  <a:lnTo>
+                    <a:pt x="1002715" y="11404"/>
+                  </a:lnTo>
+                  <a:lnTo>
+                    <a:pt x="931092" y="11757"/>
+                  </a:lnTo>
+                  <a:lnTo>
+                    <a:pt x="859470" y="12111"/>
+                  </a:lnTo>
+                  <a:lnTo>
+                    <a:pt x="787847" y="12465"/>
+                  </a:lnTo>
+                  <a:lnTo>
+                    <a:pt x="716225" y="12818"/>
+                  </a:lnTo>
+                  <a:lnTo>
+                    <a:pt x="644602" y="13171"/>
+                  </a:lnTo>
+                  <a:lnTo>
+                    <a:pt x="572980" y="13524"/>
+                  </a:lnTo>
+                  <a:lnTo>
+                    <a:pt x="501357" y="13877"/>
+                  </a:lnTo>
+                  <a:lnTo>
+                    <a:pt x="429735" y="14230"/>
+                  </a:lnTo>
+                  <a:lnTo>
+                    <a:pt x="358112" y="14583"/>
+                  </a:lnTo>
+                  <a:lnTo>
+                    <a:pt x="286490" y="14935"/>
+                  </a:lnTo>
+                  <a:lnTo>
+                    <a:pt x="214867" y="15287"/>
+                  </a:lnTo>
+                  <a:lnTo>
+                    <a:pt x="143245" y="15640"/>
+                  </a:lnTo>
+                  <a:lnTo>
+                    <a:pt x="71622" y="15992"/>
+                  </a:lnTo>
+                  <a:lnTo>
+                    <a:pt x="0" y="16343"/>
                   </a:lnTo>
                 </a:path>
               </a:pathLst>
@@ -3928,625 +4216,312 @@
           </p:nvSpPr>
           <p:spPr>
             <a:xfrm>
-              <a:off x="817517" y="4728088"/>
-              <a:ext cx="7403783" cy="690360"/>
+              <a:off x="1172049" y="3724830"/>
+              <a:ext cx="7090630" cy="1489259"/>
             </a:xfrm>
             <a:custGeom>
               <a:avLst/>
               <a:pathLst>
-                <a:path w="7403783" h="690360">
-                  <a:moveTo>
-                    <a:pt x="7403783" y="690360"/>
-                  </a:moveTo>
-                  <a:lnTo>
-                    <a:pt x="7327150" y="685520"/>
-                  </a:lnTo>
-                  <a:lnTo>
-                    <a:pt x="7250518" y="680512"/>
-                  </a:lnTo>
-                  <a:lnTo>
-                    <a:pt x="7173885" y="675329"/>
-                  </a:lnTo>
-                  <a:lnTo>
-                    <a:pt x="7097253" y="669964"/>
-                  </a:lnTo>
-                  <a:lnTo>
-                    <a:pt x="7020620" y="664413"/>
-                  </a:lnTo>
-                  <a:lnTo>
-                    <a:pt x="6943987" y="658669"/>
-                  </a:lnTo>
-                  <a:lnTo>
-                    <a:pt x="6867355" y="652724"/>
-                  </a:lnTo>
-                  <a:lnTo>
-                    <a:pt x="6790722" y="646572"/>
-                  </a:lnTo>
-                  <a:lnTo>
-                    <a:pt x="6714090" y="640205"/>
-                  </a:lnTo>
-                  <a:lnTo>
-                    <a:pt x="6637457" y="633616"/>
-                  </a:lnTo>
-                  <a:lnTo>
-                    <a:pt x="6560825" y="626798"/>
-                  </a:lnTo>
-                  <a:lnTo>
-                    <a:pt x="6484192" y="619741"/>
-                  </a:lnTo>
-                  <a:lnTo>
-                    <a:pt x="6407560" y="612439"/>
-                  </a:lnTo>
-                  <a:lnTo>
-                    <a:pt x="6330927" y="604882"/>
-                  </a:lnTo>
-                  <a:lnTo>
-                    <a:pt x="6254294" y="597062"/>
-                  </a:lnTo>
-                  <a:lnTo>
-                    <a:pt x="6177662" y="588968"/>
-                  </a:lnTo>
-                  <a:lnTo>
-                    <a:pt x="6101029" y="580593"/>
-                  </a:lnTo>
-                  <a:lnTo>
-                    <a:pt x="6024397" y="571926"/>
-                  </a:lnTo>
-                  <a:lnTo>
-                    <a:pt x="5947764" y="562956"/>
-                  </a:lnTo>
-                  <a:lnTo>
-                    <a:pt x="5871132" y="553674"/>
-                  </a:lnTo>
-                  <a:lnTo>
-                    <a:pt x="5794499" y="544068"/>
-                  </a:lnTo>
-                  <a:lnTo>
-                    <a:pt x="5717867" y="534127"/>
-                  </a:lnTo>
-                  <a:lnTo>
-                    <a:pt x="5641234" y="523839"/>
-                  </a:lnTo>
-                  <a:lnTo>
-                    <a:pt x="5564602" y="513193"/>
-                  </a:lnTo>
-                  <a:lnTo>
-                    <a:pt x="5487969" y="502175"/>
-                  </a:lnTo>
-                  <a:lnTo>
-                    <a:pt x="5411336" y="490773"/>
-                  </a:lnTo>
-                  <a:lnTo>
-                    <a:pt x="5334704" y="478974"/>
-                  </a:lnTo>
-                  <a:lnTo>
-                    <a:pt x="5258071" y="466763"/>
-                  </a:lnTo>
-                  <a:lnTo>
-                    <a:pt x="5181439" y="454126"/>
-                  </a:lnTo>
-                  <a:lnTo>
-                    <a:pt x="5104806" y="441049"/>
-                  </a:lnTo>
-                  <a:lnTo>
-                    <a:pt x="5028174" y="427516"/>
-                  </a:lnTo>
-                  <a:lnTo>
-                    <a:pt x="4951541" y="413511"/>
-                  </a:lnTo>
-                  <a:lnTo>
-                    <a:pt x="4874909" y="399018"/>
-                  </a:lnTo>
-                  <a:lnTo>
-                    <a:pt x="4798276" y="384019"/>
-                  </a:lnTo>
-                  <a:lnTo>
-                    <a:pt x="4721644" y="368497"/>
-                  </a:lnTo>
-                  <a:lnTo>
-                    <a:pt x="4645011" y="352434"/>
-                  </a:lnTo>
-                  <a:lnTo>
-                    <a:pt x="4568378" y="335811"/>
-                  </a:lnTo>
-                  <a:lnTo>
-                    <a:pt x="4491746" y="318608"/>
-                  </a:lnTo>
-                  <a:lnTo>
-                    <a:pt x="4415113" y="300805"/>
-                  </a:lnTo>
-                  <a:lnTo>
-                    <a:pt x="4338481" y="282382"/>
-                  </a:lnTo>
-                  <a:lnTo>
-                    <a:pt x="4261848" y="263316"/>
-                  </a:lnTo>
-                  <a:lnTo>
-                    <a:pt x="4185216" y="243586"/>
-                  </a:lnTo>
-                  <a:lnTo>
-                    <a:pt x="4108583" y="223167"/>
-                  </a:lnTo>
-                  <a:lnTo>
-                    <a:pt x="4031951" y="202036"/>
-                  </a:lnTo>
-                  <a:lnTo>
-                    <a:pt x="3955318" y="180169"/>
-                  </a:lnTo>
-                  <a:lnTo>
-                    <a:pt x="3878685" y="157539"/>
-                  </a:lnTo>
-                  <a:lnTo>
-                    <a:pt x="3802053" y="134120"/>
-                  </a:lnTo>
-                  <a:lnTo>
-                    <a:pt x="3725420" y="109885"/>
-                  </a:lnTo>
-                  <a:lnTo>
-                    <a:pt x="3648788" y="84804"/>
-                  </a:lnTo>
-                  <a:lnTo>
-                    <a:pt x="3572155" y="58849"/>
-                  </a:lnTo>
-                  <a:lnTo>
-                    <a:pt x="3495523" y="31988"/>
-                  </a:lnTo>
-                  <a:lnTo>
-                    <a:pt x="3418890" y="4192"/>
-                  </a:lnTo>
-                  <a:lnTo>
-                    <a:pt x="3342258" y="0"/>
-                  </a:lnTo>
-                  <a:lnTo>
-                    <a:pt x="3265625" y="358"/>
-                  </a:lnTo>
-                  <a:lnTo>
-                    <a:pt x="3188993" y="717"/>
-                  </a:lnTo>
-                  <a:lnTo>
-                    <a:pt x="3112360" y="1075"/>
-                  </a:lnTo>
-                  <a:lnTo>
-                    <a:pt x="3035727" y="1434"/>
-                  </a:lnTo>
-                  <a:lnTo>
-                    <a:pt x="2959095" y="1792"/>
-                  </a:lnTo>
-                  <a:lnTo>
-                    <a:pt x="2882462" y="2150"/>
-                  </a:lnTo>
-                  <a:lnTo>
-                    <a:pt x="2805830" y="2508"/>
-                  </a:lnTo>
-                  <a:lnTo>
-                    <a:pt x="2729197" y="2865"/>
-                  </a:lnTo>
-                  <a:lnTo>
-                    <a:pt x="2652565" y="3223"/>
-                  </a:lnTo>
-                  <a:lnTo>
-                    <a:pt x="2575932" y="3580"/>
-                  </a:lnTo>
-                  <a:lnTo>
-                    <a:pt x="2499300" y="3937"/>
-                  </a:lnTo>
-                  <a:lnTo>
-                    <a:pt x="2422667" y="4295"/>
-                  </a:lnTo>
-                  <a:lnTo>
-                    <a:pt x="2346034" y="4651"/>
-                  </a:lnTo>
-                  <a:lnTo>
-                    <a:pt x="2269402" y="5008"/>
-                  </a:lnTo>
-                  <a:lnTo>
-                    <a:pt x="2192769" y="5365"/>
-                  </a:lnTo>
-                  <a:lnTo>
-                    <a:pt x="2116137" y="5721"/>
-                  </a:lnTo>
-                  <a:lnTo>
-                    <a:pt x="2039504" y="6078"/>
-                  </a:lnTo>
-                  <a:lnTo>
-                    <a:pt x="1962872" y="6434"/>
-                  </a:lnTo>
-                  <a:lnTo>
-                    <a:pt x="1886239" y="6790"/>
-                  </a:lnTo>
-                  <a:lnTo>
-                    <a:pt x="1809607" y="7146"/>
-                  </a:lnTo>
-                  <a:lnTo>
-                    <a:pt x="1732974" y="7501"/>
-                  </a:lnTo>
-                  <a:lnTo>
-                    <a:pt x="1656342" y="7857"/>
-                  </a:lnTo>
-                  <a:lnTo>
-                    <a:pt x="1579709" y="8212"/>
-                  </a:lnTo>
-                  <a:lnTo>
-                    <a:pt x="1503076" y="8567"/>
-                  </a:lnTo>
-                  <a:lnTo>
-                    <a:pt x="1426444" y="8922"/>
-                  </a:lnTo>
-                  <a:lnTo>
-                    <a:pt x="1349811" y="9277"/>
-                  </a:lnTo>
-                  <a:lnTo>
-                    <a:pt x="1273179" y="9632"/>
-                  </a:lnTo>
-                  <a:lnTo>
-                    <a:pt x="1196546" y="9987"/>
-                  </a:lnTo>
-                  <a:lnTo>
-                    <a:pt x="1119914" y="10341"/>
-                  </a:lnTo>
-                  <a:lnTo>
-                    <a:pt x="1043281" y="10695"/>
-                  </a:lnTo>
-                  <a:lnTo>
-                    <a:pt x="966649" y="11050"/>
-                  </a:lnTo>
-                  <a:lnTo>
-                    <a:pt x="890016" y="11404"/>
-                  </a:lnTo>
-                  <a:lnTo>
-                    <a:pt x="813384" y="11757"/>
-                  </a:lnTo>
-                  <a:lnTo>
-                    <a:pt x="736751" y="12111"/>
-                  </a:lnTo>
-                  <a:lnTo>
-                    <a:pt x="660118" y="12465"/>
-                  </a:lnTo>
-                  <a:lnTo>
-                    <a:pt x="583486" y="12818"/>
-                  </a:lnTo>
-                  <a:lnTo>
-                    <a:pt x="506853" y="13171"/>
-                  </a:lnTo>
-                  <a:lnTo>
-                    <a:pt x="430221" y="13524"/>
-                  </a:lnTo>
-                  <a:lnTo>
-                    <a:pt x="353588" y="13877"/>
-                  </a:lnTo>
-                  <a:lnTo>
-                    <a:pt x="276956" y="14230"/>
-                  </a:lnTo>
-                  <a:lnTo>
-                    <a:pt x="200323" y="14583"/>
-                  </a:lnTo>
-                  <a:lnTo>
-                    <a:pt x="123691" y="14935"/>
-                  </a:lnTo>
-                  <a:lnTo>
-                    <a:pt x="47058" y="15287"/>
-                  </a:lnTo>
-                  <a:lnTo>
-                    <a:pt x="0" y="15504"/>
-                  </a:lnTo>
-                </a:path>
-              </a:pathLst>
-            </a:custGeom>
-          </p:spPr>
-          <p:txBody>
-            <a:bodyPr/>
-            <a:lstStyle/>
-            <a:p/>
-          </p:txBody>
-        </p:sp>
-        <p:sp>
-          <p:nvSpPr>
-            <p:cNvPr id="24" name="pl24"/>
-            <p:cNvSpPr/>
-            <p:nvPr/>
-          </p:nvSpPr>
-          <p:spPr>
-            <a:xfrm>
-              <a:off x="817517" y="3797277"/>
-              <a:ext cx="7403783" cy="1416813"/>
-            </a:xfrm>
-            <a:custGeom>
-              <a:avLst/>
-              <a:pathLst>
-                <a:path w="7403783" h="1416813">
+                <a:path w="7090630" h="1489259">
                   <a:moveTo>
                     <a:pt x="0" y="0"/>
                   </a:moveTo>
                   <a:lnTo>
-                    <a:pt x="47058" y="18252"/>
-                  </a:lnTo>
-                  <a:lnTo>
-                    <a:pt x="123691" y="47476"/>
-                  </a:lnTo>
-                  <a:lnTo>
-                    <a:pt x="200323" y="76209"/>
-                  </a:lnTo>
-                  <a:lnTo>
-                    <a:pt x="276956" y="104461"/>
-                  </a:lnTo>
-                  <a:lnTo>
-                    <a:pt x="353588" y="132238"/>
-                  </a:lnTo>
-                  <a:lnTo>
-                    <a:pt x="430221" y="159550"/>
-                  </a:lnTo>
-                  <a:lnTo>
-                    <a:pt x="506853" y="186403"/>
-                  </a:lnTo>
-                  <a:lnTo>
-                    <a:pt x="583486" y="212806"/>
-                  </a:lnTo>
-                  <a:lnTo>
-                    <a:pt x="660118" y="238765"/>
-                  </a:lnTo>
-                  <a:lnTo>
-                    <a:pt x="736751" y="264289"/>
-                  </a:lnTo>
-                  <a:lnTo>
-                    <a:pt x="813384" y="289385"/>
-                  </a:lnTo>
-                  <a:lnTo>
-                    <a:pt x="890016" y="314060"/>
-                  </a:lnTo>
-                  <a:lnTo>
-                    <a:pt x="966649" y="338321"/>
-                  </a:lnTo>
-                  <a:lnTo>
-                    <a:pt x="1043281" y="362174"/>
-                  </a:lnTo>
-                  <a:lnTo>
-                    <a:pt x="1119914" y="385628"/>
-                  </a:lnTo>
-                  <a:lnTo>
-                    <a:pt x="1196546" y="408687"/>
-                  </a:lnTo>
-                  <a:lnTo>
-                    <a:pt x="1273179" y="431360"/>
-                  </a:lnTo>
-                  <a:lnTo>
-                    <a:pt x="1349811" y="453653"/>
-                  </a:lnTo>
-                  <a:lnTo>
-                    <a:pt x="1426444" y="475571"/>
-                  </a:lnTo>
-                  <a:lnTo>
-                    <a:pt x="1503076" y="497122"/>
-                  </a:lnTo>
-                  <a:lnTo>
-                    <a:pt x="1579709" y="518311"/>
-                  </a:lnTo>
-                  <a:lnTo>
-                    <a:pt x="1656342" y="539145"/>
-                  </a:lnTo>
-                  <a:lnTo>
-                    <a:pt x="1732974" y="559629"/>
-                  </a:lnTo>
-                  <a:lnTo>
-                    <a:pt x="1809607" y="579769"/>
-                  </a:lnTo>
-                  <a:lnTo>
-                    <a:pt x="1886239" y="599572"/>
-                  </a:lnTo>
-                  <a:lnTo>
-                    <a:pt x="1962872" y="619042"/>
-                  </a:lnTo>
-                  <a:lnTo>
-                    <a:pt x="2039504" y="638185"/>
-                  </a:lnTo>
-                  <a:lnTo>
-                    <a:pt x="2116137" y="657008"/>
-                  </a:lnTo>
-                  <a:lnTo>
-                    <a:pt x="2192769" y="675514"/>
-                  </a:lnTo>
-                  <a:lnTo>
-                    <a:pt x="2269402" y="693710"/>
-                  </a:lnTo>
-                  <a:lnTo>
-                    <a:pt x="2346034" y="711601"/>
-                  </a:lnTo>
-                  <a:lnTo>
-                    <a:pt x="2422667" y="729191"/>
-                  </a:lnTo>
-                  <a:lnTo>
-                    <a:pt x="2499300" y="746486"/>
-                  </a:lnTo>
-                  <a:lnTo>
-                    <a:pt x="2575932" y="763491"/>
-                  </a:lnTo>
-                  <a:lnTo>
-                    <a:pt x="2652565" y="780211"/>
-                  </a:lnTo>
-                  <a:lnTo>
-                    <a:pt x="2729197" y="796650"/>
-                  </a:lnTo>
-                  <a:lnTo>
-                    <a:pt x="2805830" y="812814"/>
-                  </a:lnTo>
-                  <a:lnTo>
-                    <a:pt x="2882462" y="828706"/>
-                  </a:lnTo>
-                  <a:lnTo>
-                    <a:pt x="2959095" y="844332"/>
-                  </a:lnTo>
-                  <a:lnTo>
-                    <a:pt x="3035727" y="859695"/>
-                  </a:lnTo>
-                  <a:lnTo>
-                    <a:pt x="3112360" y="874801"/>
-                  </a:lnTo>
-                  <a:lnTo>
-                    <a:pt x="3188993" y="889653"/>
-                  </a:lnTo>
-                  <a:lnTo>
-                    <a:pt x="3265625" y="904256"/>
-                  </a:lnTo>
-                  <a:lnTo>
-                    <a:pt x="3342258" y="918614"/>
-                  </a:lnTo>
-                  <a:lnTo>
-                    <a:pt x="3418890" y="932731"/>
-                  </a:lnTo>
-                  <a:lnTo>
-                    <a:pt x="3495523" y="946611"/>
-                  </a:lnTo>
-                  <a:lnTo>
-                    <a:pt x="3572155" y="960258"/>
-                  </a:lnTo>
-                  <a:lnTo>
-                    <a:pt x="3648788" y="973676"/>
-                  </a:lnTo>
-                  <a:lnTo>
-                    <a:pt x="3725420" y="986869"/>
-                  </a:lnTo>
-                  <a:lnTo>
-                    <a:pt x="3802053" y="999841"/>
-                  </a:lnTo>
-                  <a:lnTo>
-                    <a:pt x="3878685" y="1012595"/>
-                  </a:lnTo>
-                  <a:lnTo>
-                    <a:pt x="3955318" y="1025135"/>
-                  </a:lnTo>
-                  <a:lnTo>
-                    <a:pt x="4031951" y="1037465"/>
-                  </a:lnTo>
-                  <a:lnTo>
-                    <a:pt x="4108583" y="1049588"/>
-                  </a:lnTo>
-                  <a:lnTo>
-                    <a:pt x="4185216" y="1061507"/>
-                  </a:lnTo>
-                  <a:lnTo>
-                    <a:pt x="4261848" y="1073227"/>
-                  </a:lnTo>
-                  <a:lnTo>
-                    <a:pt x="4338481" y="1084749"/>
-                  </a:lnTo>
-                  <a:lnTo>
-                    <a:pt x="4415113" y="1096079"/>
-                  </a:lnTo>
-                  <a:lnTo>
-                    <a:pt x="4491746" y="1107218"/>
-                  </a:lnTo>
-                  <a:lnTo>
-                    <a:pt x="4568378" y="1118171"/>
-                  </a:lnTo>
-                  <a:lnTo>
-                    <a:pt x="4645011" y="1128939"/>
-                  </a:lnTo>
-                  <a:lnTo>
-                    <a:pt x="4721644" y="1139527"/>
-                  </a:lnTo>
-                  <a:lnTo>
-                    <a:pt x="4798276" y="1149938"/>
-                  </a:lnTo>
-                  <a:lnTo>
-                    <a:pt x="4874909" y="1160173"/>
-                  </a:lnTo>
-                  <a:lnTo>
-                    <a:pt x="4951541" y="1170237"/>
-                  </a:lnTo>
-                  <a:lnTo>
-                    <a:pt x="5028174" y="1180132"/>
-                  </a:lnTo>
-                  <a:lnTo>
-                    <a:pt x="5104806" y="1189861"/>
-                  </a:lnTo>
-                  <a:lnTo>
-                    <a:pt x="5181439" y="1199427"/>
-                  </a:lnTo>
-                  <a:lnTo>
-                    <a:pt x="5258071" y="1208832"/>
-                  </a:lnTo>
-                  <a:lnTo>
-                    <a:pt x="5334704" y="1218080"/>
-                  </a:lnTo>
-                  <a:lnTo>
-                    <a:pt x="5411336" y="1227172"/>
-                  </a:lnTo>
-                  <a:lnTo>
-                    <a:pt x="5487969" y="1236112"/>
-                  </a:lnTo>
-                  <a:lnTo>
-                    <a:pt x="5564602" y="1244902"/>
-                  </a:lnTo>
-                  <a:lnTo>
-                    <a:pt x="5641234" y="1253544"/>
-                  </a:lnTo>
-                  <a:lnTo>
-                    <a:pt x="5717867" y="1262041"/>
-                  </a:lnTo>
-                  <a:lnTo>
-                    <a:pt x="5794499" y="1270396"/>
-                  </a:lnTo>
-                  <a:lnTo>
-                    <a:pt x="5871132" y="1278610"/>
-                  </a:lnTo>
-                  <a:lnTo>
-                    <a:pt x="5947764" y="1286687"/>
-                  </a:lnTo>
-                  <a:lnTo>
-                    <a:pt x="6024397" y="1294628"/>
-                  </a:lnTo>
-                  <a:lnTo>
-                    <a:pt x="6101029" y="1302436"/>
-                  </a:lnTo>
-                  <a:lnTo>
-                    <a:pt x="6177662" y="1310113"/>
-                  </a:lnTo>
-                  <a:lnTo>
-                    <a:pt x="6254294" y="1317661"/>
-                  </a:lnTo>
-                  <a:lnTo>
-                    <a:pt x="6330927" y="1325083"/>
-                  </a:lnTo>
-                  <a:lnTo>
-                    <a:pt x="6407560" y="1332380"/>
-                  </a:lnTo>
-                  <a:lnTo>
-                    <a:pt x="6484192" y="1339554"/>
-                  </a:lnTo>
-                  <a:lnTo>
-                    <a:pt x="6560825" y="1346608"/>
-                  </a:lnTo>
-                  <a:lnTo>
-                    <a:pt x="6637457" y="1353544"/>
-                  </a:lnTo>
-                  <a:lnTo>
-                    <a:pt x="6714090" y="1360363"/>
-                  </a:lnTo>
-                  <a:lnTo>
-                    <a:pt x="6790722" y="1367068"/>
-                  </a:lnTo>
-                  <a:lnTo>
-                    <a:pt x="6867355" y="1373661"/>
-                  </a:lnTo>
-                  <a:lnTo>
-                    <a:pt x="6943987" y="1380143"/>
-                  </a:lnTo>
-                  <a:lnTo>
-                    <a:pt x="7020620" y="1386516"/>
-                  </a:lnTo>
-                  <a:lnTo>
-                    <a:pt x="7097253" y="1392782"/>
-                  </a:lnTo>
-                  <a:lnTo>
-                    <a:pt x="7173885" y="1398943"/>
-                  </a:lnTo>
-                  <a:lnTo>
-                    <a:pt x="7250518" y="1405001"/>
-                  </a:lnTo>
-                  <a:lnTo>
-                    <a:pt x="7327150" y="1410957"/>
-                  </a:lnTo>
-                  <a:lnTo>
-                    <a:pt x="7403783" y="1416813"/>
+                    <a:pt x="71622" y="30745"/>
+                  </a:lnTo>
+                  <a:lnTo>
+                    <a:pt x="143245" y="60975"/>
+                  </a:lnTo>
+                  <a:lnTo>
+                    <a:pt x="214867" y="90698"/>
+                  </a:lnTo>
+                  <a:lnTo>
+                    <a:pt x="286490" y="119922"/>
+                  </a:lnTo>
+                  <a:lnTo>
+                    <a:pt x="358112" y="148656"/>
+                  </a:lnTo>
+                  <a:lnTo>
+                    <a:pt x="429735" y="176907"/>
+                  </a:lnTo>
+                  <a:lnTo>
+                    <a:pt x="501357" y="204685"/>
+                  </a:lnTo>
+                  <a:lnTo>
+                    <a:pt x="572980" y="231996"/>
+                  </a:lnTo>
+                  <a:lnTo>
+                    <a:pt x="644602" y="258849"/>
+                  </a:lnTo>
+                  <a:lnTo>
+                    <a:pt x="716225" y="285252"/>
+                  </a:lnTo>
+                  <a:lnTo>
+                    <a:pt x="787847" y="311212"/>
+                  </a:lnTo>
+                  <a:lnTo>
+                    <a:pt x="859470" y="336736"/>
+                  </a:lnTo>
+                  <a:lnTo>
+                    <a:pt x="931092" y="361832"/>
+                  </a:lnTo>
+                  <a:lnTo>
+                    <a:pt x="1002715" y="386506"/>
+                  </a:lnTo>
+                  <a:lnTo>
+                    <a:pt x="1074337" y="410767"/>
+                  </a:lnTo>
+                  <a:lnTo>
+                    <a:pt x="1145960" y="434621"/>
+                  </a:lnTo>
+                  <a:lnTo>
+                    <a:pt x="1217582" y="458074"/>
+                  </a:lnTo>
+                  <a:lnTo>
+                    <a:pt x="1289205" y="481134"/>
+                  </a:lnTo>
+                  <a:lnTo>
+                    <a:pt x="1360827" y="503807"/>
+                  </a:lnTo>
+                  <a:lnTo>
+                    <a:pt x="1432450" y="526099"/>
+                  </a:lnTo>
+                  <a:lnTo>
+                    <a:pt x="1504073" y="548018"/>
+                  </a:lnTo>
+                  <a:lnTo>
+                    <a:pt x="1575695" y="569569"/>
+                  </a:lnTo>
+                  <a:lnTo>
+                    <a:pt x="1647318" y="590758"/>
+                  </a:lnTo>
+                  <a:lnTo>
+                    <a:pt x="1718940" y="611591"/>
+                  </a:lnTo>
+                  <a:lnTo>
+                    <a:pt x="1790563" y="632075"/>
+                  </a:lnTo>
+                  <a:lnTo>
+                    <a:pt x="1862185" y="652216"/>
+                  </a:lnTo>
+                  <a:lnTo>
+                    <a:pt x="1933808" y="672018"/>
+                  </a:lnTo>
+                  <a:lnTo>
+                    <a:pt x="2005430" y="691488"/>
+                  </a:lnTo>
+                  <a:lnTo>
+                    <a:pt x="2077053" y="710632"/>
+                  </a:lnTo>
+                  <a:lnTo>
+                    <a:pt x="2148675" y="729454"/>
+                  </a:lnTo>
+                  <a:lnTo>
+                    <a:pt x="2220298" y="747960"/>
+                  </a:lnTo>
+                  <a:lnTo>
+                    <a:pt x="2291920" y="766156"/>
+                  </a:lnTo>
+                  <a:lnTo>
+                    <a:pt x="2363543" y="784047"/>
+                  </a:lnTo>
+                  <a:lnTo>
+                    <a:pt x="2435165" y="801637"/>
+                  </a:lnTo>
+                  <a:lnTo>
+                    <a:pt x="2506788" y="818933"/>
+                  </a:lnTo>
+                  <a:lnTo>
+                    <a:pt x="2578410" y="835938"/>
+                  </a:lnTo>
+                  <a:lnTo>
+                    <a:pt x="2650033" y="852658"/>
+                  </a:lnTo>
+                  <a:lnTo>
+                    <a:pt x="2721655" y="869097"/>
+                  </a:lnTo>
+                  <a:lnTo>
+                    <a:pt x="2793278" y="885260"/>
+                  </a:lnTo>
+                  <a:lnTo>
+                    <a:pt x="2864901" y="901152"/>
+                  </a:lnTo>
+                  <a:lnTo>
+                    <a:pt x="2936523" y="916778"/>
+                  </a:lnTo>
+                  <a:lnTo>
+                    <a:pt x="3008146" y="932141"/>
+                  </a:lnTo>
+                  <a:lnTo>
+                    <a:pt x="3079768" y="947247"/>
+                  </a:lnTo>
+                  <a:lnTo>
+                    <a:pt x="3151391" y="962099"/>
+                  </a:lnTo>
+                  <a:lnTo>
+                    <a:pt x="3223013" y="976702"/>
+                  </a:lnTo>
+                  <a:lnTo>
+                    <a:pt x="3294636" y="991060"/>
+                  </a:lnTo>
+                  <a:lnTo>
+                    <a:pt x="3366258" y="1005177"/>
+                  </a:lnTo>
+                  <a:lnTo>
+                    <a:pt x="3437881" y="1019057"/>
+                  </a:lnTo>
+                  <a:lnTo>
+                    <a:pt x="3509503" y="1032704"/>
+                  </a:lnTo>
+                  <a:lnTo>
+                    <a:pt x="3581126" y="1046123"/>
+                  </a:lnTo>
+                  <a:lnTo>
+                    <a:pt x="3652748" y="1059316"/>
+                  </a:lnTo>
+                  <a:lnTo>
+                    <a:pt x="3724371" y="1072287"/>
+                  </a:lnTo>
+                  <a:lnTo>
+                    <a:pt x="3795993" y="1085042"/>
+                  </a:lnTo>
+                  <a:lnTo>
+                    <a:pt x="3867616" y="1097582"/>
+                  </a:lnTo>
+                  <a:lnTo>
+                    <a:pt x="3939238" y="1109911"/>
+                  </a:lnTo>
+                  <a:lnTo>
+                    <a:pt x="4010861" y="1122034"/>
+                  </a:lnTo>
+                  <a:lnTo>
+                    <a:pt x="4082483" y="1133954"/>
+                  </a:lnTo>
+                  <a:lnTo>
+                    <a:pt x="4154106" y="1145673"/>
+                  </a:lnTo>
+                  <a:lnTo>
+                    <a:pt x="4225729" y="1157196"/>
+                  </a:lnTo>
+                  <a:lnTo>
+                    <a:pt x="4297351" y="1168525"/>
+                  </a:lnTo>
+                  <a:lnTo>
+                    <a:pt x="4368974" y="1179665"/>
+                  </a:lnTo>
+                  <a:lnTo>
+                    <a:pt x="4440596" y="1190617"/>
+                  </a:lnTo>
+                  <a:lnTo>
+                    <a:pt x="4512219" y="1201386"/>
+                  </a:lnTo>
+                  <a:lnTo>
+                    <a:pt x="4583841" y="1211974"/>
+                  </a:lnTo>
+                  <a:lnTo>
+                    <a:pt x="4655464" y="1222384"/>
+                  </a:lnTo>
+                  <a:lnTo>
+                    <a:pt x="4727086" y="1232620"/>
+                  </a:lnTo>
+                  <a:lnTo>
+                    <a:pt x="4798709" y="1242684"/>
+                  </a:lnTo>
+                  <a:lnTo>
+                    <a:pt x="4870331" y="1252579"/>
+                  </a:lnTo>
+                  <a:lnTo>
+                    <a:pt x="4941954" y="1262308"/>
+                  </a:lnTo>
+                  <a:lnTo>
+                    <a:pt x="5013576" y="1271873"/>
+                  </a:lnTo>
+                  <a:lnTo>
+                    <a:pt x="5085199" y="1281279"/>
+                  </a:lnTo>
+                  <a:lnTo>
+                    <a:pt x="5156821" y="1290526"/>
+                  </a:lnTo>
+                  <a:lnTo>
+                    <a:pt x="5228444" y="1299619"/>
+                  </a:lnTo>
+                  <a:lnTo>
+                    <a:pt x="5300066" y="1308558"/>
+                  </a:lnTo>
+                  <a:lnTo>
+                    <a:pt x="5371689" y="1317348"/>
+                  </a:lnTo>
+                  <a:lnTo>
+                    <a:pt x="5443311" y="1325990"/>
+                  </a:lnTo>
+                  <a:lnTo>
+                    <a:pt x="5514934" y="1334488"/>
+                  </a:lnTo>
+                  <a:lnTo>
+                    <a:pt x="5586557" y="1342842"/>
+                  </a:lnTo>
+                  <a:lnTo>
+                    <a:pt x="5658179" y="1351057"/>
+                  </a:lnTo>
+                  <a:lnTo>
+                    <a:pt x="5729802" y="1359134"/>
+                  </a:lnTo>
+                  <a:lnTo>
+                    <a:pt x="5801424" y="1367075"/>
+                  </a:lnTo>
+                  <a:lnTo>
+                    <a:pt x="5873047" y="1374883"/>
+                  </a:lnTo>
+                  <a:lnTo>
+                    <a:pt x="5944669" y="1382560"/>
+                  </a:lnTo>
+                  <a:lnTo>
+                    <a:pt x="6016292" y="1390108"/>
+                  </a:lnTo>
+                  <a:lnTo>
+                    <a:pt x="6087914" y="1397529"/>
+                  </a:lnTo>
+                  <a:lnTo>
+                    <a:pt x="6159537" y="1404826"/>
+                  </a:lnTo>
+                  <a:lnTo>
+                    <a:pt x="6231159" y="1412001"/>
+                  </a:lnTo>
+                  <a:lnTo>
+                    <a:pt x="6302782" y="1419055"/>
+                  </a:lnTo>
+                  <a:lnTo>
+                    <a:pt x="6374404" y="1425990"/>
+                  </a:lnTo>
+                  <a:lnTo>
+                    <a:pt x="6446027" y="1432810"/>
+                  </a:lnTo>
+                  <a:lnTo>
+                    <a:pt x="6517649" y="1439515"/>
+                  </a:lnTo>
+                  <a:lnTo>
+                    <a:pt x="6589272" y="1446107"/>
+                  </a:lnTo>
+                  <a:lnTo>
+                    <a:pt x="6660894" y="1452589"/>
+                  </a:lnTo>
+                  <a:lnTo>
+                    <a:pt x="6732517" y="1458962"/>
+                  </a:lnTo>
+                  <a:lnTo>
+                    <a:pt x="6804139" y="1465228"/>
+                  </a:lnTo>
+                  <a:lnTo>
+                    <a:pt x="6875762" y="1471389"/>
+                  </a:lnTo>
+                  <a:lnTo>
+                    <a:pt x="6947385" y="1477447"/>
+                  </a:lnTo>
+                  <a:lnTo>
+                    <a:pt x="7019007" y="1483403"/>
+                  </a:lnTo>
+                  <a:lnTo>
+                    <a:pt x="7090630" y="1489259"/>
                   </a:lnTo>
                 </a:path>
               </a:pathLst>
@@ -4569,7 +4544,7 @@
         </p:sp>
         <p:sp>
           <p:nvSpPr>
-            <p:cNvPr id="25" name="pl25"/>
+            <p:cNvPr id="24" name="pl24"/>
             <p:cNvSpPr/>
             <p:nvPr/>
           </p:nvSpPr>
@@ -4612,13 +4587,13 @@
         </p:sp>
         <p:sp>
           <p:nvSpPr>
-            <p:cNvPr id="26" name="pl26"/>
+            <p:cNvPr id="25" name="pl25"/>
             <p:cNvSpPr/>
             <p:nvPr/>
           </p:nvSpPr>
           <p:spPr>
             <a:xfrm>
-              <a:off x="4224261" y="2073503"/>
+              <a:off x="4526955" y="2073503"/>
               <a:ext cx="0" cy="3649639"/>
             </a:xfrm>
             <a:custGeom>
@@ -4655,7 +4630,7 @@
         </p:sp>
         <p:sp>
           <p:nvSpPr>
-            <p:cNvPr id="27" name="tx27"/>
+            <p:cNvPr id="26" name="tx26"/>
             <p:cNvSpPr/>
             <p:nvPr/>
           </p:nvSpPr>
@@ -4701,7 +4676,7 @@
         </p:sp>
         <p:sp>
           <p:nvSpPr>
-            <p:cNvPr id="28" name="tx28"/>
+            <p:cNvPr id="27" name="tx27"/>
             <p:cNvSpPr/>
             <p:nvPr/>
           </p:nvSpPr>
@@ -4747,7 +4722,7 @@
         </p:sp>
         <p:sp>
           <p:nvSpPr>
-            <p:cNvPr id="29" name="tx29"/>
+            <p:cNvPr id="28" name="tx28"/>
             <p:cNvSpPr/>
             <p:nvPr/>
           </p:nvSpPr>
@@ -4793,7 +4768,7 @@
         </p:sp>
         <p:sp>
           <p:nvSpPr>
-            <p:cNvPr id="30" name="tx30"/>
+            <p:cNvPr id="29" name="tx29"/>
             <p:cNvSpPr/>
             <p:nvPr/>
           </p:nvSpPr>
@@ -4839,7 +4814,7 @@
         </p:sp>
         <p:sp>
           <p:nvSpPr>
-            <p:cNvPr id="31" name="tx31"/>
+            <p:cNvPr id="30" name="tx30"/>
             <p:cNvSpPr/>
             <p:nvPr/>
           </p:nvSpPr>
@@ -4885,14 +4860,14 @@
         </p:sp>
         <p:sp>
           <p:nvSpPr>
-            <p:cNvPr id="32" name="tx32"/>
+            <p:cNvPr id="31" name="tx31"/>
             <p:cNvSpPr/>
             <p:nvPr/>
           </p:nvSpPr>
           <p:spPr>
             <a:xfrm>
-              <a:off x="2423864" y="5785772"/>
-              <a:ext cx="155356" cy="80101"/>
+              <a:off x="2421884" y="5785772"/>
+              <a:ext cx="161574" cy="80101"/>
             </a:xfrm>
             <a:prstGeom prst="rect">
               <a:avLst/>
@@ -4924,21 +4899,21 @@
                   <a:latin typeface="Helvetica"/>
                   <a:cs typeface="Helvetica"/>
                 </a:rPr>
-                <a:t>0.8</a:t>
+                <a:t>-25</a:t>
               </a:r>
             </a:p>
           </p:txBody>
         </p:sp>
         <p:sp>
           <p:nvSpPr>
-            <p:cNvPr id="33" name="tx33"/>
+            <p:cNvPr id="32" name="tx32"/>
             <p:cNvSpPr/>
             <p:nvPr/>
           </p:nvSpPr>
           <p:spPr>
             <a:xfrm>
-              <a:off x="4196521" y="5785772"/>
-              <a:ext cx="155356" cy="80101"/>
+              <a:off x="4542539" y="5785772"/>
+              <a:ext cx="62179" cy="80101"/>
             </a:xfrm>
             <a:prstGeom prst="rect">
               <a:avLst/>
@@ -4970,21 +4945,21 @@
                   <a:latin typeface="Helvetica"/>
                   <a:cs typeface="Helvetica"/>
                 </a:rPr>
-                <a:t>1.0</a:t>
+                <a:t>0</a:t>
               </a:r>
             </a:p>
           </p:txBody>
         </p:sp>
         <p:sp>
           <p:nvSpPr>
-            <p:cNvPr id="34" name="tx34"/>
+            <p:cNvPr id="33" name="tx33"/>
             <p:cNvSpPr/>
             <p:nvPr/>
           </p:nvSpPr>
           <p:spPr>
             <a:xfrm>
-              <a:off x="5969179" y="5785772"/>
-              <a:ext cx="155356" cy="80101"/>
+              <a:off x="6582407" y="5785772"/>
+              <a:ext cx="124358" cy="80101"/>
             </a:xfrm>
             <a:prstGeom prst="rect">
               <a:avLst/>
@@ -5016,67 +4991,21 @@
                   <a:latin typeface="Helvetica"/>
                   <a:cs typeface="Helvetica"/>
                 </a:rPr>
-                <a:t>1.2</a:t>
+                <a:t>25</a:t>
               </a:r>
             </a:p>
           </p:txBody>
         </p:sp>
         <p:sp>
           <p:nvSpPr>
-            <p:cNvPr id="35" name="tx35"/>
+            <p:cNvPr id="34" name="tx34"/>
             <p:cNvSpPr/>
             <p:nvPr/>
           </p:nvSpPr>
           <p:spPr>
             <a:xfrm>
-              <a:off x="7741836" y="5785772"/>
-              <a:ext cx="155356" cy="80101"/>
-            </a:xfrm>
-            <a:prstGeom prst="rect">
-              <a:avLst/>
-            </a:prstGeom>
-            <a:noFill/>
-          </p:spPr>
-          <p:txBody>
-            <a:bodyPr lIns="0" rIns="0" tIns="0" bIns="0" anchorCtr="1" anchor="ctr" wrap="none"/>
-            <a:lstStyle/>
-            <a:p>
-              <a:pPr algn="l" marL="0" marR="0" indent="0">
-                <a:lnSpc>
-                  <a:spcPts val="880"/>
-                </a:lnSpc>
-                <a:spcBef>
-                  <a:spcPts val="0"/>
-                </a:spcBef>
-                <a:spcAft>
-                  <a:spcPts val="0"/>
-                </a:spcAft>
-              </a:pPr>
-              <a:r>
-                <a:rPr sz="880">
-                  <a:solidFill>
-                    <a:srgbClr val="4D4D4D">
-                      <a:alpha val="100000"/>
-                    </a:srgbClr>
-                  </a:solidFill>
-                  <a:latin typeface="Helvetica"/>
-                  <a:cs typeface="Helvetica"/>
-                </a:rPr>
-                <a:t>1.4</a:t>
-              </a:r>
-            </a:p>
-          </p:txBody>
-        </p:sp>
-        <p:sp>
-          <p:nvSpPr>
-            <p:cNvPr id="36" name="tx36"/>
-            <p:cNvSpPr/>
-            <p:nvPr/>
-          </p:nvSpPr>
-          <p:spPr>
-            <a:xfrm>
-              <a:off x="3879271" y="5925448"/>
-              <a:ext cx="1676186" cy="100218"/>
+              <a:off x="2928340" y="5925448"/>
+              <a:ext cx="3578047" cy="100218"/>
             </a:xfrm>
             <a:prstGeom prst="rect">
               <a:avLst/>
@@ -5108,14 +5037,14 @@
                   <a:latin typeface="Helvetica"/>
                   <a:cs typeface="Helvetica"/>
                 </a:rPr>
-                <a:t>CKD-EPI Cr-Cys / CG ratio</a:t>
+                <a:t>eGFR difference (%): 100 × (CKD-EPI Cr-Cys − CG) / CG</a:t>
               </a:r>
             </a:p>
           </p:txBody>
         </p:sp>
         <p:sp>
           <p:nvSpPr>
-            <p:cNvPr id="37" name="tx37"/>
+            <p:cNvPr id="35" name="tx35"/>
             <p:cNvSpPr/>
             <p:nvPr/>
           </p:nvSpPr>
@@ -5161,14 +5090,14 @@
         </p:sp>
         <p:sp>
           <p:nvSpPr>
-            <p:cNvPr id="38" name="tx38"/>
+            <p:cNvPr id="36" name="tx36"/>
             <p:cNvSpPr/>
             <p:nvPr/>
           </p:nvSpPr>
           <p:spPr>
             <a:xfrm>
               <a:off x="817517" y="1896563"/>
-              <a:ext cx="6169365" cy="82021"/>
+              <a:ext cx="6321612" cy="82021"/>
             </a:xfrm>
             <a:prstGeom prst="rect">
               <a:avLst/>
@@ -5200,14 +5129,14 @@
                   <a:latin typeface="Helvetica"/>
                   <a:cs typeface="Helvetica"/>
                 </a:rPr>
-                <a:t>subHR per 0.1 ratio decline: 1.22 (1.00-1.49), p = 0.056  |  per IQR decline (Δ = 0.30): 1.80 (0.99-3.27)  |  IQR: [0.85, 1.15]</a:t>
+                <a:t>subHR per 10 % decline: 1.22 (1.00-1.49), p = 0.056  |  per IQR decline (Δ = 29.9 %): 1.80 (0.99-3.27)  |  IQR: [-15.0, 14.9] %</a:t>
               </a:r>
             </a:p>
           </p:txBody>
         </p:sp>
         <p:sp>
           <p:nvSpPr>
-            <p:cNvPr id="39" name="tx39"/>
+            <p:cNvPr id="37" name="tx37"/>
             <p:cNvSpPr/>
             <p:nvPr/>
           </p:nvSpPr>

--- a/docs/pptx/carbo/jx-carbo-linsubhr-ratio-hosp8.pptx
+++ b/docs/pptx/carbo/jx-carbo-linsubhr-ratio-hosp8.pptx
@@ -2265,34 +2265,26 @@
         </p:sp>
         <p:sp>
           <p:nvSpPr>
-            <p:cNvPr id="4" name="pl4"/>
+            <p:cNvPr id="4" name="rc4"/>
             <p:cNvSpPr/>
             <p:nvPr/>
           </p:nvSpPr>
           <p:spPr>
             <a:xfrm>
-              <a:off x="817517" y="5142518"/>
-              <a:ext cx="7799693" cy="0"/>
+              <a:off x="457200" y="1600200"/>
+              <a:ext cx="8229600" cy="4525962"/>
             </a:xfrm>
-            <a:custGeom>
+            <a:prstGeom prst="rect">
               <a:avLst/>
-              <a:pathLst>
-                <a:path w="7799693" h="0">
-                  <a:moveTo>
-                    <a:pt x="0" y="0"/>
-                  </a:moveTo>
-                  <a:lnTo>
-                    <a:pt x="7799693" y="0"/>
-                  </a:lnTo>
-                  <a:lnTo>
-                    <a:pt x="7799693" y="0"/>
-                  </a:lnTo>
-                </a:path>
-              </a:pathLst>
-            </a:custGeom>
-            <a:ln w="6775" cap="flat">
+            </a:prstGeom>
+            <a:solidFill>
+              <a:srgbClr val="FFFFFF">
+                <a:alpha val="100000"/>
+              </a:srgbClr>
+            </a:solidFill>
+            <a:ln w="13550" cap="rnd">
               <a:solidFill>
-                <a:srgbClr val="EBEBEB">
+                <a:srgbClr val="FFFFFF">
                   <a:alpha val="100000"/>
                 </a:srgbClr>
               </a:solidFill>
@@ -2314,21 +2306,21 @@
           </p:nvSpPr>
           <p:spPr>
             <a:xfrm>
-              <a:off x="817517" y="4313054"/>
-              <a:ext cx="7799693" cy="0"/>
+              <a:off x="887106" y="3250627"/>
+              <a:ext cx="7660515" cy="0"/>
             </a:xfrm>
             <a:custGeom>
               <a:avLst/>
               <a:pathLst>
-                <a:path w="7799693" h="0">
+                <a:path w="7660515" h="0">
                   <a:moveTo>
                     <a:pt x="0" y="0"/>
                   </a:moveTo>
                   <a:lnTo>
-                    <a:pt x="7799693" y="0"/>
-                  </a:lnTo>
-                  <a:lnTo>
-                    <a:pt x="7799693" y="0"/>
+                    <a:pt x="7660515" y="0"/>
+                  </a:lnTo>
+                  <a:lnTo>
+                    <a:pt x="7660515" y="0"/>
                   </a:lnTo>
                 </a:path>
               </a:pathLst>
@@ -2357,21 +2349,21 @@
           </p:nvSpPr>
           <p:spPr>
             <a:xfrm>
-              <a:off x="817517" y="3483591"/>
-              <a:ext cx="7799693" cy="0"/>
+              <a:off x="887106" y="2951293"/>
+              <a:ext cx="7660515" cy="0"/>
             </a:xfrm>
             <a:custGeom>
               <a:avLst/>
               <a:pathLst>
-                <a:path w="7799693" h="0">
+                <a:path w="7660515" h="0">
                   <a:moveTo>
                     <a:pt x="0" y="0"/>
                   </a:moveTo>
                   <a:lnTo>
-                    <a:pt x="7799693" y="0"/>
-                  </a:lnTo>
-                  <a:lnTo>
-                    <a:pt x="7799693" y="0"/>
+                    <a:pt x="7660515" y="0"/>
+                  </a:lnTo>
+                  <a:lnTo>
+                    <a:pt x="7660515" y="0"/>
                   </a:lnTo>
                 </a:path>
               </a:pathLst>
@@ -2400,21 +2392,21 @@
           </p:nvSpPr>
           <p:spPr>
             <a:xfrm>
-              <a:off x="817517" y="2654127"/>
-              <a:ext cx="7799693" cy="0"/>
+              <a:off x="887106" y="2651959"/>
+              <a:ext cx="7660515" cy="0"/>
             </a:xfrm>
             <a:custGeom>
               <a:avLst/>
               <a:pathLst>
-                <a:path w="7799693" h="0">
+                <a:path w="7660515" h="0">
                   <a:moveTo>
                     <a:pt x="0" y="0"/>
                   </a:moveTo>
                   <a:lnTo>
-                    <a:pt x="7799693" y="0"/>
-                  </a:lnTo>
-                  <a:lnTo>
-                    <a:pt x="7799693" y="0"/>
+                    <a:pt x="7660515" y="0"/>
+                  </a:lnTo>
+                  <a:lnTo>
+                    <a:pt x="7660515" y="0"/>
                   </a:lnTo>
                 </a:path>
               </a:pathLst>
@@ -2443,21 +2435,21 @@
           </p:nvSpPr>
           <p:spPr>
             <a:xfrm>
-              <a:off x="1467192" y="2073503"/>
-              <a:ext cx="0" cy="3649639"/>
+              <a:off x="887106" y="2352625"/>
+              <a:ext cx="7660515" cy="0"/>
             </a:xfrm>
             <a:custGeom>
               <a:avLst/>
               <a:pathLst>
-                <a:path w="0" h="3649639">
+                <a:path w="7660515" h="0">
                   <a:moveTo>
-                    <a:pt x="0" y="3649639"/>
+                    <a:pt x="0" y="0"/>
                   </a:moveTo>
                   <a:lnTo>
-                    <a:pt x="0" y="0"/>
-                  </a:lnTo>
-                  <a:lnTo>
-                    <a:pt x="0" y="0"/>
+                    <a:pt x="7660515" y="0"/>
+                  </a:lnTo>
+                  <a:lnTo>
+                    <a:pt x="7660515" y="0"/>
                   </a:lnTo>
                 </a:path>
               </a:pathLst>
@@ -2486,15 +2478,15 @@
           </p:nvSpPr>
           <p:spPr>
             <a:xfrm>
-              <a:off x="3538150" y="2073503"/>
-              <a:ext cx="0" cy="3649639"/>
+              <a:off x="1525188" y="2143092"/>
+              <a:ext cx="0" cy="1317069"/>
             </a:xfrm>
             <a:custGeom>
               <a:avLst/>
               <a:pathLst>
-                <a:path w="0" h="3649639">
+                <a:path w="0" h="1317069">
                   <a:moveTo>
-                    <a:pt x="0" y="3649639"/>
+                    <a:pt x="0" y="1317069"/>
                   </a:moveTo>
                   <a:lnTo>
                     <a:pt x="0" y="0"/>
@@ -2529,15 +2521,15 @@
           </p:nvSpPr>
           <p:spPr>
             <a:xfrm>
-              <a:off x="5609107" y="2073503"/>
-              <a:ext cx="0" cy="3649639"/>
+              <a:off x="3559192" y="2143092"/>
+              <a:ext cx="0" cy="1317069"/>
             </a:xfrm>
             <a:custGeom>
               <a:avLst/>
               <a:pathLst>
-                <a:path w="0" h="3649639">
+                <a:path w="0" h="1317069">
                   <a:moveTo>
-                    <a:pt x="0" y="3649639"/>
+                    <a:pt x="0" y="1317069"/>
                   </a:moveTo>
                   <a:lnTo>
                     <a:pt x="0" y="0"/>
@@ -2572,15 +2564,15 @@
           </p:nvSpPr>
           <p:spPr>
             <a:xfrm>
-              <a:off x="7680065" y="2073503"/>
-              <a:ext cx="0" cy="3649639"/>
+              <a:off x="5593195" y="2143092"/>
+              <a:ext cx="0" cy="1317069"/>
             </a:xfrm>
             <a:custGeom>
               <a:avLst/>
               <a:pathLst>
-                <a:path w="0" h="3649639">
+                <a:path w="0" h="1317069">
                   <a:moveTo>
-                    <a:pt x="0" y="3649639"/>
+                    <a:pt x="0" y="1317069"/>
                   </a:moveTo>
                   <a:lnTo>
                     <a:pt x="0" y="0"/>
@@ -2615,26 +2607,26 @@
           </p:nvSpPr>
           <p:spPr>
             <a:xfrm>
-              <a:off x="817517" y="5557249"/>
-              <a:ext cx="7799693" cy="0"/>
+              <a:off x="7627198" y="2143092"/>
+              <a:ext cx="0" cy="1317069"/>
             </a:xfrm>
             <a:custGeom>
               <a:avLst/>
               <a:pathLst>
-                <a:path w="7799693" h="0">
+                <a:path w="0" h="1317069">
                   <a:moveTo>
+                    <a:pt x="0" y="1317069"/>
+                  </a:moveTo>
+                  <a:lnTo>
                     <a:pt x="0" y="0"/>
-                  </a:moveTo>
-                  <a:lnTo>
-                    <a:pt x="7799693" y="0"/>
-                  </a:lnTo>
-                  <a:lnTo>
-                    <a:pt x="7799693" y="0"/>
+                  </a:lnTo>
+                  <a:lnTo>
+                    <a:pt x="0" y="0"/>
                   </a:lnTo>
                 </a:path>
               </a:pathLst>
             </a:custGeom>
-            <a:ln w="13550" cap="flat">
+            <a:ln w="6775" cap="flat">
               <a:solidFill>
                 <a:srgbClr val="EBEBEB">
                   <a:alpha val="100000"/>
@@ -2658,21 +2650,21 @@
           </p:nvSpPr>
           <p:spPr>
             <a:xfrm>
-              <a:off x="817517" y="4727786"/>
-              <a:ext cx="7799693" cy="0"/>
+              <a:off x="887106" y="3400294"/>
+              <a:ext cx="7660515" cy="0"/>
             </a:xfrm>
             <a:custGeom>
               <a:avLst/>
               <a:pathLst>
-                <a:path w="7799693" h="0">
+                <a:path w="7660515" h="0">
                   <a:moveTo>
                     <a:pt x="0" y="0"/>
                   </a:moveTo>
                   <a:lnTo>
-                    <a:pt x="7799693" y="0"/>
-                  </a:lnTo>
-                  <a:lnTo>
-                    <a:pt x="7799693" y="0"/>
+                    <a:pt x="7660515" y="0"/>
+                  </a:lnTo>
+                  <a:lnTo>
+                    <a:pt x="7660515" y="0"/>
                   </a:lnTo>
                 </a:path>
               </a:pathLst>
@@ -2701,21 +2693,21 @@
           </p:nvSpPr>
           <p:spPr>
             <a:xfrm>
-              <a:off x="817517" y="3898322"/>
-              <a:ext cx="7799693" cy="0"/>
+              <a:off x="887106" y="3100960"/>
+              <a:ext cx="7660515" cy="0"/>
             </a:xfrm>
             <a:custGeom>
               <a:avLst/>
               <a:pathLst>
-                <a:path w="7799693" h="0">
+                <a:path w="7660515" h="0">
                   <a:moveTo>
                     <a:pt x="0" y="0"/>
                   </a:moveTo>
                   <a:lnTo>
-                    <a:pt x="7799693" y="0"/>
-                  </a:lnTo>
-                  <a:lnTo>
-                    <a:pt x="7799693" y="0"/>
+                    <a:pt x="7660515" y="0"/>
+                  </a:lnTo>
+                  <a:lnTo>
+                    <a:pt x="7660515" y="0"/>
                   </a:lnTo>
                 </a:path>
               </a:pathLst>
@@ -2744,21 +2736,21 @@
           </p:nvSpPr>
           <p:spPr>
             <a:xfrm>
-              <a:off x="817517" y="3068859"/>
-              <a:ext cx="7799693" cy="0"/>
+              <a:off x="887106" y="2801626"/>
+              <a:ext cx="7660515" cy="0"/>
             </a:xfrm>
             <a:custGeom>
               <a:avLst/>
               <a:pathLst>
-                <a:path w="7799693" h="0">
+                <a:path w="7660515" h="0">
                   <a:moveTo>
                     <a:pt x="0" y="0"/>
                   </a:moveTo>
                   <a:lnTo>
-                    <a:pt x="7799693" y="0"/>
-                  </a:lnTo>
-                  <a:lnTo>
-                    <a:pt x="7799693" y="0"/>
+                    <a:pt x="7660515" y="0"/>
+                  </a:lnTo>
+                  <a:lnTo>
+                    <a:pt x="7660515" y="0"/>
                   </a:lnTo>
                 </a:path>
               </a:pathLst>
@@ -2787,21 +2779,21 @@
           </p:nvSpPr>
           <p:spPr>
             <a:xfrm>
-              <a:off x="817517" y="2239395"/>
-              <a:ext cx="7799693" cy="0"/>
+              <a:off x="887106" y="2502292"/>
+              <a:ext cx="7660515" cy="0"/>
             </a:xfrm>
             <a:custGeom>
               <a:avLst/>
               <a:pathLst>
-                <a:path w="7799693" h="0">
+                <a:path w="7660515" h="0">
                   <a:moveTo>
                     <a:pt x="0" y="0"/>
                   </a:moveTo>
                   <a:lnTo>
-                    <a:pt x="7799693" y="0"/>
-                  </a:lnTo>
-                  <a:lnTo>
-                    <a:pt x="7799693" y="0"/>
+                    <a:pt x="7660515" y="0"/>
+                  </a:lnTo>
+                  <a:lnTo>
+                    <a:pt x="7660515" y="0"/>
                   </a:lnTo>
                 </a:path>
               </a:pathLst>
@@ -2830,21 +2822,21 @@
           </p:nvSpPr>
           <p:spPr>
             <a:xfrm>
-              <a:off x="2502671" y="2073503"/>
-              <a:ext cx="0" cy="3649639"/>
+              <a:off x="887106" y="2202958"/>
+              <a:ext cx="7660515" cy="0"/>
             </a:xfrm>
             <a:custGeom>
               <a:avLst/>
               <a:pathLst>
-                <a:path w="0" h="3649639">
+                <a:path w="7660515" h="0">
                   <a:moveTo>
-                    <a:pt x="0" y="3649639"/>
+                    <a:pt x="0" y="0"/>
                   </a:moveTo>
                   <a:lnTo>
-                    <a:pt x="0" y="0"/>
-                  </a:lnTo>
-                  <a:lnTo>
-                    <a:pt x="0" y="0"/>
+                    <a:pt x="7660515" y="0"/>
+                  </a:lnTo>
+                  <a:lnTo>
+                    <a:pt x="7660515" y="0"/>
                   </a:lnTo>
                 </a:path>
               </a:pathLst>
@@ -2873,15 +2865,15 @@
           </p:nvSpPr>
           <p:spPr>
             <a:xfrm>
-              <a:off x="4573628" y="2073503"/>
-              <a:ext cx="0" cy="3649639"/>
+              <a:off x="2542190" y="2143092"/>
+              <a:ext cx="0" cy="1317069"/>
             </a:xfrm>
             <a:custGeom>
               <a:avLst/>
               <a:pathLst>
-                <a:path w="0" h="3649639">
+                <a:path w="0" h="1317069">
                   <a:moveTo>
-                    <a:pt x="0" y="3649639"/>
+                    <a:pt x="0" y="1317069"/>
                   </a:moveTo>
                   <a:lnTo>
                     <a:pt x="0" y="0"/>
@@ -2916,15 +2908,15 @@
           </p:nvSpPr>
           <p:spPr>
             <a:xfrm>
-              <a:off x="6644586" y="2073503"/>
-              <a:ext cx="0" cy="3649639"/>
+              <a:off x="4576193" y="2143092"/>
+              <a:ext cx="0" cy="1317069"/>
             </a:xfrm>
             <a:custGeom>
               <a:avLst/>
               <a:pathLst>
-                <a:path w="0" h="3649639">
+                <a:path w="0" h="1317069">
                   <a:moveTo>
-                    <a:pt x="0" y="3649639"/>
+                    <a:pt x="0" y="1317069"/>
                   </a:moveTo>
                   <a:lnTo>
                     <a:pt x="0" y="0"/>
@@ -2953,606 +2945,649 @@
         </p:sp>
         <p:sp>
           <p:nvSpPr>
-            <p:cNvPr id="20" name="pg20"/>
+            <p:cNvPr id="20" name="pl20"/>
             <p:cNvSpPr/>
             <p:nvPr/>
           </p:nvSpPr>
           <p:spPr>
             <a:xfrm>
-              <a:off x="1172049" y="2073503"/>
-              <a:ext cx="7090630" cy="3344946"/>
+              <a:off x="6610197" y="2143092"/>
+              <a:ext cx="0" cy="1317069"/>
             </a:xfrm>
             <a:custGeom>
               <a:avLst/>
               <a:pathLst>
-                <a:path w="7090630" h="3344946">
+                <a:path w="0" h="1317069">
                   <a:moveTo>
-                    <a:pt x="356137" y="0"/>
+                    <a:pt x="0" y="1317069"/>
                   </a:moveTo>
                   <a:lnTo>
-                    <a:pt x="358112" y="3347"/>
-                  </a:lnTo>
-                  <a:lnTo>
-                    <a:pt x="429735" y="120617"/>
-                  </a:lnTo>
-                  <a:lnTo>
-                    <a:pt x="501357" y="233936"/>
-                  </a:lnTo>
-                  <a:lnTo>
-                    <a:pt x="572980" y="343436"/>
-                  </a:lnTo>
-                  <a:lnTo>
-                    <a:pt x="644602" y="449247"/>
-                  </a:lnTo>
-                  <a:lnTo>
-                    <a:pt x="716225" y="551493"/>
-                  </a:lnTo>
-                  <a:lnTo>
-                    <a:pt x="787847" y="650293"/>
-                  </a:lnTo>
-                  <a:lnTo>
-                    <a:pt x="859470" y="745765"/>
-                  </a:lnTo>
-                  <a:lnTo>
-                    <a:pt x="931092" y="838019"/>
-                  </a:lnTo>
-                  <a:lnTo>
-                    <a:pt x="1002715" y="927166"/>
-                  </a:lnTo>
-                  <a:lnTo>
-                    <a:pt x="1074337" y="1013308"/>
-                  </a:lnTo>
-                  <a:lnTo>
-                    <a:pt x="1145960" y="1096548"/>
-                  </a:lnTo>
-                  <a:lnTo>
-                    <a:pt x="1217582" y="1176983"/>
-                  </a:lnTo>
-                  <a:lnTo>
-                    <a:pt x="1289205" y="1254708"/>
-                  </a:lnTo>
-                  <a:lnTo>
-                    <a:pt x="1360827" y="1329814"/>
-                  </a:lnTo>
-                  <a:lnTo>
-                    <a:pt x="1432450" y="1402390"/>
-                  </a:lnTo>
-                  <a:lnTo>
-                    <a:pt x="1504073" y="1472520"/>
-                  </a:lnTo>
-                  <a:lnTo>
-                    <a:pt x="1575695" y="1540287"/>
-                  </a:lnTo>
-                  <a:lnTo>
-                    <a:pt x="1647318" y="1605771"/>
-                  </a:lnTo>
-                  <a:lnTo>
-                    <a:pt x="1718940" y="1669048"/>
-                  </a:lnTo>
-                  <a:lnTo>
-                    <a:pt x="1790563" y="1730193"/>
-                  </a:lnTo>
-                  <a:lnTo>
-                    <a:pt x="1862185" y="1789278"/>
-                  </a:lnTo>
-                  <a:lnTo>
-                    <a:pt x="1933808" y="1846372"/>
-                  </a:lnTo>
-                  <a:lnTo>
-                    <a:pt x="2005430" y="1901542"/>
-                  </a:lnTo>
-                  <a:lnTo>
-                    <a:pt x="2077053" y="1954854"/>
-                  </a:lnTo>
-                  <a:lnTo>
-                    <a:pt x="2148675" y="2006369"/>
-                  </a:lnTo>
-                  <a:lnTo>
-                    <a:pt x="2220298" y="2056148"/>
-                  </a:lnTo>
-                  <a:lnTo>
-                    <a:pt x="2291920" y="2104250"/>
-                  </a:lnTo>
-                  <a:lnTo>
-                    <a:pt x="2363543" y="2150732"/>
-                  </a:lnTo>
-                  <a:lnTo>
-                    <a:pt x="2435165" y="2195647"/>
-                  </a:lnTo>
-                  <a:lnTo>
-                    <a:pt x="2506788" y="2239049"/>
-                  </a:lnTo>
-                  <a:lnTo>
-                    <a:pt x="2578410" y="2280988"/>
-                  </a:lnTo>
-                  <a:lnTo>
-                    <a:pt x="2650033" y="2321514"/>
-                  </a:lnTo>
-                  <a:lnTo>
-                    <a:pt x="2721655" y="2360675"/>
-                  </a:lnTo>
-                  <a:lnTo>
-                    <a:pt x="2793278" y="2398516"/>
-                  </a:lnTo>
-                  <a:lnTo>
-                    <a:pt x="2864901" y="2435082"/>
-                  </a:lnTo>
-                  <a:lnTo>
-                    <a:pt x="2936523" y="2470416"/>
-                  </a:lnTo>
-                  <a:lnTo>
-                    <a:pt x="3008146" y="2504560"/>
-                  </a:lnTo>
-                  <a:lnTo>
-                    <a:pt x="3079768" y="2537553"/>
-                  </a:lnTo>
-                  <a:lnTo>
-                    <a:pt x="3151391" y="2569434"/>
-                  </a:lnTo>
-                  <a:lnTo>
-                    <a:pt x="3223013" y="2600242"/>
-                  </a:lnTo>
-                  <a:lnTo>
-                    <a:pt x="3294636" y="2630011"/>
-                  </a:lnTo>
-                  <a:lnTo>
-                    <a:pt x="3366258" y="2654226"/>
-                  </a:lnTo>
-                  <a:lnTo>
-                    <a:pt x="3437881" y="2653867"/>
-                  </a:lnTo>
-                  <a:lnTo>
-                    <a:pt x="3509503" y="2653508"/>
-                  </a:lnTo>
-                  <a:lnTo>
-                    <a:pt x="3581126" y="2653148"/>
-                  </a:lnTo>
-                  <a:lnTo>
-                    <a:pt x="3652748" y="2652789"/>
-                  </a:lnTo>
-                  <a:lnTo>
-                    <a:pt x="3724371" y="2652429"/>
-                  </a:lnTo>
-                  <a:lnTo>
-                    <a:pt x="3795993" y="2652069"/>
-                  </a:lnTo>
-                  <a:lnTo>
-                    <a:pt x="3867616" y="2651709"/>
-                  </a:lnTo>
-                  <a:lnTo>
-                    <a:pt x="3939238" y="2651349"/>
-                  </a:lnTo>
-                  <a:lnTo>
-                    <a:pt x="4010861" y="2650989"/>
-                  </a:lnTo>
-                  <a:lnTo>
-                    <a:pt x="4082483" y="2650628"/>
-                  </a:lnTo>
-                  <a:lnTo>
-                    <a:pt x="4154106" y="2650267"/>
-                  </a:lnTo>
-                  <a:lnTo>
-                    <a:pt x="4225729" y="2649907"/>
-                  </a:lnTo>
-                  <a:lnTo>
-                    <a:pt x="4297351" y="2649546"/>
-                  </a:lnTo>
-                  <a:lnTo>
-                    <a:pt x="4368974" y="2649185"/>
-                  </a:lnTo>
-                  <a:lnTo>
-                    <a:pt x="4440596" y="2648823"/>
-                  </a:lnTo>
-                  <a:lnTo>
-                    <a:pt x="4512219" y="2648462"/>
-                  </a:lnTo>
-                  <a:lnTo>
-                    <a:pt x="4583841" y="2648100"/>
-                  </a:lnTo>
-                  <a:lnTo>
-                    <a:pt x="4655464" y="2647739"/>
-                  </a:lnTo>
-                  <a:lnTo>
-                    <a:pt x="4727086" y="2647377"/>
-                  </a:lnTo>
-                  <a:lnTo>
-                    <a:pt x="4798709" y="2647015"/>
-                  </a:lnTo>
-                  <a:lnTo>
-                    <a:pt x="4870331" y="2646652"/>
-                  </a:lnTo>
-                  <a:lnTo>
-                    <a:pt x="4941954" y="2646290"/>
-                  </a:lnTo>
-                  <a:lnTo>
-                    <a:pt x="5013576" y="2645928"/>
-                  </a:lnTo>
-                  <a:lnTo>
-                    <a:pt x="5085199" y="2645565"/>
-                  </a:lnTo>
-                  <a:lnTo>
-                    <a:pt x="5156821" y="2645202"/>
-                  </a:lnTo>
-                  <a:lnTo>
-                    <a:pt x="5228444" y="2644839"/>
-                  </a:lnTo>
-                  <a:lnTo>
-                    <a:pt x="5300066" y="2644476"/>
-                  </a:lnTo>
-                  <a:lnTo>
-                    <a:pt x="5371689" y="2644113"/>
-                  </a:lnTo>
-                  <a:lnTo>
-                    <a:pt x="5443311" y="2643749"/>
-                  </a:lnTo>
-                  <a:lnTo>
-                    <a:pt x="5514934" y="2643386"/>
-                  </a:lnTo>
-                  <a:lnTo>
-                    <a:pt x="5586557" y="2643022"/>
-                  </a:lnTo>
-                  <a:lnTo>
-                    <a:pt x="5658179" y="2642658"/>
-                  </a:lnTo>
-                  <a:lnTo>
-                    <a:pt x="5729802" y="2642294"/>
-                  </a:lnTo>
-                  <a:lnTo>
-                    <a:pt x="5801424" y="2641929"/>
-                  </a:lnTo>
-                  <a:lnTo>
-                    <a:pt x="5873047" y="2641565"/>
-                  </a:lnTo>
-                  <a:lnTo>
-                    <a:pt x="5944669" y="2641200"/>
-                  </a:lnTo>
-                  <a:lnTo>
-                    <a:pt x="6016292" y="2640836"/>
-                  </a:lnTo>
-                  <a:lnTo>
-                    <a:pt x="6087914" y="2640471"/>
-                  </a:lnTo>
-                  <a:lnTo>
-                    <a:pt x="6159537" y="2640106"/>
-                  </a:lnTo>
-                  <a:lnTo>
-                    <a:pt x="6231159" y="2639741"/>
-                  </a:lnTo>
-                  <a:lnTo>
-                    <a:pt x="6302782" y="2639375"/>
-                  </a:lnTo>
-                  <a:lnTo>
-                    <a:pt x="6374404" y="2639010"/>
-                  </a:lnTo>
-                  <a:lnTo>
-                    <a:pt x="6446027" y="2638644"/>
-                  </a:lnTo>
-                  <a:lnTo>
-                    <a:pt x="6517649" y="2638278"/>
-                  </a:lnTo>
-                  <a:lnTo>
-                    <a:pt x="6589272" y="2637912"/>
-                  </a:lnTo>
-                  <a:lnTo>
-                    <a:pt x="6660894" y="2637546"/>
-                  </a:lnTo>
-                  <a:lnTo>
-                    <a:pt x="6732517" y="2637180"/>
-                  </a:lnTo>
-                  <a:lnTo>
-                    <a:pt x="6804139" y="2636813"/>
-                  </a:lnTo>
-                  <a:lnTo>
-                    <a:pt x="6875762" y="2636447"/>
-                  </a:lnTo>
-                  <a:lnTo>
-                    <a:pt x="6947385" y="2636080"/>
-                  </a:lnTo>
-                  <a:lnTo>
-                    <a:pt x="7019007" y="2635713"/>
-                  </a:lnTo>
-                  <a:lnTo>
-                    <a:pt x="7090630" y="2635346"/>
-                  </a:lnTo>
-                  <a:lnTo>
-                    <a:pt x="7090630" y="3344946"/>
-                  </a:lnTo>
-                  <a:lnTo>
-                    <a:pt x="7019007" y="3340106"/>
-                  </a:lnTo>
-                  <a:lnTo>
-                    <a:pt x="6947385" y="3335097"/>
-                  </a:lnTo>
-                  <a:lnTo>
-                    <a:pt x="6875762" y="3329914"/>
-                  </a:lnTo>
-                  <a:lnTo>
-                    <a:pt x="6804139" y="3324550"/>
-                  </a:lnTo>
-                  <a:lnTo>
-                    <a:pt x="6732517" y="3318999"/>
-                  </a:lnTo>
-                  <a:lnTo>
-                    <a:pt x="6660894" y="3313254"/>
-                  </a:lnTo>
-                  <a:lnTo>
-                    <a:pt x="6589272" y="3307309"/>
-                  </a:lnTo>
-                  <a:lnTo>
-                    <a:pt x="6517649" y="3301157"/>
-                  </a:lnTo>
-                  <a:lnTo>
-                    <a:pt x="6446027" y="3294790"/>
-                  </a:lnTo>
-                  <a:lnTo>
-                    <a:pt x="6374404" y="3288201"/>
-                  </a:lnTo>
-                  <a:lnTo>
-                    <a:pt x="6302782" y="3281383"/>
-                  </a:lnTo>
-                  <a:lnTo>
-                    <a:pt x="6231159" y="3274327"/>
-                  </a:lnTo>
-                  <a:lnTo>
-                    <a:pt x="6159537" y="3267024"/>
-                  </a:lnTo>
-                  <a:lnTo>
-                    <a:pt x="6087914" y="3259467"/>
-                  </a:lnTo>
-                  <a:lnTo>
-                    <a:pt x="6016292" y="3251647"/>
-                  </a:lnTo>
-                  <a:lnTo>
-                    <a:pt x="5944669" y="3243554"/>
-                  </a:lnTo>
-                  <a:lnTo>
-                    <a:pt x="5873047" y="3235178"/>
-                  </a:lnTo>
-                  <a:lnTo>
-                    <a:pt x="5801424" y="3226511"/>
-                  </a:lnTo>
-                  <a:lnTo>
-                    <a:pt x="5729802" y="3217541"/>
-                  </a:lnTo>
-                  <a:lnTo>
-                    <a:pt x="5658179" y="3208259"/>
-                  </a:lnTo>
-                  <a:lnTo>
-                    <a:pt x="5586557" y="3198653"/>
-                  </a:lnTo>
-                  <a:lnTo>
-                    <a:pt x="5514934" y="3188712"/>
-                  </a:lnTo>
-                  <a:lnTo>
-                    <a:pt x="5443311" y="3178424"/>
-                  </a:lnTo>
-                  <a:lnTo>
-                    <a:pt x="5371689" y="3167778"/>
-                  </a:lnTo>
-                  <a:lnTo>
-                    <a:pt x="5300066" y="3156760"/>
-                  </a:lnTo>
-                  <a:lnTo>
-                    <a:pt x="5228444" y="3145359"/>
-                  </a:lnTo>
-                  <a:lnTo>
-                    <a:pt x="5156821" y="3133559"/>
-                  </a:lnTo>
-                  <a:lnTo>
-                    <a:pt x="5085199" y="3121348"/>
-                  </a:lnTo>
-                  <a:lnTo>
-                    <a:pt x="5013576" y="3108712"/>
-                  </a:lnTo>
-                  <a:lnTo>
-                    <a:pt x="4941954" y="3095635"/>
-                  </a:lnTo>
-                  <a:lnTo>
-                    <a:pt x="4870331" y="3082102"/>
-                  </a:lnTo>
-                  <a:lnTo>
-                    <a:pt x="4798709" y="3068096"/>
-                  </a:lnTo>
-                  <a:lnTo>
-                    <a:pt x="4727086" y="3053603"/>
-                  </a:lnTo>
-                  <a:lnTo>
-                    <a:pt x="4655464" y="3038604"/>
-                  </a:lnTo>
-                  <a:lnTo>
-                    <a:pt x="4583841" y="3023082"/>
-                  </a:lnTo>
-                  <a:lnTo>
-                    <a:pt x="4512219" y="3007019"/>
-                  </a:lnTo>
-                  <a:lnTo>
-                    <a:pt x="4440596" y="2990396"/>
-                  </a:lnTo>
-                  <a:lnTo>
-                    <a:pt x="4368974" y="2973193"/>
-                  </a:lnTo>
-                  <a:lnTo>
-                    <a:pt x="4297351" y="2955391"/>
-                  </a:lnTo>
-                  <a:lnTo>
-                    <a:pt x="4225729" y="2936967"/>
-                  </a:lnTo>
-                  <a:lnTo>
-                    <a:pt x="4154106" y="2917902"/>
-                  </a:lnTo>
-                  <a:lnTo>
-                    <a:pt x="4082483" y="2898171"/>
-                  </a:lnTo>
-                  <a:lnTo>
-                    <a:pt x="4010861" y="2877752"/>
-                  </a:lnTo>
-                  <a:lnTo>
-                    <a:pt x="3939238" y="2856622"/>
-                  </a:lnTo>
-                  <a:lnTo>
-                    <a:pt x="3867616" y="2834754"/>
-                  </a:lnTo>
-                  <a:lnTo>
-                    <a:pt x="3795993" y="2812125"/>
-                  </a:lnTo>
-                  <a:lnTo>
-                    <a:pt x="3724371" y="2788706"/>
-                  </a:lnTo>
-                  <a:lnTo>
-                    <a:pt x="3652748" y="2764470"/>
-                  </a:lnTo>
-                  <a:lnTo>
-                    <a:pt x="3581126" y="2739389"/>
-                  </a:lnTo>
-                  <a:lnTo>
-                    <a:pt x="3509503" y="2713434"/>
-                  </a:lnTo>
-                  <a:lnTo>
-                    <a:pt x="3437881" y="2686574"/>
-                  </a:lnTo>
-                  <a:lnTo>
-                    <a:pt x="3366258" y="2658777"/>
-                  </a:lnTo>
-                  <a:lnTo>
-                    <a:pt x="3294636" y="2654585"/>
-                  </a:lnTo>
-                  <a:lnTo>
-                    <a:pt x="3223013" y="2654944"/>
-                  </a:lnTo>
-                  <a:lnTo>
-                    <a:pt x="3151391" y="2655302"/>
-                  </a:lnTo>
-                  <a:lnTo>
-                    <a:pt x="3079768" y="2655661"/>
-                  </a:lnTo>
-                  <a:lnTo>
-                    <a:pt x="3008146" y="2656019"/>
-                  </a:lnTo>
-                  <a:lnTo>
-                    <a:pt x="2936523" y="2656377"/>
-                  </a:lnTo>
-                  <a:lnTo>
-                    <a:pt x="2864901" y="2656735"/>
-                  </a:lnTo>
-                  <a:lnTo>
-                    <a:pt x="2793278" y="2657093"/>
-                  </a:lnTo>
-                  <a:lnTo>
-                    <a:pt x="2721655" y="2657451"/>
-                  </a:lnTo>
-                  <a:lnTo>
-                    <a:pt x="2650033" y="2657808"/>
-                  </a:lnTo>
-                  <a:lnTo>
-                    <a:pt x="2578410" y="2658166"/>
-                  </a:lnTo>
-                  <a:lnTo>
-                    <a:pt x="2506788" y="2658523"/>
-                  </a:lnTo>
-                  <a:lnTo>
-                    <a:pt x="2435165" y="2658880"/>
-                  </a:lnTo>
-                  <a:lnTo>
-                    <a:pt x="2363543" y="2659237"/>
-                  </a:lnTo>
-                  <a:lnTo>
-                    <a:pt x="2291920" y="2659594"/>
-                  </a:lnTo>
-                  <a:lnTo>
-                    <a:pt x="2220298" y="2659950"/>
-                  </a:lnTo>
-                  <a:lnTo>
-                    <a:pt x="2148675" y="2660307"/>
-                  </a:lnTo>
-                  <a:lnTo>
-                    <a:pt x="2077053" y="2660663"/>
-                  </a:lnTo>
-                  <a:lnTo>
-                    <a:pt x="2005430" y="2661019"/>
-                  </a:lnTo>
-                  <a:lnTo>
-                    <a:pt x="1933808" y="2661375"/>
-                  </a:lnTo>
-                  <a:lnTo>
-                    <a:pt x="1862185" y="2661731"/>
-                  </a:lnTo>
-                  <a:lnTo>
-                    <a:pt x="1790563" y="2662087"/>
-                  </a:lnTo>
-                  <a:lnTo>
-                    <a:pt x="1718940" y="2662442"/>
-                  </a:lnTo>
-                  <a:lnTo>
-                    <a:pt x="1647318" y="2662798"/>
-                  </a:lnTo>
-                  <a:lnTo>
-                    <a:pt x="1575695" y="2663153"/>
-                  </a:lnTo>
-                  <a:lnTo>
-                    <a:pt x="1504073" y="2663508"/>
-                  </a:lnTo>
-                  <a:lnTo>
-                    <a:pt x="1432450" y="2663863"/>
-                  </a:lnTo>
-                  <a:lnTo>
-                    <a:pt x="1360827" y="2664217"/>
-                  </a:lnTo>
-                  <a:lnTo>
-                    <a:pt x="1289205" y="2664572"/>
-                  </a:lnTo>
-                  <a:lnTo>
-                    <a:pt x="1217582" y="2664927"/>
-                  </a:lnTo>
-                  <a:lnTo>
-                    <a:pt x="1145960" y="2665281"/>
-                  </a:lnTo>
-                  <a:lnTo>
-                    <a:pt x="1074337" y="2665635"/>
-                  </a:lnTo>
-                  <a:lnTo>
-                    <a:pt x="1002715" y="2665989"/>
-                  </a:lnTo>
-                  <a:lnTo>
-                    <a:pt x="931092" y="2666343"/>
-                  </a:lnTo>
-                  <a:lnTo>
-                    <a:pt x="859470" y="2666697"/>
-                  </a:lnTo>
-                  <a:lnTo>
-                    <a:pt x="787847" y="2667050"/>
-                  </a:lnTo>
-                  <a:lnTo>
-                    <a:pt x="716225" y="2667403"/>
-                  </a:lnTo>
-                  <a:lnTo>
-                    <a:pt x="644602" y="2667757"/>
-                  </a:lnTo>
-                  <a:lnTo>
-                    <a:pt x="572980" y="2668110"/>
-                  </a:lnTo>
-                  <a:lnTo>
-                    <a:pt x="501357" y="2668463"/>
-                  </a:lnTo>
-                  <a:lnTo>
-                    <a:pt x="429735" y="2668815"/>
-                  </a:lnTo>
-                  <a:lnTo>
-                    <a:pt x="358112" y="2669168"/>
-                  </a:lnTo>
-                  <a:lnTo>
-                    <a:pt x="286490" y="2669521"/>
-                  </a:lnTo>
-                  <a:lnTo>
-                    <a:pt x="214867" y="2669873"/>
-                  </a:lnTo>
-                  <a:lnTo>
-                    <a:pt x="143245" y="2670225"/>
-                  </a:lnTo>
-                  <a:lnTo>
-                    <a:pt x="71622" y="2670577"/>
-                  </a:lnTo>
-                  <a:lnTo>
-                    <a:pt x="0" y="2670929"/>
+                    <a:pt x="0" y="0"/>
+                  </a:lnTo>
+                  <a:lnTo>
+                    <a:pt x="0" y="0"/>
+                  </a:lnTo>
+                </a:path>
+              </a:pathLst>
+            </a:custGeom>
+            <a:ln w="13550" cap="flat">
+              <a:solidFill>
+                <a:srgbClr val="EBEBEB">
+                  <a:alpha val="100000"/>
+                </a:srgbClr>
+              </a:solidFill>
+              <a:prstDash val="solid"/>
+              <a:round/>
+            </a:ln>
+          </p:spPr>
+          <p:txBody>
+            <a:bodyPr/>
+            <a:lstStyle/>
+            <a:p/>
+          </p:txBody>
+        </p:sp>
+        <p:sp>
+          <p:nvSpPr>
+            <p:cNvPr id="21" name="pg21"/>
+            <p:cNvSpPr/>
+            <p:nvPr/>
+          </p:nvSpPr>
+          <p:spPr>
+            <a:xfrm>
+              <a:off x="1235312" y="2143092"/>
+              <a:ext cx="6964104" cy="1207112"/>
+            </a:xfrm>
+            <a:custGeom>
+              <a:avLst/>
+              <a:pathLst>
+                <a:path w="6964104" h="1207112">
+                  <a:moveTo>
+                    <a:pt x="349782" y="0"/>
+                  </a:moveTo>
+                  <a:lnTo>
+                    <a:pt x="351722" y="1208"/>
+                  </a:lnTo>
+                  <a:lnTo>
+                    <a:pt x="422066" y="43528"/>
+                  </a:lnTo>
+                  <a:lnTo>
+                    <a:pt x="492411" y="84422"/>
+                  </a:lnTo>
+                  <a:lnTo>
+                    <a:pt x="562755" y="123938"/>
+                  </a:lnTo>
+                  <a:lnTo>
+                    <a:pt x="633100" y="162122"/>
+                  </a:lnTo>
+                  <a:lnTo>
+                    <a:pt x="703444" y="199020"/>
+                  </a:lnTo>
+                  <a:lnTo>
+                    <a:pt x="773789" y="234675"/>
+                  </a:lnTo>
+                  <a:lnTo>
+                    <a:pt x="844133" y="269129"/>
+                  </a:lnTo>
+                  <a:lnTo>
+                    <a:pt x="914478" y="302421"/>
+                  </a:lnTo>
+                  <a:lnTo>
+                    <a:pt x="984822" y="334592"/>
+                  </a:lnTo>
+                  <a:lnTo>
+                    <a:pt x="1055167" y="365679"/>
+                  </a:lnTo>
+                  <a:lnTo>
+                    <a:pt x="1125511" y="395718"/>
+                  </a:lnTo>
+                  <a:lnTo>
+                    <a:pt x="1195856" y="424745"/>
+                  </a:lnTo>
+                  <a:lnTo>
+                    <a:pt x="1266200" y="452794"/>
+                  </a:lnTo>
+                  <a:lnTo>
+                    <a:pt x="1336545" y="479898"/>
+                  </a:lnTo>
+                  <a:lnTo>
+                    <a:pt x="1406889" y="506089"/>
+                  </a:lnTo>
+                  <a:lnTo>
+                    <a:pt x="1477234" y="531397"/>
+                  </a:lnTo>
+                  <a:lnTo>
+                    <a:pt x="1547578" y="555853"/>
+                  </a:lnTo>
+                  <a:lnTo>
+                    <a:pt x="1617923" y="579485"/>
+                  </a:lnTo>
+                  <a:lnTo>
+                    <a:pt x="1688267" y="602320"/>
+                  </a:lnTo>
+                  <a:lnTo>
+                    <a:pt x="1758612" y="624386"/>
+                  </a:lnTo>
+                  <a:lnTo>
+                    <a:pt x="1828956" y="645708"/>
+                  </a:lnTo>
+                  <a:lnTo>
+                    <a:pt x="1899301" y="666312"/>
+                  </a:lnTo>
+                  <a:lnTo>
+                    <a:pt x="1969645" y="686222"/>
+                  </a:lnTo>
+                  <a:lnTo>
+                    <a:pt x="2039990" y="705460"/>
+                  </a:lnTo>
+                  <a:lnTo>
+                    <a:pt x="2110334" y="724051"/>
+                  </a:lnTo>
+                  <a:lnTo>
+                    <a:pt x="2180679" y="742015"/>
+                  </a:lnTo>
+                  <a:lnTo>
+                    <a:pt x="2251023" y="759374"/>
+                  </a:lnTo>
+                  <a:lnTo>
+                    <a:pt x="2321368" y="776148"/>
+                  </a:lnTo>
+                  <a:lnTo>
+                    <a:pt x="2391712" y="792357"/>
+                  </a:lnTo>
+                  <a:lnTo>
+                    <a:pt x="2462057" y="808020"/>
+                  </a:lnTo>
+                  <a:lnTo>
+                    <a:pt x="2532401" y="823155"/>
+                  </a:lnTo>
+                  <a:lnTo>
+                    <a:pt x="2602746" y="837780"/>
+                  </a:lnTo>
+                  <a:lnTo>
+                    <a:pt x="2673090" y="851912"/>
+                  </a:lnTo>
+                  <a:lnTo>
+                    <a:pt x="2743435" y="865568"/>
+                  </a:lnTo>
+                  <a:lnTo>
+                    <a:pt x="2813779" y="878764"/>
+                  </a:lnTo>
+                  <a:lnTo>
+                    <a:pt x="2884124" y="891515"/>
+                  </a:lnTo>
+                  <a:lnTo>
+                    <a:pt x="2954468" y="903836"/>
+                  </a:lnTo>
+                  <a:lnTo>
+                    <a:pt x="3024813" y="915743"/>
+                  </a:lnTo>
+                  <a:lnTo>
+                    <a:pt x="3095157" y="927248"/>
+                  </a:lnTo>
+                  <a:lnTo>
+                    <a:pt x="3165502" y="938366"/>
+                  </a:lnTo>
+                  <a:lnTo>
+                    <a:pt x="3235846" y="949109"/>
+                  </a:lnTo>
+                  <a:lnTo>
+                    <a:pt x="3306191" y="957847"/>
+                  </a:lnTo>
+                  <a:lnTo>
+                    <a:pt x="3376535" y="957718"/>
+                  </a:lnTo>
+                  <a:lnTo>
+                    <a:pt x="3446880" y="957588"/>
+                  </a:lnTo>
+                  <a:lnTo>
+                    <a:pt x="3517224" y="957458"/>
+                  </a:lnTo>
+                  <a:lnTo>
+                    <a:pt x="3587569" y="957329"/>
+                  </a:lnTo>
+                  <a:lnTo>
+                    <a:pt x="3657913" y="957199"/>
+                  </a:lnTo>
+                  <a:lnTo>
+                    <a:pt x="3728257" y="957069"/>
+                  </a:lnTo>
+                  <a:lnTo>
+                    <a:pt x="3798602" y="956939"/>
+                  </a:lnTo>
+                  <a:lnTo>
+                    <a:pt x="3868946" y="956809"/>
+                  </a:lnTo>
+                  <a:lnTo>
+                    <a:pt x="3939291" y="956679"/>
+                  </a:lnTo>
+                  <a:lnTo>
+                    <a:pt x="4009635" y="956549"/>
+                  </a:lnTo>
+                  <a:lnTo>
+                    <a:pt x="4079980" y="956419"/>
+                  </a:lnTo>
+                  <a:lnTo>
+                    <a:pt x="4150324" y="956289"/>
+                  </a:lnTo>
+                  <a:lnTo>
+                    <a:pt x="4220669" y="956158"/>
+                  </a:lnTo>
+                  <a:lnTo>
+                    <a:pt x="4291013" y="956028"/>
+                  </a:lnTo>
+                  <a:lnTo>
+                    <a:pt x="4361358" y="955898"/>
+                  </a:lnTo>
+                  <a:lnTo>
+                    <a:pt x="4431702" y="955767"/>
+                  </a:lnTo>
+                  <a:lnTo>
+                    <a:pt x="4502047" y="955637"/>
+                  </a:lnTo>
+                  <a:lnTo>
+                    <a:pt x="4572391" y="955506"/>
+                  </a:lnTo>
+                  <a:lnTo>
+                    <a:pt x="4642736" y="955376"/>
+                  </a:lnTo>
+                  <a:lnTo>
+                    <a:pt x="4713080" y="955245"/>
+                  </a:lnTo>
+                  <a:lnTo>
+                    <a:pt x="4783425" y="955114"/>
+                  </a:lnTo>
+                  <a:lnTo>
+                    <a:pt x="4853769" y="954984"/>
+                  </a:lnTo>
+                  <a:lnTo>
+                    <a:pt x="4924114" y="954853"/>
+                  </a:lnTo>
+                  <a:lnTo>
+                    <a:pt x="4994458" y="954722"/>
+                  </a:lnTo>
+                  <a:lnTo>
+                    <a:pt x="5064803" y="954591"/>
+                  </a:lnTo>
+                  <a:lnTo>
+                    <a:pt x="5135147" y="954460"/>
+                  </a:lnTo>
+                  <a:lnTo>
+                    <a:pt x="5205492" y="954329"/>
+                  </a:lnTo>
+                  <a:lnTo>
+                    <a:pt x="5275836" y="954198"/>
+                  </a:lnTo>
+                  <a:lnTo>
+                    <a:pt x="5346181" y="954067"/>
+                  </a:lnTo>
+                  <a:lnTo>
+                    <a:pt x="5416525" y="953935"/>
+                  </a:lnTo>
+                  <a:lnTo>
+                    <a:pt x="5486870" y="953804"/>
+                  </a:lnTo>
+                  <a:lnTo>
+                    <a:pt x="5557214" y="953673"/>
+                  </a:lnTo>
+                  <a:lnTo>
+                    <a:pt x="5627559" y="953541"/>
+                  </a:lnTo>
+                  <a:lnTo>
+                    <a:pt x="5697903" y="953410"/>
+                  </a:lnTo>
+                  <a:lnTo>
+                    <a:pt x="5768248" y="953278"/>
+                  </a:lnTo>
+                  <a:lnTo>
+                    <a:pt x="5838592" y="953147"/>
+                  </a:lnTo>
+                  <a:lnTo>
+                    <a:pt x="5908937" y="953015"/>
+                  </a:lnTo>
+                  <a:lnTo>
+                    <a:pt x="5979281" y="952884"/>
+                  </a:lnTo>
+                  <a:lnTo>
+                    <a:pt x="6049626" y="952752"/>
+                  </a:lnTo>
+                  <a:lnTo>
+                    <a:pt x="6119970" y="952620"/>
+                  </a:lnTo>
+                  <a:lnTo>
+                    <a:pt x="6190315" y="952488"/>
+                  </a:lnTo>
+                  <a:lnTo>
+                    <a:pt x="6260659" y="952356"/>
+                  </a:lnTo>
+                  <a:lnTo>
+                    <a:pt x="6331004" y="952224"/>
+                  </a:lnTo>
+                  <a:lnTo>
+                    <a:pt x="6401348" y="952092"/>
+                  </a:lnTo>
+                  <a:lnTo>
+                    <a:pt x="6471693" y="951960"/>
+                  </a:lnTo>
+                  <a:lnTo>
+                    <a:pt x="6542037" y="951828"/>
+                  </a:lnTo>
+                  <a:lnTo>
+                    <a:pt x="6612382" y="951696"/>
+                  </a:lnTo>
+                  <a:lnTo>
+                    <a:pt x="6682726" y="951564"/>
+                  </a:lnTo>
+                  <a:lnTo>
+                    <a:pt x="6753071" y="951431"/>
+                  </a:lnTo>
+                  <a:lnTo>
+                    <a:pt x="6823415" y="951299"/>
+                  </a:lnTo>
+                  <a:lnTo>
+                    <a:pt x="6893760" y="951167"/>
+                  </a:lnTo>
+                  <a:lnTo>
+                    <a:pt x="6964104" y="951034"/>
+                  </a:lnTo>
+                  <a:lnTo>
+                    <a:pt x="6964104" y="1207112"/>
+                  </a:lnTo>
+                  <a:lnTo>
+                    <a:pt x="6893760" y="1205365"/>
+                  </a:lnTo>
+                  <a:lnTo>
+                    <a:pt x="6823415" y="1203558"/>
+                  </a:lnTo>
+                  <a:lnTo>
+                    <a:pt x="6753071" y="1201687"/>
+                  </a:lnTo>
+                  <a:lnTo>
+                    <a:pt x="6682726" y="1199752"/>
+                  </a:lnTo>
+                  <a:lnTo>
+                    <a:pt x="6612382" y="1197748"/>
+                  </a:lnTo>
+                  <a:lnTo>
+                    <a:pt x="6542037" y="1195675"/>
+                  </a:lnTo>
+                  <a:lnTo>
+                    <a:pt x="6471693" y="1193530"/>
+                  </a:lnTo>
+                  <a:lnTo>
+                    <a:pt x="6401348" y="1191310"/>
+                  </a:lnTo>
+                  <a:lnTo>
+                    <a:pt x="6331004" y="1189012"/>
+                  </a:lnTo>
+                  <a:lnTo>
+                    <a:pt x="6260659" y="1186634"/>
+                  </a:lnTo>
+                  <a:lnTo>
+                    <a:pt x="6190315" y="1184174"/>
+                  </a:lnTo>
+                  <a:lnTo>
+                    <a:pt x="6119970" y="1181627"/>
+                  </a:lnTo>
+                  <a:lnTo>
+                    <a:pt x="6049626" y="1178992"/>
+                  </a:lnTo>
+                  <a:lnTo>
+                    <a:pt x="5979281" y="1176265"/>
+                  </a:lnTo>
+                  <a:lnTo>
+                    <a:pt x="5908937" y="1173443"/>
+                  </a:lnTo>
+                  <a:lnTo>
+                    <a:pt x="5838592" y="1170522"/>
+                  </a:lnTo>
+                  <a:lnTo>
+                    <a:pt x="5768248" y="1167499"/>
+                  </a:lnTo>
+                  <a:lnTo>
+                    <a:pt x="5697903" y="1164372"/>
+                  </a:lnTo>
+                  <a:lnTo>
+                    <a:pt x="5627559" y="1161135"/>
+                  </a:lnTo>
+                  <a:lnTo>
+                    <a:pt x="5557214" y="1157785"/>
+                  </a:lnTo>
+                  <a:lnTo>
+                    <a:pt x="5486870" y="1154318"/>
+                  </a:lnTo>
+                  <a:lnTo>
+                    <a:pt x="5416525" y="1150731"/>
+                  </a:lnTo>
+                  <a:lnTo>
+                    <a:pt x="5346181" y="1147018"/>
+                  </a:lnTo>
+                  <a:lnTo>
+                    <a:pt x="5275836" y="1143176"/>
+                  </a:lnTo>
+                  <a:lnTo>
+                    <a:pt x="5205492" y="1139200"/>
+                  </a:lnTo>
+                  <a:lnTo>
+                    <a:pt x="5135147" y="1135086"/>
+                  </a:lnTo>
+                  <a:lnTo>
+                    <a:pt x="5064803" y="1130827"/>
+                  </a:lnTo>
+                  <a:lnTo>
+                    <a:pt x="4994458" y="1126421"/>
+                  </a:lnTo>
+                  <a:lnTo>
+                    <a:pt x="4924114" y="1121861"/>
+                  </a:lnTo>
+                  <a:lnTo>
+                    <a:pt x="4853769" y="1117141"/>
+                  </a:lnTo>
+                  <a:lnTo>
+                    <a:pt x="4783425" y="1112258"/>
+                  </a:lnTo>
+                  <a:lnTo>
+                    <a:pt x="4713080" y="1107204"/>
+                  </a:lnTo>
+                  <a:lnTo>
+                    <a:pt x="4642736" y="1101973"/>
+                  </a:lnTo>
+                  <a:lnTo>
+                    <a:pt x="4572391" y="1096560"/>
+                  </a:lnTo>
+                  <a:lnTo>
+                    <a:pt x="4502047" y="1090959"/>
+                  </a:lnTo>
+                  <a:lnTo>
+                    <a:pt x="4431702" y="1085162"/>
+                  </a:lnTo>
+                  <a:lnTo>
+                    <a:pt x="4361358" y="1079163"/>
+                  </a:lnTo>
+                  <a:lnTo>
+                    <a:pt x="4291013" y="1072955"/>
+                  </a:lnTo>
+                  <a:lnTo>
+                    <a:pt x="4220669" y="1066531"/>
+                  </a:lnTo>
+                  <a:lnTo>
+                    <a:pt x="4150324" y="1059882"/>
+                  </a:lnTo>
+                  <a:lnTo>
+                    <a:pt x="4079980" y="1053002"/>
+                  </a:lnTo>
+                  <a:lnTo>
+                    <a:pt x="4009635" y="1045881"/>
+                  </a:lnTo>
+                  <a:lnTo>
+                    <a:pt x="3939291" y="1038513"/>
+                  </a:lnTo>
+                  <a:lnTo>
+                    <a:pt x="3868946" y="1030887"/>
+                  </a:lnTo>
+                  <a:lnTo>
+                    <a:pt x="3798602" y="1022996"/>
+                  </a:lnTo>
+                  <a:lnTo>
+                    <a:pt x="3728257" y="1014829"/>
+                  </a:lnTo>
+                  <a:lnTo>
+                    <a:pt x="3657913" y="1006378"/>
+                  </a:lnTo>
+                  <a:lnTo>
+                    <a:pt x="3587569" y="997632"/>
+                  </a:lnTo>
+                  <a:lnTo>
+                    <a:pt x="3517224" y="988581"/>
+                  </a:lnTo>
+                  <a:lnTo>
+                    <a:pt x="3446880" y="979214"/>
+                  </a:lnTo>
+                  <a:lnTo>
+                    <a:pt x="3376535" y="969521"/>
+                  </a:lnTo>
+                  <a:lnTo>
+                    <a:pt x="3306191" y="959490"/>
+                  </a:lnTo>
+                  <a:lnTo>
+                    <a:pt x="3235846" y="957977"/>
+                  </a:lnTo>
+                  <a:lnTo>
+                    <a:pt x="3165502" y="958106"/>
+                  </a:lnTo>
+                  <a:lnTo>
+                    <a:pt x="3095157" y="958236"/>
+                  </a:lnTo>
+                  <a:lnTo>
+                    <a:pt x="3024813" y="958365"/>
+                  </a:lnTo>
+                  <a:lnTo>
+                    <a:pt x="2954468" y="958494"/>
+                  </a:lnTo>
+                  <a:lnTo>
+                    <a:pt x="2884124" y="958624"/>
+                  </a:lnTo>
+                  <a:lnTo>
+                    <a:pt x="2813779" y="958753"/>
+                  </a:lnTo>
+                  <a:lnTo>
+                    <a:pt x="2743435" y="958882"/>
+                  </a:lnTo>
+                  <a:lnTo>
+                    <a:pt x="2673090" y="959011"/>
+                  </a:lnTo>
+                  <a:lnTo>
+                    <a:pt x="2602746" y="959140"/>
+                  </a:lnTo>
+                  <a:lnTo>
+                    <a:pt x="2532401" y="959269"/>
+                  </a:lnTo>
+                  <a:lnTo>
+                    <a:pt x="2462057" y="959398"/>
+                  </a:lnTo>
+                  <a:lnTo>
+                    <a:pt x="2391712" y="959527"/>
+                  </a:lnTo>
+                  <a:lnTo>
+                    <a:pt x="2321368" y="959656"/>
+                  </a:lnTo>
+                  <a:lnTo>
+                    <a:pt x="2251023" y="959784"/>
+                  </a:lnTo>
+                  <a:lnTo>
+                    <a:pt x="2180679" y="959913"/>
+                  </a:lnTo>
+                  <a:lnTo>
+                    <a:pt x="2110334" y="960042"/>
+                  </a:lnTo>
+                  <a:lnTo>
+                    <a:pt x="2039990" y="960170"/>
+                  </a:lnTo>
+                  <a:lnTo>
+                    <a:pt x="1969645" y="960299"/>
+                  </a:lnTo>
+                  <a:lnTo>
+                    <a:pt x="1899301" y="960427"/>
+                  </a:lnTo>
+                  <a:lnTo>
+                    <a:pt x="1828956" y="960556"/>
+                  </a:lnTo>
+                  <a:lnTo>
+                    <a:pt x="1758612" y="960684"/>
+                  </a:lnTo>
+                  <a:lnTo>
+                    <a:pt x="1688267" y="960812"/>
+                  </a:lnTo>
+                  <a:lnTo>
+                    <a:pt x="1617923" y="960941"/>
+                  </a:lnTo>
+                  <a:lnTo>
+                    <a:pt x="1547578" y="961069"/>
+                  </a:lnTo>
+                  <a:lnTo>
+                    <a:pt x="1477234" y="961197"/>
+                  </a:lnTo>
+                  <a:lnTo>
+                    <a:pt x="1406889" y="961325"/>
+                  </a:lnTo>
+                  <a:lnTo>
+                    <a:pt x="1336545" y="961453"/>
+                  </a:lnTo>
+                  <a:lnTo>
+                    <a:pt x="1266200" y="961581"/>
+                  </a:lnTo>
+                  <a:lnTo>
+                    <a:pt x="1195856" y="961709"/>
+                  </a:lnTo>
+                  <a:lnTo>
+                    <a:pt x="1125511" y="961837"/>
+                  </a:lnTo>
+                  <a:lnTo>
+                    <a:pt x="1055167" y="961965"/>
+                  </a:lnTo>
+                  <a:lnTo>
+                    <a:pt x="984822" y="962092"/>
+                  </a:lnTo>
+                  <a:lnTo>
+                    <a:pt x="914478" y="962220"/>
+                  </a:lnTo>
+                  <a:lnTo>
+                    <a:pt x="844133" y="962348"/>
+                  </a:lnTo>
+                  <a:lnTo>
+                    <a:pt x="773789" y="962475"/>
+                  </a:lnTo>
+                  <a:lnTo>
+                    <a:pt x="703444" y="962603"/>
+                  </a:lnTo>
+                  <a:lnTo>
+                    <a:pt x="633100" y="962730"/>
+                  </a:lnTo>
+                  <a:lnTo>
+                    <a:pt x="562755" y="962858"/>
+                  </a:lnTo>
+                  <a:lnTo>
+                    <a:pt x="492411" y="962985"/>
+                  </a:lnTo>
+                  <a:lnTo>
+                    <a:pt x="422066" y="963112"/>
+                  </a:lnTo>
+                  <a:lnTo>
+                    <a:pt x="351722" y="963240"/>
+                  </a:lnTo>
+                  <a:lnTo>
+                    <a:pt x="281377" y="963367"/>
+                  </a:lnTo>
+                  <a:lnTo>
+                    <a:pt x="211033" y="963494"/>
+                  </a:lnTo>
+                  <a:lnTo>
+                    <a:pt x="140688" y="963621"/>
+                  </a:lnTo>
+                  <a:lnTo>
+                    <a:pt x="70344" y="963748"/>
+                  </a:lnTo>
+                  <a:lnTo>
+                    <a:pt x="0" y="963875"/>
                   </a:lnTo>
                   <a:close/>
                 </a:path>
@@ -3572,631 +3607,306 @@
         </p:sp>
         <p:sp>
           <p:nvSpPr>
-            <p:cNvPr id="21" name="pl21"/>
-            <p:cNvSpPr/>
-            <p:nvPr/>
-          </p:nvSpPr>
-          <p:spPr>
-            <a:xfrm>
-              <a:off x="1528186" y="2073503"/>
-              <a:ext cx="6734493" cy="2654226"/>
-            </a:xfrm>
-            <a:custGeom>
-              <a:avLst/>
-              <a:pathLst>
-                <a:path w="6734493" h="2654226">
-                  <a:moveTo>
-                    <a:pt x="0" y="0"/>
-                  </a:moveTo>
-                  <a:lnTo>
-                    <a:pt x="1975" y="3347"/>
-                  </a:lnTo>
-                  <a:lnTo>
-                    <a:pt x="73598" y="120617"/>
-                  </a:lnTo>
-                  <a:lnTo>
-                    <a:pt x="145220" y="233936"/>
-                  </a:lnTo>
-                  <a:lnTo>
-                    <a:pt x="216843" y="343436"/>
-                  </a:lnTo>
-                  <a:lnTo>
-                    <a:pt x="288465" y="449247"/>
-                  </a:lnTo>
-                  <a:lnTo>
-                    <a:pt x="360088" y="551493"/>
-                  </a:lnTo>
-                  <a:lnTo>
-                    <a:pt x="431710" y="650293"/>
-                  </a:lnTo>
-                  <a:lnTo>
-                    <a:pt x="503333" y="745765"/>
-                  </a:lnTo>
-                  <a:lnTo>
-                    <a:pt x="574955" y="838019"/>
-                  </a:lnTo>
-                  <a:lnTo>
-                    <a:pt x="646578" y="927166"/>
-                  </a:lnTo>
-                  <a:lnTo>
-                    <a:pt x="718200" y="1013308"/>
-                  </a:lnTo>
-                  <a:lnTo>
-                    <a:pt x="789823" y="1096548"/>
-                  </a:lnTo>
-                  <a:lnTo>
-                    <a:pt x="861445" y="1176983"/>
-                  </a:lnTo>
-                  <a:lnTo>
-                    <a:pt x="933068" y="1254708"/>
-                  </a:lnTo>
-                  <a:lnTo>
-                    <a:pt x="1004690" y="1329814"/>
-                  </a:lnTo>
-                  <a:lnTo>
-                    <a:pt x="1076313" y="1402390"/>
-                  </a:lnTo>
-                  <a:lnTo>
-                    <a:pt x="1147936" y="1472520"/>
-                  </a:lnTo>
-                  <a:lnTo>
-                    <a:pt x="1219558" y="1540287"/>
-                  </a:lnTo>
-                  <a:lnTo>
-                    <a:pt x="1291181" y="1605771"/>
-                  </a:lnTo>
-                  <a:lnTo>
-                    <a:pt x="1362803" y="1669048"/>
-                  </a:lnTo>
-                  <a:lnTo>
-                    <a:pt x="1434426" y="1730193"/>
-                  </a:lnTo>
-                  <a:lnTo>
-                    <a:pt x="1506048" y="1789278"/>
-                  </a:lnTo>
-                  <a:lnTo>
-                    <a:pt x="1577671" y="1846372"/>
-                  </a:lnTo>
-                  <a:lnTo>
-                    <a:pt x="1649293" y="1901542"/>
-                  </a:lnTo>
-                  <a:lnTo>
-                    <a:pt x="1720916" y="1954854"/>
-                  </a:lnTo>
-                  <a:lnTo>
-                    <a:pt x="1792538" y="2006369"/>
-                  </a:lnTo>
-                  <a:lnTo>
-                    <a:pt x="1864161" y="2056148"/>
-                  </a:lnTo>
-                  <a:lnTo>
-                    <a:pt x="1935783" y="2104250"/>
-                  </a:lnTo>
-                  <a:lnTo>
-                    <a:pt x="2007406" y="2150732"/>
-                  </a:lnTo>
-                  <a:lnTo>
-                    <a:pt x="2079028" y="2195647"/>
-                  </a:lnTo>
-                  <a:lnTo>
-                    <a:pt x="2150651" y="2239049"/>
-                  </a:lnTo>
-                  <a:lnTo>
-                    <a:pt x="2222273" y="2280988"/>
-                  </a:lnTo>
-                  <a:lnTo>
-                    <a:pt x="2293896" y="2321514"/>
-                  </a:lnTo>
-                  <a:lnTo>
-                    <a:pt x="2365518" y="2360675"/>
-                  </a:lnTo>
-                  <a:lnTo>
-                    <a:pt x="2437141" y="2398516"/>
-                  </a:lnTo>
-                  <a:lnTo>
-                    <a:pt x="2508764" y="2435082"/>
-                  </a:lnTo>
-                  <a:lnTo>
-                    <a:pt x="2580386" y="2470416"/>
-                  </a:lnTo>
-                  <a:lnTo>
-                    <a:pt x="2652009" y="2504560"/>
-                  </a:lnTo>
-                  <a:lnTo>
-                    <a:pt x="2723631" y="2537553"/>
-                  </a:lnTo>
-                  <a:lnTo>
-                    <a:pt x="2795254" y="2569434"/>
-                  </a:lnTo>
-                  <a:lnTo>
-                    <a:pt x="2866876" y="2600242"/>
-                  </a:lnTo>
-                  <a:lnTo>
-                    <a:pt x="2938499" y="2630011"/>
-                  </a:lnTo>
-                  <a:lnTo>
-                    <a:pt x="3010121" y="2654226"/>
-                  </a:lnTo>
-                  <a:lnTo>
-                    <a:pt x="3081744" y="2653867"/>
-                  </a:lnTo>
-                  <a:lnTo>
-                    <a:pt x="3153366" y="2653508"/>
-                  </a:lnTo>
-                  <a:lnTo>
-                    <a:pt x="3224989" y="2653148"/>
-                  </a:lnTo>
-                  <a:lnTo>
-                    <a:pt x="3296611" y="2652789"/>
-                  </a:lnTo>
-                  <a:lnTo>
-                    <a:pt x="3368234" y="2652429"/>
-                  </a:lnTo>
-                  <a:lnTo>
-                    <a:pt x="3439856" y="2652069"/>
-                  </a:lnTo>
-                  <a:lnTo>
-                    <a:pt x="3511479" y="2651709"/>
-                  </a:lnTo>
-                  <a:lnTo>
-                    <a:pt x="3583101" y="2651349"/>
-                  </a:lnTo>
-                  <a:lnTo>
-                    <a:pt x="3654724" y="2650989"/>
-                  </a:lnTo>
-                  <a:lnTo>
-                    <a:pt x="3726346" y="2650628"/>
-                  </a:lnTo>
-                  <a:lnTo>
-                    <a:pt x="3797969" y="2650267"/>
-                  </a:lnTo>
-                  <a:lnTo>
-                    <a:pt x="3869592" y="2649907"/>
-                  </a:lnTo>
-                  <a:lnTo>
-                    <a:pt x="3941214" y="2649546"/>
-                  </a:lnTo>
-                  <a:lnTo>
-                    <a:pt x="4012837" y="2649185"/>
-                  </a:lnTo>
-                  <a:lnTo>
-                    <a:pt x="4084459" y="2648823"/>
-                  </a:lnTo>
-                  <a:lnTo>
-                    <a:pt x="4156082" y="2648462"/>
-                  </a:lnTo>
-                  <a:lnTo>
-                    <a:pt x="4227704" y="2648100"/>
-                  </a:lnTo>
-                  <a:lnTo>
-                    <a:pt x="4299327" y="2647739"/>
-                  </a:lnTo>
-                  <a:lnTo>
-                    <a:pt x="4370949" y="2647377"/>
-                  </a:lnTo>
-                  <a:lnTo>
-                    <a:pt x="4442572" y="2647015"/>
-                  </a:lnTo>
-                  <a:lnTo>
-                    <a:pt x="4514194" y="2646652"/>
-                  </a:lnTo>
-                  <a:lnTo>
-                    <a:pt x="4585817" y="2646290"/>
-                  </a:lnTo>
-                  <a:lnTo>
-                    <a:pt x="4657439" y="2645928"/>
-                  </a:lnTo>
-                  <a:lnTo>
-                    <a:pt x="4729062" y="2645565"/>
-                  </a:lnTo>
-                  <a:lnTo>
-                    <a:pt x="4800684" y="2645202"/>
-                  </a:lnTo>
-                  <a:lnTo>
-                    <a:pt x="4872307" y="2644839"/>
-                  </a:lnTo>
-                  <a:lnTo>
-                    <a:pt x="4943929" y="2644476"/>
-                  </a:lnTo>
-                  <a:lnTo>
-                    <a:pt x="5015552" y="2644113"/>
-                  </a:lnTo>
-                  <a:lnTo>
-                    <a:pt x="5087174" y="2643749"/>
-                  </a:lnTo>
-                  <a:lnTo>
-                    <a:pt x="5158797" y="2643386"/>
-                  </a:lnTo>
-                  <a:lnTo>
-                    <a:pt x="5230420" y="2643022"/>
-                  </a:lnTo>
-                  <a:lnTo>
-                    <a:pt x="5302042" y="2642658"/>
-                  </a:lnTo>
-                  <a:lnTo>
-                    <a:pt x="5373665" y="2642294"/>
-                  </a:lnTo>
-                  <a:lnTo>
-                    <a:pt x="5445287" y="2641929"/>
-                  </a:lnTo>
-                  <a:lnTo>
-                    <a:pt x="5516910" y="2641565"/>
-                  </a:lnTo>
-                  <a:lnTo>
-                    <a:pt x="5588532" y="2641200"/>
-                  </a:lnTo>
-                  <a:lnTo>
-                    <a:pt x="5660155" y="2640836"/>
-                  </a:lnTo>
-                  <a:lnTo>
-                    <a:pt x="5731777" y="2640471"/>
-                  </a:lnTo>
-                  <a:lnTo>
-                    <a:pt x="5803400" y="2640106"/>
-                  </a:lnTo>
-                  <a:lnTo>
-                    <a:pt x="5875022" y="2639741"/>
-                  </a:lnTo>
-                  <a:lnTo>
-                    <a:pt x="5946645" y="2639375"/>
-                  </a:lnTo>
-                  <a:lnTo>
-                    <a:pt x="6018267" y="2639010"/>
-                  </a:lnTo>
-                  <a:lnTo>
-                    <a:pt x="6089890" y="2638644"/>
-                  </a:lnTo>
-                  <a:lnTo>
-                    <a:pt x="6161512" y="2638278"/>
-                  </a:lnTo>
-                  <a:lnTo>
-                    <a:pt x="6233135" y="2637912"/>
-                  </a:lnTo>
-                  <a:lnTo>
-                    <a:pt x="6304757" y="2637546"/>
-                  </a:lnTo>
-                  <a:lnTo>
-                    <a:pt x="6376380" y="2637180"/>
-                  </a:lnTo>
-                  <a:lnTo>
-                    <a:pt x="6448002" y="2636813"/>
-                  </a:lnTo>
-                  <a:lnTo>
-                    <a:pt x="6519625" y="2636447"/>
-                  </a:lnTo>
-                  <a:lnTo>
-                    <a:pt x="6591248" y="2636080"/>
-                  </a:lnTo>
-                  <a:lnTo>
-                    <a:pt x="6662870" y="2635713"/>
-                  </a:lnTo>
-                  <a:lnTo>
-                    <a:pt x="6734493" y="2635346"/>
-                  </a:lnTo>
-                </a:path>
-              </a:pathLst>
-            </a:custGeom>
-          </p:spPr>
-          <p:txBody>
-            <a:bodyPr/>
-            <a:lstStyle/>
-            <a:p/>
-          </p:txBody>
-        </p:sp>
-        <p:sp>
-          <p:nvSpPr>
             <p:cNvPr id="22" name="pl22"/>
             <p:cNvSpPr/>
             <p:nvPr/>
           </p:nvSpPr>
           <p:spPr>
             <a:xfrm>
-              <a:off x="1172049" y="4728088"/>
-              <a:ext cx="7090630" cy="690360"/>
+              <a:off x="1585094" y="2143092"/>
+              <a:ext cx="6614322" cy="957847"/>
             </a:xfrm>
             <a:custGeom>
               <a:avLst/>
               <a:pathLst>
-                <a:path w="7090630" h="690360">
+                <a:path w="6614322" h="957847">
                   <a:moveTo>
-                    <a:pt x="7090630" y="690360"/>
+                    <a:pt x="0" y="0"/>
                   </a:moveTo>
                   <a:lnTo>
-                    <a:pt x="7019007" y="685520"/>
-                  </a:lnTo>
-                  <a:lnTo>
-                    <a:pt x="6947385" y="680512"/>
-                  </a:lnTo>
-                  <a:lnTo>
-                    <a:pt x="6875762" y="675329"/>
-                  </a:lnTo>
-                  <a:lnTo>
-                    <a:pt x="6804139" y="669964"/>
-                  </a:lnTo>
-                  <a:lnTo>
-                    <a:pt x="6732517" y="664413"/>
-                  </a:lnTo>
-                  <a:lnTo>
-                    <a:pt x="6660894" y="658669"/>
-                  </a:lnTo>
-                  <a:lnTo>
-                    <a:pt x="6589272" y="652724"/>
-                  </a:lnTo>
-                  <a:lnTo>
-                    <a:pt x="6517649" y="646572"/>
-                  </a:lnTo>
-                  <a:lnTo>
-                    <a:pt x="6446027" y="640205"/>
-                  </a:lnTo>
-                  <a:lnTo>
-                    <a:pt x="6374404" y="633616"/>
-                  </a:lnTo>
-                  <a:lnTo>
-                    <a:pt x="6302782" y="626798"/>
-                  </a:lnTo>
-                  <a:lnTo>
-                    <a:pt x="6231159" y="619741"/>
-                  </a:lnTo>
-                  <a:lnTo>
-                    <a:pt x="6159537" y="612439"/>
-                  </a:lnTo>
-                  <a:lnTo>
-                    <a:pt x="6087914" y="604882"/>
-                  </a:lnTo>
-                  <a:lnTo>
-                    <a:pt x="6016292" y="597062"/>
-                  </a:lnTo>
-                  <a:lnTo>
-                    <a:pt x="5944669" y="588968"/>
-                  </a:lnTo>
-                  <a:lnTo>
-                    <a:pt x="5873047" y="580593"/>
-                  </a:lnTo>
-                  <a:lnTo>
-                    <a:pt x="5801424" y="571926"/>
-                  </a:lnTo>
-                  <a:lnTo>
-                    <a:pt x="5729802" y="562956"/>
-                  </a:lnTo>
-                  <a:lnTo>
-                    <a:pt x="5658179" y="553674"/>
-                  </a:lnTo>
-                  <a:lnTo>
-                    <a:pt x="5586557" y="544068"/>
-                  </a:lnTo>
-                  <a:lnTo>
-                    <a:pt x="5514934" y="534127"/>
-                  </a:lnTo>
-                  <a:lnTo>
-                    <a:pt x="5443311" y="523839"/>
-                  </a:lnTo>
-                  <a:lnTo>
-                    <a:pt x="5371689" y="513193"/>
-                  </a:lnTo>
-                  <a:lnTo>
-                    <a:pt x="5300066" y="502175"/>
-                  </a:lnTo>
-                  <a:lnTo>
-                    <a:pt x="5228444" y="490773"/>
-                  </a:lnTo>
-                  <a:lnTo>
-                    <a:pt x="5156821" y="478974"/>
-                  </a:lnTo>
-                  <a:lnTo>
-                    <a:pt x="5085199" y="466763"/>
-                  </a:lnTo>
-                  <a:lnTo>
-                    <a:pt x="5013576" y="454126"/>
-                  </a:lnTo>
-                  <a:lnTo>
-                    <a:pt x="4941954" y="441049"/>
-                  </a:lnTo>
-                  <a:lnTo>
-                    <a:pt x="4870331" y="427516"/>
-                  </a:lnTo>
-                  <a:lnTo>
-                    <a:pt x="4798709" y="413511"/>
-                  </a:lnTo>
-                  <a:lnTo>
-                    <a:pt x="4727086" y="399018"/>
-                  </a:lnTo>
-                  <a:lnTo>
-                    <a:pt x="4655464" y="384019"/>
-                  </a:lnTo>
-                  <a:lnTo>
-                    <a:pt x="4583841" y="368497"/>
-                  </a:lnTo>
-                  <a:lnTo>
-                    <a:pt x="4512219" y="352434"/>
-                  </a:lnTo>
-                  <a:lnTo>
-                    <a:pt x="4440596" y="335811"/>
-                  </a:lnTo>
-                  <a:lnTo>
-                    <a:pt x="4368974" y="318608"/>
-                  </a:lnTo>
-                  <a:lnTo>
-                    <a:pt x="4297351" y="300805"/>
-                  </a:lnTo>
-                  <a:lnTo>
-                    <a:pt x="4225729" y="282382"/>
-                  </a:lnTo>
-                  <a:lnTo>
-                    <a:pt x="4154106" y="263316"/>
-                  </a:lnTo>
-                  <a:lnTo>
-                    <a:pt x="4082483" y="243586"/>
-                  </a:lnTo>
-                  <a:lnTo>
-                    <a:pt x="4010861" y="223167"/>
-                  </a:lnTo>
-                  <a:lnTo>
-                    <a:pt x="3939238" y="202036"/>
-                  </a:lnTo>
-                  <a:lnTo>
-                    <a:pt x="3867616" y="180169"/>
-                  </a:lnTo>
-                  <a:lnTo>
-                    <a:pt x="3795993" y="157539"/>
-                  </a:lnTo>
-                  <a:lnTo>
-                    <a:pt x="3724371" y="134120"/>
-                  </a:lnTo>
-                  <a:lnTo>
-                    <a:pt x="3652748" y="109885"/>
-                  </a:lnTo>
-                  <a:lnTo>
-                    <a:pt x="3581126" y="84804"/>
-                  </a:lnTo>
-                  <a:lnTo>
-                    <a:pt x="3509503" y="58849"/>
-                  </a:lnTo>
-                  <a:lnTo>
-                    <a:pt x="3437881" y="31988"/>
-                  </a:lnTo>
-                  <a:lnTo>
-                    <a:pt x="3366258" y="4192"/>
-                  </a:lnTo>
-                  <a:lnTo>
-                    <a:pt x="3294636" y="0"/>
-                  </a:lnTo>
-                  <a:lnTo>
-                    <a:pt x="3223013" y="358"/>
-                  </a:lnTo>
-                  <a:lnTo>
-                    <a:pt x="3151391" y="717"/>
-                  </a:lnTo>
-                  <a:lnTo>
-                    <a:pt x="3079768" y="1075"/>
-                  </a:lnTo>
-                  <a:lnTo>
-                    <a:pt x="3008146" y="1434"/>
-                  </a:lnTo>
-                  <a:lnTo>
-                    <a:pt x="2936523" y="1792"/>
-                  </a:lnTo>
-                  <a:lnTo>
-                    <a:pt x="2864901" y="2150"/>
-                  </a:lnTo>
-                  <a:lnTo>
-                    <a:pt x="2793278" y="2508"/>
-                  </a:lnTo>
-                  <a:lnTo>
-                    <a:pt x="2721655" y="2865"/>
-                  </a:lnTo>
-                  <a:lnTo>
-                    <a:pt x="2650033" y="3223"/>
-                  </a:lnTo>
-                  <a:lnTo>
-                    <a:pt x="2578410" y="3580"/>
-                  </a:lnTo>
-                  <a:lnTo>
-                    <a:pt x="2506788" y="3937"/>
-                  </a:lnTo>
-                  <a:lnTo>
-                    <a:pt x="2435165" y="4295"/>
-                  </a:lnTo>
-                  <a:lnTo>
-                    <a:pt x="2363543" y="4651"/>
-                  </a:lnTo>
-                  <a:lnTo>
-                    <a:pt x="2291920" y="5008"/>
-                  </a:lnTo>
-                  <a:lnTo>
-                    <a:pt x="2220298" y="5365"/>
-                  </a:lnTo>
-                  <a:lnTo>
-                    <a:pt x="2148675" y="5721"/>
-                  </a:lnTo>
-                  <a:lnTo>
-                    <a:pt x="2077053" y="6078"/>
-                  </a:lnTo>
-                  <a:lnTo>
-                    <a:pt x="2005430" y="6434"/>
-                  </a:lnTo>
-                  <a:lnTo>
-                    <a:pt x="1933808" y="6790"/>
-                  </a:lnTo>
-                  <a:lnTo>
-                    <a:pt x="1862185" y="7146"/>
-                  </a:lnTo>
-                  <a:lnTo>
-                    <a:pt x="1790563" y="7501"/>
-                  </a:lnTo>
-                  <a:lnTo>
-                    <a:pt x="1718940" y="7857"/>
-                  </a:lnTo>
-                  <a:lnTo>
-                    <a:pt x="1647318" y="8212"/>
-                  </a:lnTo>
-                  <a:lnTo>
-                    <a:pt x="1575695" y="8567"/>
-                  </a:lnTo>
-                  <a:lnTo>
-                    <a:pt x="1504073" y="8922"/>
-                  </a:lnTo>
-                  <a:lnTo>
-                    <a:pt x="1432450" y="9277"/>
-                  </a:lnTo>
-                  <a:lnTo>
-                    <a:pt x="1360827" y="9632"/>
-                  </a:lnTo>
-                  <a:lnTo>
-                    <a:pt x="1289205" y="9987"/>
-                  </a:lnTo>
-                  <a:lnTo>
-                    <a:pt x="1217582" y="10341"/>
-                  </a:lnTo>
-                  <a:lnTo>
-                    <a:pt x="1145960" y="10695"/>
-                  </a:lnTo>
-                  <a:lnTo>
-                    <a:pt x="1074337" y="11050"/>
-                  </a:lnTo>
-                  <a:lnTo>
-                    <a:pt x="1002715" y="11404"/>
-                  </a:lnTo>
-                  <a:lnTo>
-                    <a:pt x="931092" y="11757"/>
-                  </a:lnTo>
-                  <a:lnTo>
-                    <a:pt x="859470" y="12111"/>
-                  </a:lnTo>
-                  <a:lnTo>
-                    <a:pt x="787847" y="12465"/>
-                  </a:lnTo>
-                  <a:lnTo>
-                    <a:pt x="716225" y="12818"/>
-                  </a:lnTo>
-                  <a:lnTo>
-                    <a:pt x="644602" y="13171"/>
-                  </a:lnTo>
-                  <a:lnTo>
-                    <a:pt x="572980" y="13524"/>
-                  </a:lnTo>
-                  <a:lnTo>
-                    <a:pt x="501357" y="13877"/>
-                  </a:lnTo>
-                  <a:lnTo>
-                    <a:pt x="429735" y="14230"/>
-                  </a:lnTo>
-                  <a:lnTo>
-                    <a:pt x="358112" y="14583"/>
-                  </a:lnTo>
-                  <a:lnTo>
-                    <a:pt x="286490" y="14935"/>
-                  </a:lnTo>
-                  <a:lnTo>
-                    <a:pt x="214867" y="15287"/>
-                  </a:lnTo>
-                  <a:lnTo>
-                    <a:pt x="143245" y="15640"/>
-                  </a:lnTo>
-                  <a:lnTo>
-                    <a:pt x="71622" y="15992"/>
-                  </a:lnTo>
-                  <a:lnTo>
-                    <a:pt x="0" y="16343"/>
+                    <a:pt x="1940" y="1208"/>
+                  </a:lnTo>
+                  <a:lnTo>
+                    <a:pt x="72284" y="43528"/>
+                  </a:lnTo>
+                  <a:lnTo>
+                    <a:pt x="142629" y="84422"/>
+                  </a:lnTo>
+                  <a:lnTo>
+                    <a:pt x="212973" y="123938"/>
+                  </a:lnTo>
+                  <a:lnTo>
+                    <a:pt x="283318" y="162122"/>
+                  </a:lnTo>
+                  <a:lnTo>
+                    <a:pt x="353662" y="199020"/>
+                  </a:lnTo>
+                  <a:lnTo>
+                    <a:pt x="424007" y="234675"/>
+                  </a:lnTo>
+                  <a:lnTo>
+                    <a:pt x="494351" y="269129"/>
+                  </a:lnTo>
+                  <a:lnTo>
+                    <a:pt x="564696" y="302421"/>
+                  </a:lnTo>
+                  <a:lnTo>
+                    <a:pt x="635040" y="334592"/>
+                  </a:lnTo>
+                  <a:lnTo>
+                    <a:pt x="705385" y="365679"/>
+                  </a:lnTo>
+                  <a:lnTo>
+                    <a:pt x="775729" y="395718"/>
+                  </a:lnTo>
+                  <a:lnTo>
+                    <a:pt x="846074" y="424745"/>
+                  </a:lnTo>
+                  <a:lnTo>
+                    <a:pt x="916418" y="452794"/>
+                  </a:lnTo>
+                  <a:lnTo>
+                    <a:pt x="986763" y="479898"/>
+                  </a:lnTo>
+                  <a:lnTo>
+                    <a:pt x="1057107" y="506089"/>
+                  </a:lnTo>
+                  <a:lnTo>
+                    <a:pt x="1127452" y="531397"/>
+                  </a:lnTo>
+                  <a:lnTo>
+                    <a:pt x="1197796" y="555853"/>
+                  </a:lnTo>
+                  <a:lnTo>
+                    <a:pt x="1268141" y="579485"/>
+                  </a:lnTo>
+                  <a:lnTo>
+                    <a:pt x="1338485" y="602320"/>
+                  </a:lnTo>
+                  <a:lnTo>
+                    <a:pt x="1408830" y="624386"/>
+                  </a:lnTo>
+                  <a:lnTo>
+                    <a:pt x="1479174" y="645708"/>
+                  </a:lnTo>
+                  <a:lnTo>
+                    <a:pt x="1549519" y="666312"/>
+                  </a:lnTo>
+                  <a:lnTo>
+                    <a:pt x="1619863" y="686222"/>
+                  </a:lnTo>
+                  <a:lnTo>
+                    <a:pt x="1690208" y="705460"/>
+                  </a:lnTo>
+                  <a:lnTo>
+                    <a:pt x="1760552" y="724051"/>
+                  </a:lnTo>
+                  <a:lnTo>
+                    <a:pt x="1830897" y="742015"/>
+                  </a:lnTo>
+                  <a:lnTo>
+                    <a:pt x="1901241" y="759374"/>
+                  </a:lnTo>
+                  <a:lnTo>
+                    <a:pt x="1971586" y="776148"/>
+                  </a:lnTo>
+                  <a:lnTo>
+                    <a:pt x="2041930" y="792357"/>
+                  </a:lnTo>
+                  <a:lnTo>
+                    <a:pt x="2112275" y="808020"/>
+                  </a:lnTo>
+                  <a:lnTo>
+                    <a:pt x="2182619" y="823155"/>
+                  </a:lnTo>
+                  <a:lnTo>
+                    <a:pt x="2252964" y="837780"/>
+                  </a:lnTo>
+                  <a:lnTo>
+                    <a:pt x="2323308" y="851912"/>
+                  </a:lnTo>
+                  <a:lnTo>
+                    <a:pt x="2393653" y="865568"/>
+                  </a:lnTo>
+                  <a:lnTo>
+                    <a:pt x="2463997" y="878764"/>
+                  </a:lnTo>
+                  <a:lnTo>
+                    <a:pt x="2534342" y="891515"/>
+                  </a:lnTo>
+                  <a:lnTo>
+                    <a:pt x="2604686" y="903836"/>
+                  </a:lnTo>
+                  <a:lnTo>
+                    <a:pt x="2675030" y="915743"/>
+                  </a:lnTo>
+                  <a:lnTo>
+                    <a:pt x="2745375" y="927248"/>
+                  </a:lnTo>
+                  <a:lnTo>
+                    <a:pt x="2815719" y="938366"/>
+                  </a:lnTo>
+                  <a:lnTo>
+                    <a:pt x="2886064" y="949109"/>
+                  </a:lnTo>
+                  <a:lnTo>
+                    <a:pt x="2956408" y="957847"/>
+                  </a:lnTo>
+                  <a:lnTo>
+                    <a:pt x="3026753" y="957718"/>
+                  </a:lnTo>
+                  <a:lnTo>
+                    <a:pt x="3097097" y="957588"/>
+                  </a:lnTo>
+                  <a:lnTo>
+                    <a:pt x="3167442" y="957458"/>
+                  </a:lnTo>
+                  <a:lnTo>
+                    <a:pt x="3237786" y="957329"/>
+                  </a:lnTo>
+                  <a:lnTo>
+                    <a:pt x="3308131" y="957199"/>
+                  </a:lnTo>
+                  <a:lnTo>
+                    <a:pt x="3378475" y="957069"/>
+                  </a:lnTo>
+                  <a:lnTo>
+                    <a:pt x="3448820" y="956939"/>
+                  </a:lnTo>
+                  <a:lnTo>
+                    <a:pt x="3519164" y="956809"/>
+                  </a:lnTo>
+                  <a:lnTo>
+                    <a:pt x="3589509" y="956679"/>
+                  </a:lnTo>
+                  <a:lnTo>
+                    <a:pt x="3659853" y="956549"/>
+                  </a:lnTo>
+                  <a:lnTo>
+                    <a:pt x="3730198" y="956419"/>
+                  </a:lnTo>
+                  <a:lnTo>
+                    <a:pt x="3800542" y="956289"/>
+                  </a:lnTo>
+                  <a:lnTo>
+                    <a:pt x="3870887" y="956158"/>
+                  </a:lnTo>
+                  <a:lnTo>
+                    <a:pt x="3941231" y="956028"/>
+                  </a:lnTo>
+                  <a:lnTo>
+                    <a:pt x="4011576" y="955898"/>
+                  </a:lnTo>
+                  <a:lnTo>
+                    <a:pt x="4081920" y="955767"/>
+                  </a:lnTo>
+                  <a:lnTo>
+                    <a:pt x="4152265" y="955637"/>
+                  </a:lnTo>
+                  <a:lnTo>
+                    <a:pt x="4222609" y="955506"/>
+                  </a:lnTo>
+                  <a:lnTo>
+                    <a:pt x="4292954" y="955376"/>
+                  </a:lnTo>
+                  <a:lnTo>
+                    <a:pt x="4363298" y="955245"/>
+                  </a:lnTo>
+                  <a:lnTo>
+                    <a:pt x="4433643" y="955114"/>
+                  </a:lnTo>
+                  <a:lnTo>
+                    <a:pt x="4503987" y="954984"/>
+                  </a:lnTo>
+                  <a:lnTo>
+                    <a:pt x="4574332" y="954853"/>
+                  </a:lnTo>
+                  <a:lnTo>
+                    <a:pt x="4644676" y="954722"/>
+                  </a:lnTo>
+                  <a:lnTo>
+                    <a:pt x="4715021" y="954591"/>
+                  </a:lnTo>
+                  <a:lnTo>
+                    <a:pt x="4785365" y="954460"/>
+                  </a:lnTo>
+                  <a:lnTo>
+                    <a:pt x="4855710" y="954329"/>
+                  </a:lnTo>
+                  <a:lnTo>
+                    <a:pt x="4926054" y="954198"/>
+                  </a:lnTo>
+                  <a:lnTo>
+                    <a:pt x="4996399" y="954067"/>
+                  </a:lnTo>
+                  <a:lnTo>
+                    <a:pt x="5066743" y="953935"/>
+                  </a:lnTo>
+                  <a:lnTo>
+                    <a:pt x="5137088" y="953804"/>
+                  </a:lnTo>
+                  <a:lnTo>
+                    <a:pt x="5207432" y="953673"/>
+                  </a:lnTo>
+                  <a:lnTo>
+                    <a:pt x="5277777" y="953541"/>
+                  </a:lnTo>
+                  <a:lnTo>
+                    <a:pt x="5348121" y="953410"/>
+                  </a:lnTo>
+                  <a:lnTo>
+                    <a:pt x="5418466" y="953278"/>
+                  </a:lnTo>
+                  <a:lnTo>
+                    <a:pt x="5488810" y="953147"/>
+                  </a:lnTo>
+                  <a:lnTo>
+                    <a:pt x="5559155" y="953015"/>
+                  </a:lnTo>
+                  <a:lnTo>
+                    <a:pt x="5629499" y="952884"/>
+                  </a:lnTo>
+                  <a:lnTo>
+                    <a:pt x="5699844" y="952752"/>
+                  </a:lnTo>
+                  <a:lnTo>
+                    <a:pt x="5770188" y="952620"/>
+                  </a:lnTo>
+                  <a:lnTo>
+                    <a:pt x="5840533" y="952488"/>
+                  </a:lnTo>
+                  <a:lnTo>
+                    <a:pt x="5910877" y="952356"/>
+                  </a:lnTo>
+                  <a:lnTo>
+                    <a:pt x="5981222" y="952224"/>
+                  </a:lnTo>
+                  <a:lnTo>
+                    <a:pt x="6051566" y="952092"/>
+                  </a:lnTo>
+                  <a:lnTo>
+                    <a:pt x="6121911" y="951960"/>
+                  </a:lnTo>
+                  <a:lnTo>
+                    <a:pt x="6192255" y="951828"/>
+                  </a:lnTo>
+                  <a:lnTo>
+                    <a:pt x="6262600" y="951696"/>
+                  </a:lnTo>
+                  <a:lnTo>
+                    <a:pt x="6332944" y="951564"/>
+                  </a:lnTo>
+                  <a:lnTo>
+                    <a:pt x="6403288" y="951431"/>
+                  </a:lnTo>
+                  <a:lnTo>
+                    <a:pt x="6473633" y="951299"/>
+                  </a:lnTo>
+                  <a:lnTo>
+                    <a:pt x="6543977" y="951167"/>
+                  </a:lnTo>
+                  <a:lnTo>
+                    <a:pt x="6614322" y="951034"/>
                   </a:lnTo>
                 </a:path>
               </a:pathLst>
@@ -4216,312 +3926,637 @@
           </p:nvSpPr>
           <p:spPr>
             <a:xfrm>
-              <a:off x="1172049" y="3724830"/>
-              <a:ext cx="7090630" cy="1489259"/>
+              <a:off x="1235312" y="3101069"/>
+              <a:ext cx="6964104" cy="249134"/>
             </a:xfrm>
             <a:custGeom>
               <a:avLst/>
               <a:pathLst>
-                <a:path w="7090630" h="1489259">
+                <a:path w="6964104" h="249134">
+                  <a:moveTo>
+                    <a:pt x="6964104" y="249134"/>
+                  </a:moveTo>
+                  <a:lnTo>
+                    <a:pt x="6893760" y="247388"/>
+                  </a:lnTo>
+                  <a:lnTo>
+                    <a:pt x="6823415" y="245580"/>
+                  </a:lnTo>
+                  <a:lnTo>
+                    <a:pt x="6753071" y="243710"/>
+                  </a:lnTo>
+                  <a:lnTo>
+                    <a:pt x="6682726" y="241774"/>
+                  </a:lnTo>
+                  <a:lnTo>
+                    <a:pt x="6612382" y="239771"/>
+                  </a:lnTo>
+                  <a:lnTo>
+                    <a:pt x="6542037" y="237698"/>
+                  </a:lnTo>
+                  <a:lnTo>
+                    <a:pt x="6471693" y="235552"/>
+                  </a:lnTo>
+                  <a:lnTo>
+                    <a:pt x="6401348" y="233332"/>
+                  </a:lnTo>
+                  <a:lnTo>
+                    <a:pt x="6331004" y="231035"/>
+                  </a:lnTo>
+                  <a:lnTo>
+                    <a:pt x="6260659" y="228657"/>
+                  </a:lnTo>
+                  <a:lnTo>
+                    <a:pt x="6190315" y="226196"/>
+                  </a:lnTo>
+                  <a:lnTo>
+                    <a:pt x="6119970" y="223650"/>
+                  </a:lnTo>
+                  <a:lnTo>
+                    <a:pt x="6049626" y="221014"/>
+                  </a:lnTo>
+                  <a:lnTo>
+                    <a:pt x="5979281" y="218287"/>
+                  </a:lnTo>
+                  <a:lnTo>
+                    <a:pt x="5908937" y="215465"/>
+                  </a:lnTo>
+                  <a:lnTo>
+                    <a:pt x="5838592" y="212545"/>
+                  </a:lnTo>
+                  <a:lnTo>
+                    <a:pt x="5768248" y="209522"/>
+                  </a:lnTo>
+                  <a:lnTo>
+                    <a:pt x="5697903" y="206394"/>
+                  </a:lnTo>
+                  <a:lnTo>
+                    <a:pt x="5627559" y="203157"/>
+                  </a:lnTo>
+                  <a:lnTo>
+                    <a:pt x="5557214" y="199807"/>
+                  </a:lnTo>
+                  <a:lnTo>
+                    <a:pt x="5486870" y="196341"/>
+                  </a:lnTo>
+                  <a:lnTo>
+                    <a:pt x="5416525" y="192753"/>
+                  </a:lnTo>
+                  <a:lnTo>
+                    <a:pt x="5346181" y="189041"/>
+                  </a:lnTo>
+                  <a:lnTo>
+                    <a:pt x="5275836" y="185199"/>
+                  </a:lnTo>
+                  <a:lnTo>
+                    <a:pt x="5205492" y="181223"/>
+                  </a:lnTo>
+                  <a:lnTo>
+                    <a:pt x="5135147" y="177108"/>
+                  </a:lnTo>
+                  <a:lnTo>
+                    <a:pt x="5064803" y="172850"/>
+                  </a:lnTo>
+                  <a:lnTo>
+                    <a:pt x="4994458" y="168443"/>
+                  </a:lnTo>
+                  <a:lnTo>
+                    <a:pt x="4924114" y="163883"/>
+                  </a:lnTo>
+                  <a:lnTo>
+                    <a:pt x="4853769" y="159164"/>
+                  </a:lnTo>
+                  <a:lnTo>
+                    <a:pt x="4783425" y="154280"/>
+                  </a:lnTo>
+                  <a:lnTo>
+                    <a:pt x="4713080" y="149226"/>
+                  </a:lnTo>
+                  <a:lnTo>
+                    <a:pt x="4642736" y="143996"/>
+                  </a:lnTo>
+                  <a:lnTo>
+                    <a:pt x="4572391" y="138583"/>
+                  </a:lnTo>
+                  <a:lnTo>
+                    <a:pt x="4502047" y="132982"/>
+                  </a:lnTo>
+                  <a:lnTo>
+                    <a:pt x="4431702" y="127185"/>
+                  </a:lnTo>
+                  <a:lnTo>
+                    <a:pt x="4361358" y="121186"/>
+                  </a:lnTo>
+                  <a:lnTo>
+                    <a:pt x="4291013" y="114978"/>
+                  </a:lnTo>
+                  <a:lnTo>
+                    <a:pt x="4220669" y="108553"/>
+                  </a:lnTo>
+                  <a:lnTo>
+                    <a:pt x="4150324" y="101905"/>
+                  </a:lnTo>
+                  <a:lnTo>
+                    <a:pt x="4079980" y="95024"/>
+                  </a:lnTo>
+                  <a:lnTo>
+                    <a:pt x="4009635" y="87904"/>
+                  </a:lnTo>
+                  <a:lnTo>
+                    <a:pt x="3939291" y="80535"/>
+                  </a:lnTo>
+                  <a:lnTo>
+                    <a:pt x="3868946" y="72910"/>
+                  </a:lnTo>
+                  <a:lnTo>
+                    <a:pt x="3798602" y="65018"/>
+                  </a:lnTo>
+                  <a:lnTo>
+                    <a:pt x="3728257" y="56852"/>
+                  </a:lnTo>
+                  <a:lnTo>
+                    <a:pt x="3657913" y="48400"/>
+                  </a:lnTo>
+                  <a:lnTo>
+                    <a:pt x="3587569" y="39654"/>
+                  </a:lnTo>
+                  <a:lnTo>
+                    <a:pt x="3517224" y="30603"/>
+                  </a:lnTo>
+                  <a:lnTo>
+                    <a:pt x="3446880" y="21237"/>
+                  </a:lnTo>
+                  <a:lnTo>
+                    <a:pt x="3376535" y="11544"/>
+                  </a:lnTo>
+                  <a:lnTo>
+                    <a:pt x="3306191" y="1512"/>
+                  </a:lnTo>
+                  <a:lnTo>
+                    <a:pt x="3235846" y="0"/>
+                  </a:lnTo>
+                  <a:lnTo>
+                    <a:pt x="3165502" y="129"/>
+                  </a:lnTo>
+                  <a:lnTo>
+                    <a:pt x="3095157" y="258"/>
+                  </a:lnTo>
+                  <a:lnTo>
+                    <a:pt x="3024813" y="388"/>
+                  </a:lnTo>
+                  <a:lnTo>
+                    <a:pt x="2954468" y="517"/>
+                  </a:lnTo>
+                  <a:lnTo>
+                    <a:pt x="2884124" y="646"/>
+                  </a:lnTo>
+                  <a:lnTo>
+                    <a:pt x="2813779" y="775"/>
+                  </a:lnTo>
+                  <a:lnTo>
+                    <a:pt x="2743435" y="905"/>
+                  </a:lnTo>
+                  <a:lnTo>
+                    <a:pt x="2673090" y="1034"/>
+                  </a:lnTo>
+                  <a:lnTo>
+                    <a:pt x="2602746" y="1163"/>
+                  </a:lnTo>
+                  <a:lnTo>
+                    <a:pt x="2532401" y="1292"/>
+                  </a:lnTo>
+                  <a:lnTo>
+                    <a:pt x="2462057" y="1421"/>
+                  </a:lnTo>
+                  <a:lnTo>
+                    <a:pt x="2391712" y="1549"/>
+                  </a:lnTo>
+                  <a:lnTo>
+                    <a:pt x="2321368" y="1678"/>
+                  </a:lnTo>
+                  <a:lnTo>
+                    <a:pt x="2251023" y="1807"/>
+                  </a:lnTo>
+                  <a:lnTo>
+                    <a:pt x="2180679" y="1936"/>
+                  </a:lnTo>
+                  <a:lnTo>
+                    <a:pt x="2110334" y="2064"/>
+                  </a:lnTo>
+                  <a:lnTo>
+                    <a:pt x="2039990" y="2193"/>
+                  </a:lnTo>
+                  <a:lnTo>
+                    <a:pt x="1969645" y="2321"/>
+                  </a:lnTo>
+                  <a:lnTo>
+                    <a:pt x="1899301" y="2450"/>
+                  </a:lnTo>
+                  <a:lnTo>
+                    <a:pt x="1828956" y="2578"/>
+                  </a:lnTo>
+                  <a:lnTo>
+                    <a:pt x="1758612" y="2707"/>
+                  </a:lnTo>
+                  <a:lnTo>
+                    <a:pt x="1688267" y="2835"/>
+                  </a:lnTo>
+                  <a:lnTo>
+                    <a:pt x="1617923" y="2963"/>
+                  </a:lnTo>
+                  <a:lnTo>
+                    <a:pt x="1547578" y="3091"/>
+                  </a:lnTo>
+                  <a:lnTo>
+                    <a:pt x="1477234" y="3220"/>
+                  </a:lnTo>
+                  <a:lnTo>
+                    <a:pt x="1406889" y="3348"/>
+                  </a:lnTo>
+                  <a:lnTo>
+                    <a:pt x="1336545" y="3476"/>
+                  </a:lnTo>
+                  <a:lnTo>
+                    <a:pt x="1266200" y="3604"/>
+                  </a:lnTo>
+                  <a:lnTo>
+                    <a:pt x="1195856" y="3732"/>
+                  </a:lnTo>
+                  <a:lnTo>
+                    <a:pt x="1125511" y="3859"/>
+                  </a:lnTo>
+                  <a:lnTo>
+                    <a:pt x="1055167" y="3987"/>
+                  </a:lnTo>
+                  <a:lnTo>
+                    <a:pt x="984822" y="4115"/>
+                  </a:lnTo>
+                  <a:lnTo>
+                    <a:pt x="914478" y="4243"/>
+                  </a:lnTo>
+                  <a:lnTo>
+                    <a:pt x="844133" y="4370"/>
+                  </a:lnTo>
+                  <a:lnTo>
+                    <a:pt x="773789" y="4498"/>
+                  </a:lnTo>
+                  <a:lnTo>
+                    <a:pt x="703444" y="4625"/>
+                  </a:lnTo>
+                  <a:lnTo>
+                    <a:pt x="633100" y="4753"/>
+                  </a:lnTo>
+                  <a:lnTo>
+                    <a:pt x="562755" y="4880"/>
+                  </a:lnTo>
+                  <a:lnTo>
+                    <a:pt x="492411" y="5008"/>
+                  </a:lnTo>
+                  <a:lnTo>
+                    <a:pt x="422066" y="5135"/>
+                  </a:lnTo>
+                  <a:lnTo>
+                    <a:pt x="351722" y="5262"/>
+                  </a:lnTo>
+                  <a:lnTo>
+                    <a:pt x="281377" y="5389"/>
+                  </a:lnTo>
+                  <a:lnTo>
+                    <a:pt x="211033" y="5517"/>
+                  </a:lnTo>
+                  <a:lnTo>
+                    <a:pt x="140688" y="5644"/>
+                  </a:lnTo>
+                  <a:lnTo>
+                    <a:pt x="70344" y="5771"/>
+                  </a:lnTo>
+                  <a:lnTo>
+                    <a:pt x="0" y="5898"/>
+                  </a:lnTo>
+                </a:path>
+              </a:pathLst>
+            </a:custGeom>
+          </p:spPr>
+          <p:txBody>
+            <a:bodyPr/>
+            <a:lstStyle/>
+            <a:p/>
+          </p:txBody>
+        </p:sp>
+        <p:sp>
+          <p:nvSpPr>
+            <p:cNvPr id="24" name="pl24"/>
+            <p:cNvSpPr/>
+            <p:nvPr/>
+          </p:nvSpPr>
+          <p:spPr>
+            <a:xfrm>
+              <a:off x="1235312" y="2739017"/>
+              <a:ext cx="6964104" cy="537438"/>
+            </a:xfrm>
+            <a:custGeom>
+              <a:avLst/>
+              <a:pathLst>
+                <a:path w="6964104" h="537438">
                   <a:moveTo>
                     <a:pt x="0" y="0"/>
                   </a:moveTo>
                   <a:lnTo>
-                    <a:pt x="71622" y="30745"/>
-                  </a:lnTo>
-                  <a:lnTo>
-                    <a:pt x="143245" y="60975"/>
-                  </a:lnTo>
-                  <a:lnTo>
-                    <a:pt x="214867" y="90698"/>
-                  </a:lnTo>
-                  <a:lnTo>
-                    <a:pt x="286490" y="119922"/>
-                  </a:lnTo>
-                  <a:lnTo>
-                    <a:pt x="358112" y="148656"/>
-                  </a:lnTo>
-                  <a:lnTo>
-                    <a:pt x="429735" y="176907"/>
-                  </a:lnTo>
-                  <a:lnTo>
-                    <a:pt x="501357" y="204685"/>
-                  </a:lnTo>
-                  <a:lnTo>
-                    <a:pt x="572980" y="231996"/>
-                  </a:lnTo>
-                  <a:lnTo>
-                    <a:pt x="644602" y="258849"/>
-                  </a:lnTo>
-                  <a:lnTo>
-                    <a:pt x="716225" y="285252"/>
-                  </a:lnTo>
-                  <a:lnTo>
-                    <a:pt x="787847" y="311212"/>
-                  </a:lnTo>
-                  <a:lnTo>
-                    <a:pt x="859470" y="336736"/>
-                  </a:lnTo>
-                  <a:lnTo>
-                    <a:pt x="931092" y="361832"/>
-                  </a:lnTo>
-                  <a:lnTo>
-                    <a:pt x="1002715" y="386506"/>
-                  </a:lnTo>
-                  <a:lnTo>
-                    <a:pt x="1074337" y="410767"/>
-                  </a:lnTo>
-                  <a:lnTo>
-                    <a:pt x="1145960" y="434621"/>
-                  </a:lnTo>
-                  <a:lnTo>
-                    <a:pt x="1217582" y="458074"/>
-                  </a:lnTo>
-                  <a:lnTo>
-                    <a:pt x="1289205" y="481134"/>
-                  </a:lnTo>
-                  <a:lnTo>
-                    <a:pt x="1360827" y="503807"/>
-                  </a:lnTo>
-                  <a:lnTo>
-                    <a:pt x="1432450" y="526099"/>
-                  </a:lnTo>
-                  <a:lnTo>
-                    <a:pt x="1504073" y="548018"/>
-                  </a:lnTo>
-                  <a:lnTo>
-                    <a:pt x="1575695" y="569569"/>
-                  </a:lnTo>
-                  <a:lnTo>
-                    <a:pt x="1647318" y="590758"/>
-                  </a:lnTo>
-                  <a:lnTo>
-                    <a:pt x="1718940" y="611591"/>
-                  </a:lnTo>
-                  <a:lnTo>
-                    <a:pt x="1790563" y="632075"/>
-                  </a:lnTo>
-                  <a:lnTo>
-                    <a:pt x="1862185" y="652216"/>
-                  </a:lnTo>
-                  <a:lnTo>
-                    <a:pt x="1933808" y="672018"/>
-                  </a:lnTo>
-                  <a:lnTo>
-                    <a:pt x="2005430" y="691488"/>
-                  </a:lnTo>
-                  <a:lnTo>
-                    <a:pt x="2077053" y="710632"/>
-                  </a:lnTo>
-                  <a:lnTo>
-                    <a:pt x="2148675" y="729454"/>
-                  </a:lnTo>
-                  <a:lnTo>
-                    <a:pt x="2220298" y="747960"/>
-                  </a:lnTo>
-                  <a:lnTo>
-                    <a:pt x="2291920" y="766156"/>
-                  </a:lnTo>
-                  <a:lnTo>
-                    <a:pt x="2363543" y="784047"/>
-                  </a:lnTo>
-                  <a:lnTo>
-                    <a:pt x="2435165" y="801637"/>
-                  </a:lnTo>
-                  <a:lnTo>
-                    <a:pt x="2506788" y="818933"/>
-                  </a:lnTo>
-                  <a:lnTo>
-                    <a:pt x="2578410" y="835938"/>
-                  </a:lnTo>
-                  <a:lnTo>
-                    <a:pt x="2650033" y="852658"/>
-                  </a:lnTo>
-                  <a:lnTo>
-                    <a:pt x="2721655" y="869097"/>
-                  </a:lnTo>
-                  <a:lnTo>
-                    <a:pt x="2793278" y="885260"/>
-                  </a:lnTo>
-                  <a:lnTo>
-                    <a:pt x="2864901" y="901152"/>
-                  </a:lnTo>
-                  <a:lnTo>
-                    <a:pt x="2936523" y="916778"/>
-                  </a:lnTo>
-                  <a:lnTo>
-                    <a:pt x="3008146" y="932141"/>
-                  </a:lnTo>
-                  <a:lnTo>
-                    <a:pt x="3079768" y="947247"/>
-                  </a:lnTo>
-                  <a:lnTo>
-                    <a:pt x="3151391" y="962099"/>
-                  </a:lnTo>
-                  <a:lnTo>
-                    <a:pt x="3223013" y="976702"/>
-                  </a:lnTo>
-                  <a:lnTo>
-                    <a:pt x="3294636" y="991060"/>
-                  </a:lnTo>
-                  <a:lnTo>
-                    <a:pt x="3366258" y="1005177"/>
-                  </a:lnTo>
-                  <a:lnTo>
-                    <a:pt x="3437881" y="1019057"/>
-                  </a:lnTo>
-                  <a:lnTo>
-                    <a:pt x="3509503" y="1032704"/>
-                  </a:lnTo>
-                  <a:lnTo>
-                    <a:pt x="3581126" y="1046123"/>
-                  </a:lnTo>
-                  <a:lnTo>
-                    <a:pt x="3652748" y="1059316"/>
-                  </a:lnTo>
-                  <a:lnTo>
-                    <a:pt x="3724371" y="1072287"/>
-                  </a:lnTo>
-                  <a:lnTo>
-                    <a:pt x="3795993" y="1085042"/>
-                  </a:lnTo>
-                  <a:lnTo>
-                    <a:pt x="3867616" y="1097582"/>
-                  </a:lnTo>
-                  <a:lnTo>
-                    <a:pt x="3939238" y="1109911"/>
-                  </a:lnTo>
-                  <a:lnTo>
-                    <a:pt x="4010861" y="1122034"/>
-                  </a:lnTo>
-                  <a:lnTo>
-                    <a:pt x="4082483" y="1133954"/>
-                  </a:lnTo>
-                  <a:lnTo>
-                    <a:pt x="4154106" y="1145673"/>
-                  </a:lnTo>
-                  <a:lnTo>
-                    <a:pt x="4225729" y="1157196"/>
-                  </a:lnTo>
-                  <a:lnTo>
-                    <a:pt x="4297351" y="1168525"/>
-                  </a:lnTo>
-                  <a:lnTo>
-                    <a:pt x="4368974" y="1179665"/>
-                  </a:lnTo>
-                  <a:lnTo>
-                    <a:pt x="4440596" y="1190617"/>
-                  </a:lnTo>
-                  <a:lnTo>
-                    <a:pt x="4512219" y="1201386"/>
-                  </a:lnTo>
-                  <a:lnTo>
-                    <a:pt x="4583841" y="1211974"/>
-                  </a:lnTo>
-                  <a:lnTo>
-                    <a:pt x="4655464" y="1222384"/>
-                  </a:lnTo>
-                  <a:lnTo>
-                    <a:pt x="4727086" y="1232620"/>
-                  </a:lnTo>
-                  <a:lnTo>
-                    <a:pt x="4798709" y="1242684"/>
-                  </a:lnTo>
-                  <a:lnTo>
-                    <a:pt x="4870331" y="1252579"/>
-                  </a:lnTo>
-                  <a:lnTo>
-                    <a:pt x="4941954" y="1262308"/>
-                  </a:lnTo>
-                  <a:lnTo>
-                    <a:pt x="5013576" y="1271873"/>
-                  </a:lnTo>
-                  <a:lnTo>
-                    <a:pt x="5085199" y="1281279"/>
-                  </a:lnTo>
-                  <a:lnTo>
-                    <a:pt x="5156821" y="1290526"/>
-                  </a:lnTo>
-                  <a:lnTo>
-                    <a:pt x="5228444" y="1299619"/>
-                  </a:lnTo>
-                  <a:lnTo>
-                    <a:pt x="5300066" y="1308558"/>
-                  </a:lnTo>
-                  <a:lnTo>
-                    <a:pt x="5371689" y="1317348"/>
-                  </a:lnTo>
-                  <a:lnTo>
-                    <a:pt x="5443311" y="1325990"/>
-                  </a:lnTo>
-                  <a:lnTo>
-                    <a:pt x="5514934" y="1334488"/>
-                  </a:lnTo>
-                  <a:lnTo>
-                    <a:pt x="5586557" y="1342842"/>
-                  </a:lnTo>
-                  <a:lnTo>
-                    <a:pt x="5658179" y="1351057"/>
-                  </a:lnTo>
-                  <a:lnTo>
-                    <a:pt x="5729802" y="1359134"/>
-                  </a:lnTo>
-                  <a:lnTo>
-                    <a:pt x="5801424" y="1367075"/>
-                  </a:lnTo>
-                  <a:lnTo>
-                    <a:pt x="5873047" y="1374883"/>
-                  </a:lnTo>
-                  <a:lnTo>
-                    <a:pt x="5944669" y="1382560"/>
-                  </a:lnTo>
-                  <a:lnTo>
-                    <a:pt x="6016292" y="1390108"/>
-                  </a:lnTo>
-                  <a:lnTo>
-                    <a:pt x="6087914" y="1397529"/>
-                  </a:lnTo>
-                  <a:lnTo>
-                    <a:pt x="6159537" y="1404826"/>
-                  </a:lnTo>
-                  <a:lnTo>
-                    <a:pt x="6231159" y="1412001"/>
-                  </a:lnTo>
-                  <a:lnTo>
-                    <a:pt x="6302782" y="1419055"/>
-                  </a:lnTo>
-                  <a:lnTo>
-                    <a:pt x="6374404" y="1425990"/>
-                  </a:lnTo>
-                  <a:lnTo>
-                    <a:pt x="6446027" y="1432810"/>
-                  </a:lnTo>
-                  <a:lnTo>
-                    <a:pt x="6517649" y="1439515"/>
-                  </a:lnTo>
-                  <a:lnTo>
-                    <a:pt x="6589272" y="1446107"/>
-                  </a:lnTo>
-                  <a:lnTo>
-                    <a:pt x="6660894" y="1452589"/>
-                  </a:lnTo>
-                  <a:lnTo>
-                    <a:pt x="6732517" y="1458962"/>
-                  </a:lnTo>
-                  <a:lnTo>
-                    <a:pt x="6804139" y="1465228"/>
-                  </a:lnTo>
-                  <a:lnTo>
-                    <a:pt x="6875762" y="1471389"/>
-                  </a:lnTo>
-                  <a:lnTo>
-                    <a:pt x="6947385" y="1477447"/>
-                  </a:lnTo>
-                  <a:lnTo>
-                    <a:pt x="7019007" y="1483403"/>
-                  </a:lnTo>
-                  <a:lnTo>
-                    <a:pt x="7090630" y="1489259"/>
+                    <a:pt x="70344" y="11095"/>
+                  </a:lnTo>
+                  <a:lnTo>
+                    <a:pt x="140688" y="22004"/>
+                  </a:lnTo>
+                  <a:lnTo>
+                    <a:pt x="211033" y="32730"/>
+                  </a:lnTo>
+                  <a:lnTo>
+                    <a:pt x="281377" y="43277"/>
+                  </a:lnTo>
+                  <a:lnTo>
+                    <a:pt x="351722" y="53646"/>
+                  </a:lnTo>
+                  <a:lnTo>
+                    <a:pt x="422066" y="63841"/>
+                  </a:lnTo>
+                  <a:lnTo>
+                    <a:pt x="492411" y="73866"/>
+                  </a:lnTo>
+                  <a:lnTo>
+                    <a:pt x="562755" y="83722"/>
+                  </a:lnTo>
+                  <a:lnTo>
+                    <a:pt x="633100" y="93412"/>
+                  </a:lnTo>
+                  <a:lnTo>
+                    <a:pt x="703444" y="102940"/>
+                  </a:lnTo>
+                  <a:lnTo>
+                    <a:pt x="773789" y="112309"/>
+                  </a:lnTo>
+                  <a:lnTo>
+                    <a:pt x="844133" y="121520"/>
+                  </a:lnTo>
+                  <a:lnTo>
+                    <a:pt x="914478" y="130576"/>
+                  </a:lnTo>
+                  <a:lnTo>
+                    <a:pt x="984822" y="139481"/>
+                  </a:lnTo>
+                  <a:lnTo>
+                    <a:pt x="1055167" y="148236"/>
+                  </a:lnTo>
+                  <a:lnTo>
+                    <a:pt x="1125511" y="156844"/>
+                  </a:lnTo>
+                  <a:lnTo>
+                    <a:pt x="1195856" y="165308"/>
+                  </a:lnTo>
+                  <a:lnTo>
+                    <a:pt x="1266200" y="173630"/>
+                  </a:lnTo>
+                  <a:lnTo>
+                    <a:pt x="1336545" y="181812"/>
+                  </a:lnTo>
+                  <a:lnTo>
+                    <a:pt x="1406889" y="189857"/>
+                  </a:lnTo>
+                  <a:lnTo>
+                    <a:pt x="1477234" y="197766"/>
+                  </a:lnTo>
+                  <a:lnTo>
+                    <a:pt x="1547578" y="205544"/>
+                  </a:lnTo>
+                  <a:lnTo>
+                    <a:pt x="1617923" y="213190"/>
+                  </a:lnTo>
+                  <a:lnTo>
+                    <a:pt x="1688267" y="220709"/>
+                  </a:lnTo>
+                  <a:lnTo>
+                    <a:pt x="1758612" y="228101"/>
+                  </a:lnTo>
+                  <a:lnTo>
+                    <a:pt x="1828956" y="235369"/>
+                  </a:lnTo>
+                  <a:lnTo>
+                    <a:pt x="1899301" y="242515"/>
+                  </a:lnTo>
+                  <a:lnTo>
+                    <a:pt x="1969645" y="249542"/>
+                  </a:lnTo>
+                  <a:lnTo>
+                    <a:pt x="2039990" y="256450"/>
+                  </a:lnTo>
+                  <a:lnTo>
+                    <a:pt x="2110334" y="263242"/>
+                  </a:lnTo>
+                  <a:lnTo>
+                    <a:pt x="2180679" y="269921"/>
+                  </a:lnTo>
+                  <a:lnTo>
+                    <a:pt x="2251023" y="276487"/>
+                  </a:lnTo>
+                  <a:lnTo>
+                    <a:pt x="2321368" y="282944"/>
+                  </a:lnTo>
+                  <a:lnTo>
+                    <a:pt x="2391712" y="289292"/>
+                  </a:lnTo>
+                  <a:lnTo>
+                    <a:pt x="2462057" y="295533"/>
+                  </a:lnTo>
+                  <a:lnTo>
+                    <a:pt x="2532401" y="301670"/>
+                  </a:lnTo>
+                  <a:lnTo>
+                    <a:pt x="2602746" y="307704"/>
+                  </a:lnTo>
+                  <a:lnTo>
+                    <a:pt x="2673090" y="313636"/>
+                  </a:lnTo>
+                  <a:lnTo>
+                    <a:pt x="2743435" y="319469"/>
+                  </a:lnTo>
+                  <a:lnTo>
+                    <a:pt x="2813779" y="325204"/>
+                  </a:lnTo>
+                  <a:lnTo>
+                    <a:pt x="2884124" y="330843"/>
+                  </a:lnTo>
+                  <a:lnTo>
+                    <a:pt x="2954468" y="336388"/>
+                  </a:lnTo>
+                  <a:lnTo>
+                    <a:pt x="3024813" y="341839"/>
+                  </a:lnTo>
+                  <a:lnTo>
+                    <a:pt x="3095157" y="347199"/>
+                  </a:lnTo>
+                  <a:lnTo>
+                    <a:pt x="3165502" y="352468"/>
+                  </a:lnTo>
+                  <a:lnTo>
+                    <a:pt x="3235846" y="357650"/>
+                  </a:lnTo>
+                  <a:lnTo>
+                    <a:pt x="3306191" y="362744"/>
+                  </a:lnTo>
+                  <a:lnTo>
+                    <a:pt x="3376535" y="367753"/>
+                  </a:lnTo>
+                  <a:lnTo>
+                    <a:pt x="3446880" y="372678"/>
+                  </a:lnTo>
+                  <a:lnTo>
+                    <a:pt x="3517224" y="377521"/>
+                  </a:lnTo>
+                  <a:lnTo>
+                    <a:pt x="3587569" y="382282"/>
+                  </a:lnTo>
+                  <a:lnTo>
+                    <a:pt x="3657913" y="386963"/>
+                  </a:lnTo>
+                  <a:lnTo>
+                    <a:pt x="3728257" y="391566"/>
+                  </a:lnTo>
+                  <a:lnTo>
+                    <a:pt x="3798602" y="396091"/>
+                  </a:lnTo>
+                  <a:lnTo>
+                    <a:pt x="3868946" y="400541"/>
+                  </a:lnTo>
+                  <a:lnTo>
+                    <a:pt x="3939291" y="404915"/>
+                  </a:lnTo>
+                  <a:lnTo>
+                    <a:pt x="4009635" y="409217"/>
+                  </a:lnTo>
+                  <a:lnTo>
+                    <a:pt x="4079980" y="413446"/>
+                  </a:lnTo>
+                  <a:lnTo>
+                    <a:pt x="4150324" y="417604"/>
+                  </a:lnTo>
+                  <a:lnTo>
+                    <a:pt x="4220669" y="421693"/>
+                  </a:lnTo>
+                  <a:lnTo>
+                    <a:pt x="4291013" y="425713"/>
+                  </a:lnTo>
+                  <a:lnTo>
+                    <a:pt x="4361358" y="429665"/>
+                  </a:lnTo>
+                  <a:lnTo>
+                    <a:pt x="4431702" y="433552"/>
+                  </a:lnTo>
+                  <a:lnTo>
+                    <a:pt x="4502047" y="437372"/>
+                  </a:lnTo>
+                  <a:lnTo>
+                    <a:pt x="4572391" y="441129"/>
+                  </a:lnTo>
+                  <a:lnTo>
+                    <a:pt x="4642736" y="444823"/>
+                  </a:lnTo>
+                  <a:lnTo>
+                    <a:pt x="4713080" y="448455"/>
+                  </a:lnTo>
+                  <a:lnTo>
+                    <a:pt x="4783425" y="452026"/>
+                  </a:lnTo>
+                  <a:lnTo>
+                    <a:pt x="4853769" y="455537"/>
+                  </a:lnTo>
+                  <a:lnTo>
+                    <a:pt x="4924114" y="458989"/>
+                  </a:lnTo>
+                  <a:lnTo>
+                    <a:pt x="4994458" y="462383"/>
+                  </a:lnTo>
+                  <a:lnTo>
+                    <a:pt x="5064803" y="465720"/>
+                  </a:lnTo>
+                  <a:lnTo>
+                    <a:pt x="5135147" y="469001"/>
+                  </a:lnTo>
+                  <a:lnTo>
+                    <a:pt x="5205492" y="472228"/>
+                  </a:lnTo>
+                  <a:lnTo>
+                    <a:pt x="5275836" y="475400"/>
+                  </a:lnTo>
+                  <a:lnTo>
+                    <a:pt x="5346181" y="478518"/>
+                  </a:lnTo>
+                  <a:lnTo>
+                    <a:pt x="5416525" y="481585"/>
+                  </a:lnTo>
+                  <a:lnTo>
+                    <a:pt x="5486870" y="484600"/>
+                  </a:lnTo>
+                  <a:lnTo>
+                    <a:pt x="5557214" y="487564"/>
+                  </a:lnTo>
+                  <a:lnTo>
+                    <a:pt x="5627559" y="490479"/>
+                  </a:lnTo>
+                  <a:lnTo>
+                    <a:pt x="5697903" y="493345"/>
+                  </a:lnTo>
+                  <a:lnTo>
+                    <a:pt x="5768248" y="496162"/>
+                  </a:lnTo>
+                  <a:lnTo>
+                    <a:pt x="5838592" y="498933"/>
+                  </a:lnTo>
+                  <a:lnTo>
+                    <a:pt x="5908937" y="501657"/>
+                  </a:lnTo>
+                  <a:lnTo>
+                    <a:pt x="5979281" y="504335"/>
+                  </a:lnTo>
+                  <a:lnTo>
+                    <a:pt x="6049626" y="506968"/>
+                  </a:lnTo>
+                  <a:lnTo>
+                    <a:pt x="6119970" y="509557"/>
+                  </a:lnTo>
+                  <a:lnTo>
+                    <a:pt x="6190315" y="512103"/>
+                  </a:lnTo>
+                  <a:lnTo>
+                    <a:pt x="6260659" y="514606"/>
+                  </a:lnTo>
+                  <a:lnTo>
+                    <a:pt x="6331004" y="517067"/>
+                  </a:lnTo>
+                  <a:lnTo>
+                    <a:pt x="6401348" y="519487"/>
+                  </a:lnTo>
+                  <a:lnTo>
+                    <a:pt x="6471693" y="521866"/>
+                  </a:lnTo>
+                  <a:lnTo>
+                    <a:pt x="6542037" y="524205"/>
+                  </a:lnTo>
+                  <a:lnTo>
+                    <a:pt x="6612382" y="526505"/>
+                  </a:lnTo>
+                  <a:lnTo>
+                    <a:pt x="6682726" y="528766"/>
+                  </a:lnTo>
+                  <a:lnTo>
+                    <a:pt x="6753071" y="530989"/>
+                  </a:lnTo>
+                  <a:lnTo>
+                    <a:pt x="6823415" y="533176"/>
+                  </a:lnTo>
+                  <a:lnTo>
+                    <a:pt x="6893760" y="535325"/>
+                  </a:lnTo>
+                  <a:lnTo>
+                    <a:pt x="6964104" y="537438"/>
                   </a:lnTo>
                 </a:path>
               </a:pathLst>
@@ -4544,27 +4579,27 @@
         </p:sp>
         <p:sp>
           <p:nvSpPr>
-            <p:cNvPr id="24" name="pl24"/>
+            <p:cNvPr id="25" name="pl25"/>
             <p:cNvSpPr/>
             <p:nvPr/>
           </p:nvSpPr>
           <p:spPr>
             <a:xfrm>
-              <a:off x="817517" y="4727786"/>
-              <a:ext cx="7799693" cy="0"/>
+              <a:off x="887106" y="3100960"/>
+              <a:ext cx="7660515" cy="0"/>
             </a:xfrm>
             <a:custGeom>
               <a:avLst/>
               <a:pathLst>
-                <a:path w="7799693" h="0">
+                <a:path w="7660515" h="0">
                   <a:moveTo>
                     <a:pt x="0" y="0"/>
                   </a:moveTo>
                   <a:lnTo>
-                    <a:pt x="7799693" y="0"/>
-                  </a:lnTo>
-                  <a:lnTo>
-                    <a:pt x="7799693" y="0"/>
+                    <a:pt x="7660515" y="0"/>
+                  </a:lnTo>
+                  <a:lnTo>
+                    <a:pt x="7660515" y="0"/>
                   </a:lnTo>
                 </a:path>
               </a:pathLst>
@@ -4587,21 +4622,21 @@
         </p:sp>
         <p:sp>
           <p:nvSpPr>
-            <p:cNvPr id="25" name="pl25"/>
+            <p:cNvPr id="26" name="pl26"/>
             <p:cNvSpPr/>
             <p:nvPr/>
           </p:nvSpPr>
           <p:spPr>
             <a:xfrm>
-              <a:off x="4526955" y="2073503"/>
-              <a:ext cx="0" cy="3649639"/>
+              <a:off x="4530353" y="2143092"/>
+              <a:ext cx="0" cy="1317069"/>
             </a:xfrm>
             <a:custGeom>
               <a:avLst/>
               <a:pathLst>
-                <a:path w="0" h="3649639">
+                <a:path w="0" h="1317069">
                   <a:moveTo>
-                    <a:pt x="0" y="3649639"/>
+                    <a:pt x="0" y="1317069"/>
                   </a:moveTo>
                   <a:lnTo>
                     <a:pt x="0" y="0"/>
@@ -4630,13 +4665,13 @@
         </p:sp>
         <p:sp>
           <p:nvSpPr>
-            <p:cNvPr id="26" name="tx26"/>
+            <p:cNvPr id="27" name="tx27"/>
             <p:cNvSpPr/>
             <p:nvPr/>
           </p:nvSpPr>
           <p:spPr>
             <a:xfrm>
-              <a:off x="692708" y="5517199"/>
+              <a:off x="762297" y="3360243"/>
               <a:ext cx="62179" cy="80101"/>
             </a:xfrm>
             <a:prstGeom prst="rect">
@@ -4676,13 +4711,13 @@
         </p:sp>
         <p:sp>
           <p:nvSpPr>
-            <p:cNvPr id="27" name="tx27"/>
+            <p:cNvPr id="28" name="tx28"/>
             <p:cNvSpPr/>
             <p:nvPr/>
           </p:nvSpPr>
           <p:spPr>
             <a:xfrm>
-              <a:off x="692708" y="4687735"/>
+              <a:off x="762297" y="3060909"/>
               <a:ext cx="62179" cy="80101"/>
             </a:xfrm>
             <a:prstGeom prst="rect">
@@ -4722,13 +4757,13 @@
         </p:sp>
         <p:sp>
           <p:nvSpPr>
-            <p:cNvPr id="28" name="tx28"/>
+            <p:cNvPr id="29" name="tx29"/>
             <p:cNvSpPr/>
             <p:nvPr/>
           </p:nvSpPr>
           <p:spPr>
             <a:xfrm>
-              <a:off x="692708" y="3858272"/>
+              <a:off x="762297" y="2761575"/>
               <a:ext cx="62179" cy="80101"/>
             </a:xfrm>
             <a:prstGeom prst="rect">
@@ -4768,13 +4803,13 @@
         </p:sp>
         <p:sp>
           <p:nvSpPr>
-            <p:cNvPr id="29" name="tx29"/>
+            <p:cNvPr id="30" name="tx30"/>
             <p:cNvSpPr/>
             <p:nvPr/>
           </p:nvSpPr>
           <p:spPr>
             <a:xfrm>
-              <a:off x="692708" y="3028808"/>
+              <a:off x="762297" y="2462242"/>
               <a:ext cx="62179" cy="80101"/>
             </a:xfrm>
             <a:prstGeom prst="rect">
@@ -4814,13 +4849,13 @@
         </p:sp>
         <p:sp>
           <p:nvSpPr>
-            <p:cNvPr id="30" name="tx30"/>
+            <p:cNvPr id="31" name="tx31"/>
             <p:cNvSpPr/>
             <p:nvPr/>
           </p:nvSpPr>
           <p:spPr>
             <a:xfrm>
-              <a:off x="692708" y="2199345"/>
+              <a:off x="762297" y="2162908"/>
               <a:ext cx="62179" cy="80101"/>
             </a:xfrm>
             <a:prstGeom prst="rect">
@@ -4860,13 +4895,13 @@
         </p:sp>
         <p:sp>
           <p:nvSpPr>
-            <p:cNvPr id="31" name="tx31"/>
+            <p:cNvPr id="32" name="tx32"/>
             <p:cNvSpPr/>
             <p:nvPr/>
           </p:nvSpPr>
           <p:spPr>
             <a:xfrm>
-              <a:off x="2421884" y="5785772"/>
+              <a:off x="2461403" y="3522791"/>
               <a:ext cx="161574" cy="80101"/>
             </a:xfrm>
             <a:prstGeom prst="rect">
@@ -4906,13 +4941,13 @@
         </p:sp>
         <p:sp>
           <p:nvSpPr>
-            <p:cNvPr id="32" name="tx32"/>
+            <p:cNvPr id="33" name="tx33"/>
             <p:cNvSpPr/>
             <p:nvPr/>
           </p:nvSpPr>
           <p:spPr>
             <a:xfrm>
-              <a:off x="4542539" y="5785772"/>
+              <a:off x="4545104" y="3522791"/>
               <a:ext cx="62179" cy="80101"/>
             </a:xfrm>
             <a:prstGeom prst="rect">
@@ -4952,13 +4987,13 @@
         </p:sp>
         <p:sp>
           <p:nvSpPr>
-            <p:cNvPr id="33" name="tx33"/>
+            <p:cNvPr id="34" name="tx34"/>
             <p:cNvSpPr/>
             <p:nvPr/>
           </p:nvSpPr>
           <p:spPr>
             <a:xfrm>
-              <a:off x="6582407" y="5785772"/>
+              <a:off x="6548017" y="3522791"/>
               <a:ext cx="124358" cy="80101"/>
             </a:xfrm>
             <a:prstGeom prst="rect">
@@ -4998,13 +5033,13 @@
         </p:sp>
         <p:sp>
           <p:nvSpPr>
-            <p:cNvPr id="34" name="tx34"/>
+            <p:cNvPr id="35" name="tx35"/>
             <p:cNvSpPr/>
             <p:nvPr/>
           </p:nvSpPr>
           <p:spPr>
             <a:xfrm>
-              <a:off x="2928340" y="5925448"/>
+              <a:off x="2928340" y="3662467"/>
               <a:ext cx="3578047" cy="100218"/>
             </a:xfrm>
             <a:prstGeom prst="rect">
@@ -5044,13 +5079,13 @@
         </p:sp>
         <p:sp>
           <p:nvSpPr>
-            <p:cNvPr id="35" name="tx35"/>
+            <p:cNvPr id="36" name="tx36"/>
             <p:cNvSpPr/>
             <p:nvPr/>
           </p:nvSpPr>
           <p:spPr>
             <a:xfrm rot="-5400000">
-              <a:off x="68446" y="3848213"/>
+              <a:off x="138035" y="2751517"/>
               <a:ext cx="1016904" cy="100218"/>
             </a:xfrm>
             <a:prstGeom prst="rect">
@@ -5090,13 +5125,13 @@
         </p:sp>
         <p:sp>
           <p:nvSpPr>
-            <p:cNvPr id="36" name="tx36"/>
+            <p:cNvPr id="37" name="tx37"/>
             <p:cNvSpPr/>
             <p:nvPr/>
           </p:nvSpPr>
           <p:spPr>
             <a:xfrm>
-              <a:off x="817517" y="1896563"/>
+              <a:off x="887106" y="1966152"/>
               <a:ext cx="6321612" cy="82021"/>
             </a:xfrm>
             <a:prstGeom prst="rect">
@@ -5136,13 +5171,3722 @@
         </p:sp>
         <p:sp>
           <p:nvSpPr>
-            <p:cNvPr id="37" name="tx37"/>
+            <p:cNvPr id="38" name="tx38"/>
             <p:cNvSpPr/>
             <p:nvPr/>
           </p:nvSpPr>
           <p:spPr>
             <a:xfrm>
-              <a:off x="817517" y="1669789"/>
+              <a:off x="887106" y="1739378"/>
+              <a:ext cx="2495397" cy="120152"/>
+            </a:xfrm>
+            <a:prstGeom prst="rect">
+              <a:avLst/>
+            </a:prstGeom>
+            <a:noFill/>
+          </p:spPr>
+          <p:txBody>
+            <a:bodyPr lIns="0" rIns="0" tIns="0" bIns="0" anchorCtr="1" anchor="ctr" wrap="none"/>
+            <a:lstStyle/>
+            <a:p>
+              <a:pPr algn="l" marL="0" marR="0" indent="0">
+                <a:lnSpc>
+                  <a:spcPts val="1320"/>
+                </a:lnSpc>
+                <a:spcBef>
+                  <a:spcPts val="0"/>
+                </a:spcBef>
+                <a:spcAft>
+                  <a:spcPts val="0"/>
+                </a:spcAft>
+              </a:pPr>
+              <a:r>
+                <a:rPr sz="1320">
+                  <a:solidFill>
+                    <a:srgbClr val="000000">
+                      <a:alpha val="100000"/>
+                    </a:srgbClr>
+                  </a:solidFill>
+                  <a:latin typeface="Helvetica"/>
+                  <a:cs typeface="Helvetica"/>
+                </a:rPr>
+                <a:t>Cancer Progression (Carboplatin)</a:t>
+              </a:r>
+            </a:p>
+          </p:txBody>
+        </p:sp>
+        <p:sp>
+          <p:nvSpPr>
+            <p:cNvPr id="39" name="pl39"/>
+            <p:cNvSpPr/>
+            <p:nvPr/>
+          </p:nvSpPr>
+          <p:spPr>
+            <a:xfrm>
+              <a:off x="887106" y="5444019"/>
+              <a:ext cx="7660515" cy="0"/>
+            </a:xfrm>
+            <a:custGeom>
+              <a:avLst/>
+              <a:pathLst>
+                <a:path w="7660515" h="0">
+                  <a:moveTo>
+                    <a:pt x="0" y="0"/>
+                  </a:moveTo>
+                  <a:lnTo>
+                    <a:pt x="7660515" y="0"/>
+                  </a:lnTo>
+                  <a:lnTo>
+                    <a:pt x="7660515" y="0"/>
+                  </a:lnTo>
+                </a:path>
+              </a:pathLst>
+            </a:custGeom>
+            <a:ln w="6775" cap="flat">
+              <a:solidFill>
+                <a:srgbClr val="EBEBEB">
+                  <a:alpha val="100000"/>
+                </a:srgbClr>
+              </a:solidFill>
+              <a:prstDash val="solid"/>
+              <a:round/>
+            </a:ln>
+          </p:spPr>
+          <p:txBody>
+            <a:bodyPr/>
+            <a:lstStyle/>
+            <a:p/>
+          </p:txBody>
+        </p:sp>
+        <p:sp>
+          <p:nvSpPr>
+            <p:cNvPr id="40" name="pl40"/>
+            <p:cNvSpPr/>
+            <p:nvPr/>
+          </p:nvSpPr>
+          <p:spPr>
+            <a:xfrm>
+              <a:off x="887106" y="5144686"/>
+              <a:ext cx="7660515" cy="0"/>
+            </a:xfrm>
+            <a:custGeom>
+              <a:avLst/>
+              <a:pathLst>
+                <a:path w="7660515" h="0">
+                  <a:moveTo>
+                    <a:pt x="0" y="0"/>
+                  </a:moveTo>
+                  <a:lnTo>
+                    <a:pt x="7660515" y="0"/>
+                  </a:lnTo>
+                  <a:lnTo>
+                    <a:pt x="7660515" y="0"/>
+                  </a:lnTo>
+                </a:path>
+              </a:pathLst>
+            </a:custGeom>
+            <a:ln w="6775" cap="flat">
+              <a:solidFill>
+                <a:srgbClr val="EBEBEB">
+                  <a:alpha val="100000"/>
+                </a:srgbClr>
+              </a:solidFill>
+              <a:prstDash val="solid"/>
+              <a:round/>
+            </a:ln>
+          </p:spPr>
+          <p:txBody>
+            <a:bodyPr/>
+            <a:lstStyle/>
+            <a:p/>
+          </p:txBody>
+        </p:sp>
+        <p:sp>
+          <p:nvSpPr>
+            <p:cNvPr id="41" name="pl41"/>
+            <p:cNvSpPr/>
+            <p:nvPr/>
+          </p:nvSpPr>
+          <p:spPr>
+            <a:xfrm>
+              <a:off x="887106" y="4845352"/>
+              <a:ext cx="7660515" cy="0"/>
+            </a:xfrm>
+            <a:custGeom>
+              <a:avLst/>
+              <a:pathLst>
+                <a:path w="7660515" h="0">
+                  <a:moveTo>
+                    <a:pt x="0" y="0"/>
+                  </a:moveTo>
+                  <a:lnTo>
+                    <a:pt x="7660515" y="0"/>
+                  </a:lnTo>
+                  <a:lnTo>
+                    <a:pt x="7660515" y="0"/>
+                  </a:lnTo>
+                </a:path>
+              </a:pathLst>
+            </a:custGeom>
+            <a:ln w="6775" cap="flat">
+              <a:solidFill>
+                <a:srgbClr val="EBEBEB">
+                  <a:alpha val="100000"/>
+                </a:srgbClr>
+              </a:solidFill>
+              <a:prstDash val="solid"/>
+              <a:round/>
+            </a:ln>
+          </p:spPr>
+          <p:txBody>
+            <a:bodyPr/>
+            <a:lstStyle/>
+            <a:p/>
+          </p:txBody>
+        </p:sp>
+        <p:sp>
+          <p:nvSpPr>
+            <p:cNvPr id="42" name="pl42"/>
+            <p:cNvSpPr/>
+            <p:nvPr/>
+          </p:nvSpPr>
+          <p:spPr>
+            <a:xfrm>
+              <a:off x="887106" y="4546018"/>
+              <a:ext cx="7660515" cy="0"/>
+            </a:xfrm>
+            <a:custGeom>
+              <a:avLst/>
+              <a:pathLst>
+                <a:path w="7660515" h="0">
+                  <a:moveTo>
+                    <a:pt x="0" y="0"/>
+                  </a:moveTo>
+                  <a:lnTo>
+                    <a:pt x="7660515" y="0"/>
+                  </a:lnTo>
+                  <a:lnTo>
+                    <a:pt x="7660515" y="0"/>
+                  </a:lnTo>
+                </a:path>
+              </a:pathLst>
+            </a:custGeom>
+            <a:ln w="6775" cap="flat">
+              <a:solidFill>
+                <a:srgbClr val="EBEBEB">
+                  <a:alpha val="100000"/>
+                </a:srgbClr>
+              </a:solidFill>
+              <a:prstDash val="solid"/>
+              <a:round/>
+            </a:ln>
+          </p:spPr>
+          <p:txBody>
+            <a:bodyPr/>
+            <a:lstStyle/>
+            <a:p/>
+          </p:txBody>
+        </p:sp>
+        <p:sp>
+          <p:nvSpPr>
+            <p:cNvPr id="43" name="pl43"/>
+            <p:cNvSpPr/>
+            <p:nvPr/>
+          </p:nvSpPr>
+          <p:spPr>
+            <a:xfrm>
+              <a:off x="914987" y="4336484"/>
+              <a:ext cx="0" cy="1317069"/>
+            </a:xfrm>
+            <a:custGeom>
+              <a:avLst/>
+              <a:pathLst>
+                <a:path w="0" h="1317069">
+                  <a:moveTo>
+                    <a:pt x="0" y="1317069"/>
+                  </a:moveTo>
+                  <a:lnTo>
+                    <a:pt x="0" y="0"/>
+                  </a:lnTo>
+                  <a:lnTo>
+                    <a:pt x="0" y="0"/>
+                  </a:lnTo>
+                </a:path>
+              </a:pathLst>
+            </a:custGeom>
+            <a:ln w="6775" cap="flat">
+              <a:solidFill>
+                <a:srgbClr val="EBEBEB">
+                  <a:alpha val="100000"/>
+                </a:srgbClr>
+              </a:solidFill>
+              <a:prstDash val="solid"/>
+              <a:round/>
+            </a:ln>
+          </p:spPr>
+          <p:txBody>
+            <a:bodyPr/>
+            <a:lstStyle/>
+            <a:p/>
+          </p:txBody>
+        </p:sp>
+        <p:sp>
+          <p:nvSpPr>
+            <p:cNvPr id="44" name="pl44"/>
+            <p:cNvSpPr/>
+            <p:nvPr/>
+          </p:nvSpPr>
+          <p:spPr>
+            <a:xfrm>
+              <a:off x="1728588" y="4336484"/>
+              <a:ext cx="0" cy="1317069"/>
+            </a:xfrm>
+            <a:custGeom>
+              <a:avLst/>
+              <a:pathLst>
+                <a:path w="0" h="1317069">
+                  <a:moveTo>
+                    <a:pt x="0" y="1317069"/>
+                  </a:moveTo>
+                  <a:lnTo>
+                    <a:pt x="0" y="0"/>
+                  </a:lnTo>
+                  <a:lnTo>
+                    <a:pt x="0" y="0"/>
+                  </a:lnTo>
+                </a:path>
+              </a:pathLst>
+            </a:custGeom>
+            <a:ln w="6775" cap="flat">
+              <a:solidFill>
+                <a:srgbClr val="EBEBEB">
+                  <a:alpha val="100000"/>
+                </a:srgbClr>
+              </a:solidFill>
+              <a:prstDash val="solid"/>
+              <a:round/>
+            </a:ln>
+          </p:spPr>
+          <p:txBody>
+            <a:bodyPr/>
+            <a:lstStyle/>
+            <a:p/>
+          </p:txBody>
+        </p:sp>
+        <p:sp>
+          <p:nvSpPr>
+            <p:cNvPr id="45" name="pl45"/>
+            <p:cNvSpPr/>
+            <p:nvPr/>
+          </p:nvSpPr>
+          <p:spPr>
+            <a:xfrm>
+              <a:off x="2542190" y="4336484"/>
+              <a:ext cx="0" cy="1317069"/>
+            </a:xfrm>
+            <a:custGeom>
+              <a:avLst/>
+              <a:pathLst>
+                <a:path w="0" h="1317069">
+                  <a:moveTo>
+                    <a:pt x="0" y="1317069"/>
+                  </a:moveTo>
+                  <a:lnTo>
+                    <a:pt x="0" y="0"/>
+                  </a:lnTo>
+                  <a:lnTo>
+                    <a:pt x="0" y="0"/>
+                  </a:lnTo>
+                </a:path>
+              </a:pathLst>
+            </a:custGeom>
+            <a:ln w="6775" cap="flat">
+              <a:solidFill>
+                <a:srgbClr val="EBEBEB">
+                  <a:alpha val="100000"/>
+                </a:srgbClr>
+              </a:solidFill>
+              <a:prstDash val="solid"/>
+              <a:round/>
+            </a:ln>
+          </p:spPr>
+          <p:txBody>
+            <a:bodyPr/>
+            <a:lstStyle/>
+            <a:p/>
+          </p:txBody>
+        </p:sp>
+        <p:sp>
+          <p:nvSpPr>
+            <p:cNvPr id="46" name="pl46"/>
+            <p:cNvSpPr/>
+            <p:nvPr/>
+          </p:nvSpPr>
+          <p:spPr>
+            <a:xfrm>
+              <a:off x="3355791" y="4336484"/>
+              <a:ext cx="0" cy="1317069"/>
+            </a:xfrm>
+            <a:custGeom>
+              <a:avLst/>
+              <a:pathLst>
+                <a:path w="0" h="1317069">
+                  <a:moveTo>
+                    <a:pt x="0" y="1317069"/>
+                  </a:moveTo>
+                  <a:lnTo>
+                    <a:pt x="0" y="0"/>
+                  </a:lnTo>
+                  <a:lnTo>
+                    <a:pt x="0" y="0"/>
+                  </a:lnTo>
+                </a:path>
+              </a:pathLst>
+            </a:custGeom>
+            <a:ln w="6775" cap="flat">
+              <a:solidFill>
+                <a:srgbClr val="EBEBEB">
+                  <a:alpha val="100000"/>
+                </a:srgbClr>
+              </a:solidFill>
+              <a:prstDash val="solid"/>
+              <a:round/>
+            </a:ln>
+          </p:spPr>
+          <p:txBody>
+            <a:bodyPr/>
+            <a:lstStyle/>
+            <a:p/>
+          </p:txBody>
+        </p:sp>
+        <p:sp>
+          <p:nvSpPr>
+            <p:cNvPr id="47" name="pl47"/>
+            <p:cNvSpPr/>
+            <p:nvPr/>
+          </p:nvSpPr>
+          <p:spPr>
+            <a:xfrm>
+              <a:off x="4169393" y="4336484"/>
+              <a:ext cx="0" cy="1317069"/>
+            </a:xfrm>
+            <a:custGeom>
+              <a:avLst/>
+              <a:pathLst>
+                <a:path w="0" h="1317069">
+                  <a:moveTo>
+                    <a:pt x="0" y="1317069"/>
+                  </a:moveTo>
+                  <a:lnTo>
+                    <a:pt x="0" y="0"/>
+                  </a:lnTo>
+                  <a:lnTo>
+                    <a:pt x="0" y="0"/>
+                  </a:lnTo>
+                </a:path>
+              </a:pathLst>
+            </a:custGeom>
+            <a:ln w="6775" cap="flat">
+              <a:solidFill>
+                <a:srgbClr val="EBEBEB">
+                  <a:alpha val="100000"/>
+                </a:srgbClr>
+              </a:solidFill>
+              <a:prstDash val="solid"/>
+              <a:round/>
+            </a:ln>
+          </p:spPr>
+          <p:txBody>
+            <a:bodyPr/>
+            <a:lstStyle/>
+            <a:p/>
+          </p:txBody>
+        </p:sp>
+        <p:sp>
+          <p:nvSpPr>
+            <p:cNvPr id="48" name="pl48"/>
+            <p:cNvSpPr/>
+            <p:nvPr/>
+          </p:nvSpPr>
+          <p:spPr>
+            <a:xfrm>
+              <a:off x="4982994" y="4336484"/>
+              <a:ext cx="0" cy="1317069"/>
+            </a:xfrm>
+            <a:custGeom>
+              <a:avLst/>
+              <a:pathLst>
+                <a:path w="0" h="1317069">
+                  <a:moveTo>
+                    <a:pt x="0" y="1317069"/>
+                  </a:moveTo>
+                  <a:lnTo>
+                    <a:pt x="0" y="0"/>
+                  </a:lnTo>
+                  <a:lnTo>
+                    <a:pt x="0" y="0"/>
+                  </a:lnTo>
+                </a:path>
+              </a:pathLst>
+            </a:custGeom>
+            <a:ln w="6775" cap="flat">
+              <a:solidFill>
+                <a:srgbClr val="EBEBEB">
+                  <a:alpha val="100000"/>
+                </a:srgbClr>
+              </a:solidFill>
+              <a:prstDash val="solid"/>
+              <a:round/>
+            </a:ln>
+          </p:spPr>
+          <p:txBody>
+            <a:bodyPr/>
+            <a:lstStyle/>
+            <a:p/>
+          </p:txBody>
+        </p:sp>
+        <p:sp>
+          <p:nvSpPr>
+            <p:cNvPr id="49" name="pl49"/>
+            <p:cNvSpPr/>
+            <p:nvPr/>
+          </p:nvSpPr>
+          <p:spPr>
+            <a:xfrm>
+              <a:off x="5796595" y="4336484"/>
+              <a:ext cx="0" cy="1317069"/>
+            </a:xfrm>
+            <a:custGeom>
+              <a:avLst/>
+              <a:pathLst>
+                <a:path w="0" h="1317069">
+                  <a:moveTo>
+                    <a:pt x="0" y="1317069"/>
+                  </a:moveTo>
+                  <a:lnTo>
+                    <a:pt x="0" y="0"/>
+                  </a:lnTo>
+                  <a:lnTo>
+                    <a:pt x="0" y="0"/>
+                  </a:lnTo>
+                </a:path>
+              </a:pathLst>
+            </a:custGeom>
+            <a:ln w="6775" cap="flat">
+              <a:solidFill>
+                <a:srgbClr val="EBEBEB">
+                  <a:alpha val="100000"/>
+                </a:srgbClr>
+              </a:solidFill>
+              <a:prstDash val="solid"/>
+              <a:round/>
+            </a:ln>
+          </p:spPr>
+          <p:txBody>
+            <a:bodyPr/>
+            <a:lstStyle/>
+            <a:p/>
+          </p:txBody>
+        </p:sp>
+        <p:sp>
+          <p:nvSpPr>
+            <p:cNvPr id="50" name="pl50"/>
+            <p:cNvSpPr/>
+            <p:nvPr/>
+          </p:nvSpPr>
+          <p:spPr>
+            <a:xfrm>
+              <a:off x="6610197" y="4336484"/>
+              <a:ext cx="0" cy="1317069"/>
+            </a:xfrm>
+            <a:custGeom>
+              <a:avLst/>
+              <a:pathLst>
+                <a:path w="0" h="1317069">
+                  <a:moveTo>
+                    <a:pt x="0" y="1317069"/>
+                  </a:moveTo>
+                  <a:lnTo>
+                    <a:pt x="0" y="0"/>
+                  </a:lnTo>
+                  <a:lnTo>
+                    <a:pt x="0" y="0"/>
+                  </a:lnTo>
+                </a:path>
+              </a:pathLst>
+            </a:custGeom>
+            <a:ln w="6775" cap="flat">
+              <a:solidFill>
+                <a:srgbClr val="EBEBEB">
+                  <a:alpha val="100000"/>
+                </a:srgbClr>
+              </a:solidFill>
+              <a:prstDash val="solid"/>
+              <a:round/>
+            </a:ln>
+          </p:spPr>
+          <p:txBody>
+            <a:bodyPr/>
+            <a:lstStyle/>
+            <a:p/>
+          </p:txBody>
+        </p:sp>
+        <p:sp>
+          <p:nvSpPr>
+            <p:cNvPr id="51" name="pl51"/>
+            <p:cNvSpPr/>
+            <p:nvPr/>
+          </p:nvSpPr>
+          <p:spPr>
+            <a:xfrm>
+              <a:off x="7423798" y="4336484"/>
+              <a:ext cx="0" cy="1317069"/>
+            </a:xfrm>
+            <a:custGeom>
+              <a:avLst/>
+              <a:pathLst>
+                <a:path w="0" h="1317069">
+                  <a:moveTo>
+                    <a:pt x="0" y="1317069"/>
+                  </a:moveTo>
+                  <a:lnTo>
+                    <a:pt x="0" y="0"/>
+                  </a:lnTo>
+                  <a:lnTo>
+                    <a:pt x="0" y="0"/>
+                  </a:lnTo>
+                </a:path>
+              </a:pathLst>
+            </a:custGeom>
+            <a:ln w="6775" cap="flat">
+              <a:solidFill>
+                <a:srgbClr val="EBEBEB">
+                  <a:alpha val="100000"/>
+                </a:srgbClr>
+              </a:solidFill>
+              <a:prstDash val="solid"/>
+              <a:round/>
+            </a:ln>
+          </p:spPr>
+          <p:txBody>
+            <a:bodyPr/>
+            <a:lstStyle/>
+            <a:p/>
+          </p:txBody>
+        </p:sp>
+        <p:sp>
+          <p:nvSpPr>
+            <p:cNvPr id="52" name="pl52"/>
+            <p:cNvSpPr/>
+            <p:nvPr/>
+          </p:nvSpPr>
+          <p:spPr>
+            <a:xfrm>
+              <a:off x="8237399" y="4336484"/>
+              <a:ext cx="0" cy="1317069"/>
+            </a:xfrm>
+            <a:custGeom>
+              <a:avLst/>
+              <a:pathLst>
+                <a:path w="0" h="1317069">
+                  <a:moveTo>
+                    <a:pt x="0" y="1317069"/>
+                  </a:moveTo>
+                  <a:lnTo>
+                    <a:pt x="0" y="0"/>
+                  </a:lnTo>
+                  <a:lnTo>
+                    <a:pt x="0" y="0"/>
+                  </a:lnTo>
+                </a:path>
+              </a:pathLst>
+            </a:custGeom>
+            <a:ln w="6775" cap="flat">
+              <a:solidFill>
+                <a:srgbClr val="EBEBEB">
+                  <a:alpha val="100000"/>
+                </a:srgbClr>
+              </a:solidFill>
+              <a:prstDash val="solid"/>
+              <a:round/>
+            </a:ln>
+          </p:spPr>
+          <p:txBody>
+            <a:bodyPr/>
+            <a:lstStyle/>
+            <a:p/>
+          </p:txBody>
+        </p:sp>
+        <p:sp>
+          <p:nvSpPr>
+            <p:cNvPr id="53" name="pl53"/>
+            <p:cNvSpPr/>
+            <p:nvPr/>
+          </p:nvSpPr>
+          <p:spPr>
+            <a:xfrm>
+              <a:off x="887106" y="5593686"/>
+              <a:ext cx="7660515" cy="0"/>
+            </a:xfrm>
+            <a:custGeom>
+              <a:avLst/>
+              <a:pathLst>
+                <a:path w="7660515" h="0">
+                  <a:moveTo>
+                    <a:pt x="0" y="0"/>
+                  </a:moveTo>
+                  <a:lnTo>
+                    <a:pt x="7660515" y="0"/>
+                  </a:lnTo>
+                  <a:lnTo>
+                    <a:pt x="7660515" y="0"/>
+                  </a:lnTo>
+                </a:path>
+              </a:pathLst>
+            </a:custGeom>
+            <a:ln w="13550" cap="flat">
+              <a:solidFill>
+                <a:srgbClr val="EBEBEB">
+                  <a:alpha val="100000"/>
+                </a:srgbClr>
+              </a:solidFill>
+              <a:prstDash val="solid"/>
+              <a:round/>
+            </a:ln>
+          </p:spPr>
+          <p:txBody>
+            <a:bodyPr/>
+            <a:lstStyle/>
+            <a:p/>
+          </p:txBody>
+        </p:sp>
+        <p:sp>
+          <p:nvSpPr>
+            <p:cNvPr id="54" name="pl54"/>
+            <p:cNvSpPr/>
+            <p:nvPr/>
+          </p:nvSpPr>
+          <p:spPr>
+            <a:xfrm>
+              <a:off x="887106" y="5294352"/>
+              <a:ext cx="7660515" cy="0"/>
+            </a:xfrm>
+            <a:custGeom>
+              <a:avLst/>
+              <a:pathLst>
+                <a:path w="7660515" h="0">
+                  <a:moveTo>
+                    <a:pt x="0" y="0"/>
+                  </a:moveTo>
+                  <a:lnTo>
+                    <a:pt x="7660515" y="0"/>
+                  </a:lnTo>
+                  <a:lnTo>
+                    <a:pt x="7660515" y="0"/>
+                  </a:lnTo>
+                </a:path>
+              </a:pathLst>
+            </a:custGeom>
+            <a:ln w="13550" cap="flat">
+              <a:solidFill>
+                <a:srgbClr val="EBEBEB">
+                  <a:alpha val="100000"/>
+                </a:srgbClr>
+              </a:solidFill>
+              <a:prstDash val="solid"/>
+              <a:round/>
+            </a:ln>
+          </p:spPr>
+          <p:txBody>
+            <a:bodyPr/>
+            <a:lstStyle/>
+            <a:p/>
+          </p:txBody>
+        </p:sp>
+        <p:sp>
+          <p:nvSpPr>
+            <p:cNvPr id="55" name="pl55"/>
+            <p:cNvSpPr/>
+            <p:nvPr/>
+          </p:nvSpPr>
+          <p:spPr>
+            <a:xfrm>
+              <a:off x="887106" y="4995019"/>
+              <a:ext cx="7660515" cy="0"/>
+            </a:xfrm>
+            <a:custGeom>
+              <a:avLst/>
+              <a:pathLst>
+                <a:path w="7660515" h="0">
+                  <a:moveTo>
+                    <a:pt x="0" y="0"/>
+                  </a:moveTo>
+                  <a:lnTo>
+                    <a:pt x="7660515" y="0"/>
+                  </a:lnTo>
+                  <a:lnTo>
+                    <a:pt x="7660515" y="0"/>
+                  </a:lnTo>
+                </a:path>
+              </a:pathLst>
+            </a:custGeom>
+            <a:ln w="13550" cap="flat">
+              <a:solidFill>
+                <a:srgbClr val="EBEBEB">
+                  <a:alpha val="100000"/>
+                </a:srgbClr>
+              </a:solidFill>
+              <a:prstDash val="solid"/>
+              <a:round/>
+            </a:ln>
+          </p:spPr>
+          <p:txBody>
+            <a:bodyPr/>
+            <a:lstStyle/>
+            <a:p/>
+          </p:txBody>
+        </p:sp>
+        <p:sp>
+          <p:nvSpPr>
+            <p:cNvPr id="56" name="pl56"/>
+            <p:cNvSpPr/>
+            <p:nvPr/>
+          </p:nvSpPr>
+          <p:spPr>
+            <a:xfrm>
+              <a:off x="887106" y="4695685"/>
+              <a:ext cx="7660515" cy="0"/>
+            </a:xfrm>
+            <a:custGeom>
+              <a:avLst/>
+              <a:pathLst>
+                <a:path w="7660515" h="0">
+                  <a:moveTo>
+                    <a:pt x="0" y="0"/>
+                  </a:moveTo>
+                  <a:lnTo>
+                    <a:pt x="7660515" y="0"/>
+                  </a:lnTo>
+                  <a:lnTo>
+                    <a:pt x="7660515" y="0"/>
+                  </a:lnTo>
+                </a:path>
+              </a:pathLst>
+            </a:custGeom>
+            <a:ln w="13550" cap="flat">
+              <a:solidFill>
+                <a:srgbClr val="EBEBEB">
+                  <a:alpha val="100000"/>
+                </a:srgbClr>
+              </a:solidFill>
+              <a:prstDash val="solid"/>
+              <a:round/>
+            </a:ln>
+          </p:spPr>
+          <p:txBody>
+            <a:bodyPr/>
+            <a:lstStyle/>
+            <a:p/>
+          </p:txBody>
+        </p:sp>
+        <p:sp>
+          <p:nvSpPr>
+            <p:cNvPr id="57" name="pl57"/>
+            <p:cNvSpPr/>
+            <p:nvPr/>
+          </p:nvSpPr>
+          <p:spPr>
+            <a:xfrm>
+              <a:off x="887106" y="4396351"/>
+              <a:ext cx="7660515" cy="0"/>
+            </a:xfrm>
+            <a:custGeom>
+              <a:avLst/>
+              <a:pathLst>
+                <a:path w="7660515" h="0">
+                  <a:moveTo>
+                    <a:pt x="0" y="0"/>
+                  </a:moveTo>
+                  <a:lnTo>
+                    <a:pt x="7660515" y="0"/>
+                  </a:lnTo>
+                  <a:lnTo>
+                    <a:pt x="7660515" y="0"/>
+                  </a:lnTo>
+                </a:path>
+              </a:pathLst>
+            </a:custGeom>
+            <a:ln w="13550" cap="flat">
+              <a:solidFill>
+                <a:srgbClr val="EBEBEB">
+                  <a:alpha val="100000"/>
+                </a:srgbClr>
+              </a:solidFill>
+              <a:prstDash val="solid"/>
+              <a:round/>
+            </a:ln>
+          </p:spPr>
+          <p:txBody>
+            <a:bodyPr/>
+            <a:lstStyle/>
+            <a:p/>
+          </p:txBody>
+        </p:sp>
+        <p:sp>
+          <p:nvSpPr>
+            <p:cNvPr id="58" name="pl58"/>
+            <p:cNvSpPr/>
+            <p:nvPr/>
+          </p:nvSpPr>
+          <p:spPr>
+            <a:xfrm>
+              <a:off x="1321788" y="4336484"/>
+              <a:ext cx="0" cy="1317069"/>
+            </a:xfrm>
+            <a:custGeom>
+              <a:avLst/>
+              <a:pathLst>
+                <a:path w="0" h="1317069">
+                  <a:moveTo>
+                    <a:pt x="0" y="1317069"/>
+                  </a:moveTo>
+                  <a:lnTo>
+                    <a:pt x="0" y="0"/>
+                  </a:lnTo>
+                  <a:lnTo>
+                    <a:pt x="0" y="0"/>
+                  </a:lnTo>
+                </a:path>
+              </a:pathLst>
+            </a:custGeom>
+            <a:ln w="13550" cap="flat">
+              <a:solidFill>
+                <a:srgbClr val="EBEBEB">
+                  <a:alpha val="100000"/>
+                </a:srgbClr>
+              </a:solidFill>
+              <a:prstDash val="solid"/>
+              <a:round/>
+            </a:ln>
+          </p:spPr>
+          <p:txBody>
+            <a:bodyPr/>
+            <a:lstStyle/>
+            <a:p/>
+          </p:txBody>
+        </p:sp>
+        <p:sp>
+          <p:nvSpPr>
+            <p:cNvPr id="59" name="pl59"/>
+            <p:cNvSpPr/>
+            <p:nvPr/>
+          </p:nvSpPr>
+          <p:spPr>
+            <a:xfrm>
+              <a:off x="2135389" y="4336484"/>
+              <a:ext cx="0" cy="1317069"/>
+            </a:xfrm>
+            <a:custGeom>
+              <a:avLst/>
+              <a:pathLst>
+                <a:path w="0" h="1317069">
+                  <a:moveTo>
+                    <a:pt x="0" y="1317069"/>
+                  </a:moveTo>
+                  <a:lnTo>
+                    <a:pt x="0" y="0"/>
+                  </a:lnTo>
+                  <a:lnTo>
+                    <a:pt x="0" y="0"/>
+                  </a:lnTo>
+                </a:path>
+              </a:pathLst>
+            </a:custGeom>
+            <a:ln w="13550" cap="flat">
+              <a:solidFill>
+                <a:srgbClr val="EBEBEB">
+                  <a:alpha val="100000"/>
+                </a:srgbClr>
+              </a:solidFill>
+              <a:prstDash val="solid"/>
+              <a:round/>
+            </a:ln>
+          </p:spPr>
+          <p:txBody>
+            <a:bodyPr/>
+            <a:lstStyle/>
+            <a:p/>
+          </p:txBody>
+        </p:sp>
+        <p:sp>
+          <p:nvSpPr>
+            <p:cNvPr id="60" name="pl60"/>
+            <p:cNvSpPr/>
+            <p:nvPr/>
+          </p:nvSpPr>
+          <p:spPr>
+            <a:xfrm>
+              <a:off x="2948991" y="4336484"/>
+              <a:ext cx="0" cy="1317069"/>
+            </a:xfrm>
+            <a:custGeom>
+              <a:avLst/>
+              <a:pathLst>
+                <a:path w="0" h="1317069">
+                  <a:moveTo>
+                    <a:pt x="0" y="1317069"/>
+                  </a:moveTo>
+                  <a:lnTo>
+                    <a:pt x="0" y="0"/>
+                  </a:lnTo>
+                  <a:lnTo>
+                    <a:pt x="0" y="0"/>
+                  </a:lnTo>
+                </a:path>
+              </a:pathLst>
+            </a:custGeom>
+            <a:ln w="13550" cap="flat">
+              <a:solidFill>
+                <a:srgbClr val="EBEBEB">
+                  <a:alpha val="100000"/>
+                </a:srgbClr>
+              </a:solidFill>
+              <a:prstDash val="solid"/>
+              <a:round/>
+            </a:ln>
+          </p:spPr>
+          <p:txBody>
+            <a:bodyPr/>
+            <a:lstStyle/>
+            <a:p/>
+          </p:txBody>
+        </p:sp>
+        <p:sp>
+          <p:nvSpPr>
+            <p:cNvPr id="61" name="pl61"/>
+            <p:cNvSpPr/>
+            <p:nvPr/>
+          </p:nvSpPr>
+          <p:spPr>
+            <a:xfrm>
+              <a:off x="3762592" y="4336484"/>
+              <a:ext cx="0" cy="1317069"/>
+            </a:xfrm>
+            <a:custGeom>
+              <a:avLst/>
+              <a:pathLst>
+                <a:path w="0" h="1317069">
+                  <a:moveTo>
+                    <a:pt x="0" y="1317069"/>
+                  </a:moveTo>
+                  <a:lnTo>
+                    <a:pt x="0" y="0"/>
+                  </a:lnTo>
+                  <a:lnTo>
+                    <a:pt x="0" y="0"/>
+                  </a:lnTo>
+                </a:path>
+              </a:pathLst>
+            </a:custGeom>
+            <a:ln w="13550" cap="flat">
+              <a:solidFill>
+                <a:srgbClr val="EBEBEB">
+                  <a:alpha val="100000"/>
+                </a:srgbClr>
+              </a:solidFill>
+              <a:prstDash val="solid"/>
+              <a:round/>
+            </a:ln>
+          </p:spPr>
+          <p:txBody>
+            <a:bodyPr/>
+            <a:lstStyle/>
+            <a:p/>
+          </p:txBody>
+        </p:sp>
+        <p:sp>
+          <p:nvSpPr>
+            <p:cNvPr id="62" name="pl62"/>
+            <p:cNvSpPr/>
+            <p:nvPr/>
+          </p:nvSpPr>
+          <p:spPr>
+            <a:xfrm>
+              <a:off x="4576193" y="4336484"/>
+              <a:ext cx="0" cy="1317069"/>
+            </a:xfrm>
+            <a:custGeom>
+              <a:avLst/>
+              <a:pathLst>
+                <a:path w="0" h="1317069">
+                  <a:moveTo>
+                    <a:pt x="0" y="1317069"/>
+                  </a:moveTo>
+                  <a:lnTo>
+                    <a:pt x="0" y="0"/>
+                  </a:lnTo>
+                  <a:lnTo>
+                    <a:pt x="0" y="0"/>
+                  </a:lnTo>
+                </a:path>
+              </a:pathLst>
+            </a:custGeom>
+            <a:ln w="13550" cap="flat">
+              <a:solidFill>
+                <a:srgbClr val="EBEBEB">
+                  <a:alpha val="100000"/>
+                </a:srgbClr>
+              </a:solidFill>
+              <a:prstDash val="solid"/>
+              <a:round/>
+            </a:ln>
+          </p:spPr>
+          <p:txBody>
+            <a:bodyPr/>
+            <a:lstStyle/>
+            <a:p/>
+          </p:txBody>
+        </p:sp>
+        <p:sp>
+          <p:nvSpPr>
+            <p:cNvPr id="63" name="pl63"/>
+            <p:cNvSpPr/>
+            <p:nvPr/>
+          </p:nvSpPr>
+          <p:spPr>
+            <a:xfrm>
+              <a:off x="5389795" y="4336484"/>
+              <a:ext cx="0" cy="1317069"/>
+            </a:xfrm>
+            <a:custGeom>
+              <a:avLst/>
+              <a:pathLst>
+                <a:path w="0" h="1317069">
+                  <a:moveTo>
+                    <a:pt x="0" y="1317069"/>
+                  </a:moveTo>
+                  <a:lnTo>
+                    <a:pt x="0" y="0"/>
+                  </a:lnTo>
+                  <a:lnTo>
+                    <a:pt x="0" y="0"/>
+                  </a:lnTo>
+                </a:path>
+              </a:pathLst>
+            </a:custGeom>
+            <a:ln w="13550" cap="flat">
+              <a:solidFill>
+                <a:srgbClr val="EBEBEB">
+                  <a:alpha val="100000"/>
+                </a:srgbClr>
+              </a:solidFill>
+              <a:prstDash val="solid"/>
+              <a:round/>
+            </a:ln>
+          </p:spPr>
+          <p:txBody>
+            <a:bodyPr/>
+            <a:lstStyle/>
+            <a:p/>
+          </p:txBody>
+        </p:sp>
+        <p:sp>
+          <p:nvSpPr>
+            <p:cNvPr id="64" name="pl64"/>
+            <p:cNvSpPr/>
+            <p:nvPr/>
+          </p:nvSpPr>
+          <p:spPr>
+            <a:xfrm>
+              <a:off x="6203396" y="4336484"/>
+              <a:ext cx="0" cy="1317069"/>
+            </a:xfrm>
+            <a:custGeom>
+              <a:avLst/>
+              <a:pathLst>
+                <a:path w="0" h="1317069">
+                  <a:moveTo>
+                    <a:pt x="0" y="1317069"/>
+                  </a:moveTo>
+                  <a:lnTo>
+                    <a:pt x="0" y="0"/>
+                  </a:lnTo>
+                  <a:lnTo>
+                    <a:pt x="0" y="0"/>
+                  </a:lnTo>
+                </a:path>
+              </a:pathLst>
+            </a:custGeom>
+            <a:ln w="13550" cap="flat">
+              <a:solidFill>
+                <a:srgbClr val="EBEBEB">
+                  <a:alpha val="100000"/>
+                </a:srgbClr>
+              </a:solidFill>
+              <a:prstDash val="solid"/>
+              <a:round/>
+            </a:ln>
+          </p:spPr>
+          <p:txBody>
+            <a:bodyPr/>
+            <a:lstStyle/>
+            <a:p/>
+          </p:txBody>
+        </p:sp>
+        <p:sp>
+          <p:nvSpPr>
+            <p:cNvPr id="65" name="pl65"/>
+            <p:cNvSpPr/>
+            <p:nvPr/>
+          </p:nvSpPr>
+          <p:spPr>
+            <a:xfrm>
+              <a:off x="7016997" y="4336484"/>
+              <a:ext cx="0" cy="1317069"/>
+            </a:xfrm>
+            <a:custGeom>
+              <a:avLst/>
+              <a:pathLst>
+                <a:path w="0" h="1317069">
+                  <a:moveTo>
+                    <a:pt x="0" y="1317069"/>
+                  </a:moveTo>
+                  <a:lnTo>
+                    <a:pt x="0" y="0"/>
+                  </a:lnTo>
+                  <a:lnTo>
+                    <a:pt x="0" y="0"/>
+                  </a:lnTo>
+                </a:path>
+              </a:pathLst>
+            </a:custGeom>
+            <a:ln w="13550" cap="flat">
+              <a:solidFill>
+                <a:srgbClr val="EBEBEB">
+                  <a:alpha val="100000"/>
+                </a:srgbClr>
+              </a:solidFill>
+              <a:prstDash val="solid"/>
+              <a:round/>
+            </a:ln>
+          </p:spPr>
+          <p:txBody>
+            <a:bodyPr/>
+            <a:lstStyle/>
+            <a:p/>
+          </p:txBody>
+        </p:sp>
+        <p:sp>
+          <p:nvSpPr>
+            <p:cNvPr id="66" name="pl66"/>
+            <p:cNvSpPr/>
+            <p:nvPr/>
+          </p:nvSpPr>
+          <p:spPr>
+            <a:xfrm>
+              <a:off x="7830599" y="4336484"/>
+              <a:ext cx="0" cy="1317069"/>
+            </a:xfrm>
+            <a:custGeom>
+              <a:avLst/>
+              <a:pathLst>
+                <a:path w="0" h="1317069">
+                  <a:moveTo>
+                    <a:pt x="0" y="1317069"/>
+                  </a:moveTo>
+                  <a:lnTo>
+                    <a:pt x="0" y="0"/>
+                  </a:lnTo>
+                  <a:lnTo>
+                    <a:pt x="0" y="0"/>
+                  </a:lnTo>
+                </a:path>
+              </a:pathLst>
+            </a:custGeom>
+            <a:ln w="13550" cap="flat">
+              <a:solidFill>
+                <a:srgbClr val="EBEBEB">
+                  <a:alpha val="100000"/>
+                </a:srgbClr>
+              </a:solidFill>
+              <a:prstDash val="solid"/>
+              <a:round/>
+            </a:ln>
+          </p:spPr>
+          <p:txBody>
+            <a:bodyPr/>
+            <a:lstStyle/>
+            <a:p/>
+          </p:txBody>
+        </p:sp>
+        <p:sp>
+          <p:nvSpPr>
+            <p:cNvPr id="67" name="pg67"/>
+            <p:cNvSpPr/>
+            <p:nvPr/>
+          </p:nvSpPr>
+          <p:spPr>
+            <a:xfrm>
+              <a:off x="1235312" y="4336484"/>
+              <a:ext cx="6964104" cy="1207112"/>
+            </a:xfrm>
+            <a:custGeom>
+              <a:avLst/>
+              <a:pathLst>
+                <a:path w="6964104" h="1207112">
+                  <a:moveTo>
+                    <a:pt x="349782" y="0"/>
+                  </a:moveTo>
+                  <a:lnTo>
+                    <a:pt x="351722" y="1208"/>
+                  </a:lnTo>
+                  <a:lnTo>
+                    <a:pt x="422066" y="43528"/>
+                  </a:lnTo>
+                  <a:lnTo>
+                    <a:pt x="492411" y="84422"/>
+                  </a:lnTo>
+                  <a:lnTo>
+                    <a:pt x="562755" y="123938"/>
+                  </a:lnTo>
+                  <a:lnTo>
+                    <a:pt x="633100" y="162122"/>
+                  </a:lnTo>
+                  <a:lnTo>
+                    <a:pt x="703444" y="199020"/>
+                  </a:lnTo>
+                  <a:lnTo>
+                    <a:pt x="773789" y="234675"/>
+                  </a:lnTo>
+                  <a:lnTo>
+                    <a:pt x="844133" y="269129"/>
+                  </a:lnTo>
+                  <a:lnTo>
+                    <a:pt x="914478" y="302421"/>
+                  </a:lnTo>
+                  <a:lnTo>
+                    <a:pt x="984822" y="334592"/>
+                  </a:lnTo>
+                  <a:lnTo>
+                    <a:pt x="1055167" y="365679"/>
+                  </a:lnTo>
+                  <a:lnTo>
+                    <a:pt x="1125511" y="395718"/>
+                  </a:lnTo>
+                  <a:lnTo>
+                    <a:pt x="1195856" y="424745"/>
+                  </a:lnTo>
+                  <a:lnTo>
+                    <a:pt x="1266200" y="452794"/>
+                  </a:lnTo>
+                  <a:lnTo>
+                    <a:pt x="1336545" y="479898"/>
+                  </a:lnTo>
+                  <a:lnTo>
+                    <a:pt x="1406889" y="506089"/>
+                  </a:lnTo>
+                  <a:lnTo>
+                    <a:pt x="1477234" y="531397"/>
+                  </a:lnTo>
+                  <a:lnTo>
+                    <a:pt x="1547578" y="555853"/>
+                  </a:lnTo>
+                  <a:lnTo>
+                    <a:pt x="1617923" y="579485"/>
+                  </a:lnTo>
+                  <a:lnTo>
+                    <a:pt x="1688267" y="602320"/>
+                  </a:lnTo>
+                  <a:lnTo>
+                    <a:pt x="1758612" y="624386"/>
+                  </a:lnTo>
+                  <a:lnTo>
+                    <a:pt x="1828956" y="645708"/>
+                  </a:lnTo>
+                  <a:lnTo>
+                    <a:pt x="1899301" y="666312"/>
+                  </a:lnTo>
+                  <a:lnTo>
+                    <a:pt x="1969645" y="686222"/>
+                  </a:lnTo>
+                  <a:lnTo>
+                    <a:pt x="2039990" y="705460"/>
+                  </a:lnTo>
+                  <a:lnTo>
+                    <a:pt x="2110334" y="724051"/>
+                  </a:lnTo>
+                  <a:lnTo>
+                    <a:pt x="2180679" y="742015"/>
+                  </a:lnTo>
+                  <a:lnTo>
+                    <a:pt x="2251023" y="759374"/>
+                  </a:lnTo>
+                  <a:lnTo>
+                    <a:pt x="2321368" y="776148"/>
+                  </a:lnTo>
+                  <a:lnTo>
+                    <a:pt x="2391712" y="792357"/>
+                  </a:lnTo>
+                  <a:lnTo>
+                    <a:pt x="2462057" y="808020"/>
+                  </a:lnTo>
+                  <a:lnTo>
+                    <a:pt x="2532401" y="823155"/>
+                  </a:lnTo>
+                  <a:lnTo>
+                    <a:pt x="2602746" y="837780"/>
+                  </a:lnTo>
+                  <a:lnTo>
+                    <a:pt x="2673090" y="851912"/>
+                  </a:lnTo>
+                  <a:lnTo>
+                    <a:pt x="2743435" y="865568"/>
+                  </a:lnTo>
+                  <a:lnTo>
+                    <a:pt x="2813779" y="878764"/>
+                  </a:lnTo>
+                  <a:lnTo>
+                    <a:pt x="2884124" y="891515"/>
+                  </a:lnTo>
+                  <a:lnTo>
+                    <a:pt x="2954468" y="903836"/>
+                  </a:lnTo>
+                  <a:lnTo>
+                    <a:pt x="3024813" y="915743"/>
+                  </a:lnTo>
+                  <a:lnTo>
+                    <a:pt x="3095157" y="927248"/>
+                  </a:lnTo>
+                  <a:lnTo>
+                    <a:pt x="3165502" y="938366"/>
+                  </a:lnTo>
+                  <a:lnTo>
+                    <a:pt x="3235846" y="949109"/>
+                  </a:lnTo>
+                  <a:lnTo>
+                    <a:pt x="3306191" y="957847"/>
+                  </a:lnTo>
+                  <a:lnTo>
+                    <a:pt x="3376535" y="957718"/>
+                  </a:lnTo>
+                  <a:lnTo>
+                    <a:pt x="3446880" y="957588"/>
+                  </a:lnTo>
+                  <a:lnTo>
+                    <a:pt x="3517224" y="957458"/>
+                  </a:lnTo>
+                  <a:lnTo>
+                    <a:pt x="3587569" y="957329"/>
+                  </a:lnTo>
+                  <a:lnTo>
+                    <a:pt x="3657913" y="957199"/>
+                  </a:lnTo>
+                  <a:lnTo>
+                    <a:pt x="3728257" y="957069"/>
+                  </a:lnTo>
+                  <a:lnTo>
+                    <a:pt x="3798602" y="956939"/>
+                  </a:lnTo>
+                  <a:lnTo>
+                    <a:pt x="3868946" y="956809"/>
+                  </a:lnTo>
+                  <a:lnTo>
+                    <a:pt x="3939291" y="956679"/>
+                  </a:lnTo>
+                  <a:lnTo>
+                    <a:pt x="4009635" y="956549"/>
+                  </a:lnTo>
+                  <a:lnTo>
+                    <a:pt x="4079980" y="956419"/>
+                  </a:lnTo>
+                  <a:lnTo>
+                    <a:pt x="4150324" y="956289"/>
+                  </a:lnTo>
+                  <a:lnTo>
+                    <a:pt x="4220669" y="956158"/>
+                  </a:lnTo>
+                  <a:lnTo>
+                    <a:pt x="4291013" y="956028"/>
+                  </a:lnTo>
+                  <a:lnTo>
+                    <a:pt x="4361358" y="955898"/>
+                  </a:lnTo>
+                  <a:lnTo>
+                    <a:pt x="4431702" y="955767"/>
+                  </a:lnTo>
+                  <a:lnTo>
+                    <a:pt x="4502047" y="955637"/>
+                  </a:lnTo>
+                  <a:lnTo>
+                    <a:pt x="4572391" y="955506"/>
+                  </a:lnTo>
+                  <a:lnTo>
+                    <a:pt x="4642736" y="955376"/>
+                  </a:lnTo>
+                  <a:lnTo>
+                    <a:pt x="4713080" y="955245"/>
+                  </a:lnTo>
+                  <a:lnTo>
+                    <a:pt x="4783425" y="955114"/>
+                  </a:lnTo>
+                  <a:lnTo>
+                    <a:pt x="4853769" y="954984"/>
+                  </a:lnTo>
+                  <a:lnTo>
+                    <a:pt x="4924114" y="954853"/>
+                  </a:lnTo>
+                  <a:lnTo>
+                    <a:pt x="4994458" y="954722"/>
+                  </a:lnTo>
+                  <a:lnTo>
+                    <a:pt x="5064803" y="954591"/>
+                  </a:lnTo>
+                  <a:lnTo>
+                    <a:pt x="5135147" y="954460"/>
+                  </a:lnTo>
+                  <a:lnTo>
+                    <a:pt x="5205492" y="954329"/>
+                  </a:lnTo>
+                  <a:lnTo>
+                    <a:pt x="5275836" y="954198"/>
+                  </a:lnTo>
+                  <a:lnTo>
+                    <a:pt x="5346181" y="954067"/>
+                  </a:lnTo>
+                  <a:lnTo>
+                    <a:pt x="5416525" y="953935"/>
+                  </a:lnTo>
+                  <a:lnTo>
+                    <a:pt x="5486870" y="953804"/>
+                  </a:lnTo>
+                  <a:lnTo>
+                    <a:pt x="5557214" y="953673"/>
+                  </a:lnTo>
+                  <a:lnTo>
+                    <a:pt x="5627559" y="953541"/>
+                  </a:lnTo>
+                  <a:lnTo>
+                    <a:pt x="5697903" y="953410"/>
+                  </a:lnTo>
+                  <a:lnTo>
+                    <a:pt x="5768248" y="953278"/>
+                  </a:lnTo>
+                  <a:lnTo>
+                    <a:pt x="5838592" y="953147"/>
+                  </a:lnTo>
+                  <a:lnTo>
+                    <a:pt x="5908937" y="953015"/>
+                  </a:lnTo>
+                  <a:lnTo>
+                    <a:pt x="5979281" y="952884"/>
+                  </a:lnTo>
+                  <a:lnTo>
+                    <a:pt x="6049626" y="952752"/>
+                  </a:lnTo>
+                  <a:lnTo>
+                    <a:pt x="6119970" y="952620"/>
+                  </a:lnTo>
+                  <a:lnTo>
+                    <a:pt x="6190315" y="952488"/>
+                  </a:lnTo>
+                  <a:lnTo>
+                    <a:pt x="6260659" y="952356"/>
+                  </a:lnTo>
+                  <a:lnTo>
+                    <a:pt x="6331004" y="952224"/>
+                  </a:lnTo>
+                  <a:lnTo>
+                    <a:pt x="6401348" y="952092"/>
+                  </a:lnTo>
+                  <a:lnTo>
+                    <a:pt x="6471693" y="951960"/>
+                  </a:lnTo>
+                  <a:lnTo>
+                    <a:pt x="6542037" y="951828"/>
+                  </a:lnTo>
+                  <a:lnTo>
+                    <a:pt x="6612382" y="951696"/>
+                  </a:lnTo>
+                  <a:lnTo>
+                    <a:pt x="6682726" y="951564"/>
+                  </a:lnTo>
+                  <a:lnTo>
+                    <a:pt x="6753071" y="951431"/>
+                  </a:lnTo>
+                  <a:lnTo>
+                    <a:pt x="6823415" y="951299"/>
+                  </a:lnTo>
+                  <a:lnTo>
+                    <a:pt x="6893760" y="951167"/>
+                  </a:lnTo>
+                  <a:lnTo>
+                    <a:pt x="6964104" y="951034"/>
+                  </a:lnTo>
+                  <a:lnTo>
+                    <a:pt x="6964104" y="1207112"/>
+                  </a:lnTo>
+                  <a:lnTo>
+                    <a:pt x="6893760" y="1205365"/>
+                  </a:lnTo>
+                  <a:lnTo>
+                    <a:pt x="6823415" y="1203558"/>
+                  </a:lnTo>
+                  <a:lnTo>
+                    <a:pt x="6753071" y="1201687"/>
+                  </a:lnTo>
+                  <a:lnTo>
+                    <a:pt x="6682726" y="1199752"/>
+                  </a:lnTo>
+                  <a:lnTo>
+                    <a:pt x="6612382" y="1197748"/>
+                  </a:lnTo>
+                  <a:lnTo>
+                    <a:pt x="6542037" y="1195675"/>
+                  </a:lnTo>
+                  <a:lnTo>
+                    <a:pt x="6471693" y="1193530"/>
+                  </a:lnTo>
+                  <a:lnTo>
+                    <a:pt x="6401348" y="1191310"/>
+                  </a:lnTo>
+                  <a:lnTo>
+                    <a:pt x="6331004" y="1189012"/>
+                  </a:lnTo>
+                  <a:lnTo>
+                    <a:pt x="6260659" y="1186634"/>
+                  </a:lnTo>
+                  <a:lnTo>
+                    <a:pt x="6190315" y="1184174"/>
+                  </a:lnTo>
+                  <a:lnTo>
+                    <a:pt x="6119970" y="1181627"/>
+                  </a:lnTo>
+                  <a:lnTo>
+                    <a:pt x="6049626" y="1178992"/>
+                  </a:lnTo>
+                  <a:lnTo>
+                    <a:pt x="5979281" y="1176265"/>
+                  </a:lnTo>
+                  <a:lnTo>
+                    <a:pt x="5908937" y="1173443"/>
+                  </a:lnTo>
+                  <a:lnTo>
+                    <a:pt x="5838592" y="1170522"/>
+                  </a:lnTo>
+                  <a:lnTo>
+                    <a:pt x="5768248" y="1167499"/>
+                  </a:lnTo>
+                  <a:lnTo>
+                    <a:pt x="5697903" y="1164372"/>
+                  </a:lnTo>
+                  <a:lnTo>
+                    <a:pt x="5627559" y="1161135"/>
+                  </a:lnTo>
+                  <a:lnTo>
+                    <a:pt x="5557214" y="1157785"/>
+                  </a:lnTo>
+                  <a:lnTo>
+                    <a:pt x="5486870" y="1154318"/>
+                  </a:lnTo>
+                  <a:lnTo>
+                    <a:pt x="5416525" y="1150731"/>
+                  </a:lnTo>
+                  <a:lnTo>
+                    <a:pt x="5346181" y="1147018"/>
+                  </a:lnTo>
+                  <a:lnTo>
+                    <a:pt x="5275836" y="1143176"/>
+                  </a:lnTo>
+                  <a:lnTo>
+                    <a:pt x="5205492" y="1139200"/>
+                  </a:lnTo>
+                  <a:lnTo>
+                    <a:pt x="5135147" y="1135086"/>
+                  </a:lnTo>
+                  <a:lnTo>
+                    <a:pt x="5064803" y="1130827"/>
+                  </a:lnTo>
+                  <a:lnTo>
+                    <a:pt x="4994458" y="1126421"/>
+                  </a:lnTo>
+                  <a:lnTo>
+                    <a:pt x="4924114" y="1121861"/>
+                  </a:lnTo>
+                  <a:lnTo>
+                    <a:pt x="4853769" y="1117141"/>
+                  </a:lnTo>
+                  <a:lnTo>
+                    <a:pt x="4783425" y="1112258"/>
+                  </a:lnTo>
+                  <a:lnTo>
+                    <a:pt x="4713080" y="1107204"/>
+                  </a:lnTo>
+                  <a:lnTo>
+                    <a:pt x="4642736" y="1101973"/>
+                  </a:lnTo>
+                  <a:lnTo>
+                    <a:pt x="4572391" y="1096560"/>
+                  </a:lnTo>
+                  <a:lnTo>
+                    <a:pt x="4502047" y="1090959"/>
+                  </a:lnTo>
+                  <a:lnTo>
+                    <a:pt x="4431702" y="1085162"/>
+                  </a:lnTo>
+                  <a:lnTo>
+                    <a:pt x="4361358" y="1079163"/>
+                  </a:lnTo>
+                  <a:lnTo>
+                    <a:pt x="4291013" y="1072955"/>
+                  </a:lnTo>
+                  <a:lnTo>
+                    <a:pt x="4220669" y="1066531"/>
+                  </a:lnTo>
+                  <a:lnTo>
+                    <a:pt x="4150324" y="1059882"/>
+                  </a:lnTo>
+                  <a:lnTo>
+                    <a:pt x="4079980" y="1053002"/>
+                  </a:lnTo>
+                  <a:lnTo>
+                    <a:pt x="4009635" y="1045881"/>
+                  </a:lnTo>
+                  <a:lnTo>
+                    <a:pt x="3939291" y="1038513"/>
+                  </a:lnTo>
+                  <a:lnTo>
+                    <a:pt x="3868946" y="1030887"/>
+                  </a:lnTo>
+                  <a:lnTo>
+                    <a:pt x="3798602" y="1022996"/>
+                  </a:lnTo>
+                  <a:lnTo>
+                    <a:pt x="3728257" y="1014829"/>
+                  </a:lnTo>
+                  <a:lnTo>
+                    <a:pt x="3657913" y="1006378"/>
+                  </a:lnTo>
+                  <a:lnTo>
+                    <a:pt x="3587569" y="997632"/>
+                  </a:lnTo>
+                  <a:lnTo>
+                    <a:pt x="3517224" y="988581"/>
+                  </a:lnTo>
+                  <a:lnTo>
+                    <a:pt x="3446880" y="979214"/>
+                  </a:lnTo>
+                  <a:lnTo>
+                    <a:pt x="3376535" y="969521"/>
+                  </a:lnTo>
+                  <a:lnTo>
+                    <a:pt x="3306191" y="959490"/>
+                  </a:lnTo>
+                  <a:lnTo>
+                    <a:pt x="3235846" y="957977"/>
+                  </a:lnTo>
+                  <a:lnTo>
+                    <a:pt x="3165502" y="958106"/>
+                  </a:lnTo>
+                  <a:lnTo>
+                    <a:pt x="3095157" y="958236"/>
+                  </a:lnTo>
+                  <a:lnTo>
+                    <a:pt x="3024813" y="958365"/>
+                  </a:lnTo>
+                  <a:lnTo>
+                    <a:pt x="2954468" y="958494"/>
+                  </a:lnTo>
+                  <a:lnTo>
+                    <a:pt x="2884124" y="958624"/>
+                  </a:lnTo>
+                  <a:lnTo>
+                    <a:pt x="2813779" y="958753"/>
+                  </a:lnTo>
+                  <a:lnTo>
+                    <a:pt x="2743435" y="958882"/>
+                  </a:lnTo>
+                  <a:lnTo>
+                    <a:pt x="2673090" y="959011"/>
+                  </a:lnTo>
+                  <a:lnTo>
+                    <a:pt x="2602746" y="959140"/>
+                  </a:lnTo>
+                  <a:lnTo>
+                    <a:pt x="2532401" y="959269"/>
+                  </a:lnTo>
+                  <a:lnTo>
+                    <a:pt x="2462057" y="959398"/>
+                  </a:lnTo>
+                  <a:lnTo>
+                    <a:pt x="2391712" y="959527"/>
+                  </a:lnTo>
+                  <a:lnTo>
+                    <a:pt x="2321368" y="959656"/>
+                  </a:lnTo>
+                  <a:lnTo>
+                    <a:pt x="2251023" y="959784"/>
+                  </a:lnTo>
+                  <a:lnTo>
+                    <a:pt x="2180679" y="959913"/>
+                  </a:lnTo>
+                  <a:lnTo>
+                    <a:pt x="2110334" y="960042"/>
+                  </a:lnTo>
+                  <a:lnTo>
+                    <a:pt x="2039990" y="960170"/>
+                  </a:lnTo>
+                  <a:lnTo>
+                    <a:pt x="1969645" y="960299"/>
+                  </a:lnTo>
+                  <a:lnTo>
+                    <a:pt x="1899301" y="960427"/>
+                  </a:lnTo>
+                  <a:lnTo>
+                    <a:pt x="1828956" y="960556"/>
+                  </a:lnTo>
+                  <a:lnTo>
+                    <a:pt x="1758612" y="960684"/>
+                  </a:lnTo>
+                  <a:lnTo>
+                    <a:pt x="1688267" y="960812"/>
+                  </a:lnTo>
+                  <a:lnTo>
+                    <a:pt x="1617923" y="960941"/>
+                  </a:lnTo>
+                  <a:lnTo>
+                    <a:pt x="1547578" y="961069"/>
+                  </a:lnTo>
+                  <a:lnTo>
+                    <a:pt x="1477234" y="961197"/>
+                  </a:lnTo>
+                  <a:lnTo>
+                    <a:pt x="1406889" y="961325"/>
+                  </a:lnTo>
+                  <a:lnTo>
+                    <a:pt x="1336545" y="961453"/>
+                  </a:lnTo>
+                  <a:lnTo>
+                    <a:pt x="1266200" y="961581"/>
+                  </a:lnTo>
+                  <a:lnTo>
+                    <a:pt x="1195856" y="961709"/>
+                  </a:lnTo>
+                  <a:lnTo>
+                    <a:pt x="1125511" y="961837"/>
+                  </a:lnTo>
+                  <a:lnTo>
+                    <a:pt x="1055167" y="961965"/>
+                  </a:lnTo>
+                  <a:lnTo>
+                    <a:pt x="984822" y="962092"/>
+                  </a:lnTo>
+                  <a:lnTo>
+                    <a:pt x="914478" y="962220"/>
+                  </a:lnTo>
+                  <a:lnTo>
+                    <a:pt x="844133" y="962348"/>
+                  </a:lnTo>
+                  <a:lnTo>
+                    <a:pt x="773789" y="962475"/>
+                  </a:lnTo>
+                  <a:lnTo>
+                    <a:pt x="703444" y="962603"/>
+                  </a:lnTo>
+                  <a:lnTo>
+                    <a:pt x="633100" y="962730"/>
+                  </a:lnTo>
+                  <a:lnTo>
+                    <a:pt x="562755" y="962858"/>
+                  </a:lnTo>
+                  <a:lnTo>
+                    <a:pt x="492411" y="962985"/>
+                  </a:lnTo>
+                  <a:lnTo>
+                    <a:pt x="422066" y="963112"/>
+                  </a:lnTo>
+                  <a:lnTo>
+                    <a:pt x="351722" y="963240"/>
+                  </a:lnTo>
+                  <a:lnTo>
+                    <a:pt x="281377" y="963367"/>
+                  </a:lnTo>
+                  <a:lnTo>
+                    <a:pt x="211033" y="963494"/>
+                  </a:lnTo>
+                  <a:lnTo>
+                    <a:pt x="140688" y="963621"/>
+                  </a:lnTo>
+                  <a:lnTo>
+                    <a:pt x="70344" y="963748"/>
+                  </a:lnTo>
+                  <a:lnTo>
+                    <a:pt x="0" y="963875"/>
+                  </a:lnTo>
+                  <a:close/>
+                </a:path>
+              </a:pathLst>
+            </a:custGeom>
+            <a:solidFill>
+              <a:srgbClr val="FF8C00">
+                <a:alpha val="20000"/>
+              </a:srgbClr>
+            </a:solidFill>
+          </p:spPr>
+          <p:txBody>
+            <a:bodyPr/>
+            <a:lstStyle/>
+            <a:p/>
+          </p:txBody>
+        </p:sp>
+        <p:sp>
+          <p:nvSpPr>
+            <p:cNvPr id="68" name="pl68"/>
+            <p:cNvSpPr/>
+            <p:nvPr/>
+          </p:nvSpPr>
+          <p:spPr>
+            <a:xfrm>
+              <a:off x="1585094" y="4336484"/>
+              <a:ext cx="6614322" cy="957847"/>
+            </a:xfrm>
+            <a:custGeom>
+              <a:avLst/>
+              <a:pathLst>
+                <a:path w="6614322" h="957847">
+                  <a:moveTo>
+                    <a:pt x="0" y="0"/>
+                  </a:moveTo>
+                  <a:lnTo>
+                    <a:pt x="1940" y="1208"/>
+                  </a:lnTo>
+                  <a:lnTo>
+                    <a:pt x="72284" y="43528"/>
+                  </a:lnTo>
+                  <a:lnTo>
+                    <a:pt x="142629" y="84422"/>
+                  </a:lnTo>
+                  <a:lnTo>
+                    <a:pt x="212973" y="123938"/>
+                  </a:lnTo>
+                  <a:lnTo>
+                    <a:pt x="283318" y="162122"/>
+                  </a:lnTo>
+                  <a:lnTo>
+                    <a:pt x="353662" y="199020"/>
+                  </a:lnTo>
+                  <a:lnTo>
+                    <a:pt x="424007" y="234675"/>
+                  </a:lnTo>
+                  <a:lnTo>
+                    <a:pt x="494351" y="269129"/>
+                  </a:lnTo>
+                  <a:lnTo>
+                    <a:pt x="564696" y="302421"/>
+                  </a:lnTo>
+                  <a:lnTo>
+                    <a:pt x="635040" y="334592"/>
+                  </a:lnTo>
+                  <a:lnTo>
+                    <a:pt x="705385" y="365679"/>
+                  </a:lnTo>
+                  <a:lnTo>
+                    <a:pt x="775729" y="395718"/>
+                  </a:lnTo>
+                  <a:lnTo>
+                    <a:pt x="846074" y="424745"/>
+                  </a:lnTo>
+                  <a:lnTo>
+                    <a:pt x="916418" y="452794"/>
+                  </a:lnTo>
+                  <a:lnTo>
+                    <a:pt x="986763" y="479898"/>
+                  </a:lnTo>
+                  <a:lnTo>
+                    <a:pt x="1057107" y="506089"/>
+                  </a:lnTo>
+                  <a:lnTo>
+                    <a:pt x="1127452" y="531397"/>
+                  </a:lnTo>
+                  <a:lnTo>
+                    <a:pt x="1197796" y="555853"/>
+                  </a:lnTo>
+                  <a:lnTo>
+                    <a:pt x="1268141" y="579485"/>
+                  </a:lnTo>
+                  <a:lnTo>
+                    <a:pt x="1338485" y="602320"/>
+                  </a:lnTo>
+                  <a:lnTo>
+                    <a:pt x="1408830" y="624386"/>
+                  </a:lnTo>
+                  <a:lnTo>
+                    <a:pt x="1479174" y="645708"/>
+                  </a:lnTo>
+                  <a:lnTo>
+                    <a:pt x="1549519" y="666312"/>
+                  </a:lnTo>
+                  <a:lnTo>
+                    <a:pt x="1619863" y="686222"/>
+                  </a:lnTo>
+                  <a:lnTo>
+                    <a:pt x="1690208" y="705460"/>
+                  </a:lnTo>
+                  <a:lnTo>
+                    <a:pt x="1760552" y="724051"/>
+                  </a:lnTo>
+                  <a:lnTo>
+                    <a:pt x="1830897" y="742015"/>
+                  </a:lnTo>
+                  <a:lnTo>
+                    <a:pt x="1901241" y="759374"/>
+                  </a:lnTo>
+                  <a:lnTo>
+                    <a:pt x="1971586" y="776148"/>
+                  </a:lnTo>
+                  <a:lnTo>
+                    <a:pt x="2041930" y="792357"/>
+                  </a:lnTo>
+                  <a:lnTo>
+                    <a:pt x="2112275" y="808020"/>
+                  </a:lnTo>
+                  <a:lnTo>
+                    <a:pt x="2182619" y="823155"/>
+                  </a:lnTo>
+                  <a:lnTo>
+                    <a:pt x="2252964" y="837780"/>
+                  </a:lnTo>
+                  <a:lnTo>
+                    <a:pt x="2323308" y="851912"/>
+                  </a:lnTo>
+                  <a:lnTo>
+                    <a:pt x="2393653" y="865568"/>
+                  </a:lnTo>
+                  <a:lnTo>
+                    <a:pt x="2463997" y="878764"/>
+                  </a:lnTo>
+                  <a:lnTo>
+                    <a:pt x="2534342" y="891515"/>
+                  </a:lnTo>
+                  <a:lnTo>
+                    <a:pt x="2604686" y="903836"/>
+                  </a:lnTo>
+                  <a:lnTo>
+                    <a:pt x="2675030" y="915743"/>
+                  </a:lnTo>
+                  <a:lnTo>
+                    <a:pt x="2745375" y="927248"/>
+                  </a:lnTo>
+                  <a:lnTo>
+                    <a:pt x="2815719" y="938366"/>
+                  </a:lnTo>
+                  <a:lnTo>
+                    <a:pt x="2886064" y="949109"/>
+                  </a:lnTo>
+                  <a:lnTo>
+                    <a:pt x="2956408" y="957847"/>
+                  </a:lnTo>
+                  <a:lnTo>
+                    <a:pt x="3026753" y="957718"/>
+                  </a:lnTo>
+                  <a:lnTo>
+                    <a:pt x="3097097" y="957588"/>
+                  </a:lnTo>
+                  <a:lnTo>
+                    <a:pt x="3167442" y="957458"/>
+                  </a:lnTo>
+                  <a:lnTo>
+                    <a:pt x="3237786" y="957329"/>
+                  </a:lnTo>
+                  <a:lnTo>
+                    <a:pt x="3308131" y="957199"/>
+                  </a:lnTo>
+                  <a:lnTo>
+                    <a:pt x="3378475" y="957069"/>
+                  </a:lnTo>
+                  <a:lnTo>
+                    <a:pt x="3448820" y="956939"/>
+                  </a:lnTo>
+                  <a:lnTo>
+                    <a:pt x="3519164" y="956809"/>
+                  </a:lnTo>
+                  <a:lnTo>
+                    <a:pt x="3589509" y="956679"/>
+                  </a:lnTo>
+                  <a:lnTo>
+                    <a:pt x="3659853" y="956549"/>
+                  </a:lnTo>
+                  <a:lnTo>
+                    <a:pt x="3730198" y="956419"/>
+                  </a:lnTo>
+                  <a:lnTo>
+                    <a:pt x="3800542" y="956289"/>
+                  </a:lnTo>
+                  <a:lnTo>
+                    <a:pt x="3870887" y="956158"/>
+                  </a:lnTo>
+                  <a:lnTo>
+                    <a:pt x="3941231" y="956028"/>
+                  </a:lnTo>
+                  <a:lnTo>
+                    <a:pt x="4011576" y="955898"/>
+                  </a:lnTo>
+                  <a:lnTo>
+                    <a:pt x="4081920" y="955767"/>
+                  </a:lnTo>
+                  <a:lnTo>
+                    <a:pt x="4152265" y="955637"/>
+                  </a:lnTo>
+                  <a:lnTo>
+                    <a:pt x="4222609" y="955506"/>
+                  </a:lnTo>
+                  <a:lnTo>
+                    <a:pt x="4292954" y="955376"/>
+                  </a:lnTo>
+                  <a:lnTo>
+                    <a:pt x="4363298" y="955245"/>
+                  </a:lnTo>
+                  <a:lnTo>
+                    <a:pt x="4433643" y="955114"/>
+                  </a:lnTo>
+                  <a:lnTo>
+                    <a:pt x="4503987" y="954984"/>
+                  </a:lnTo>
+                  <a:lnTo>
+                    <a:pt x="4574332" y="954853"/>
+                  </a:lnTo>
+                  <a:lnTo>
+                    <a:pt x="4644676" y="954722"/>
+                  </a:lnTo>
+                  <a:lnTo>
+                    <a:pt x="4715021" y="954591"/>
+                  </a:lnTo>
+                  <a:lnTo>
+                    <a:pt x="4785365" y="954460"/>
+                  </a:lnTo>
+                  <a:lnTo>
+                    <a:pt x="4855710" y="954329"/>
+                  </a:lnTo>
+                  <a:lnTo>
+                    <a:pt x="4926054" y="954198"/>
+                  </a:lnTo>
+                  <a:lnTo>
+                    <a:pt x="4996399" y="954067"/>
+                  </a:lnTo>
+                  <a:lnTo>
+                    <a:pt x="5066743" y="953935"/>
+                  </a:lnTo>
+                  <a:lnTo>
+                    <a:pt x="5137088" y="953804"/>
+                  </a:lnTo>
+                  <a:lnTo>
+                    <a:pt x="5207432" y="953673"/>
+                  </a:lnTo>
+                  <a:lnTo>
+                    <a:pt x="5277777" y="953541"/>
+                  </a:lnTo>
+                  <a:lnTo>
+                    <a:pt x="5348121" y="953410"/>
+                  </a:lnTo>
+                  <a:lnTo>
+                    <a:pt x="5418466" y="953278"/>
+                  </a:lnTo>
+                  <a:lnTo>
+                    <a:pt x="5488810" y="953147"/>
+                  </a:lnTo>
+                  <a:lnTo>
+                    <a:pt x="5559155" y="953015"/>
+                  </a:lnTo>
+                  <a:lnTo>
+                    <a:pt x="5629499" y="952884"/>
+                  </a:lnTo>
+                  <a:lnTo>
+                    <a:pt x="5699844" y="952752"/>
+                  </a:lnTo>
+                  <a:lnTo>
+                    <a:pt x="5770188" y="952620"/>
+                  </a:lnTo>
+                  <a:lnTo>
+                    <a:pt x="5840533" y="952488"/>
+                  </a:lnTo>
+                  <a:lnTo>
+                    <a:pt x="5910877" y="952356"/>
+                  </a:lnTo>
+                  <a:lnTo>
+                    <a:pt x="5981222" y="952224"/>
+                  </a:lnTo>
+                  <a:lnTo>
+                    <a:pt x="6051566" y="952092"/>
+                  </a:lnTo>
+                  <a:lnTo>
+                    <a:pt x="6121911" y="951960"/>
+                  </a:lnTo>
+                  <a:lnTo>
+                    <a:pt x="6192255" y="951828"/>
+                  </a:lnTo>
+                  <a:lnTo>
+                    <a:pt x="6262600" y="951696"/>
+                  </a:lnTo>
+                  <a:lnTo>
+                    <a:pt x="6332944" y="951564"/>
+                  </a:lnTo>
+                  <a:lnTo>
+                    <a:pt x="6403288" y="951431"/>
+                  </a:lnTo>
+                  <a:lnTo>
+                    <a:pt x="6473633" y="951299"/>
+                  </a:lnTo>
+                  <a:lnTo>
+                    <a:pt x="6543977" y="951167"/>
+                  </a:lnTo>
+                  <a:lnTo>
+                    <a:pt x="6614322" y="951034"/>
+                  </a:lnTo>
+                </a:path>
+              </a:pathLst>
+            </a:custGeom>
+          </p:spPr>
+          <p:txBody>
+            <a:bodyPr/>
+            <a:lstStyle/>
+            <a:p/>
+          </p:txBody>
+        </p:sp>
+        <p:sp>
+          <p:nvSpPr>
+            <p:cNvPr id="69" name="pl69"/>
+            <p:cNvSpPr/>
+            <p:nvPr/>
+          </p:nvSpPr>
+          <p:spPr>
+            <a:xfrm>
+              <a:off x="1235312" y="5294461"/>
+              <a:ext cx="6964104" cy="249134"/>
+            </a:xfrm>
+            <a:custGeom>
+              <a:avLst/>
+              <a:pathLst>
+                <a:path w="6964104" h="249134">
+                  <a:moveTo>
+                    <a:pt x="6964104" y="249134"/>
+                  </a:moveTo>
+                  <a:lnTo>
+                    <a:pt x="6893760" y="247388"/>
+                  </a:lnTo>
+                  <a:lnTo>
+                    <a:pt x="6823415" y="245580"/>
+                  </a:lnTo>
+                  <a:lnTo>
+                    <a:pt x="6753071" y="243710"/>
+                  </a:lnTo>
+                  <a:lnTo>
+                    <a:pt x="6682726" y="241774"/>
+                  </a:lnTo>
+                  <a:lnTo>
+                    <a:pt x="6612382" y="239771"/>
+                  </a:lnTo>
+                  <a:lnTo>
+                    <a:pt x="6542037" y="237698"/>
+                  </a:lnTo>
+                  <a:lnTo>
+                    <a:pt x="6471693" y="235552"/>
+                  </a:lnTo>
+                  <a:lnTo>
+                    <a:pt x="6401348" y="233332"/>
+                  </a:lnTo>
+                  <a:lnTo>
+                    <a:pt x="6331004" y="231035"/>
+                  </a:lnTo>
+                  <a:lnTo>
+                    <a:pt x="6260659" y="228657"/>
+                  </a:lnTo>
+                  <a:lnTo>
+                    <a:pt x="6190315" y="226196"/>
+                  </a:lnTo>
+                  <a:lnTo>
+                    <a:pt x="6119970" y="223650"/>
+                  </a:lnTo>
+                  <a:lnTo>
+                    <a:pt x="6049626" y="221014"/>
+                  </a:lnTo>
+                  <a:lnTo>
+                    <a:pt x="5979281" y="218287"/>
+                  </a:lnTo>
+                  <a:lnTo>
+                    <a:pt x="5908937" y="215465"/>
+                  </a:lnTo>
+                  <a:lnTo>
+                    <a:pt x="5838592" y="212545"/>
+                  </a:lnTo>
+                  <a:lnTo>
+                    <a:pt x="5768248" y="209522"/>
+                  </a:lnTo>
+                  <a:lnTo>
+                    <a:pt x="5697903" y="206394"/>
+                  </a:lnTo>
+                  <a:lnTo>
+                    <a:pt x="5627559" y="203157"/>
+                  </a:lnTo>
+                  <a:lnTo>
+                    <a:pt x="5557214" y="199807"/>
+                  </a:lnTo>
+                  <a:lnTo>
+                    <a:pt x="5486870" y="196341"/>
+                  </a:lnTo>
+                  <a:lnTo>
+                    <a:pt x="5416525" y="192753"/>
+                  </a:lnTo>
+                  <a:lnTo>
+                    <a:pt x="5346181" y="189041"/>
+                  </a:lnTo>
+                  <a:lnTo>
+                    <a:pt x="5275836" y="185199"/>
+                  </a:lnTo>
+                  <a:lnTo>
+                    <a:pt x="5205492" y="181223"/>
+                  </a:lnTo>
+                  <a:lnTo>
+                    <a:pt x="5135147" y="177108"/>
+                  </a:lnTo>
+                  <a:lnTo>
+                    <a:pt x="5064803" y="172850"/>
+                  </a:lnTo>
+                  <a:lnTo>
+                    <a:pt x="4994458" y="168443"/>
+                  </a:lnTo>
+                  <a:lnTo>
+                    <a:pt x="4924114" y="163883"/>
+                  </a:lnTo>
+                  <a:lnTo>
+                    <a:pt x="4853769" y="159164"/>
+                  </a:lnTo>
+                  <a:lnTo>
+                    <a:pt x="4783425" y="154280"/>
+                  </a:lnTo>
+                  <a:lnTo>
+                    <a:pt x="4713080" y="149226"/>
+                  </a:lnTo>
+                  <a:lnTo>
+                    <a:pt x="4642736" y="143996"/>
+                  </a:lnTo>
+                  <a:lnTo>
+                    <a:pt x="4572391" y="138583"/>
+                  </a:lnTo>
+                  <a:lnTo>
+                    <a:pt x="4502047" y="132982"/>
+                  </a:lnTo>
+                  <a:lnTo>
+                    <a:pt x="4431702" y="127185"/>
+                  </a:lnTo>
+                  <a:lnTo>
+                    <a:pt x="4361358" y="121186"/>
+                  </a:lnTo>
+                  <a:lnTo>
+                    <a:pt x="4291013" y="114978"/>
+                  </a:lnTo>
+                  <a:lnTo>
+                    <a:pt x="4220669" y="108553"/>
+                  </a:lnTo>
+                  <a:lnTo>
+                    <a:pt x="4150324" y="101905"/>
+                  </a:lnTo>
+                  <a:lnTo>
+                    <a:pt x="4079980" y="95024"/>
+                  </a:lnTo>
+                  <a:lnTo>
+                    <a:pt x="4009635" y="87904"/>
+                  </a:lnTo>
+                  <a:lnTo>
+                    <a:pt x="3939291" y="80535"/>
+                  </a:lnTo>
+                  <a:lnTo>
+                    <a:pt x="3868946" y="72910"/>
+                  </a:lnTo>
+                  <a:lnTo>
+                    <a:pt x="3798602" y="65018"/>
+                  </a:lnTo>
+                  <a:lnTo>
+                    <a:pt x="3728257" y="56852"/>
+                  </a:lnTo>
+                  <a:lnTo>
+                    <a:pt x="3657913" y="48400"/>
+                  </a:lnTo>
+                  <a:lnTo>
+                    <a:pt x="3587569" y="39654"/>
+                  </a:lnTo>
+                  <a:lnTo>
+                    <a:pt x="3517224" y="30603"/>
+                  </a:lnTo>
+                  <a:lnTo>
+                    <a:pt x="3446880" y="21237"/>
+                  </a:lnTo>
+                  <a:lnTo>
+                    <a:pt x="3376535" y="11544"/>
+                  </a:lnTo>
+                  <a:lnTo>
+                    <a:pt x="3306191" y="1512"/>
+                  </a:lnTo>
+                  <a:lnTo>
+                    <a:pt x="3235846" y="0"/>
+                  </a:lnTo>
+                  <a:lnTo>
+                    <a:pt x="3165502" y="129"/>
+                  </a:lnTo>
+                  <a:lnTo>
+                    <a:pt x="3095157" y="258"/>
+                  </a:lnTo>
+                  <a:lnTo>
+                    <a:pt x="3024813" y="388"/>
+                  </a:lnTo>
+                  <a:lnTo>
+                    <a:pt x="2954468" y="517"/>
+                  </a:lnTo>
+                  <a:lnTo>
+                    <a:pt x="2884124" y="646"/>
+                  </a:lnTo>
+                  <a:lnTo>
+                    <a:pt x="2813779" y="775"/>
+                  </a:lnTo>
+                  <a:lnTo>
+                    <a:pt x="2743435" y="905"/>
+                  </a:lnTo>
+                  <a:lnTo>
+                    <a:pt x="2673090" y="1034"/>
+                  </a:lnTo>
+                  <a:lnTo>
+                    <a:pt x="2602746" y="1163"/>
+                  </a:lnTo>
+                  <a:lnTo>
+                    <a:pt x="2532401" y="1292"/>
+                  </a:lnTo>
+                  <a:lnTo>
+                    <a:pt x="2462057" y="1421"/>
+                  </a:lnTo>
+                  <a:lnTo>
+                    <a:pt x="2391712" y="1549"/>
+                  </a:lnTo>
+                  <a:lnTo>
+                    <a:pt x="2321368" y="1678"/>
+                  </a:lnTo>
+                  <a:lnTo>
+                    <a:pt x="2251023" y="1807"/>
+                  </a:lnTo>
+                  <a:lnTo>
+                    <a:pt x="2180679" y="1936"/>
+                  </a:lnTo>
+                  <a:lnTo>
+                    <a:pt x="2110334" y="2064"/>
+                  </a:lnTo>
+                  <a:lnTo>
+                    <a:pt x="2039990" y="2193"/>
+                  </a:lnTo>
+                  <a:lnTo>
+                    <a:pt x="1969645" y="2321"/>
+                  </a:lnTo>
+                  <a:lnTo>
+                    <a:pt x="1899301" y="2450"/>
+                  </a:lnTo>
+                  <a:lnTo>
+                    <a:pt x="1828956" y="2578"/>
+                  </a:lnTo>
+                  <a:lnTo>
+                    <a:pt x="1758612" y="2707"/>
+                  </a:lnTo>
+                  <a:lnTo>
+                    <a:pt x="1688267" y="2835"/>
+                  </a:lnTo>
+                  <a:lnTo>
+                    <a:pt x="1617923" y="2963"/>
+                  </a:lnTo>
+                  <a:lnTo>
+                    <a:pt x="1547578" y="3091"/>
+                  </a:lnTo>
+                  <a:lnTo>
+                    <a:pt x="1477234" y="3220"/>
+                  </a:lnTo>
+                  <a:lnTo>
+                    <a:pt x="1406889" y="3348"/>
+                  </a:lnTo>
+                  <a:lnTo>
+                    <a:pt x="1336545" y="3476"/>
+                  </a:lnTo>
+                  <a:lnTo>
+                    <a:pt x="1266200" y="3604"/>
+                  </a:lnTo>
+                  <a:lnTo>
+                    <a:pt x="1195856" y="3732"/>
+                  </a:lnTo>
+                  <a:lnTo>
+                    <a:pt x="1125511" y="3859"/>
+                  </a:lnTo>
+                  <a:lnTo>
+                    <a:pt x="1055167" y="3987"/>
+                  </a:lnTo>
+                  <a:lnTo>
+                    <a:pt x="984822" y="4115"/>
+                  </a:lnTo>
+                  <a:lnTo>
+                    <a:pt x="914478" y="4243"/>
+                  </a:lnTo>
+                  <a:lnTo>
+                    <a:pt x="844133" y="4370"/>
+                  </a:lnTo>
+                  <a:lnTo>
+                    <a:pt x="773789" y="4498"/>
+                  </a:lnTo>
+                  <a:lnTo>
+                    <a:pt x="703444" y="4625"/>
+                  </a:lnTo>
+                  <a:lnTo>
+                    <a:pt x="633100" y="4753"/>
+                  </a:lnTo>
+                  <a:lnTo>
+                    <a:pt x="562755" y="4880"/>
+                  </a:lnTo>
+                  <a:lnTo>
+                    <a:pt x="492411" y="5008"/>
+                  </a:lnTo>
+                  <a:lnTo>
+                    <a:pt x="422066" y="5135"/>
+                  </a:lnTo>
+                  <a:lnTo>
+                    <a:pt x="351722" y="5262"/>
+                  </a:lnTo>
+                  <a:lnTo>
+                    <a:pt x="281377" y="5389"/>
+                  </a:lnTo>
+                  <a:lnTo>
+                    <a:pt x="211033" y="5517"/>
+                  </a:lnTo>
+                  <a:lnTo>
+                    <a:pt x="140688" y="5644"/>
+                  </a:lnTo>
+                  <a:lnTo>
+                    <a:pt x="70344" y="5771"/>
+                  </a:lnTo>
+                  <a:lnTo>
+                    <a:pt x="0" y="5898"/>
+                  </a:lnTo>
+                </a:path>
+              </a:pathLst>
+            </a:custGeom>
+          </p:spPr>
+          <p:txBody>
+            <a:bodyPr/>
+            <a:lstStyle/>
+            <a:p/>
+          </p:txBody>
+        </p:sp>
+        <p:sp>
+          <p:nvSpPr>
+            <p:cNvPr id="70" name="pl70"/>
+            <p:cNvSpPr/>
+            <p:nvPr/>
+          </p:nvSpPr>
+          <p:spPr>
+            <a:xfrm>
+              <a:off x="1235312" y="4932409"/>
+              <a:ext cx="6964104" cy="537438"/>
+            </a:xfrm>
+            <a:custGeom>
+              <a:avLst/>
+              <a:pathLst>
+                <a:path w="6964104" h="537438">
+                  <a:moveTo>
+                    <a:pt x="0" y="0"/>
+                  </a:moveTo>
+                  <a:lnTo>
+                    <a:pt x="70344" y="11095"/>
+                  </a:lnTo>
+                  <a:lnTo>
+                    <a:pt x="140688" y="22004"/>
+                  </a:lnTo>
+                  <a:lnTo>
+                    <a:pt x="211033" y="32730"/>
+                  </a:lnTo>
+                  <a:lnTo>
+                    <a:pt x="281377" y="43277"/>
+                  </a:lnTo>
+                  <a:lnTo>
+                    <a:pt x="351722" y="53646"/>
+                  </a:lnTo>
+                  <a:lnTo>
+                    <a:pt x="422066" y="63841"/>
+                  </a:lnTo>
+                  <a:lnTo>
+                    <a:pt x="492411" y="73866"/>
+                  </a:lnTo>
+                  <a:lnTo>
+                    <a:pt x="562755" y="83722"/>
+                  </a:lnTo>
+                  <a:lnTo>
+                    <a:pt x="633100" y="93412"/>
+                  </a:lnTo>
+                  <a:lnTo>
+                    <a:pt x="703444" y="102940"/>
+                  </a:lnTo>
+                  <a:lnTo>
+                    <a:pt x="773789" y="112309"/>
+                  </a:lnTo>
+                  <a:lnTo>
+                    <a:pt x="844133" y="121520"/>
+                  </a:lnTo>
+                  <a:lnTo>
+                    <a:pt x="914478" y="130576"/>
+                  </a:lnTo>
+                  <a:lnTo>
+                    <a:pt x="984822" y="139481"/>
+                  </a:lnTo>
+                  <a:lnTo>
+                    <a:pt x="1055167" y="148236"/>
+                  </a:lnTo>
+                  <a:lnTo>
+                    <a:pt x="1125511" y="156844"/>
+                  </a:lnTo>
+                  <a:lnTo>
+                    <a:pt x="1195856" y="165308"/>
+                  </a:lnTo>
+                  <a:lnTo>
+                    <a:pt x="1266200" y="173630"/>
+                  </a:lnTo>
+                  <a:lnTo>
+                    <a:pt x="1336545" y="181812"/>
+                  </a:lnTo>
+                  <a:lnTo>
+                    <a:pt x="1406889" y="189857"/>
+                  </a:lnTo>
+                  <a:lnTo>
+                    <a:pt x="1477234" y="197766"/>
+                  </a:lnTo>
+                  <a:lnTo>
+                    <a:pt x="1547578" y="205544"/>
+                  </a:lnTo>
+                  <a:lnTo>
+                    <a:pt x="1617923" y="213190"/>
+                  </a:lnTo>
+                  <a:lnTo>
+                    <a:pt x="1688267" y="220709"/>
+                  </a:lnTo>
+                  <a:lnTo>
+                    <a:pt x="1758612" y="228101"/>
+                  </a:lnTo>
+                  <a:lnTo>
+                    <a:pt x="1828956" y="235369"/>
+                  </a:lnTo>
+                  <a:lnTo>
+                    <a:pt x="1899301" y="242515"/>
+                  </a:lnTo>
+                  <a:lnTo>
+                    <a:pt x="1969645" y="249542"/>
+                  </a:lnTo>
+                  <a:lnTo>
+                    <a:pt x="2039990" y="256450"/>
+                  </a:lnTo>
+                  <a:lnTo>
+                    <a:pt x="2110334" y="263242"/>
+                  </a:lnTo>
+                  <a:lnTo>
+                    <a:pt x="2180679" y="269921"/>
+                  </a:lnTo>
+                  <a:lnTo>
+                    <a:pt x="2251023" y="276487"/>
+                  </a:lnTo>
+                  <a:lnTo>
+                    <a:pt x="2321368" y="282944"/>
+                  </a:lnTo>
+                  <a:lnTo>
+                    <a:pt x="2391712" y="289292"/>
+                  </a:lnTo>
+                  <a:lnTo>
+                    <a:pt x="2462057" y="295533"/>
+                  </a:lnTo>
+                  <a:lnTo>
+                    <a:pt x="2532401" y="301670"/>
+                  </a:lnTo>
+                  <a:lnTo>
+                    <a:pt x="2602746" y="307704"/>
+                  </a:lnTo>
+                  <a:lnTo>
+                    <a:pt x="2673090" y="313636"/>
+                  </a:lnTo>
+                  <a:lnTo>
+                    <a:pt x="2743435" y="319469"/>
+                  </a:lnTo>
+                  <a:lnTo>
+                    <a:pt x="2813779" y="325204"/>
+                  </a:lnTo>
+                  <a:lnTo>
+                    <a:pt x="2884124" y="330843"/>
+                  </a:lnTo>
+                  <a:lnTo>
+                    <a:pt x="2954468" y="336388"/>
+                  </a:lnTo>
+                  <a:lnTo>
+                    <a:pt x="3024813" y="341839"/>
+                  </a:lnTo>
+                  <a:lnTo>
+                    <a:pt x="3095157" y="347199"/>
+                  </a:lnTo>
+                  <a:lnTo>
+                    <a:pt x="3165502" y="352468"/>
+                  </a:lnTo>
+                  <a:lnTo>
+                    <a:pt x="3235846" y="357650"/>
+                  </a:lnTo>
+                  <a:lnTo>
+                    <a:pt x="3306191" y="362744"/>
+                  </a:lnTo>
+                  <a:lnTo>
+                    <a:pt x="3376535" y="367753"/>
+                  </a:lnTo>
+                  <a:lnTo>
+                    <a:pt x="3446880" y="372678"/>
+                  </a:lnTo>
+                  <a:lnTo>
+                    <a:pt x="3517224" y="377521"/>
+                  </a:lnTo>
+                  <a:lnTo>
+                    <a:pt x="3587569" y="382282"/>
+                  </a:lnTo>
+                  <a:lnTo>
+                    <a:pt x="3657913" y="386963"/>
+                  </a:lnTo>
+                  <a:lnTo>
+                    <a:pt x="3728257" y="391566"/>
+                  </a:lnTo>
+                  <a:lnTo>
+                    <a:pt x="3798602" y="396091"/>
+                  </a:lnTo>
+                  <a:lnTo>
+                    <a:pt x="3868946" y="400541"/>
+                  </a:lnTo>
+                  <a:lnTo>
+                    <a:pt x="3939291" y="404915"/>
+                  </a:lnTo>
+                  <a:lnTo>
+                    <a:pt x="4009635" y="409217"/>
+                  </a:lnTo>
+                  <a:lnTo>
+                    <a:pt x="4079980" y="413446"/>
+                  </a:lnTo>
+                  <a:lnTo>
+                    <a:pt x="4150324" y="417604"/>
+                  </a:lnTo>
+                  <a:lnTo>
+                    <a:pt x="4220669" y="421693"/>
+                  </a:lnTo>
+                  <a:lnTo>
+                    <a:pt x="4291013" y="425713"/>
+                  </a:lnTo>
+                  <a:lnTo>
+                    <a:pt x="4361358" y="429665"/>
+                  </a:lnTo>
+                  <a:lnTo>
+                    <a:pt x="4431702" y="433552"/>
+                  </a:lnTo>
+                  <a:lnTo>
+                    <a:pt x="4502047" y="437372"/>
+                  </a:lnTo>
+                  <a:lnTo>
+                    <a:pt x="4572391" y="441129"/>
+                  </a:lnTo>
+                  <a:lnTo>
+                    <a:pt x="4642736" y="444823"/>
+                  </a:lnTo>
+                  <a:lnTo>
+                    <a:pt x="4713080" y="448455"/>
+                  </a:lnTo>
+                  <a:lnTo>
+                    <a:pt x="4783425" y="452026"/>
+                  </a:lnTo>
+                  <a:lnTo>
+                    <a:pt x="4853769" y="455537"/>
+                  </a:lnTo>
+                  <a:lnTo>
+                    <a:pt x="4924114" y="458989"/>
+                  </a:lnTo>
+                  <a:lnTo>
+                    <a:pt x="4994458" y="462383"/>
+                  </a:lnTo>
+                  <a:lnTo>
+                    <a:pt x="5064803" y="465720"/>
+                  </a:lnTo>
+                  <a:lnTo>
+                    <a:pt x="5135147" y="469001"/>
+                  </a:lnTo>
+                  <a:lnTo>
+                    <a:pt x="5205492" y="472228"/>
+                  </a:lnTo>
+                  <a:lnTo>
+                    <a:pt x="5275836" y="475400"/>
+                  </a:lnTo>
+                  <a:lnTo>
+                    <a:pt x="5346181" y="478518"/>
+                  </a:lnTo>
+                  <a:lnTo>
+                    <a:pt x="5416525" y="481585"/>
+                  </a:lnTo>
+                  <a:lnTo>
+                    <a:pt x="5486870" y="484600"/>
+                  </a:lnTo>
+                  <a:lnTo>
+                    <a:pt x="5557214" y="487564"/>
+                  </a:lnTo>
+                  <a:lnTo>
+                    <a:pt x="5627559" y="490479"/>
+                  </a:lnTo>
+                  <a:lnTo>
+                    <a:pt x="5697903" y="493345"/>
+                  </a:lnTo>
+                  <a:lnTo>
+                    <a:pt x="5768248" y="496162"/>
+                  </a:lnTo>
+                  <a:lnTo>
+                    <a:pt x="5838592" y="498933"/>
+                  </a:lnTo>
+                  <a:lnTo>
+                    <a:pt x="5908937" y="501657"/>
+                  </a:lnTo>
+                  <a:lnTo>
+                    <a:pt x="5979281" y="504335"/>
+                  </a:lnTo>
+                  <a:lnTo>
+                    <a:pt x="6049626" y="506968"/>
+                  </a:lnTo>
+                  <a:lnTo>
+                    <a:pt x="6119970" y="509557"/>
+                  </a:lnTo>
+                  <a:lnTo>
+                    <a:pt x="6190315" y="512103"/>
+                  </a:lnTo>
+                  <a:lnTo>
+                    <a:pt x="6260659" y="514606"/>
+                  </a:lnTo>
+                  <a:lnTo>
+                    <a:pt x="6331004" y="517067"/>
+                  </a:lnTo>
+                  <a:lnTo>
+                    <a:pt x="6401348" y="519487"/>
+                  </a:lnTo>
+                  <a:lnTo>
+                    <a:pt x="6471693" y="521866"/>
+                  </a:lnTo>
+                  <a:lnTo>
+                    <a:pt x="6542037" y="524205"/>
+                  </a:lnTo>
+                  <a:lnTo>
+                    <a:pt x="6612382" y="526505"/>
+                  </a:lnTo>
+                  <a:lnTo>
+                    <a:pt x="6682726" y="528766"/>
+                  </a:lnTo>
+                  <a:lnTo>
+                    <a:pt x="6753071" y="530989"/>
+                  </a:lnTo>
+                  <a:lnTo>
+                    <a:pt x="6823415" y="533176"/>
+                  </a:lnTo>
+                  <a:lnTo>
+                    <a:pt x="6893760" y="535325"/>
+                  </a:lnTo>
+                  <a:lnTo>
+                    <a:pt x="6964104" y="537438"/>
+                  </a:lnTo>
+                </a:path>
+              </a:pathLst>
+            </a:custGeom>
+            <a:ln w="27101" cap="flat">
+              <a:solidFill>
+                <a:srgbClr val="FF8C00">
+                  <a:alpha val="100000"/>
+                </a:srgbClr>
+              </a:solidFill>
+              <a:prstDash val="solid"/>
+              <a:round/>
+            </a:ln>
+          </p:spPr>
+          <p:txBody>
+            <a:bodyPr/>
+            <a:lstStyle/>
+            <a:p/>
+          </p:txBody>
+        </p:sp>
+        <p:sp>
+          <p:nvSpPr>
+            <p:cNvPr id="71" name="pl71"/>
+            <p:cNvSpPr/>
+            <p:nvPr/>
+          </p:nvSpPr>
+          <p:spPr>
+            <a:xfrm>
+              <a:off x="887106" y="5294352"/>
+              <a:ext cx="7660515" cy="0"/>
+            </a:xfrm>
+            <a:custGeom>
+              <a:avLst/>
+              <a:pathLst>
+                <a:path w="7660515" h="0">
+                  <a:moveTo>
+                    <a:pt x="0" y="0"/>
+                  </a:moveTo>
+                  <a:lnTo>
+                    <a:pt x="7660515" y="0"/>
+                  </a:lnTo>
+                  <a:lnTo>
+                    <a:pt x="7660515" y="0"/>
+                  </a:lnTo>
+                </a:path>
+              </a:pathLst>
+            </a:custGeom>
+            <a:ln w="13550" cap="flat">
+              <a:solidFill>
+                <a:srgbClr val="7F7F7F">
+                  <a:alpha val="100000"/>
+                </a:srgbClr>
+              </a:solidFill>
+              <a:prstDash val="dash"/>
+              <a:round/>
+            </a:ln>
+          </p:spPr>
+          <p:txBody>
+            <a:bodyPr/>
+            <a:lstStyle/>
+            <a:p/>
+          </p:txBody>
+        </p:sp>
+        <p:sp>
+          <p:nvSpPr>
+            <p:cNvPr id="72" name="pl72"/>
+            <p:cNvSpPr/>
+            <p:nvPr/>
+          </p:nvSpPr>
+          <p:spPr>
+            <a:xfrm>
+              <a:off x="4530353" y="4336484"/>
+              <a:ext cx="0" cy="1317069"/>
+            </a:xfrm>
+            <a:custGeom>
+              <a:avLst/>
+              <a:pathLst>
+                <a:path w="0" h="1317069">
+                  <a:moveTo>
+                    <a:pt x="0" y="1317069"/>
+                  </a:moveTo>
+                  <a:lnTo>
+                    <a:pt x="0" y="0"/>
+                  </a:lnTo>
+                  <a:lnTo>
+                    <a:pt x="0" y="0"/>
+                  </a:lnTo>
+                </a:path>
+              </a:pathLst>
+            </a:custGeom>
+            <a:ln w="13550" cap="flat">
+              <a:solidFill>
+                <a:srgbClr val="666666">
+                  <a:alpha val="100000"/>
+                </a:srgbClr>
+              </a:solidFill>
+              <a:prstDash val="dot"/>
+              <a:round/>
+            </a:ln>
+          </p:spPr>
+          <p:txBody>
+            <a:bodyPr/>
+            <a:lstStyle/>
+            <a:p/>
+          </p:txBody>
+        </p:sp>
+        <p:sp>
+          <p:nvSpPr>
+            <p:cNvPr id="73" name="tx73"/>
+            <p:cNvSpPr/>
+            <p:nvPr/>
+          </p:nvSpPr>
+          <p:spPr>
+            <a:xfrm>
+              <a:off x="762297" y="5553636"/>
+              <a:ext cx="62179" cy="80101"/>
+            </a:xfrm>
+            <a:prstGeom prst="rect">
+              <a:avLst/>
+            </a:prstGeom>
+            <a:noFill/>
+          </p:spPr>
+          <p:txBody>
+            <a:bodyPr lIns="0" rIns="0" tIns="0" bIns="0" anchorCtr="1" anchor="ctr" wrap="none"/>
+            <a:lstStyle/>
+            <a:p>
+              <a:pPr algn="l" marL="0" marR="0" indent="0">
+                <a:lnSpc>
+                  <a:spcPts val="880"/>
+                </a:lnSpc>
+                <a:spcBef>
+                  <a:spcPts val="0"/>
+                </a:spcBef>
+                <a:spcAft>
+                  <a:spcPts val="0"/>
+                </a:spcAft>
+              </a:pPr>
+              <a:r>
+                <a:rPr sz="880">
+                  <a:solidFill>
+                    <a:srgbClr val="4D4D4D">
+                      <a:alpha val="100000"/>
+                    </a:srgbClr>
+                  </a:solidFill>
+                  <a:latin typeface="Helvetica"/>
+                  <a:cs typeface="Helvetica"/>
+                </a:rPr>
+                <a:t>0</a:t>
+              </a:r>
+            </a:p>
+          </p:txBody>
+        </p:sp>
+        <p:sp>
+          <p:nvSpPr>
+            <p:cNvPr id="74" name="tx74"/>
+            <p:cNvSpPr/>
+            <p:nvPr/>
+          </p:nvSpPr>
+          <p:spPr>
+            <a:xfrm>
+              <a:off x="762297" y="5254302"/>
+              <a:ext cx="62179" cy="80101"/>
+            </a:xfrm>
+            <a:prstGeom prst="rect">
+              <a:avLst/>
+            </a:prstGeom>
+            <a:noFill/>
+          </p:spPr>
+          <p:txBody>
+            <a:bodyPr lIns="0" rIns="0" tIns="0" bIns="0" anchorCtr="1" anchor="ctr" wrap="none"/>
+            <a:lstStyle/>
+            <a:p>
+              <a:pPr algn="l" marL="0" marR="0" indent="0">
+                <a:lnSpc>
+                  <a:spcPts val="880"/>
+                </a:lnSpc>
+                <a:spcBef>
+                  <a:spcPts val="0"/>
+                </a:spcBef>
+                <a:spcAft>
+                  <a:spcPts val="0"/>
+                </a:spcAft>
+              </a:pPr>
+              <a:r>
+                <a:rPr sz="880">
+                  <a:solidFill>
+                    <a:srgbClr val="4D4D4D">
+                      <a:alpha val="100000"/>
+                    </a:srgbClr>
+                  </a:solidFill>
+                  <a:latin typeface="Helvetica"/>
+                  <a:cs typeface="Helvetica"/>
+                </a:rPr>
+                <a:t>1</a:t>
+              </a:r>
+            </a:p>
+          </p:txBody>
+        </p:sp>
+        <p:sp>
+          <p:nvSpPr>
+            <p:cNvPr id="75" name="tx75"/>
+            <p:cNvSpPr/>
+            <p:nvPr/>
+          </p:nvSpPr>
+          <p:spPr>
+            <a:xfrm>
+              <a:off x="762297" y="4954968"/>
+              <a:ext cx="62179" cy="80101"/>
+            </a:xfrm>
+            <a:prstGeom prst="rect">
+              <a:avLst/>
+            </a:prstGeom>
+            <a:noFill/>
+          </p:spPr>
+          <p:txBody>
+            <a:bodyPr lIns="0" rIns="0" tIns="0" bIns="0" anchorCtr="1" anchor="ctr" wrap="none"/>
+            <a:lstStyle/>
+            <a:p>
+              <a:pPr algn="l" marL="0" marR="0" indent="0">
+                <a:lnSpc>
+                  <a:spcPts val="880"/>
+                </a:lnSpc>
+                <a:spcBef>
+                  <a:spcPts val="0"/>
+                </a:spcBef>
+                <a:spcAft>
+                  <a:spcPts val="0"/>
+                </a:spcAft>
+              </a:pPr>
+              <a:r>
+                <a:rPr sz="880">
+                  <a:solidFill>
+                    <a:srgbClr val="4D4D4D">
+                      <a:alpha val="100000"/>
+                    </a:srgbClr>
+                  </a:solidFill>
+                  <a:latin typeface="Helvetica"/>
+                  <a:cs typeface="Helvetica"/>
+                </a:rPr>
+                <a:t>2</a:t>
+              </a:r>
+            </a:p>
+          </p:txBody>
+        </p:sp>
+        <p:sp>
+          <p:nvSpPr>
+            <p:cNvPr id="76" name="tx76"/>
+            <p:cNvSpPr/>
+            <p:nvPr/>
+          </p:nvSpPr>
+          <p:spPr>
+            <a:xfrm>
+              <a:off x="762297" y="4655634"/>
+              <a:ext cx="62179" cy="80101"/>
+            </a:xfrm>
+            <a:prstGeom prst="rect">
+              <a:avLst/>
+            </a:prstGeom>
+            <a:noFill/>
+          </p:spPr>
+          <p:txBody>
+            <a:bodyPr lIns="0" rIns="0" tIns="0" bIns="0" anchorCtr="1" anchor="ctr" wrap="none"/>
+            <a:lstStyle/>
+            <a:p>
+              <a:pPr algn="l" marL="0" marR="0" indent="0">
+                <a:lnSpc>
+                  <a:spcPts val="880"/>
+                </a:lnSpc>
+                <a:spcBef>
+                  <a:spcPts val="0"/>
+                </a:spcBef>
+                <a:spcAft>
+                  <a:spcPts val="0"/>
+                </a:spcAft>
+              </a:pPr>
+              <a:r>
+                <a:rPr sz="880">
+                  <a:solidFill>
+                    <a:srgbClr val="4D4D4D">
+                      <a:alpha val="100000"/>
+                    </a:srgbClr>
+                  </a:solidFill>
+                  <a:latin typeface="Helvetica"/>
+                  <a:cs typeface="Helvetica"/>
+                </a:rPr>
+                <a:t>3</a:t>
+              </a:r>
+            </a:p>
+          </p:txBody>
+        </p:sp>
+        <p:sp>
+          <p:nvSpPr>
+            <p:cNvPr id="77" name="tx77"/>
+            <p:cNvSpPr/>
+            <p:nvPr/>
+          </p:nvSpPr>
+          <p:spPr>
+            <a:xfrm>
+              <a:off x="762297" y="4356300"/>
+              <a:ext cx="62179" cy="80101"/>
+            </a:xfrm>
+            <a:prstGeom prst="rect">
+              <a:avLst/>
+            </a:prstGeom>
+            <a:noFill/>
+          </p:spPr>
+          <p:txBody>
+            <a:bodyPr lIns="0" rIns="0" tIns="0" bIns="0" anchorCtr="1" anchor="ctr" wrap="none"/>
+            <a:lstStyle/>
+            <a:p>
+              <a:pPr algn="l" marL="0" marR="0" indent="0">
+                <a:lnSpc>
+                  <a:spcPts val="880"/>
+                </a:lnSpc>
+                <a:spcBef>
+                  <a:spcPts val="0"/>
+                </a:spcBef>
+                <a:spcAft>
+                  <a:spcPts val="0"/>
+                </a:spcAft>
+              </a:pPr>
+              <a:r>
+                <a:rPr sz="880">
+                  <a:solidFill>
+                    <a:srgbClr val="4D4D4D">
+                      <a:alpha val="100000"/>
+                    </a:srgbClr>
+                  </a:solidFill>
+                  <a:latin typeface="Helvetica"/>
+                  <a:cs typeface="Helvetica"/>
+                </a:rPr>
+                <a:t>4</a:t>
+              </a:r>
+            </a:p>
+          </p:txBody>
+        </p:sp>
+        <p:sp>
+          <p:nvSpPr>
+            <p:cNvPr id="78" name="tx78"/>
+            <p:cNvSpPr/>
+            <p:nvPr/>
+          </p:nvSpPr>
+          <p:spPr>
+            <a:xfrm>
+              <a:off x="1241001" y="5716183"/>
+              <a:ext cx="161574" cy="80101"/>
+            </a:xfrm>
+            <a:prstGeom prst="rect">
+              <a:avLst/>
+            </a:prstGeom>
+            <a:noFill/>
+          </p:spPr>
+          <p:txBody>
+            <a:bodyPr lIns="0" rIns="0" tIns="0" bIns="0" anchorCtr="1" anchor="ctr" wrap="none"/>
+            <a:lstStyle/>
+            <a:p>
+              <a:pPr algn="l" marL="0" marR="0" indent="0">
+                <a:lnSpc>
+                  <a:spcPts val="880"/>
+                </a:lnSpc>
+                <a:spcBef>
+                  <a:spcPts val="0"/>
+                </a:spcBef>
+                <a:spcAft>
+                  <a:spcPts val="0"/>
+                </a:spcAft>
+              </a:pPr>
+              <a:r>
+                <a:rPr sz="880">
+                  <a:solidFill>
+                    <a:srgbClr val="4D4D4D">
+                      <a:alpha val="100000"/>
+                    </a:srgbClr>
+                  </a:solidFill>
+                  <a:latin typeface="Helvetica"/>
+                  <a:cs typeface="Helvetica"/>
+                </a:rPr>
+                <a:t>-40</a:t>
+              </a:r>
+            </a:p>
+          </p:txBody>
+        </p:sp>
+        <p:sp>
+          <p:nvSpPr>
+            <p:cNvPr id="79" name="tx79"/>
+            <p:cNvSpPr/>
+            <p:nvPr/>
+          </p:nvSpPr>
+          <p:spPr>
+            <a:xfrm>
+              <a:off x="2054602" y="5716183"/>
+              <a:ext cx="161574" cy="80101"/>
+            </a:xfrm>
+            <a:prstGeom prst="rect">
+              <a:avLst/>
+            </a:prstGeom>
+            <a:noFill/>
+          </p:spPr>
+          <p:txBody>
+            <a:bodyPr lIns="0" rIns="0" tIns="0" bIns="0" anchorCtr="1" anchor="ctr" wrap="none"/>
+            <a:lstStyle/>
+            <a:p>
+              <a:pPr algn="l" marL="0" marR="0" indent="0">
+                <a:lnSpc>
+                  <a:spcPts val="880"/>
+                </a:lnSpc>
+                <a:spcBef>
+                  <a:spcPts val="0"/>
+                </a:spcBef>
+                <a:spcAft>
+                  <a:spcPts val="0"/>
+                </a:spcAft>
+              </a:pPr>
+              <a:r>
+                <a:rPr sz="880">
+                  <a:solidFill>
+                    <a:srgbClr val="4D4D4D">
+                      <a:alpha val="100000"/>
+                    </a:srgbClr>
+                  </a:solidFill>
+                  <a:latin typeface="Helvetica"/>
+                  <a:cs typeface="Helvetica"/>
+                </a:rPr>
+                <a:t>-30</a:t>
+              </a:r>
+            </a:p>
+          </p:txBody>
+        </p:sp>
+        <p:sp>
+          <p:nvSpPr>
+            <p:cNvPr id="80" name="tx80"/>
+            <p:cNvSpPr/>
+            <p:nvPr/>
+          </p:nvSpPr>
+          <p:spPr>
+            <a:xfrm>
+              <a:off x="2868203" y="5716183"/>
+              <a:ext cx="161574" cy="80101"/>
+            </a:xfrm>
+            <a:prstGeom prst="rect">
+              <a:avLst/>
+            </a:prstGeom>
+            <a:noFill/>
+          </p:spPr>
+          <p:txBody>
+            <a:bodyPr lIns="0" rIns="0" tIns="0" bIns="0" anchorCtr="1" anchor="ctr" wrap="none"/>
+            <a:lstStyle/>
+            <a:p>
+              <a:pPr algn="l" marL="0" marR="0" indent="0">
+                <a:lnSpc>
+                  <a:spcPts val="880"/>
+                </a:lnSpc>
+                <a:spcBef>
+                  <a:spcPts val="0"/>
+                </a:spcBef>
+                <a:spcAft>
+                  <a:spcPts val="0"/>
+                </a:spcAft>
+              </a:pPr>
+              <a:r>
+                <a:rPr sz="880">
+                  <a:solidFill>
+                    <a:srgbClr val="4D4D4D">
+                      <a:alpha val="100000"/>
+                    </a:srgbClr>
+                  </a:solidFill>
+                  <a:latin typeface="Helvetica"/>
+                  <a:cs typeface="Helvetica"/>
+                </a:rPr>
+                <a:t>-20</a:t>
+              </a:r>
+            </a:p>
+          </p:txBody>
+        </p:sp>
+        <p:sp>
+          <p:nvSpPr>
+            <p:cNvPr id="81" name="tx81"/>
+            <p:cNvSpPr/>
+            <p:nvPr/>
+          </p:nvSpPr>
+          <p:spPr>
+            <a:xfrm>
+              <a:off x="3681805" y="5716183"/>
+              <a:ext cx="161574" cy="80101"/>
+            </a:xfrm>
+            <a:prstGeom prst="rect">
+              <a:avLst/>
+            </a:prstGeom>
+            <a:noFill/>
+          </p:spPr>
+          <p:txBody>
+            <a:bodyPr lIns="0" rIns="0" tIns="0" bIns="0" anchorCtr="1" anchor="ctr" wrap="none"/>
+            <a:lstStyle/>
+            <a:p>
+              <a:pPr algn="l" marL="0" marR="0" indent="0">
+                <a:lnSpc>
+                  <a:spcPts val="880"/>
+                </a:lnSpc>
+                <a:spcBef>
+                  <a:spcPts val="0"/>
+                </a:spcBef>
+                <a:spcAft>
+                  <a:spcPts val="0"/>
+                </a:spcAft>
+              </a:pPr>
+              <a:r>
+                <a:rPr sz="880">
+                  <a:solidFill>
+                    <a:srgbClr val="4D4D4D">
+                      <a:alpha val="100000"/>
+                    </a:srgbClr>
+                  </a:solidFill>
+                  <a:latin typeface="Helvetica"/>
+                  <a:cs typeface="Helvetica"/>
+                </a:rPr>
+                <a:t>-10</a:t>
+              </a:r>
+            </a:p>
+          </p:txBody>
+        </p:sp>
+        <p:sp>
+          <p:nvSpPr>
+            <p:cNvPr id="82" name="tx82"/>
+            <p:cNvSpPr/>
+            <p:nvPr/>
+          </p:nvSpPr>
+          <p:spPr>
+            <a:xfrm>
+              <a:off x="4545104" y="5716183"/>
+              <a:ext cx="62179" cy="80101"/>
+            </a:xfrm>
+            <a:prstGeom prst="rect">
+              <a:avLst/>
+            </a:prstGeom>
+            <a:noFill/>
+          </p:spPr>
+          <p:txBody>
+            <a:bodyPr lIns="0" rIns="0" tIns="0" bIns="0" anchorCtr="1" anchor="ctr" wrap="none"/>
+            <a:lstStyle/>
+            <a:p>
+              <a:pPr algn="l" marL="0" marR="0" indent="0">
+                <a:lnSpc>
+                  <a:spcPts val="880"/>
+                </a:lnSpc>
+                <a:spcBef>
+                  <a:spcPts val="0"/>
+                </a:spcBef>
+                <a:spcAft>
+                  <a:spcPts val="0"/>
+                </a:spcAft>
+              </a:pPr>
+              <a:r>
+                <a:rPr sz="880">
+                  <a:solidFill>
+                    <a:srgbClr val="4D4D4D">
+                      <a:alpha val="100000"/>
+                    </a:srgbClr>
+                  </a:solidFill>
+                  <a:latin typeface="Helvetica"/>
+                  <a:cs typeface="Helvetica"/>
+                </a:rPr>
+                <a:t>0</a:t>
+              </a:r>
+            </a:p>
+          </p:txBody>
+        </p:sp>
+        <p:sp>
+          <p:nvSpPr>
+            <p:cNvPr id="83" name="tx83"/>
+            <p:cNvSpPr/>
+            <p:nvPr/>
+          </p:nvSpPr>
+          <p:spPr>
+            <a:xfrm>
+              <a:off x="5327615" y="5716183"/>
+              <a:ext cx="124358" cy="80101"/>
+            </a:xfrm>
+            <a:prstGeom prst="rect">
+              <a:avLst/>
+            </a:prstGeom>
+            <a:noFill/>
+          </p:spPr>
+          <p:txBody>
+            <a:bodyPr lIns="0" rIns="0" tIns="0" bIns="0" anchorCtr="1" anchor="ctr" wrap="none"/>
+            <a:lstStyle/>
+            <a:p>
+              <a:pPr algn="l" marL="0" marR="0" indent="0">
+                <a:lnSpc>
+                  <a:spcPts val="880"/>
+                </a:lnSpc>
+                <a:spcBef>
+                  <a:spcPts val="0"/>
+                </a:spcBef>
+                <a:spcAft>
+                  <a:spcPts val="0"/>
+                </a:spcAft>
+              </a:pPr>
+              <a:r>
+                <a:rPr sz="880">
+                  <a:solidFill>
+                    <a:srgbClr val="4D4D4D">
+                      <a:alpha val="100000"/>
+                    </a:srgbClr>
+                  </a:solidFill>
+                  <a:latin typeface="Helvetica"/>
+                  <a:cs typeface="Helvetica"/>
+                </a:rPr>
+                <a:t>10</a:t>
+              </a:r>
+            </a:p>
+          </p:txBody>
+        </p:sp>
+        <p:sp>
+          <p:nvSpPr>
+            <p:cNvPr id="84" name="tx84"/>
+            <p:cNvSpPr/>
+            <p:nvPr/>
+          </p:nvSpPr>
+          <p:spPr>
+            <a:xfrm>
+              <a:off x="6141217" y="5716183"/>
+              <a:ext cx="124358" cy="80101"/>
+            </a:xfrm>
+            <a:prstGeom prst="rect">
+              <a:avLst/>
+            </a:prstGeom>
+            <a:noFill/>
+          </p:spPr>
+          <p:txBody>
+            <a:bodyPr lIns="0" rIns="0" tIns="0" bIns="0" anchorCtr="1" anchor="ctr" wrap="none"/>
+            <a:lstStyle/>
+            <a:p>
+              <a:pPr algn="l" marL="0" marR="0" indent="0">
+                <a:lnSpc>
+                  <a:spcPts val="880"/>
+                </a:lnSpc>
+                <a:spcBef>
+                  <a:spcPts val="0"/>
+                </a:spcBef>
+                <a:spcAft>
+                  <a:spcPts val="0"/>
+                </a:spcAft>
+              </a:pPr>
+              <a:r>
+                <a:rPr sz="880">
+                  <a:solidFill>
+                    <a:srgbClr val="4D4D4D">
+                      <a:alpha val="100000"/>
+                    </a:srgbClr>
+                  </a:solidFill>
+                  <a:latin typeface="Helvetica"/>
+                  <a:cs typeface="Helvetica"/>
+                </a:rPr>
+                <a:t>20</a:t>
+              </a:r>
+            </a:p>
+          </p:txBody>
+        </p:sp>
+        <p:sp>
+          <p:nvSpPr>
+            <p:cNvPr id="85" name="tx85"/>
+            <p:cNvSpPr/>
+            <p:nvPr/>
+          </p:nvSpPr>
+          <p:spPr>
+            <a:xfrm>
+              <a:off x="6954818" y="5716183"/>
+              <a:ext cx="124358" cy="80101"/>
+            </a:xfrm>
+            <a:prstGeom prst="rect">
+              <a:avLst/>
+            </a:prstGeom>
+            <a:noFill/>
+          </p:spPr>
+          <p:txBody>
+            <a:bodyPr lIns="0" rIns="0" tIns="0" bIns="0" anchorCtr="1" anchor="ctr" wrap="none"/>
+            <a:lstStyle/>
+            <a:p>
+              <a:pPr algn="l" marL="0" marR="0" indent="0">
+                <a:lnSpc>
+                  <a:spcPts val="880"/>
+                </a:lnSpc>
+                <a:spcBef>
+                  <a:spcPts val="0"/>
+                </a:spcBef>
+                <a:spcAft>
+                  <a:spcPts val="0"/>
+                </a:spcAft>
+              </a:pPr>
+              <a:r>
+                <a:rPr sz="880">
+                  <a:solidFill>
+                    <a:srgbClr val="4D4D4D">
+                      <a:alpha val="100000"/>
+                    </a:srgbClr>
+                  </a:solidFill>
+                  <a:latin typeface="Helvetica"/>
+                  <a:cs typeface="Helvetica"/>
+                </a:rPr>
+                <a:t>30</a:t>
+              </a:r>
+            </a:p>
+          </p:txBody>
+        </p:sp>
+        <p:sp>
+          <p:nvSpPr>
+            <p:cNvPr id="86" name="tx86"/>
+            <p:cNvSpPr/>
+            <p:nvPr/>
+          </p:nvSpPr>
+          <p:spPr>
+            <a:xfrm>
+              <a:off x="7768419" y="5716183"/>
+              <a:ext cx="124358" cy="80101"/>
+            </a:xfrm>
+            <a:prstGeom prst="rect">
+              <a:avLst/>
+            </a:prstGeom>
+            <a:noFill/>
+          </p:spPr>
+          <p:txBody>
+            <a:bodyPr lIns="0" rIns="0" tIns="0" bIns="0" anchorCtr="1" anchor="ctr" wrap="none"/>
+            <a:lstStyle/>
+            <a:p>
+              <a:pPr algn="l" marL="0" marR="0" indent="0">
+                <a:lnSpc>
+                  <a:spcPts val="880"/>
+                </a:lnSpc>
+                <a:spcBef>
+                  <a:spcPts val="0"/>
+                </a:spcBef>
+                <a:spcAft>
+                  <a:spcPts val="0"/>
+                </a:spcAft>
+              </a:pPr>
+              <a:r>
+                <a:rPr sz="880">
+                  <a:solidFill>
+                    <a:srgbClr val="4D4D4D">
+                      <a:alpha val="100000"/>
+                    </a:srgbClr>
+                  </a:solidFill>
+                  <a:latin typeface="Helvetica"/>
+                  <a:cs typeface="Helvetica"/>
+                </a:rPr>
+                <a:t>40</a:t>
+              </a:r>
+            </a:p>
+          </p:txBody>
+        </p:sp>
+        <p:sp>
+          <p:nvSpPr>
+            <p:cNvPr id="87" name="tx87"/>
+            <p:cNvSpPr/>
+            <p:nvPr/>
+          </p:nvSpPr>
+          <p:spPr>
+            <a:xfrm>
+              <a:off x="2928340" y="5855859"/>
+              <a:ext cx="3578047" cy="100218"/>
+            </a:xfrm>
+            <a:prstGeom prst="rect">
+              <a:avLst/>
+            </a:prstGeom>
+            <a:noFill/>
+          </p:spPr>
+          <p:txBody>
+            <a:bodyPr lIns="0" rIns="0" tIns="0" bIns="0" anchorCtr="1" anchor="ctr" wrap="none"/>
+            <a:lstStyle/>
+            <a:p>
+              <a:pPr algn="l" marL="0" marR="0" indent="0">
+                <a:lnSpc>
+                  <a:spcPts val="1100"/>
+                </a:lnSpc>
+                <a:spcBef>
+                  <a:spcPts val="0"/>
+                </a:spcBef>
+                <a:spcAft>
+                  <a:spcPts val="0"/>
+                </a:spcAft>
+              </a:pPr>
+              <a:r>
+                <a:rPr sz="1100">
+                  <a:solidFill>
+                    <a:srgbClr val="000000">
+                      <a:alpha val="100000"/>
+                    </a:srgbClr>
+                  </a:solidFill>
+                  <a:latin typeface="Helvetica"/>
+                  <a:cs typeface="Helvetica"/>
+                </a:rPr>
+                <a:t>eGFR difference (%): 100 × (CKD-EPI Cr-Cys − CG) / CG</a:t>
+              </a:r>
+            </a:p>
+          </p:txBody>
+        </p:sp>
+        <p:sp>
+          <p:nvSpPr>
+            <p:cNvPr id="88" name="tx88"/>
+            <p:cNvSpPr/>
+            <p:nvPr/>
+          </p:nvSpPr>
+          <p:spPr>
+            <a:xfrm rot="-5400000">
+              <a:off x="138035" y="4944909"/>
+              <a:ext cx="1016904" cy="100218"/>
+            </a:xfrm>
+            <a:prstGeom prst="rect">
+              <a:avLst/>
+            </a:prstGeom>
+            <a:noFill/>
+          </p:spPr>
+          <p:txBody>
+            <a:bodyPr lIns="0" rIns="0" tIns="0" bIns="0" anchorCtr="1" anchor="ctr" wrap="none"/>
+            <a:lstStyle/>
+            <a:p>
+              <a:pPr algn="l" marL="0" marR="0" indent="0">
+                <a:lnSpc>
+                  <a:spcPts val="1100"/>
+                </a:lnSpc>
+                <a:spcBef>
+                  <a:spcPts val="0"/>
+                </a:spcBef>
+                <a:spcAft>
+                  <a:spcPts val="0"/>
+                </a:spcAft>
+              </a:pPr>
+              <a:r>
+                <a:rPr sz="1100">
+                  <a:solidFill>
+                    <a:srgbClr val="000000">
+                      <a:alpha val="100000"/>
+                    </a:srgbClr>
+                  </a:solidFill>
+                  <a:latin typeface="Helvetica"/>
+                  <a:cs typeface="Helvetica"/>
+                </a:rPr>
+                <a:t>subHR (95% CI)</a:t>
+              </a:r>
+            </a:p>
+          </p:txBody>
+        </p:sp>
+        <p:sp>
+          <p:nvSpPr>
+            <p:cNvPr id="89" name="tx89"/>
+            <p:cNvSpPr/>
+            <p:nvPr/>
+          </p:nvSpPr>
+          <p:spPr>
+            <a:xfrm>
+              <a:off x="887106" y="4159544"/>
+              <a:ext cx="6321612" cy="82021"/>
+            </a:xfrm>
+            <a:prstGeom prst="rect">
+              <a:avLst/>
+            </a:prstGeom>
+            <a:noFill/>
+          </p:spPr>
+          <p:txBody>
+            <a:bodyPr lIns="0" rIns="0" tIns="0" bIns="0" anchorCtr="1" anchor="ctr" wrap="none"/>
+            <a:lstStyle/>
+            <a:p>
+              <a:pPr algn="l" marL="0" marR="0" indent="0">
+                <a:lnSpc>
+                  <a:spcPts val="900"/>
+                </a:lnSpc>
+                <a:spcBef>
+                  <a:spcPts val="0"/>
+                </a:spcBef>
+                <a:spcAft>
+                  <a:spcPts val="0"/>
+                </a:spcAft>
+              </a:pPr>
+              <a:r>
+                <a:rPr sz="900">
+                  <a:solidFill>
+                    <a:srgbClr val="404040">
+                      <a:alpha val="100000"/>
+                    </a:srgbClr>
+                  </a:solidFill>
+                  <a:latin typeface="Helvetica"/>
+                  <a:cs typeface="Helvetica"/>
+                </a:rPr>
+                <a:t>subHR per 10 % decline: 1.22 (1.00-1.49), p = 0.056  |  per IQR decline (Δ = 29.9 %): 1.80 (0.99-3.27)  |  IQR: [-15.0, 14.9] %</a:t>
+              </a:r>
+            </a:p>
+          </p:txBody>
+        </p:sp>
+        <p:sp>
+          <p:nvSpPr>
+            <p:cNvPr id="90" name="tx90"/>
+            <p:cNvSpPr/>
+            <p:nvPr/>
+          </p:nvSpPr>
+          <p:spPr>
+            <a:xfrm>
+              <a:off x="887106" y="3932770"/>
               <a:ext cx="2495397" cy="120152"/>
             </a:xfrm>
             <a:prstGeom prst="rect">
